--- a/docencia-espanol/materiales/presentaciones/nuevo-espanol-en-marcha-1_unidad1.pptx
+++ b/docencia-espanol/materiales/presentaciones/nuevo-espanol-en-marcha-1_unidad1.pptx
@@ -2628,8 +2628,8 @@
         </p:nvSpPr>
         <p:spPr>
           <a:xfrm>
-            <a:off x="822960" y="6217920"/>
-            <a:ext cx="10058400" cy="365760"/>
+            <a:off x="822960" y="6080760"/>
+            <a:ext cx="10058400" cy="320040"/>
           </a:xfrm>
           <a:prstGeom prst="rect">
             <a:avLst/>
@@ -2656,6 +2656,45 @@
               <a:t>Español → Ruso · Plantilla genérica para cualquier alumno</a:t>
             </a:r>
             <a:endParaRPr lang="en-US" sz="1100" dirty="0"/>
+          </a:p>
+        </p:txBody>
+      </p:sp>
+      <p:sp>
+        <p:nvSpPr>
+          <p:cNvPr id="18" name="Text 16"/>
+          <p:cNvSpPr/>
+          <p:nvPr/>
+        </p:nvSpPr>
+        <p:spPr>
+          <a:xfrm>
+            <a:off x="822960" y="6419088"/>
+            <a:ext cx="10058400" cy="274320"/>
+          </a:xfrm>
+          <a:prstGeom prst="rect">
+            <a:avLst/>
+          </a:prstGeom>
+          <a:noFill/>
+          <a:ln/>
+        </p:spPr>
+        <p:txBody>
+          <a:bodyPr wrap="square" lIns="0" tIns="0" rIns="0" bIns="0" rtlCol="0" anchor="ctr"/>
+          <a:lstStyle/>
+          <a:p>
+            <a:pPr indent="0" marL="0">
+              <a:buNone/>
+            </a:pPr>
+            <a:r>
+              <a:rPr lang="en-US" sz="1000" i="1" dirty="0">
+                <a:solidFill>
+                  <a:srgbClr val="6E7BB0"/>
+                </a:solidFill>
+                <a:latin typeface="Calibri" pitchFamily="34" charset="0"/>
+                <a:ea typeface="Calibri" pitchFamily="34" charset="-122"/>
+                <a:cs typeface="Calibri" pitchFamily="34" charset="-120"/>
+              </a:rPr>
+              <a:t>Material elaborado por Ángel Luis Acosta González</a:t>
+            </a:r>
+            <a:endParaRPr lang="en-US" sz="1000" dirty="0"/>
           </a:p>
         </p:txBody>
       </p:sp>
@@ -5052,6 +5091,45 @@
           </a:p>
         </p:txBody>
       </p:sp>
+      <p:sp>
+        <p:nvSpPr>
+          <p:cNvPr id="66" name="Text 64"/>
+          <p:cNvSpPr/>
+          <p:nvPr/>
+        </p:nvSpPr>
+        <p:spPr>
+          <a:xfrm>
+            <a:off x="7985455" y="6473952"/>
+            <a:ext cx="3657600" cy="274320"/>
+          </a:xfrm>
+          <a:prstGeom prst="rect">
+            <a:avLst/>
+          </a:prstGeom>
+          <a:noFill/>
+          <a:ln/>
+        </p:spPr>
+        <p:txBody>
+          <a:bodyPr wrap="square" lIns="0" tIns="0" rIns="0" bIns="0" rtlCol="0" anchor="ctr"/>
+          <a:lstStyle/>
+          <a:p>
+            <a:pPr algn="r" indent="0" marL="0">
+              <a:buNone/>
+            </a:pPr>
+            <a:r>
+              <a:rPr lang="en-US" sz="900" dirty="0">
+                <a:solidFill>
+                  <a:srgbClr val="5C6690"/>
+                </a:solidFill>
+                <a:latin typeface="Calibri" pitchFamily="34" charset="0"/>
+                <a:ea typeface="Calibri" pitchFamily="34" charset="-122"/>
+                <a:cs typeface="Calibri" pitchFamily="34" charset="-120"/>
+              </a:rPr>
+              <a:t>© Ángel Luis Acosta González</a:t>
+            </a:r>
+            <a:endParaRPr lang="en-US" sz="900" dirty="0"/>
+          </a:p>
+        </p:txBody>
+      </p:sp>
     </p:spTree>
   </p:cSld>
   <p:clrMapOvr>
@@ -7298,6 +7376,45 @@
           </a:p>
         </p:txBody>
       </p:sp>
+      <p:sp>
+        <p:nvSpPr>
+          <p:cNvPr id="62" name="Text 60"/>
+          <p:cNvSpPr/>
+          <p:nvPr/>
+        </p:nvSpPr>
+        <p:spPr>
+          <a:xfrm>
+            <a:off x="7985455" y="6473952"/>
+            <a:ext cx="3657600" cy="274320"/>
+          </a:xfrm>
+          <a:prstGeom prst="rect">
+            <a:avLst/>
+          </a:prstGeom>
+          <a:noFill/>
+          <a:ln/>
+        </p:spPr>
+        <p:txBody>
+          <a:bodyPr wrap="square" lIns="0" tIns="0" rIns="0" bIns="0" rtlCol="0" anchor="ctr"/>
+          <a:lstStyle/>
+          <a:p>
+            <a:pPr algn="r" indent="0" marL="0">
+              <a:buNone/>
+            </a:pPr>
+            <a:r>
+              <a:rPr lang="en-US" sz="900" dirty="0">
+                <a:solidFill>
+                  <a:srgbClr val="5C6690"/>
+                </a:solidFill>
+                <a:latin typeface="Calibri" pitchFamily="34" charset="0"/>
+                <a:ea typeface="Calibri" pitchFamily="34" charset="-122"/>
+                <a:cs typeface="Calibri" pitchFamily="34" charset="-120"/>
+              </a:rPr>
+              <a:t>© Ángel Luis Acosta González</a:t>
+            </a:r>
+            <a:endParaRPr lang="en-US" sz="900" dirty="0"/>
+          </a:p>
+        </p:txBody>
+      </p:sp>
     </p:spTree>
   </p:cSld>
   <p:clrMapOvr>
@@ -9544,6 +9661,45 @@
           </a:p>
         </p:txBody>
       </p:sp>
+      <p:sp>
+        <p:nvSpPr>
+          <p:cNvPr id="62" name="Text 60"/>
+          <p:cNvSpPr/>
+          <p:nvPr/>
+        </p:nvSpPr>
+        <p:spPr>
+          <a:xfrm>
+            <a:off x="7985455" y="6473952"/>
+            <a:ext cx="3657600" cy="274320"/>
+          </a:xfrm>
+          <a:prstGeom prst="rect">
+            <a:avLst/>
+          </a:prstGeom>
+          <a:noFill/>
+          <a:ln/>
+        </p:spPr>
+        <p:txBody>
+          <a:bodyPr wrap="square" lIns="0" tIns="0" rIns="0" bIns="0" rtlCol="0" anchor="ctr"/>
+          <a:lstStyle/>
+          <a:p>
+            <a:pPr algn="r" indent="0" marL="0">
+              <a:buNone/>
+            </a:pPr>
+            <a:r>
+              <a:rPr lang="en-US" sz="900" dirty="0">
+                <a:solidFill>
+                  <a:srgbClr val="5C6690"/>
+                </a:solidFill>
+                <a:latin typeface="Calibri" pitchFamily="34" charset="0"/>
+                <a:ea typeface="Calibri" pitchFamily="34" charset="-122"/>
+                <a:cs typeface="Calibri" pitchFamily="34" charset="-120"/>
+              </a:rPr>
+              <a:t>© Ángel Luis Acosta González</a:t>
+            </a:r>
+            <a:endParaRPr lang="en-US" sz="900" dirty="0"/>
+          </a:p>
+        </p:txBody>
+      </p:sp>
     </p:spTree>
   </p:cSld>
   <p:clrMapOvr>
@@ -9964,7 +10120,7 @@
                 <a:ea typeface="Calibri" pitchFamily="34" charset="-122"/>
                 <a:cs typeface="Calibri" pitchFamily="34" charset="-120"/>
               </a:rPr>
-              <a:t>nosotros  somos</a:t>
+              <a:t>nosotros/nosotras  somos</a:t>
             </a:r>
             <a:endParaRPr lang="en-US" sz="1100" dirty="0"/>
           </a:p>
@@ -9987,7 +10143,7 @@
                 <a:ea typeface="Calibri" pitchFamily="34" charset="-122"/>
                 <a:cs typeface="Calibri" pitchFamily="34" charset="-120"/>
               </a:rPr>
-              <a:t>vosotros  sois</a:t>
+              <a:t>vosotros/vosotras  sois</a:t>
             </a:r>
             <a:endParaRPr lang="en-US" sz="1100" dirty="0"/>
           </a:p>
@@ -10010,7 +10166,7 @@
                 <a:ea typeface="Calibri" pitchFamily="34" charset="-122"/>
                 <a:cs typeface="Calibri" pitchFamily="34" charset="-120"/>
               </a:rPr>
-              <a:t>ellos/Uds.  son</a:t>
+              <a:t>ellos/ellas/Uds.  son</a:t>
             </a:r>
             <a:endParaRPr lang="en-US" sz="1100" dirty="0"/>
           </a:p>
@@ -10287,7 +10443,7 @@
                 <a:ea typeface="Calibri" pitchFamily="34" charset="-122"/>
                 <a:cs typeface="Calibri" pitchFamily="34" charset="-120"/>
               </a:rPr>
-              <a:t>nosotros  tenemos</a:t>
+              <a:t>nosotros/nosotras  tenemos</a:t>
             </a:r>
             <a:endParaRPr lang="en-US" sz="1100" dirty="0"/>
           </a:p>
@@ -10310,7 +10466,7 @@
                 <a:ea typeface="Calibri" pitchFamily="34" charset="-122"/>
                 <a:cs typeface="Calibri" pitchFamily="34" charset="-120"/>
               </a:rPr>
-              <a:t>vosotros  tenéis</a:t>
+              <a:t>vosotros/vosotras  tenéis</a:t>
             </a:r>
             <a:endParaRPr lang="en-US" sz="1100" dirty="0"/>
           </a:p>
@@ -10333,7 +10489,7 @@
                 <a:ea typeface="Calibri" pitchFamily="34" charset="-122"/>
                 <a:cs typeface="Calibri" pitchFamily="34" charset="-120"/>
               </a:rPr>
-              <a:t>ellos/Uds.  tienen</a:t>
+              <a:t>ellos/ellas/Uds.  tienen</a:t>
             </a:r>
             <a:endParaRPr lang="en-US" sz="1100" dirty="0"/>
           </a:p>
@@ -10610,7 +10766,7 @@
                 <a:ea typeface="Calibri" pitchFamily="34" charset="-122"/>
                 <a:cs typeface="Calibri" pitchFamily="34" charset="-120"/>
               </a:rPr>
-              <a:t>nosotros  trabajamos</a:t>
+              <a:t>nosotros/nosotras  trabajamos</a:t>
             </a:r>
             <a:endParaRPr lang="en-US" sz="1100" dirty="0"/>
           </a:p>
@@ -10633,7 +10789,7 @@
                 <a:ea typeface="Calibri" pitchFamily="34" charset="-122"/>
                 <a:cs typeface="Calibri" pitchFamily="34" charset="-120"/>
               </a:rPr>
-              <a:t>vosotros  trabajáis</a:t>
+              <a:t>vosotros/vosotras  trabajáis</a:t>
             </a:r>
             <a:endParaRPr lang="en-US" sz="1100" dirty="0"/>
           </a:p>
@@ -10656,7 +10812,7 @@
                 <a:ea typeface="Calibri" pitchFamily="34" charset="-122"/>
                 <a:cs typeface="Calibri" pitchFamily="34" charset="-120"/>
               </a:rPr>
-              <a:t>ellos/Uds.  trabajan</a:t>
+              <a:t>ellos/ellas/Uds.  trabajan</a:t>
             </a:r>
             <a:endParaRPr lang="en-US" sz="1100" dirty="0"/>
           </a:p>
@@ -10933,7 +11089,7 @@
                 <a:ea typeface="Calibri" pitchFamily="34" charset="-122"/>
                 <a:cs typeface="Calibri" pitchFamily="34" charset="-120"/>
               </a:rPr>
-              <a:t>nosotros  comemos</a:t>
+              <a:t>nosotros/nosotras  comemos</a:t>
             </a:r>
             <a:endParaRPr lang="en-US" sz="1100" dirty="0"/>
           </a:p>
@@ -10956,7 +11112,7 @@
                 <a:ea typeface="Calibri" pitchFamily="34" charset="-122"/>
                 <a:cs typeface="Calibri" pitchFamily="34" charset="-120"/>
               </a:rPr>
-              <a:t>vosotros  coméis</a:t>
+              <a:t>vosotros/vosotras  coméis</a:t>
             </a:r>
             <a:endParaRPr lang="en-US" sz="1100" dirty="0"/>
           </a:p>
@@ -10979,7 +11135,7 @@
                 <a:ea typeface="Calibri" pitchFamily="34" charset="-122"/>
                 <a:cs typeface="Calibri" pitchFamily="34" charset="-120"/>
               </a:rPr>
-              <a:t>ellos/Uds.  comen</a:t>
+              <a:t>ellos/ellas/Uds.  comen</a:t>
             </a:r>
             <a:endParaRPr lang="en-US" sz="1100" dirty="0"/>
           </a:p>
@@ -11256,7 +11412,7 @@
                 <a:ea typeface="Calibri" pitchFamily="34" charset="-122"/>
                 <a:cs typeface="Calibri" pitchFamily="34" charset="-120"/>
               </a:rPr>
-              <a:t>nosotros  vivimos</a:t>
+              <a:t>nosotros/nosotras  vivimos</a:t>
             </a:r>
             <a:endParaRPr lang="en-US" sz="1100" dirty="0"/>
           </a:p>
@@ -11279,7 +11435,7 @@
                 <a:ea typeface="Calibri" pitchFamily="34" charset="-122"/>
                 <a:cs typeface="Calibri" pitchFamily="34" charset="-120"/>
               </a:rPr>
-              <a:t>vosotros  vivís</a:t>
+              <a:t>vosotros/vosotras  vivís</a:t>
             </a:r>
             <a:endParaRPr lang="en-US" sz="1100" dirty="0"/>
           </a:p>
@@ -11302,7 +11458,7 @@
                 <a:ea typeface="Calibri" pitchFamily="34" charset="-122"/>
                 <a:cs typeface="Calibri" pitchFamily="34" charset="-120"/>
               </a:rPr>
-              <a:t>ellos/Uds.  viven</a:t>
+              <a:t>ellos/ellas/Uds.  viven</a:t>
             </a:r>
             <a:endParaRPr lang="en-US" sz="1100" dirty="0"/>
           </a:p>
@@ -11344,6 +11500,45 @@
               <a:t>Nuevo Español en Marcha 1 · Unidad 1 · Vocabulario visual</a:t>
             </a:r>
             <a:endParaRPr lang="en-US" sz="1000" dirty="0"/>
+          </a:p>
+        </p:txBody>
+      </p:sp>
+      <p:sp>
+        <p:nvSpPr>
+          <p:cNvPr id="36" name="Text 34"/>
+          <p:cNvSpPr/>
+          <p:nvPr/>
+        </p:nvSpPr>
+        <p:spPr>
+          <a:xfrm>
+            <a:off x="7985455" y="6473952"/>
+            <a:ext cx="3657600" cy="274320"/>
+          </a:xfrm>
+          <a:prstGeom prst="rect">
+            <a:avLst/>
+          </a:prstGeom>
+          <a:noFill/>
+          <a:ln/>
+        </p:spPr>
+        <p:txBody>
+          <a:bodyPr wrap="square" lIns="0" tIns="0" rIns="0" bIns="0" rtlCol="0" anchor="ctr"/>
+          <a:lstStyle/>
+          <a:p>
+            <a:pPr algn="r" indent="0" marL="0">
+              <a:buNone/>
+            </a:pPr>
+            <a:r>
+              <a:rPr lang="en-US" sz="900" dirty="0">
+                <a:solidFill>
+                  <a:srgbClr val="5C6690"/>
+                </a:solidFill>
+                <a:latin typeface="Calibri" pitchFamily="34" charset="0"/>
+                <a:ea typeface="Calibri" pitchFamily="34" charset="-122"/>
+                <a:cs typeface="Calibri" pitchFamily="34" charset="-120"/>
+              </a:rPr>
+              <a:t>© Ángel Luis Acosta González</a:t>
+            </a:r>
+            <a:endParaRPr lang="en-US" sz="900" dirty="0"/>
           </a:p>
         </p:txBody>
       </p:sp>
@@ -14163,6 +14358,45 @@
           </a:p>
         </p:txBody>
       </p:sp>
+      <p:sp>
+        <p:nvSpPr>
+          <p:cNvPr id="78" name="Text 76"/>
+          <p:cNvSpPr/>
+          <p:nvPr/>
+        </p:nvSpPr>
+        <p:spPr>
+          <a:xfrm>
+            <a:off x="7985455" y="6473952"/>
+            <a:ext cx="3657600" cy="274320"/>
+          </a:xfrm>
+          <a:prstGeom prst="rect">
+            <a:avLst/>
+          </a:prstGeom>
+          <a:noFill/>
+          <a:ln/>
+        </p:spPr>
+        <p:txBody>
+          <a:bodyPr wrap="square" lIns="0" tIns="0" rIns="0" bIns="0" rtlCol="0" anchor="ctr"/>
+          <a:lstStyle/>
+          <a:p>
+            <a:pPr algn="r" indent="0" marL="0">
+              <a:buNone/>
+            </a:pPr>
+            <a:r>
+              <a:rPr lang="en-US" sz="900" dirty="0">
+                <a:solidFill>
+                  <a:srgbClr val="5C6690"/>
+                </a:solidFill>
+                <a:latin typeface="Calibri" pitchFamily="34" charset="0"/>
+                <a:ea typeface="Calibri" pitchFamily="34" charset="-122"/>
+                <a:cs typeface="Calibri" pitchFamily="34" charset="-120"/>
+              </a:rPr>
+              <a:t>© Ángel Luis Acosta González</a:t>
+            </a:r>
+            <a:endParaRPr lang="en-US" sz="900" dirty="0"/>
+          </a:p>
+        </p:txBody>
+      </p:sp>
     </p:spTree>
   </p:cSld>
   <p:clrMapOvr>
@@ -14396,6 +14630,45 @@
         </p:nvSpPr>
         <p:spPr>
           <a:xfrm>
+            <a:off x="822960" y="5074920"/>
+            <a:ext cx="9784080" cy="365760"/>
+          </a:xfrm>
+          <a:prstGeom prst="rect">
+            <a:avLst/>
+          </a:prstGeom>
+          <a:noFill/>
+          <a:ln/>
+        </p:spPr>
+        <p:txBody>
+          <a:bodyPr wrap="square" lIns="0" tIns="0" rIns="0" bIns="0" rtlCol="0" anchor="ctr"/>
+          <a:lstStyle/>
+          <a:p>
+            <a:pPr indent="0" marL="0">
+              <a:buNone/>
+            </a:pPr>
+            <a:r>
+              <a:rPr lang="en-US" sz="1500" i="1" dirty="0">
+                <a:solidFill>
+                  <a:srgbClr val="F9E795"/>
+                </a:solidFill>
+                <a:latin typeface="Cambria" pitchFamily="34" charset="0"/>
+                <a:ea typeface="Cambria" pitchFamily="34" charset="-122"/>
+                <a:cs typeface="Cambria" pitchFamily="34" charset="-120"/>
+              </a:rPr>
+              <a:t>— Ángel Luis Acosta González, tu profesor de español</a:t>
+            </a:r>
+            <a:endParaRPr lang="en-US" sz="1500" dirty="0"/>
+          </a:p>
+        </p:txBody>
+      </p:sp>
+      <p:sp>
+        <p:nvSpPr>
+          <p:cNvPr id="8" name="Text 6"/>
+          <p:cNvSpPr/>
+          <p:nvPr/>
+        </p:nvSpPr>
+        <p:spPr>
+          <a:xfrm>
             <a:off x="822960" y="6217920"/>
             <a:ext cx="10058400" cy="365760"/>
           </a:xfrm>
@@ -16673,6 +16946,45 @@
           </a:p>
         </p:txBody>
       </p:sp>
+      <p:sp>
+        <p:nvSpPr>
+          <p:cNvPr id="62" name="Text 60"/>
+          <p:cNvSpPr/>
+          <p:nvPr/>
+        </p:nvSpPr>
+        <p:spPr>
+          <a:xfrm>
+            <a:off x="7985455" y="6473952"/>
+            <a:ext cx="3657600" cy="274320"/>
+          </a:xfrm>
+          <a:prstGeom prst="rect">
+            <a:avLst/>
+          </a:prstGeom>
+          <a:noFill/>
+          <a:ln/>
+        </p:spPr>
+        <p:txBody>
+          <a:bodyPr wrap="square" lIns="0" tIns="0" rIns="0" bIns="0" rtlCol="0" anchor="ctr"/>
+          <a:lstStyle/>
+          <a:p>
+            <a:pPr algn="r" indent="0" marL="0">
+              <a:buNone/>
+            </a:pPr>
+            <a:r>
+              <a:rPr lang="en-US" sz="900" dirty="0">
+                <a:solidFill>
+                  <a:srgbClr val="5C6690"/>
+                </a:solidFill>
+                <a:latin typeface="Calibri" pitchFamily="34" charset="0"/>
+                <a:ea typeface="Calibri" pitchFamily="34" charset="-122"/>
+                <a:cs typeface="Calibri" pitchFamily="34" charset="-120"/>
+              </a:rPr>
+              <a:t>© Ángel Luis Acosta González</a:t>
+            </a:r>
+            <a:endParaRPr lang="en-US" sz="900" dirty="0"/>
+          </a:p>
+        </p:txBody>
+      </p:sp>
     </p:spTree>
   </p:cSld>
   <p:clrMapOvr>
@@ -18478,6 +18790,45 @@
           </a:p>
         </p:txBody>
       </p:sp>
+      <p:sp>
+        <p:nvSpPr>
+          <p:cNvPr id="50" name="Text 48"/>
+          <p:cNvSpPr/>
+          <p:nvPr/>
+        </p:nvSpPr>
+        <p:spPr>
+          <a:xfrm>
+            <a:off x="7985455" y="6473952"/>
+            <a:ext cx="3657600" cy="274320"/>
+          </a:xfrm>
+          <a:prstGeom prst="rect">
+            <a:avLst/>
+          </a:prstGeom>
+          <a:noFill/>
+          <a:ln/>
+        </p:spPr>
+        <p:txBody>
+          <a:bodyPr wrap="square" lIns="0" tIns="0" rIns="0" bIns="0" rtlCol="0" anchor="ctr"/>
+          <a:lstStyle/>
+          <a:p>
+            <a:pPr algn="r" indent="0" marL="0">
+              <a:buNone/>
+            </a:pPr>
+            <a:r>
+              <a:rPr lang="en-US" sz="900" dirty="0">
+                <a:solidFill>
+                  <a:srgbClr val="5C6690"/>
+                </a:solidFill>
+                <a:latin typeface="Calibri" pitchFamily="34" charset="0"/>
+                <a:ea typeface="Calibri" pitchFamily="34" charset="-122"/>
+                <a:cs typeface="Calibri" pitchFamily="34" charset="-120"/>
+              </a:rPr>
+              <a:t>© Ángel Luis Acosta González</a:t>
+            </a:r>
+            <a:endParaRPr lang="en-US" sz="900" dirty="0"/>
+          </a:p>
+        </p:txBody>
+      </p:sp>
     </p:spTree>
   </p:cSld>
   <p:clrMapOvr>
@@ -20136,6 +20487,45 @@
           </a:p>
         </p:txBody>
       </p:sp>
+      <p:sp>
+        <p:nvSpPr>
+          <p:cNvPr id="46" name="Text 44"/>
+          <p:cNvSpPr/>
+          <p:nvPr/>
+        </p:nvSpPr>
+        <p:spPr>
+          <a:xfrm>
+            <a:off x="7985455" y="6473952"/>
+            <a:ext cx="3657600" cy="274320"/>
+          </a:xfrm>
+          <a:prstGeom prst="rect">
+            <a:avLst/>
+          </a:prstGeom>
+          <a:noFill/>
+          <a:ln/>
+        </p:spPr>
+        <p:txBody>
+          <a:bodyPr wrap="square" lIns="0" tIns="0" rIns="0" bIns="0" rtlCol="0" anchor="ctr"/>
+          <a:lstStyle/>
+          <a:p>
+            <a:pPr algn="r" indent="0" marL="0">
+              <a:buNone/>
+            </a:pPr>
+            <a:r>
+              <a:rPr lang="en-US" sz="900" dirty="0">
+                <a:solidFill>
+                  <a:srgbClr val="5C6690"/>
+                </a:solidFill>
+                <a:latin typeface="Calibri" pitchFamily="34" charset="0"/>
+                <a:ea typeface="Calibri" pitchFamily="34" charset="-122"/>
+                <a:cs typeface="Calibri" pitchFamily="34" charset="-120"/>
+              </a:rPr>
+              <a:t>© Ángel Luis Acosta González</a:t>
+            </a:r>
+            <a:endParaRPr lang="en-US" sz="900" dirty="0"/>
+          </a:p>
+        </p:txBody>
+      </p:sp>
     </p:spTree>
   </p:cSld>
   <p:clrMapOvr>
@@ -20293,12 +20683,12 @@
         </p:nvSpPr>
         <p:spPr>
           <a:xfrm>
-            <a:off x="548640" y="2432304"/>
-            <a:ext cx="3563112" cy="1463040"/>
+            <a:off x="548640" y="1746504"/>
+            <a:ext cx="3563112" cy="1371600"/>
           </a:xfrm>
           <a:prstGeom prst="roundRect">
             <a:avLst>
-              <a:gd name="adj" fmla="val 5625"/>
+              <a:gd name="adj" fmla="val 6000"/>
             </a:avLst>
           </a:prstGeom>
           <a:solidFill>
@@ -20322,8 +20712,8 @@
         </p:nvSpPr>
         <p:spPr>
           <a:xfrm>
-            <a:off x="676656" y="2880360"/>
-            <a:ext cx="566928" cy="566928"/>
+            <a:off x="676656" y="2176272"/>
+            <a:ext cx="512064" cy="512064"/>
           </a:xfrm>
           <a:prstGeom prst="ellipse">
             <a:avLst/>
@@ -20342,8 +20732,8 @@
         </p:nvSpPr>
         <p:spPr>
           <a:xfrm>
-            <a:off x="676656" y="2880360"/>
-            <a:ext cx="566928" cy="566928"/>
+            <a:off x="676656" y="2176272"/>
+            <a:ext cx="512064" cy="512064"/>
           </a:xfrm>
           <a:prstGeom prst="rect">
             <a:avLst/>
@@ -20359,14 +20749,14 @@
               <a:buNone/>
             </a:pPr>
             <a:r>
-              <a:rPr lang="en-US" sz="2100" dirty="0">
+              <a:rPr lang="en-US" sz="1900" dirty="0">
                 <a:solidFill>
                   <a:srgbClr val="000000"/>
                 </a:solidFill>
               </a:rPr>
               <a:t>❓</a:t>
             </a:r>
-            <a:endParaRPr lang="en-US" sz="2100" dirty="0"/>
+            <a:endParaRPr lang="en-US" sz="1900" dirty="0"/>
           </a:p>
         </p:txBody>
       </p:sp>
@@ -20378,8 +20768,8 @@
         </p:nvSpPr>
         <p:spPr>
           <a:xfrm>
-            <a:off x="1371600" y="2478024"/>
-            <a:ext cx="2630424" cy="1371600"/>
+            <a:off x="1316736" y="1792224"/>
+            <a:ext cx="2685288" cy="1280160"/>
           </a:xfrm>
           <a:prstGeom prst="rect">
             <a:avLst/>
@@ -20398,7 +20788,7 @@
               <a:buNone/>
             </a:pPr>
             <a:r>
-              <a:rPr lang="en-US" sz="1700" b="1" dirty="0">
+              <a:rPr lang="en-US" sz="1500" b="1" dirty="0">
                 <a:solidFill>
                   <a:srgbClr val="2F3C7E"/>
                 </a:solidFill>
@@ -20408,7 +20798,7 @@
               </a:rPr>
               <a:t>qué</a:t>
             </a:r>
-            <a:endParaRPr lang="en-US" sz="1700" dirty="0"/>
+            <a:endParaRPr lang="en-US" sz="1500" dirty="0"/>
           </a:p>
           <a:p>
             <a:pPr indent="0" marL="0">
@@ -20418,7 +20808,7 @@
               <a:buNone/>
             </a:pPr>
             <a:r>
-              <a:rPr lang="en-US" sz="1200" dirty="0">
+              <a:rPr lang="en-US" sz="1100" dirty="0">
                 <a:solidFill>
                   <a:srgbClr val="5C6690"/>
                 </a:solidFill>
@@ -20428,7 +20818,7 @@
               </a:rPr>
               <a:t>что / какой</a:t>
             </a:r>
-            <a:endParaRPr lang="en-US" sz="1700" dirty="0"/>
+            <a:endParaRPr lang="en-US" sz="1500" dirty="0"/>
           </a:p>
         </p:txBody>
       </p:sp>
@@ -20440,12 +20830,12 @@
         </p:nvSpPr>
         <p:spPr>
           <a:xfrm>
-            <a:off x="4312920" y="2432304"/>
-            <a:ext cx="3563112" cy="1463040"/>
+            <a:off x="4312920" y="1746504"/>
+            <a:ext cx="3563112" cy="1371600"/>
           </a:xfrm>
           <a:prstGeom prst="roundRect">
             <a:avLst>
-              <a:gd name="adj" fmla="val 5625"/>
+              <a:gd name="adj" fmla="val 6000"/>
             </a:avLst>
           </a:prstGeom>
           <a:solidFill>
@@ -20469,8 +20859,8 @@
         </p:nvSpPr>
         <p:spPr>
           <a:xfrm>
-            <a:off x="4440936" y="2880360"/>
-            <a:ext cx="566928" cy="566928"/>
+            <a:off x="4440936" y="2176272"/>
+            <a:ext cx="512064" cy="512064"/>
           </a:xfrm>
           <a:prstGeom prst="ellipse">
             <a:avLst/>
@@ -20489,8 +20879,8 @@
         </p:nvSpPr>
         <p:spPr>
           <a:xfrm>
-            <a:off x="4440936" y="2880360"/>
-            <a:ext cx="566928" cy="566928"/>
+            <a:off x="4440936" y="2176272"/>
+            <a:ext cx="512064" cy="512064"/>
           </a:xfrm>
           <a:prstGeom prst="rect">
             <a:avLst/>
@@ -20506,14 +20896,14 @@
               <a:buNone/>
             </a:pPr>
             <a:r>
-              <a:rPr lang="en-US" sz="2100" dirty="0">
+              <a:rPr lang="en-US" sz="1900" dirty="0">
                 <a:solidFill>
                   <a:srgbClr val="000000"/>
                 </a:solidFill>
               </a:rPr>
               <a:t>📍</a:t>
             </a:r>
-            <a:endParaRPr lang="en-US" sz="2100" dirty="0"/>
+            <a:endParaRPr lang="en-US" sz="1900" dirty="0"/>
           </a:p>
         </p:txBody>
       </p:sp>
@@ -20525,8 +20915,8 @@
         </p:nvSpPr>
         <p:spPr>
           <a:xfrm>
-            <a:off x="5135880" y="2478024"/>
-            <a:ext cx="2630424" cy="1371600"/>
+            <a:off x="5081016" y="1792224"/>
+            <a:ext cx="2685288" cy="1280160"/>
           </a:xfrm>
           <a:prstGeom prst="rect">
             <a:avLst/>
@@ -20545,7 +20935,7 @@
               <a:buNone/>
             </a:pPr>
             <a:r>
-              <a:rPr lang="en-US" sz="1700" b="1" dirty="0">
+              <a:rPr lang="en-US" sz="1500" b="1" dirty="0">
                 <a:solidFill>
                   <a:srgbClr val="2F3C7E"/>
                 </a:solidFill>
@@ -20555,7 +20945,7 @@
               </a:rPr>
               <a:t>dónde</a:t>
             </a:r>
-            <a:endParaRPr lang="en-US" sz="1700" dirty="0"/>
+            <a:endParaRPr lang="en-US" sz="1500" dirty="0"/>
           </a:p>
           <a:p>
             <a:pPr indent="0" marL="0">
@@ -20565,7 +20955,7 @@
               <a:buNone/>
             </a:pPr>
             <a:r>
-              <a:rPr lang="en-US" sz="1200" dirty="0">
+              <a:rPr lang="en-US" sz="1100" dirty="0">
                 <a:solidFill>
                   <a:srgbClr val="5C6690"/>
                 </a:solidFill>
@@ -20575,7 +20965,7 @@
               </a:rPr>
               <a:t>где</a:t>
             </a:r>
-            <a:endParaRPr lang="en-US" sz="1700" dirty="0"/>
+            <a:endParaRPr lang="en-US" sz="1500" dirty="0"/>
           </a:p>
         </p:txBody>
       </p:sp>
@@ -20587,12 +20977,12 @@
         </p:nvSpPr>
         <p:spPr>
           <a:xfrm>
-            <a:off x="8077200" y="2432304"/>
-            <a:ext cx="3563112" cy="1463040"/>
+            <a:off x="8077200" y="1746504"/>
+            <a:ext cx="3563112" cy="1371600"/>
           </a:xfrm>
           <a:prstGeom prst="roundRect">
             <a:avLst>
-              <a:gd name="adj" fmla="val 5625"/>
+              <a:gd name="adj" fmla="val 6000"/>
             </a:avLst>
           </a:prstGeom>
           <a:solidFill>
@@ -20616,8 +21006,8 @@
         </p:nvSpPr>
         <p:spPr>
           <a:xfrm>
-            <a:off x="8205216" y="2880360"/>
-            <a:ext cx="566928" cy="566928"/>
+            <a:off x="8205216" y="2176272"/>
+            <a:ext cx="512064" cy="512064"/>
           </a:xfrm>
           <a:prstGeom prst="ellipse">
             <a:avLst/>
@@ -20636,8 +21026,8 @@
         </p:nvSpPr>
         <p:spPr>
           <a:xfrm>
-            <a:off x="8205216" y="2880360"/>
-            <a:ext cx="566928" cy="566928"/>
+            <a:off x="8205216" y="2176272"/>
+            <a:ext cx="512064" cy="512064"/>
           </a:xfrm>
           <a:prstGeom prst="rect">
             <a:avLst/>
@@ -20653,14 +21043,14 @@
               <a:buNone/>
             </a:pPr>
             <a:r>
-              <a:rPr lang="en-US" sz="2100" dirty="0">
+              <a:rPr lang="en-US" sz="1900" dirty="0">
                 <a:solidFill>
                   <a:srgbClr val="000000"/>
                 </a:solidFill>
               </a:rPr>
-              <a:t>🤔</a:t>
-            </a:r>
-            <a:endParaRPr lang="en-US" sz="2100" dirty="0"/>
+              <a:t>🧭</a:t>
+            </a:r>
+            <a:endParaRPr lang="en-US" sz="1900" dirty="0"/>
           </a:p>
         </p:txBody>
       </p:sp>
@@ -20672,8 +21062,8 @@
         </p:nvSpPr>
         <p:spPr>
           <a:xfrm>
-            <a:off x="8900160" y="2478024"/>
-            <a:ext cx="2630424" cy="1371600"/>
+            <a:off x="8845296" y="1792224"/>
+            <a:ext cx="2685288" cy="1280160"/>
           </a:xfrm>
           <a:prstGeom prst="rect">
             <a:avLst/>
@@ -20692,7 +21082,7 @@
               <a:buNone/>
             </a:pPr>
             <a:r>
-              <a:rPr lang="en-US" sz="1700" b="1" dirty="0">
+              <a:rPr lang="en-US" sz="1500" b="1" dirty="0">
                 <a:solidFill>
                   <a:srgbClr val="2F3C7E"/>
                 </a:solidFill>
@@ -20700,9 +21090,9 @@
                 <a:ea typeface="Calibri" pitchFamily="34" charset="-122"/>
                 <a:cs typeface="Calibri" pitchFamily="34" charset="-120"/>
               </a:rPr>
-              <a:t>cómo</a:t>
-            </a:r>
-            <a:endParaRPr lang="en-US" sz="1700" dirty="0"/>
+              <a:t>de dónde</a:t>
+            </a:r>
+            <a:endParaRPr lang="en-US" sz="1500" dirty="0"/>
           </a:p>
           <a:p>
             <a:pPr indent="0" marL="0">
@@ -20712,7 +21102,7 @@
               <a:buNone/>
             </a:pPr>
             <a:r>
-              <a:rPr lang="en-US" sz="1200" dirty="0">
+              <a:rPr lang="en-US" sz="1100" dirty="0">
                 <a:solidFill>
                   <a:srgbClr val="5C6690"/>
                 </a:solidFill>
@@ -20720,9 +21110,9 @@
                 <a:ea typeface="Calibri" pitchFamily="34" charset="-122"/>
                 <a:cs typeface="Calibri" pitchFamily="34" charset="-120"/>
               </a:rPr>
-              <a:t>как</a:t>
-            </a:r>
-            <a:endParaRPr lang="en-US" sz="1700" dirty="0"/>
+              <a:t>откуда</a:t>
+            </a:r>
+            <a:endParaRPr lang="en-US" sz="1500" dirty="0"/>
           </a:p>
         </p:txBody>
       </p:sp>
@@ -20734,12 +21124,12 @@
         </p:nvSpPr>
         <p:spPr>
           <a:xfrm>
-            <a:off x="548640" y="4078224"/>
-            <a:ext cx="3563112" cy="1463040"/>
+            <a:off x="548640" y="3300984"/>
+            <a:ext cx="3563112" cy="1371600"/>
           </a:xfrm>
           <a:prstGeom prst="roundRect">
             <a:avLst>
-              <a:gd name="adj" fmla="val 5625"/>
+              <a:gd name="adj" fmla="val 6000"/>
             </a:avLst>
           </a:prstGeom>
           <a:solidFill>
@@ -20763,8 +21153,8 @@
         </p:nvSpPr>
         <p:spPr>
           <a:xfrm>
-            <a:off x="676656" y="4526280"/>
-            <a:ext cx="566928" cy="566928"/>
+            <a:off x="676656" y="3730752"/>
+            <a:ext cx="512064" cy="512064"/>
           </a:xfrm>
           <a:prstGeom prst="ellipse">
             <a:avLst/>
@@ -20783,8 +21173,8 @@
         </p:nvSpPr>
         <p:spPr>
           <a:xfrm>
-            <a:off x="676656" y="4526280"/>
-            <a:ext cx="566928" cy="566928"/>
+            <a:off x="676656" y="3730752"/>
+            <a:ext cx="512064" cy="512064"/>
           </a:xfrm>
           <a:prstGeom prst="rect">
             <a:avLst/>
@@ -20800,14 +21190,14 @@
               <a:buNone/>
             </a:pPr>
             <a:r>
-              <a:rPr lang="en-US" sz="2100" dirty="0">
+              <a:rPr lang="en-US" sz="1900" dirty="0">
                 <a:solidFill>
                   <a:srgbClr val="000000"/>
                 </a:solidFill>
               </a:rPr>
-              <a:t>🔀</a:t>
-            </a:r>
-            <a:endParaRPr lang="en-US" sz="2100" dirty="0"/>
+              <a:t>➡️</a:t>
+            </a:r>
+            <a:endParaRPr lang="en-US" sz="1900" dirty="0"/>
           </a:p>
         </p:txBody>
       </p:sp>
@@ -20819,8 +21209,8 @@
         </p:nvSpPr>
         <p:spPr>
           <a:xfrm>
-            <a:off x="1371600" y="4123944"/>
-            <a:ext cx="2630424" cy="1371600"/>
+            <a:off x="1316736" y="3346704"/>
+            <a:ext cx="2685288" cy="1280160"/>
           </a:xfrm>
           <a:prstGeom prst="rect">
             <a:avLst/>
@@ -20839,7 +21229,7 @@
               <a:buNone/>
             </a:pPr>
             <a:r>
-              <a:rPr lang="en-US" sz="1700" b="1" dirty="0">
+              <a:rPr lang="en-US" sz="1500" b="1" dirty="0">
                 <a:solidFill>
                   <a:srgbClr val="2F3C7E"/>
                 </a:solidFill>
@@ -20847,9 +21237,9 @@
                 <a:ea typeface="Calibri" pitchFamily="34" charset="-122"/>
                 <a:cs typeface="Calibri" pitchFamily="34" charset="-120"/>
               </a:rPr>
-              <a:t>cuál</a:t>
-            </a:r>
-            <a:endParaRPr lang="en-US" sz="1700" dirty="0"/>
+              <a:t>adónde</a:t>
+            </a:r>
+            <a:endParaRPr lang="en-US" sz="1500" dirty="0"/>
           </a:p>
           <a:p>
             <a:pPr indent="0" marL="0">
@@ -20859,7 +21249,7 @@
               <a:buNone/>
             </a:pPr>
             <a:r>
-              <a:rPr lang="en-US" sz="1200" dirty="0">
+              <a:rPr lang="en-US" sz="1100" dirty="0">
                 <a:solidFill>
                   <a:srgbClr val="5C6690"/>
                 </a:solidFill>
@@ -20867,9 +21257,9 @@
                 <a:ea typeface="Calibri" pitchFamily="34" charset="-122"/>
                 <a:cs typeface="Calibri" pitchFamily="34" charset="-120"/>
               </a:rPr>
-              <a:t>какой (из вариантов)</a:t>
-            </a:r>
-            <a:endParaRPr lang="en-US" sz="1700" dirty="0"/>
+              <a:t>куда</a:t>
+            </a:r>
+            <a:endParaRPr lang="en-US" sz="1500" dirty="0"/>
           </a:p>
         </p:txBody>
       </p:sp>
@@ -20881,12 +21271,12 @@
         </p:nvSpPr>
         <p:spPr>
           <a:xfrm>
-            <a:off x="4312920" y="4078224"/>
-            <a:ext cx="3563112" cy="1463040"/>
+            <a:off x="4312920" y="3300984"/>
+            <a:ext cx="3563112" cy="1371600"/>
           </a:xfrm>
           <a:prstGeom prst="roundRect">
             <a:avLst>
-              <a:gd name="adj" fmla="val 5625"/>
+              <a:gd name="adj" fmla="val 6000"/>
             </a:avLst>
           </a:prstGeom>
           <a:solidFill>
@@ -20910,8 +21300,8 @@
         </p:nvSpPr>
         <p:spPr>
           <a:xfrm>
-            <a:off x="4440936" y="4526280"/>
-            <a:ext cx="566928" cy="566928"/>
+            <a:off x="4440936" y="3730752"/>
+            <a:ext cx="512064" cy="512064"/>
           </a:xfrm>
           <a:prstGeom prst="ellipse">
             <a:avLst/>
@@ -20930,8 +21320,8 @@
         </p:nvSpPr>
         <p:spPr>
           <a:xfrm>
-            <a:off x="4440936" y="4526280"/>
-            <a:ext cx="566928" cy="566928"/>
+            <a:off x="4440936" y="3730752"/>
+            <a:ext cx="512064" cy="512064"/>
           </a:xfrm>
           <a:prstGeom prst="rect">
             <a:avLst/>
@@ -20947,14 +21337,14 @@
               <a:buNone/>
             </a:pPr>
             <a:r>
-              <a:rPr lang="en-US" sz="2100" dirty="0">
+              <a:rPr lang="en-US" sz="1900" dirty="0">
                 <a:solidFill>
                   <a:srgbClr val="000000"/>
                 </a:solidFill>
               </a:rPr>
-              <a:t>🙋</a:t>
-            </a:r>
-            <a:endParaRPr lang="en-US" sz="2100" dirty="0"/>
+              <a:t>🤔</a:t>
+            </a:r>
+            <a:endParaRPr lang="en-US" sz="1900" dirty="0"/>
           </a:p>
         </p:txBody>
       </p:sp>
@@ -20966,8 +21356,8 @@
         </p:nvSpPr>
         <p:spPr>
           <a:xfrm>
-            <a:off x="5135880" y="4123944"/>
-            <a:ext cx="2630424" cy="1371600"/>
+            <a:off x="5081016" y="3346704"/>
+            <a:ext cx="2685288" cy="1280160"/>
           </a:xfrm>
           <a:prstGeom prst="rect">
             <a:avLst/>
@@ -20986,7 +21376,7 @@
               <a:buNone/>
             </a:pPr>
             <a:r>
-              <a:rPr lang="en-US" sz="1700" b="1" dirty="0">
+              <a:rPr lang="en-US" sz="1500" b="1" dirty="0">
                 <a:solidFill>
                   <a:srgbClr val="2F3C7E"/>
                 </a:solidFill>
@@ -20994,9 +21384,9 @@
                 <a:ea typeface="Calibri" pitchFamily="34" charset="-122"/>
                 <a:cs typeface="Calibri" pitchFamily="34" charset="-120"/>
               </a:rPr>
-              <a:t>quién / quiénes</a:t>
-            </a:r>
-            <a:endParaRPr lang="en-US" sz="1700" dirty="0"/>
+              <a:t>cómo</a:t>
+            </a:r>
+            <a:endParaRPr lang="en-US" sz="1500" dirty="0"/>
           </a:p>
           <a:p>
             <a:pPr indent="0" marL="0">
@@ -21006,7 +21396,7 @@
               <a:buNone/>
             </a:pPr>
             <a:r>
-              <a:rPr lang="en-US" sz="1200" dirty="0">
+              <a:rPr lang="en-US" sz="1100" dirty="0">
                 <a:solidFill>
                   <a:srgbClr val="5C6690"/>
                 </a:solidFill>
@@ -21014,9 +21404,9 @@
                 <a:ea typeface="Calibri" pitchFamily="34" charset="-122"/>
                 <a:cs typeface="Calibri" pitchFamily="34" charset="-120"/>
               </a:rPr>
-              <a:t>кто</a:t>
-            </a:r>
-            <a:endParaRPr lang="en-US" sz="1700" dirty="0"/>
+              <a:t>как</a:t>
+            </a:r>
+            <a:endParaRPr lang="en-US" sz="1500" dirty="0"/>
           </a:p>
         </p:txBody>
       </p:sp>
@@ -21028,12 +21418,12 @@
         </p:nvSpPr>
         <p:spPr>
           <a:xfrm>
-            <a:off x="8077200" y="4078224"/>
-            <a:ext cx="3563112" cy="1463040"/>
+            <a:off x="8077200" y="3300984"/>
+            <a:ext cx="3563112" cy="1371600"/>
           </a:xfrm>
           <a:prstGeom prst="roundRect">
             <a:avLst>
-              <a:gd name="adj" fmla="val 5625"/>
+              <a:gd name="adj" fmla="val 6000"/>
             </a:avLst>
           </a:prstGeom>
           <a:solidFill>
@@ -21057,8 +21447,8 @@
         </p:nvSpPr>
         <p:spPr>
           <a:xfrm>
-            <a:off x="8205216" y="4526280"/>
-            <a:ext cx="566928" cy="566928"/>
+            <a:off x="8205216" y="3730752"/>
+            <a:ext cx="512064" cy="512064"/>
           </a:xfrm>
           <a:prstGeom prst="ellipse">
             <a:avLst/>
@@ -21077,8 +21467,8 @@
         </p:nvSpPr>
         <p:spPr>
           <a:xfrm>
-            <a:off x="8205216" y="4526280"/>
-            <a:ext cx="566928" cy="566928"/>
+            <a:off x="8205216" y="3730752"/>
+            <a:ext cx="512064" cy="512064"/>
           </a:xfrm>
           <a:prstGeom prst="rect">
             <a:avLst/>
@@ -21094,27 +21484,321 @@
               <a:buNone/>
             </a:pPr>
             <a:r>
-              <a:rPr lang="en-US" sz="2100" dirty="0">
+              <a:rPr lang="en-US" sz="1900" dirty="0">
                 <a:solidFill>
                   <a:srgbClr val="000000"/>
                 </a:solidFill>
               </a:rPr>
+              <a:t>🔀</a:t>
+            </a:r>
+            <a:endParaRPr lang="en-US" sz="1900" dirty="0"/>
+          </a:p>
+        </p:txBody>
+      </p:sp>
+      <p:sp>
+        <p:nvSpPr>
+          <p:cNvPr id="28" name="Text 26"/>
+          <p:cNvSpPr/>
+          <p:nvPr/>
+        </p:nvSpPr>
+        <p:spPr>
+          <a:xfrm>
+            <a:off x="8845296" y="3346704"/>
+            <a:ext cx="2685288" cy="1280160"/>
+          </a:xfrm>
+          <a:prstGeom prst="rect">
+            <a:avLst/>
+          </a:prstGeom>
+          <a:noFill/>
+          <a:ln/>
+        </p:spPr>
+        <p:txBody>
+          <a:bodyPr wrap="square" lIns="0" tIns="0" rIns="0" bIns="0" rtlCol="0" anchor="ctr"/>
+          <a:lstStyle/>
+          <a:p>
+            <a:pPr indent="0" marL="0">
+              <a:lnSpc>
+                <a:spcPct val="105000"/>
+              </a:lnSpc>
+              <a:buNone/>
+            </a:pPr>
+            <a:r>
+              <a:rPr lang="en-US" sz="1500" b="1" dirty="0">
+                <a:solidFill>
+                  <a:srgbClr val="2F3C7E"/>
+                </a:solidFill>
+                <a:latin typeface="Calibri" pitchFamily="34" charset="0"/>
+                <a:ea typeface="Calibri" pitchFamily="34" charset="-122"/>
+                <a:cs typeface="Calibri" pitchFamily="34" charset="-120"/>
+              </a:rPr>
+              <a:t>cuál</a:t>
+            </a:r>
+            <a:endParaRPr lang="en-US" sz="1500" dirty="0"/>
+          </a:p>
+          <a:p>
+            <a:pPr indent="0" marL="0">
+              <a:lnSpc>
+                <a:spcPct val="105000"/>
+              </a:lnSpc>
+              <a:buNone/>
+            </a:pPr>
+            <a:r>
+              <a:rPr lang="en-US" sz="1100" dirty="0">
+                <a:solidFill>
+                  <a:srgbClr val="5C6690"/>
+                </a:solidFill>
+                <a:latin typeface="Calibri" pitchFamily="34" charset="0"/>
+                <a:ea typeface="Calibri" pitchFamily="34" charset="-122"/>
+                <a:cs typeface="Calibri" pitchFamily="34" charset="-120"/>
+              </a:rPr>
+              <a:t>какой (из вариантов)</a:t>
+            </a:r>
+            <a:endParaRPr lang="en-US" sz="1500" dirty="0"/>
+          </a:p>
+        </p:txBody>
+      </p:sp>
+      <p:sp>
+        <p:nvSpPr>
+          <p:cNvPr id="29" name="Shape 27"/>
+          <p:cNvSpPr/>
+          <p:nvPr/>
+        </p:nvSpPr>
+        <p:spPr>
+          <a:xfrm>
+            <a:off x="548640" y="4855464"/>
+            <a:ext cx="3563112" cy="1371600"/>
+          </a:xfrm>
+          <a:prstGeom prst="roundRect">
+            <a:avLst>
+              <a:gd name="adj" fmla="val 6000"/>
+            </a:avLst>
+          </a:prstGeom>
+          <a:solidFill>
+            <a:srgbClr val="F5F6FB"/>
+          </a:solidFill>
+          <a:ln/>
+          <a:effectLst>
+            <a:outerShdw sx="100000" sy="100000" kx="0" ky="0" algn="bl" rotWithShape="0" blurRad="76200" dist="38100" dir="5400000">
+              <a:srgbClr val="1B2340">
+                <a:alpha val="18000"/>
+              </a:srgbClr>
+            </a:outerShdw>
+          </a:effectLst>
+        </p:spPr>
+      </p:sp>
+      <p:sp>
+        <p:nvSpPr>
+          <p:cNvPr id="30" name="Shape 28"/>
+          <p:cNvSpPr/>
+          <p:nvPr/>
+        </p:nvSpPr>
+        <p:spPr>
+          <a:xfrm>
+            <a:off x="676656" y="5285232"/>
+            <a:ext cx="512064" cy="512064"/>
+          </a:xfrm>
+          <a:prstGeom prst="ellipse">
+            <a:avLst/>
+          </a:prstGeom>
+          <a:solidFill>
+            <a:srgbClr val="F96167"/>
+          </a:solidFill>
+          <a:ln/>
+        </p:spPr>
+      </p:sp>
+      <p:sp>
+        <p:nvSpPr>
+          <p:cNvPr id="31" name="Text 29"/>
+          <p:cNvSpPr/>
+          <p:nvPr/>
+        </p:nvSpPr>
+        <p:spPr>
+          <a:xfrm>
+            <a:off x="676656" y="5285232"/>
+            <a:ext cx="512064" cy="512064"/>
+          </a:xfrm>
+          <a:prstGeom prst="rect">
+            <a:avLst/>
+          </a:prstGeom>
+          <a:noFill/>
+          <a:ln/>
+        </p:spPr>
+        <p:txBody>
+          <a:bodyPr wrap="square" lIns="0" tIns="0" rIns="0" bIns="0" rtlCol="0" anchor="ctr"/>
+          <a:lstStyle/>
+          <a:p>
+            <a:pPr algn="ctr" indent="0" marL="0">
+              <a:buNone/>
+            </a:pPr>
+            <a:r>
+              <a:rPr lang="en-US" sz="1900" dirty="0">
+                <a:solidFill>
+                  <a:srgbClr val="000000"/>
+                </a:solidFill>
+              </a:rPr>
+              <a:t>🙋</a:t>
+            </a:r>
+            <a:endParaRPr lang="en-US" sz="1900" dirty="0"/>
+          </a:p>
+        </p:txBody>
+      </p:sp>
+      <p:sp>
+        <p:nvSpPr>
+          <p:cNvPr id="32" name="Text 30"/>
+          <p:cNvSpPr/>
+          <p:nvPr/>
+        </p:nvSpPr>
+        <p:spPr>
+          <a:xfrm>
+            <a:off x="1316736" y="4901184"/>
+            <a:ext cx="2685288" cy="1280160"/>
+          </a:xfrm>
+          <a:prstGeom prst="rect">
+            <a:avLst/>
+          </a:prstGeom>
+          <a:noFill/>
+          <a:ln/>
+        </p:spPr>
+        <p:txBody>
+          <a:bodyPr wrap="square" lIns="0" tIns="0" rIns="0" bIns="0" rtlCol="0" anchor="ctr"/>
+          <a:lstStyle/>
+          <a:p>
+            <a:pPr indent="0" marL="0">
+              <a:lnSpc>
+                <a:spcPct val="105000"/>
+              </a:lnSpc>
+              <a:buNone/>
+            </a:pPr>
+            <a:r>
+              <a:rPr lang="en-US" sz="1500" b="1" dirty="0">
+                <a:solidFill>
+                  <a:srgbClr val="2F3C7E"/>
+                </a:solidFill>
+                <a:latin typeface="Calibri" pitchFamily="34" charset="0"/>
+                <a:ea typeface="Calibri" pitchFamily="34" charset="-122"/>
+                <a:cs typeface="Calibri" pitchFamily="34" charset="-120"/>
+              </a:rPr>
+              <a:t>quién / quiénes</a:t>
+            </a:r>
+            <a:endParaRPr lang="en-US" sz="1500" dirty="0"/>
+          </a:p>
+          <a:p>
+            <a:pPr indent="0" marL="0">
+              <a:lnSpc>
+                <a:spcPct val="105000"/>
+              </a:lnSpc>
+              <a:buNone/>
+            </a:pPr>
+            <a:r>
+              <a:rPr lang="en-US" sz="1100" dirty="0">
+                <a:solidFill>
+                  <a:srgbClr val="5C6690"/>
+                </a:solidFill>
+                <a:latin typeface="Calibri" pitchFamily="34" charset="0"/>
+                <a:ea typeface="Calibri" pitchFamily="34" charset="-122"/>
+                <a:cs typeface="Calibri" pitchFamily="34" charset="-120"/>
+              </a:rPr>
+              <a:t>кто</a:t>
+            </a:r>
+            <a:endParaRPr lang="en-US" sz="1500" dirty="0"/>
+          </a:p>
+        </p:txBody>
+      </p:sp>
+      <p:sp>
+        <p:nvSpPr>
+          <p:cNvPr id="33" name="Shape 31"/>
+          <p:cNvSpPr/>
+          <p:nvPr/>
+        </p:nvSpPr>
+        <p:spPr>
+          <a:xfrm>
+            <a:off x="4312920" y="4855464"/>
+            <a:ext cx="3563112" cy="1371600"/>
+          </a:xfrm>
+          <a:prstGeom prst="roundRect">
+            <a:avLst>
+              <a:gd name="adj" fmla="val 6000"/>
+            </a:avLst>
+          </a:prstGeom>
+          <a:solidFill>
+            <a:srgbClr val="F5F6FB"/>
+          </a:solidFill>
+          <a:ln/>
+          <a:effectLst>
+            <a:outerShdw sx="100000" sy="100000" kx="0" ky="0" algn="bl" rotWithShape="0" blurRad="76200" dist="38100" dir="5400000">
+              <a:srgbClr val="1B2340">
+                <a:alpha val="18000"/>
+              </a:srgbClr>
+            </a:outerShdw>
+          </a:effectLst>
+        </p:spPr>
+      </p:sp>
+      <p:sp>
+        <p:nvSpPr>
+          <p:cNvPr id="34" name="Shape 32"/>
+          <p:cNvSpPr/>
+          <p:nvPr/>
+        </p:nvSpPr>
+        <p:spPr>
+          <a:xfrm>
+            <a:off x="4440936" y="5285232"/>
+            <a:ext cx="512064" cy="512064"/>
+          </a:xfrm>
+          <a:prstGeom prst="ellipse">
+            <a:avLst/>
+          </a:prstGeom>
+          <a:solidFill>
+            <a:srgbClr val="F96167"/>
+          </a:solidFill>
+          <a:ln/>
+        </p:spPr>
+      </p:sp>
+      <p:sp>
+        <p:nvSpPr>
+          <p:cNvPr id="35" name="Text 33"/>
+          <p:cNvSpPr/>
+          <p:nvPr/>
+        </p:nvSpPr>
+        <p:spPr>
+          <a:xfrm>
+            <a:off x="4440936" y="5285232"/>
+            <a:ext cx="512064" cy="512064"/>
+          </a:xfrm>
+          <a:prstGeom prst="rect">
+            <a:avLst/>
+          </a:prstGeom>
+          <a:noFill/>
+          <a:ln/>
+        </p:spPr>
+        <p:txBody>
+          <a:bodyPr wrap="square" lIns="0" tIns="0" rIns="0" bIns="0" rtlCol="0" anchor="ctr"/>
+          <a:lstStyle/>
+          <a:p>
+            <a:pPr algn="ctr" indent="0" marL="0">
+              <a:buNone/>
+            </a:pPr>
+            <a:r>
+              <a:rPr lang="en-US" sz="1900" dirty="0">
+                <a:solidFill>
+                  <a:srgbClr val="000000"/>
+                </a:solidFill>
+              </a:rPr>
               <a:t>🔢</a:t>
             </a:r>
-            <a:endParaRPr lang="en-US" sz="2100" dirty="0"/>
-          </a:p>
-        </p:txBody>
-      </p:sp>
-      <p:sp>
-        <p:nvSpPr>
-          <p:cNvPr id="28" name="Text 26"/>
-          <p:cNvSpPr/>
-          <p:nvPr/>
-        </p:nvSpPr>
-        <p:spPr>
-          <a:xfrm>
-            <a:off x="8900160" y="4123944"/>
-            <a:ext cx="2630424" cy="1371600"/>
+            <a:endParaRPr lang="en-US" sz="1900" dirty="0"/>
+          </a:p>
+        </p:txBody>
+      </p:sp>
+      <p:sp>
+        <p:nvSpPr>
+          <p:cNvPr id="36" name="Text 34"/>
+          <p:cNvSpPr/>
+          <p:nvPr/>
+        </p:nvSpPr>
+        <p:spPr>
+          <a:xfrm>
+            <a:off x="5081016" y="4901184"/>
+            <a:ext cx="2685288" cy="1280160"/>
           </a:xfrm>
           <a:prstGeom prst="rect">
             <a:avLst/>
@@ -21133,7 +21817,7 @@
               <a:buNone/>
             </a:pPr>
             <a:r>
-              <a:rPr lang="en-US" sz="1700" b="1" dirty="0">
+              <a:rPr lang="en-US" sz="1500" b="1" dirty="0">
                 <a:solidFill>
                   <a:srgbClr val="2F3C7E"/>
                 </a:solidFill>
@@ -21143,7 +21827,7 @@
               </a:rPr>
               <a:t>cuánto/a/os/as</a:t>
             </a:r>
-            <a:endParaRPr lang="en-US" sz="1700" dirty="0"/>
+            <a:endParaRPr lang="en-US" sz="1500" dirty="0"/>
           </a:p>
           <a:p>
             <a:pPr indent="0" marL="0">
@@ -21153,7 +21837,7 @@
               <a:buNone/>
             </a:pPr>
             <a:r>
-              <a:rPr lang="en-US" sz="1200" dirty="0">
+              <a:rPr lang="en-US" sz="1100" dirty="0">
                 <a:solidFill>
                   <a:srgbClr val="5C6690"/>
                 </a:solidFill>
@@ -21163,13 +21847,13 @@
               </a:rPr>
               <a:t>сколько</a:t>
             </a:r>
-            <a:endParaRPr lang="en-US" sz="1700" dirty="0"/>
-          </a:p>
-        </p:txBody>
-      </p:sp>
-      <p:sp>
-        <p:nvSpPr>
-          <p:cNvPr id="29" name="Text 27"/>
+            <a:endParaRPr lang="en-US" sz="1500" dirty="0"/>
+          </a:p>
+        </p:txBody>
+      </p:sp>
+      <p:sp>
+        <p:nvSpPr>
+          <p:cNvPr id="37" name="Text 35"/>
           <p:cNvSpPr/>
           <p:nvPr/>
         </p:nvSpPr>
@@ -21203,6 +21887,45 @@
               <a:t>Nuevo Español en Marcha 1 · Unidad 1 · Vocabulario visual</a:t>
             </a:r>
             <a:endParaRPr lang="en-US" sz="1000" dirty="0"/>
+          </a:p>
+        </p:txBody>
+      </p:sp>
+      <p:sp>
+        <p:nvSpPr>
+          <p:cNvPr id="38" name="Text 36"/>
+          <p:cNvSpPr/>
+          <p:nvPr/>
+        </p:nvSpPr>
+        <p:spPr>
+          <a:xfrm>
+            <a:off x="7985455" y="6473952"/>
+            <a:ext cx="3657600" cy="274320"/>
+          </a:xfrm>
+          <a:prstGeom prst="rect">
+            <a:avLst/>
+          </a:prstGeom>
+          <a:noFill/>
+          <a:ln/>
+        </p:spPr>
+        <p:txBody>
+          <a:bodyPr wrap="square" lIns="0" tIns="0" rIns="0" bIns="0" rtlCol="0" anchor="ctr"/>
+          <a:lstStyle/>
+          <a:p>
+            <a:pPr algn="r" indent="0" marL="0">
+              <a:buNone/>
+            </a:pPr>
+            <a:r>
+              <a:rPr lang="en-US" sz="900" dirty="0">
+                <a:solidFill>
+                  <a:srgbClr val="5C6690"/>
+                </a:solidFill>
+                <a:latin typeface="Calibri" pitchFamily="34" charset="0"/>
+                <a:ea typeface="Calibri" pitchFamily="34" charset="-122"/>
+                <a:cs typeface="Calibri" pitchFamily="34" charset="-120"/>
+              </a:rPr>
+              <a:t>© Ángel Luis Acosta González</a:t>
+            </a:r>
+            <a:endParaRPr lang="en-US" sz="900" dirty="0"/>
           </a:p>
         </p:txBody>
       </p:sp>
@@ -22423,6 +23146,45 @@
           </a:p>
         </p:txBody>
       </p:sp>
+      <p:sp>
+        <p:nvSpPr>
+          <p:cNvPr id="34" name="Text 32"/>
+          <p:cNvSpPr/>
+          <p:nvPr/>
+        </p:nvSpPr>
+        <p:spPr>
+          <a:xfrm>
+            <a:off x="7985455" y="6473952"/>
+            <a:ext cx="3657600" cy="274320"/>
+          </a:xfrm>
+          <a:prstGeom prst="rect">
+            <a:avLst/>
+          </a:prstGeom>
+          <a:noFill/>
+          <a:ln/>
+        </p:spPr>
+        <p:txBody>
+          <a:bodyPr wrap="square" lIns="0" tIns="0" rIns="0" bIns="0" rtlCol="0" anchor="ctr"/>
+          <a:lstStyle/>
+          <a:p>
+            <a:pPr algn="r" indent="0" marL="0">
+              <a:buNone/>
+            </a:pPr>
+            <a:r>
+              <a:rPr lang="en-US" sz="900" dirty="0">
+                <a:solidFill>
+                  <a:srgbClr val="5C6690"/>
+                </a:solidFill>
+                <a:latin typeface="Calibri" pitchFamily="34" charset="0"/>
+                <a:ea typeface="Calibri" pitchFamily="34" charset="-122"/>
+                <a:cs typeface="Calibri" pitchFamily="34" charset="-120"/>
+              </a:rPr>
+              <a:t>© Ángel Luis Acosta González</a:t>
+            </a:r>
+            <a:endParaRPr lang="en-US" sz="900" dirty="0"/>
+          </a:p>
+        </p:txBody>
+      </p:sp>
     </p:spTree>
   </p:cSld>
   <p:clrMapOvr>
@@ -23787,6 +24549,45 @@
           </a:p>
         </p:txBody>
       </p:sp>
+      <p:sp>
+        <p:nvSpPr>
+          <p:cNvPr id="38" name="Text 36"/>
+          <p:cNvSpPr/>
+          <p:nvPr/>
+        </p:nvSpPr>
+        <p:spPr>
+          <a:xfrm>
+            <a:off x="7985455" y="6473952"/>
+            <a:ext cx="3657600" cy="274320"/>
+          </a:xfrm>
+          <a:prstGeom prst="rect">
+            <a:avLst/>
+          </a:prstGeom>
+          <a:noFill/>
+          <a:ln/>
+        </p:spPr>
+        <p:txBody>
+          <a:bodyPr wrap="square" lIns="0" tIns="0" rIns="0" bIns="0" rtlCol="0" anchor="ctr"/>
+          <a:lstStyle/>
+          <a:p>
+            <a:pPr algn="r" indent="0" marL="0">
+              <a:buNone/>
+            </a:pPr>
+            <a:r>
+              <a:rPr lang="en-US" sz="900" dirty="0">
+                <a:solidFill>
+                  <a:srgbClr val="5C6690"/>
+                </a:solidFill>
+                <a:latin typeface="Calibri" pitchFamily="34" charset="0"/>
+                <a:ea typeface="Calibri" pitchFamily="34" charset="-122"/>
+                <a:cs typeface="Calibri" pitchFamily="34" charset="-120"/>
+              </a:rPr>
+              <a:t>© Ángel Luis Acosta González</a:t>
+            </a:r>
+            <a:endParaRPr lang="en-US" sz="900" dirty="0"/>
+          </a:p>
+        </p:txBody>
+      </p:sp>
     </p:spTree>
   </p:cSld>
   <p:clrMapOvr>
@@ -25886,6 +26687,45 @@
           </a:p>
         </p:txBody>
       </p:sp>
+      <p:sp>
+        <p:nvSpPr>
+          <p:cNvPr id="58" name="Text 56"/>
+          <p:cNvSpPr/>
+          <p:nvPr/>
+        </p:nvSpPr>
+        <p:spPr>
+          <a:xfrm>
+            <a:off x="7985455" y="6473952"/>
+            <a:ext cx="3657600" cy="274320"/>
+          </a:xfrm>
+          <a:prstGeom prst="rect">
+            <a:avLst/>
+          </a:prstGeom>
+          <a:noFill/>
+          <a:ln/>
+        </p:spPr>
+        <p:txBody>
+          <a:bodyPr wrap="square" lIns="0" tIns="0" rIns="0" bIns="0" rtlCol="0" anchor="ctr"/>
+          <a:lstStyle/>
+          <a:p>
+            <a:pPr algn="r" indent="0" marL="0">
+              <a:buNone/>
+            </a:pPr>
+            <a:r>
+              <a:rPr lang="en-US" sz="900" dirty="0">
+                <a:solidFill>
+                  <a:srgbClr val="5C6690"/>
+                </a:solidFill>
+                <a:latin typeface="Calibri" pitchFamily="34" charset="0"/>
+                <a:ea typeface="Calibri" pitchFamily="34" charset="-122"/>
+                <a:cs typeface="Calibri" pitchFamily="34" charset="-120"/>
+              </a:rPr>
+              <a:t>© Ángel Luis Acosta González</a:t>
+            </a:r>
+            <a:endParaRPr lang="en-US" sz="900" dirty="0"/>
+          </a:p>
+        </p:txBody>
+      </p:sp>
     </p:spTree>
   </p:cSld>
   <p:clrMapOvr>
@@ -27982,6 +28822,45 @@
               <a:t>Nuevo Español en Marcha 1 · Unidad 1 · Vocabulario visual</a:t>
             </a:r>
             <a:endParaRPr lang="en-US" sz="1000" dirty="0"/>
+          </a:p>
+        </p:txBody>
+      </p:sp>
+      <p:sp>
+        <p:nvSpPr>
+          <p:cNvPr id="58" name="Text 56"/>
+          <p:cNvSpPr/>
+          <p:nvPr/>
+        </p:nvSpPr>
+        <p:spPr>
+          <a:xfrm>
+            <a:off x="7985455" y="6473952"/>
+            <a:ext cx="3657600" cy="274320"/>
+          </a:xfrm>
+          <a:prstGeom prst="rect">
+            <a:avLst/>
+          </a:prstGeom>
+          <a:noFill/>
+          <a:ln/>
+        </p:spPr>
+        <p:txBody>
+          <a:bodyPr wrap="square" lIns="0" tIns="0" rIns="0" bIns="0" rtlCol="0" anchor="ctr"/>
+          <a:lstStyle/>
+          <a:p>
+            <a:pPr algn="r" indent="0" marL="0">
+              <a:buNone/>
+            </a:pPr>
+            <a:r>
+              <a:rPr lang="en-US" sz="900" dirty="0">
+                <a:solidFill>
+                  <a:srgbClr val="5C6690"/>
+                </a:solidFill>
+                <a:latin typeface="Calibri" pitchFamily="34" charset="0"/>
+                <a:ea typeface="Calibri" pitchFamily="34" charset="-122"/>
+                <a:cs typeface="Calibri" pitchFamily="34" charset="-120"/>
+              </a:rPr>
+              <a:t>© Ángel Luis Acosta González</a:t>
+            </a:r>
+            <a:endParaRPr lang="en-US" sz="900" dirty="0"/>
           </a:p>
         </p:txBody>
       </p:sp>

--- a/docencia-espanol/materiales/presentaciones/nuevo-espanol-en-marcha-1_unidad1.pptx
+++ b/docencia-espanol/materiales/presentaciones/nuevo-espanol-en-marcha-1_unidad1.pptx
@@ -2692,7 +2692,7 @@
                 <a:ea typeface="Calibri" pitchFamily="34" charset="-122"/>
                 <a:cs typeface="Calibri" pitchFamily="34" charset="-120"/>
               </a:rPr>
-              <a:t>Material elaborado por Ángel Luis Acosta González</a:t>
+              <a:t>Material elaborado por Angel Luis Acosta González</a:t>
             </a:r>
             <a:endParaRPr lang="en-US" sz="1000" dirty="0"/>
           </a:p>
@@ -5124,7 +5124,7 @@
                 <a:ea typeface="Calibri" pitchFamily="34" charset="-122"/>
                 <a:cs typeface="Calibri" pitchFamily="34" charset="-120"/>
               </a:rPr>
-              <a:t>© Ángel Luis Acosta González</a:t>
+              <a:t>© Angel Luis Acosta González</a:t>
             </a:r>
             <a:endParaRPr lang="en-US" sz="900" dirty="0"/>
           </a:p>
@@ -7409,7 +7409,7 @@
                 <a:ea typeface="Calibri" pitchFamily="34" charset="-122"/>
                 <a:cs typeface="Calibri" pitchFamily="34" charset="-120"/>
               </a:rPr>
-              <a:t>© Ángel Luis Acosta González</a:t>
+              <a:t>© Angel Luis Acosta González</a:t>
             </a:r>
             <a:endParaRPr lang="en-US" sz="900" dirty="0"/>
           </a:p>
@@ -9694,7 +9694,7 @@
                 <a:ea typeface="Calibri" pitchFamily="34" charset="-122"/>
                 <a:cs typeface="Calibri" pitchFamily="34" charset="-120"/>
               </a:rPr>
-              <a:t>© Ángel Luis Acosta González</a:t>
+              <a:t>© Angel Luis Acosta González</a:t>
             </a:r>
             <a:endParaRPr lang="en-US" sz="900" dirty="0"/>
           </a:p>
@@ -10014,36 +10014,73 @@
       </p:sp>
       <p:sp>
         <p:nvSpPr>
-          <p:cNvPr id="10" name="Text 8"/>
-          <p:cNvSpPr/>
-          <p:nvPr/>
-        </p:nvSpPr>
-        <p:spPr>
-          <a:xfrm>
-            <a:off x="731520" y="2468880"/>
-            <a:ext cx="3148584" cy="1257300"/>
-          </a:xfrm>
-          <a:prstGeom prst="rect">
-            <a:avLst/>
-          </a:prstGeom>
-          <a:noFill/>
-          <a:ln/>
-        </p:spPr>
-        <p:txBody>
-          <a:bodyPr wrap="square" lIns="0" tIns="0" rIns="0" bIns="0" rtlCol="0" anchor="ctr"/>
-          <a:lstStyle/>
-          <a:p>
-            <a:pPr indent="0" marL="0">
-              <a:lnSpc>
-                <a:spcPct val="115000"/>
-              </a:lnSpc>
-              <a:spcAft>
-                <a:spcPts val="100"/>
-              </a:spcAft>
-              <a:buNone/>
-            </a:pPr>
-            <a:r>
-              <a:rPr lang="en-US" sz="1100" dirty="0">
+          <p:cNvPr id="10" name="Shape 8"/>
+          <p:cNvSpPr/>
+          <p:nvPr/>
+        </p:nvSpPr>
+        <p:spPr>
+          <a:xfrm>
+            <a:off x="731520" y="2496312"/>
+            <a:ext cx="3148584" cy="1229868"/>
+          </a:xfrm>
+          <a:prstGeom prst="rect">
+            <a:avLst/>
+          </a:prstGeom>
+          <a:solidFill>
+            <a:srgbClr val="FFFFFF"/>
+          </a:solidFill>
+          <a:ln/>
+        </p:spPr>
+      </p:sp>
+      <p:sp>
+        <p:nvSpPr>
+          <p:cNvPr id="11" name="Shape 9"/>
+          <p:cNvSpPr/>
+          <p:nvPr/>
+        </p:nvSpPr>
+        <p:spPr>
+          <a:xfrm>
+            <a:off x="2748686" y="2551176"/>
+            <a:ext cx="0" cy="1120140"/>
+          </a:xfrm>
+          <a:prstGeom prst="line">
+            <a:avLst/>
+          </a:prstGeom>
+          <a:noFill/>
+          <a:ln w="12700">
+            <a:solidFill>
+              <a:srgbClr val="D8DBEA"/>
+            </a:solidFill>
+            <a:prstDash val="solid"/>
+          </a:ln>
+        </p:spPr>
+      </p:sp>
+      <p:sp>
+        <p:nvSpPr>
+          <p:cNvPr id="12" name="Text 10"/>
+          <p:cNvSpPr/>
+          <p:nvPr/>
+        </p:nvSpPr>
+        <p:spPr>
+          <a:xfrm>
+            <a:off x="822960" y="2496312"/>
+            <a:ext cx="1742846" cy="204978"/>
+          </a:xfrm>
+          <a:prstGeom prst="rect">
+            <a:avLst/>
+          </a:prstGeom>
+          <a:noFill/>
+          <a:ln/>
+        </p:spPr>
+        <p:txBody>
+          <a:bodyPr wrap="square" lIns="0" tIns="0" rIns="0" bIns="0" rtlCol="0" anchor="ctr"/>
+          <a:lstStyle/>
+          <a:p>
+            <a:pPr algn="r" indent="0" marL="0">
+              <a:buNone/>
+            </a:pPr>
+            <a:r>
+              <a:rPr lang="en-US" sz="1050" b="1" dirty="0">
                 <a:solidFill>
                   <a:srgbClr val="2F3C7E"/>
                 </a:solidFill>
@@ -10051,22 +10088,100 @@
                 <a:ea typeface="Calibri" pitchFamily="34" charset="-122"/>
                 <a:cs typeface="Calibri" pitchFamily="34" charset="-120"/>
               </a:rPr>
-              <a:t>yo  soy</a:t>
+              <a:t>yo</a:t>
+            </a:r>
+            <a:endParaRPr lang="en-US" sz="1050" dirty="0"/>
+          </a:p>
+        </p:txBody>
+      </p:sp>
+      <p:sp>
+        <p:nvSpPr>
+          <p:cNvPr id="13" name="Text 11"/>
+          <p:cNvSpPr/>
+          <p:nvPr/>
+        </p:nvSpPr>
+        <p:spPr>
+          <a:xfrm>
+            <a:off x="2876702" y="2496312"/>
+            <a:ext cx="1039978" cy="204978"/>
+          </a:xfrm>
+          <a:prstGeom prst="rect">
+            <a:avLst/>
+          </a:prstGeom>
+          <a:noFill/>
+          <a:ln/>
+        </p:spPr>
+        <p:txBody>
+          <a:bodyPr wrap="square" lIns="0" tIns="0" rIns="0" bIns="0" rtlCol="0" anchor="ctr"/>
+          <a:lstStyle/>
+          <a:p>
+            <a:pPr algn="l" indent="0" marL="0">
+              <a:buNone/>
+            </a:pPr>
+            <a:r>
+              <a:rPr lang="en-US" sz="1100" b="1" dirty="0">
+                <a:solidFill>
+                  <a:srgbClr val="F96167"/>
+                </a:solidFill>
+                <a:latin typeface="Calibri" pitchFamily="34" charset="0"/>
+                <a:ea typeface="Calibri" pitchFamily="34" charset="-122"/>
+                <a:cs typeface="Calibri" pitchFamily="34" charset="-120"/>
+              </a:rPr>
+              <a:t>soy</a:t>
             </a:r>
             <a:endParaRPr lang="en-US" sz="1100" dirty="0"/>
           </a:p>
-          <a:p>
-            <a:pPr indent="0" marL="0">
-              <a:lnSpc>
-                <a:spcPct val="115000"/>
-              </a:lnSpc>
-              <a:spcAft>
-                <a:spcPts val="100"/>
-              </a:spcAft>
-              <a:buNone/>
-            </a:pPr>
-            <a:r>
-              <a:rPr lang="en-US" sz="1100" dirty="0">
+        </p:txBody>
+      </p:sp>
+      <p:sp>
+        <p:nvSpPr>
+          <p:cNvPr id="14" name="Shape 12"/>
+          <p:cNvSpPr/>
+          <p:nvPr/>
+        </p:nvSpPr>
+        <p:spPr>
+          <a:xfrm>
+            <a:off x="786384" y="2701290"/>
+            <a:ext cx="3038856" cy="0"/>
+          </a:xfrm>
+          <a:prstGeom prst="line">
+            <a:avLst/>
+          </a:prstGeom>
+          <a:noFill/>
+          <a:ln w="9525">
+            <a:solidFill>
+              <a:srgbClr val="E7E9F3"/>
+            </a:solidFill>
+            <a:prstDash val="solid"/>
+          </a:ln>
+        </p:spPr>
+      </p:sp>
+      <p:sp>
+        <p:nvSpPr>
+          <p:cNvPr id="15" name="Text 13"/>
+          <p:cNvSpPr/>
+          <p:nvPr/>
+        </p:nvSpPr>
+        <p:spPr>
+          <a:xfrm>
+            <a:off x="822960" y="2701290"/>
+            <a:ext cx="1742846" cy="204978"/>
+          </a:xfrm>
+          <a:prstGeom prst="rect">
+            <a:avLst/>
+          </a:prstGeom>
+          <a:noFill/>
+          <a:ln/>
+        </p:spPr>
+        <p:txBody>
+          <a:bodyPr wrap="square" lIns="0" tIns="0" rIns="0" bIns="0" rtlCol="0" anchor="ctr"/>
+          <a:lstStyle/>
+          <a:p>
+            <a:pPr algn="r" indent="0" marL="0">
+              <a:buNone/>
+            </a:pPr>
+            <a:r>
+              <a:rPr lang="en-US" sz="1050" b="1" dirty="0">
                 <a:solidFill>
                   <a:srgbClr val="2F3C7E"/>
                 </a:solidFill>
@@ -10074,22 +10189,100 @@
                 <a:ea typeface="Calibri" pitchFamily="34" charset="-122"/>
                 <a:cs typeface="Calibri" pitchFamily="34" charset="-120"/>
               </a:rPr>
-              <a:t>tú  eres</a:t>
+              <a:t>tú</a:t>
+            </a:r>
+            <a:endParaRPr lang="en-US" sz="1050" dirty="0"/>
+          </a:p>
+        </p:txBody>
+      </p:sp>
+      <p:sp>
+        <p:nvSpPr>
+          <p:cNvPr id="16" name="Text 14"/>
+          <p:cNvSpPr/>
+          <p:nvPr/>
+        </p:nvSpPr>
+        <p:spPr>
+          <a:xfrm>
+            <a:off x="2876702" y="2701290"/>
+            <a:ext cx="1039978" cy="204978"/>
+          </a:xfrm>
+          <a:prstGeom prst="rect">
+            <a:avLst/>
+          </a:prstGeom>
+          <a:noFill/>
+          <a:ln/>
+        </p:spPr>
+        <p:txBody>
+          <a:bodyPr wrap="square" lIns="0" tIns="0" rIns="0" bIns="0" rtlCol="0" anchor="ctr"/>
+          <a:lstStyle/>
+          <a:p>
+            <a:pPr algn="l" indent="0" marL="0">
+              <a:buNone/>
+            </a:pPr>
+            <a:r>
+              <a:rPr lang="en-US" sz="1100" b="1" dirty="0">
+                <a:solidFill>
+                  <a:srgbClr val="F96167"/>
+                </a:solidFill>
+                <a:latin typeface="Calibri" pitchFamily="34" charset="0"/>
+                <a:ea typeface="Calibri" pitchFamily="34" charset="-122"/>
+                <a:cs typeface="Calibri" pitchFamily="34" charset="-120"/>
+              </a:rPr>
+              <a:t>eres</a:t>
             </a:r>
             <a:endParaRPr lang="en-US" sz="1100" dirty="0"/>
           </a:p>
-          <a:p>
-            <a:pPr indent="0" marL="0">
-              <a:lnSpc>
-                <a:spcPct val="115000"/>
-              </a:lnSpc>
-              <a:spcAft>
-                <a:spcPts val="100"/>
-              </a:spcAft>
-              <a:buNone/>
-            </a:pPr>
-            <a:r>
-              <a:rPr lang="en-US" sz="1100" dirty="0">
+        </p:txBody>
+      </p:sp>
+      <p:sp>
+        <p:nvSpPr>
+          <p:cNvPr id="17" name="Shape 15"/>
+          <p:cNvSpPr/>
+          <p:nvPr/>
+        </p:nvSpPr>
+        <p:spPr>
+          <a:xfrm>
+            <a:off x="786384" y="2906268"/>
+            <a:ext cx="3038856" cy="0"/>
+          </a:xfrm>
+          <a:prstGeom prst="line">
+            <a:avLst/>
+          </a:prstGeom>
+          <a:noFill/>
+          <a:ln w="9525">
+            <a:solidFill>
+              <a:srgbClr val="E7E9F3"/>
+            </a:solidFill>
+            <a:prstDash val="solid"/>
+          </a:ln>
+        </p:spPr>
+      </p:sp>
+      <p:sp>
+        <p:nvSpPr>
+          <p:cNvPr id="18" name="Text 16"/>
+          <p:cNvSpPr/>
+          <p:nvPr/>
+        </p:nvSpPr>
+        <p:spPr>
+          <a:xfrm>
+            <a:off x="822960" y="2906268"/>
+            <a:ext cx="1742846" cy="204978"/>
+          </a:xfrm>
+          <a:prstGeom prst="rect">
+            <a:avLst/>
+          </a:prstGeom>
+          <a:noFill/>
+          <a:ln/>
+        </p:spPr>
+        <p:txBody>
+          <a:bodyPr wrap="square" lIns="0" tIns="0" rIns="0" bIns="0" rtlCol="0" anchor="ctr"/>
+          <a:lstStyle/>
+          <a:p>
+            <a:pPr algn="r" indent="0" marL="0">
+              <a:buNone/>
+            </a:pPr>
+            <a:r>
+              <a:rPr lang="en-US" sz="1050" b="1" dirty="0">
                 <a:solidFill>
                   <a:srgbClr val="2F3C7E"/>
                 </a:solidFill>
@@ -10097,22 +10290,100 @@
                 <a:ea typeface="Calibri" pitchFamily="34" charset="-122"/>
                 <a:cs typeface="Calibri" pitchFamily="34" charset="-120"/>
               </a:rPr>
-              <a:t>él/ella/Ud.  es</a:t>
+              <a:t>él/ella/Ud.</a:t>
+            </a:r>
+            <a:endParaRPr lang="en-US" sz="1050" dirty="0"/>
+          </a:p>
+        </p:txBody>
+      </p:sp>
+      <p:sp>
+        <p:nvSpPr>
+          <p:cNvPr id="19" name="Text 17"/>
+          <p:cNvSpPr/>
+          <p:nvPr/>
+        </p:nvSpPr>
+        <p:spPr>
+          <a:xfrm>
+            <a:off x="2876702" y="2906268"/>
+            <a:ext cx="1039978" cy="204978"/>
+          </a:xfrm>
+          <a:prstGeom prst="rect">
+            <a:avLst/>
+          </a:prstGeom>
+          <a:noFill/>
+          <a:ln/>
+        </p:spPr>
+        <p:txBody>
+          <a:bodyPr wrap="square" lIns="0" tIns="0" rIns="0" bIns="0" rtlCol="0" anchor="ctr"/>
+          <a:lstStyle/>
+          <a:p>
+            <a:pPr algn="l" indent="0" marL="0">
+              <a:buNone/>
+            </a:pPr>
+            <a:r>
+              <a:rPr lang="en-US" sz="1100" b="1" dirty="0">
+                <a:solidFill>
+                  <a:srgbClr val="F96167"/>
+                </a:solidFill>
+                <a:latin typeface="Calibri" pitchFamily="34" charset="0"/>
+                <a:ea typeface="Calibri" pitchFamily="34" charset="-122"/>
+                <a:cs typeface="Calibri" pitchFamily="34" charset="-120"/>
+              </a:rPr>
+              <a:t>es</a:t>
             </a:r>
             <a:endParaRPr lang="en-US" sz="1100" dirty="0"/>
           </a:p>
-          <a:p>
-            <a:pPr indent="0" marL="0">
-              <a:lnSpc>
-                <a:spcPct val="115000"/>
-              </a:lnSpc>
-              <a:spcAft>
-                <a:spcPts val="100"/>
-              </a:spcAft>
-              <a:buNone/>
-            </a:pPr>
-            <a:r>
-              <a:rPr lang="en-US" sz="1100" dirty="0">
+        </p:txBody>
+      </p:sp>
+      <p:sp>
+        <p:nvSpPr>
+          <p:cNvPr id="20" name="Shape 18"/>
+          <p:cNvSpPr/>
+          <p:nvPr/>
+        </p:nvSpPr>
+        <p:spPr>
+          <a:xfrm>
+            <a:off x="786384" y="3111246"/>
+            <a:ext cx="3038856" cy="0"/>
+          </a:xfrm>
+          <a:prstGeom prst="line">
+            <a:avLst/>
+          </a:prstGeom>
+          <a:noFill/>
+          <a:ln w="9525">
+            <a:solidFill>
+              <a:srgbClr val="E7E9F3"/>
+            </a:solidFill>
+            <a:prstDash val="solid"/>
+          </a:ln>
+        </p:spPr>
+      </p:sp>
+      <p:sp>
+        <p:nvSpPr>
+          <p:cNvPr id="21" name="Text 19"/>
+          <p:cNvSpPr/>
+          <p:nvPr/>
+        </p:nvSpPr>
+        <p:spPr>
+          <a:xfrm>
+            <a:off x="822960" y="3111246"/>
+            <a:ext cx="1742846" cy="204978"/>
+          </a:xfrm>
+          <a:prstGeom prst="rect">
+            <a:avLst/>
+          </a:prstGeom>
+          <a:noFill/>
+          <a:ln/>
+        </p:spPr>
+        <p:txBody>
+          <a:bodyPr wrap="square" lIns="0" tIns="0" rIns="0" bIns="0" rtlCol="0" anchor="ctr"/>
+          <a:lstStyle/>
+          <a:p>
+            <a:pPr algn="r" indent="0" marL="0">
+              <a:buNone/>
+            </a:pPr>
+            <a:r>
+              <a:rPr lang="en-US" sz="1050" b="1" dirty="0">
                 <a:solidFill>
                   <a:srgbClr val="2F3C7E"/>
                 </a:solidFill>
@@ -10120,22 +10391,100 @@
                 <a:ea typeface="Calibri" pitchFamily="34" charset="-122"/>
                 <a:cs typeface="Calibri" pitchFamily="34" charset="-120"/>
               </a:rPr>
-              <a:t>nosotros/nosotras  somos</a:t>
+              <a:t>nosotros/nosotras</a:t>
+            </a:r>
+            <a:endParaRPr lang="en-US" sz="1050" dirty="0"/>
+          </a:p>
+        </p:txBody>
+      </p:sp>
+      <p:sp>
+        <p:nvSpPr>
+          <p:cNvPr id="22" name="Text 20"/>
+          <p:cNvSpPr/>
+          <p:nvPr/>
+        </p:nvSpPr>
+        <p:spPr>
+          <a:xfrm>
+            <a:off x="2876702" y="3111246"/>
+            <a:ext cx="1039978" cy="204978"/>
+          </a:xfrm>
+          <a:prstGeom prst="rect">
+            <a:avLst/>
+          </a:prstGeom>
+          <a:noFill/>
+          <a:ln/>
+        </p:spPr>
+        <p:txBody>
+          <a:bodyPr wrap="square" lIns="0" tIns="0" rIns="0" bIns="0" rtlCol="0" anchor="ctr"/>
+          <a:lstStyle/>
+          <a:p>
+            <a:pPr algn="l" indent="0" marL="0">
+              <a:buNone/>
+            </a:pPr>
+            <a:r>
+              <a:rPr lang="en-US" sz="1100" b="1" dirty="0">
+                <a:solidFill>
+                  <a:srgbClr val="F96167"/>
+                </a:solidFill>
+                <a:latin typeface="Calibri" pitchFamily="34" charset="0"/>
+                <a:ea typeface="Calibri" pitchFamily="34" charset="-122"/>
+                <a:cs typeface="Calibri" pitchFamily="34" charset="-120"/>
+              </a:rPr>
+              <a:t>somos</a:t>
             </a:r>
             <a:endParaRPr lang="en-US" sz="1100" dirty="0"/>
           </a:p>
-          <a:p>
-            <a:pPr indent="0" marL="0">
-              <a:lnSpc>
-                <a:spcPct val="115000"/>
-              </a:lnSpc>
-              <a:spcAft>
-                <a:spcPts val="100"/>
-              </a:spcAft>
-              <a:buNone/>
-            </a:pPr>
-            <a:r>
-              <a:rPr lang="en-US" sz="1100" dirty="0">
+        </p:txBody>
+      </p:sp>
+      <p:sp>
+        <p:nvSpPr>
+          <p:cNvPr id="23" name="Shape 21"/>
+          <p:cNvSpPr/>
+          <p:nvPr/>
+        </p:nvSpPr>
+        <p:spPr>
+          <a:xfrm>
+            <a:off x="786384" y="3316224"/>
+            <a:ext cx="3038856" cy="0"/>
+          </a:xfrm>
+          <a:prstGeom prst="line">
+            <a:avLst/>
+          </a:prstGeom>
+          <a:noFill/>
+          <a:ln w="9525">
+            <a:solidFill>
+              <a:srgbClr val="E7E9F3"/>
+            </a:solidFill>
+            <a:prstDash val="solid"/>
+          </a:ln>
+        </p:spPr>
+      </p:sp>
+      <p:sp>
+        <p:nvSpPr>
+          <p:cNvPr id="24" name="Text 22"/>
+          <p:cNvSpPr/>
+          <p:nvPr/>
+        </p:nvSpPr>
+        <p:spPr>
+          <a:xfrm>
+            <a:off x="822960" y="3316224"/>
+            <a:ext cx="1742846" cy="204978"/>
+          </a:xfrm>
+          <a:prstGeom prst="rect">
+            <a:avLst/>
+          </a:prstGeom>
+          <a:noFill/>
+          <a:ln/>
+        </p:spPr>
+        <p:txBody>
+          <a:bodyPr wrap="square" lIns="0" tIns="0" rIns="0" bIns="0" rtlCol="0" anchor="ctr"/>
+          <a:lstStyle/>
+          <a:p>
+            <a:pPr algn="r" indent="0" marL="0">
+              <a:buNone/>
+            </a:pPr>
+            <a:r>
+              <a:rPr lang="en-US" sz="1050" b="1" dirty="0">
                 <a:solidFill>
                   <a:srgbClr val="2F3C7E"/>
                 </a:solidFill>
@@ -10143,22 +10492,100 @@
                 <a:ea typeface="Calibri" pitchFamily="34" charset="-122"/>
                 <a:cs typeface="Calibri" pitchFamily="34" charset="-120"/>
               </a:rPr>
-              <a:t>vosotros/vosotras  sois</a:t>
+              <a:t>vosotros/vosotras</a:t>
+            </a:r>
+            <a:endParaRPr lang="en-US" sz="1050" dirty="0"/>
+          </a:p>
+        </p:txBody>
+      </p:sp>
+      <p:sp>
+        <p:nvSpPr>
+          <p:cNvPr id="25" name="Text 23"/>
+          <p:cNvSpPr/>
+          <p:nvPr/>
+        </p:nvSpPr>
+        <p:spPr>
+          <a:xfrm>
+            <a:off x="2876702" y="3316224"/>
+            <a:ext cx="1039978" cy="204978"/>
+          </a:xfrm>
+          <a:prstGeom prst="rect">
+            <a:avLst/>
+          </a:prstGeom>
+          <a:noFill/>
+          <a:ln/>
+        </p:spPr>
+        <p:txBody>
+          <a:bodyPr wrap="square" lIns="0" tIns="0" rIns="0" bIns="0" rtlCol="0" anchor="ctr"/>
+          <a:lstStyle/>
+          <a:p>
+            <a:pPr algn="l" indent="0" marL="0">
+              <a:buNone/>
+            </a:pPr>
+            <a:r>
+              <a:rPr lang="en-US" sz="1100" b="1" dirty="0">
+                <a:solidFill>
+                  <a:srgbClr val="F96167"/>
+                </a:solidFill>
+                <a:latin typeface="Calibri" pitchFamily="34" charset="0"/>
+                <a:ea typeface="Calibri" pitchFamily="34" charset="-122"/>
+                <a:cs typeface="Calibri" pitchFamily="34" charset="-120"/>
+              </a:rPr>
+              <a:t>sois</a:t>
             </a:r>
             <a:endParaRPr lang="en-US" sz="1100" dirty="0"/>
           </a:p>
-          <a:p>
-            <a:pPr indent="0" marL="0">
-              <a:lnSpc>
-                <a:spcPct val="115000"/>
-              </a:lnSpc>
-              <a:spcAft>
-                <a:spcPts val="100"/>
-              </a:spcAft>
-              <a:buNone/>
-            </a:pPr>
-            <a:r>
-              <a:rPr lang="en-US" sz="1100" dirty="0">
+        </p:txBody>
+      </p:sp>
+      <p:sp>
+        <p:nvSpPr>
+          <p:cNvPr id="26" name="Shape 24"/>
+          <p:cNvSpPr/>
+          <p:nvPr/>
+        </p:nvSpPr>
+        <p:spPr>
+          <a:xfrm>
+            <a:off x="786384" y="3521202"/>
+            <a:ext cx="3038856" cy="0"/>
+          </a:xfrm>
+          <a:prstGeom prst="line">
+            <a:avLst/>
+          </a:prstGeom>
+          <a:noFill/>
+          <a:ln w="9525">
+            <a:solidFill>
+              <a:srgbClr val="E7E9F3"/>
+            </a:solidFill>
+            <a:prstDash val="solid"/>
+          </a:ln>
+        </p:spPr>
+      </p:sp>
+      <p:sp>
+        <p:nvSpPr>
+          <p:cNvPr id="27" name="Text 25"/>
+          <p:cNvSpPr/>
+          <p:nvPr/>
+        </p:nvSpPr>
+        <p:spPr>
+          <a:xfrm>
+            <a:off x="822960" y="3521202"/>
+            <a:ext cx="1742846" cy="204978"/>
+          </a:xfrm>
+          <a:prstGeom prst="rect">
+            <a:avLst/>
+          </a:prstGeom>
+          <a:noFill/>
+          <a:ln/>
+        </p:spPr>
+        <p:txBody>
+          <a:bodyPr wrap="square" lIns="0" tIns="0" rIns="0" bIns="0" rtlCol="0" anchor="ctr"/>
+          <a:lstStyle/>
+          <a:p>
+            <a:pPr algn="r" indent="0" marL="0">
+              <a:buNone/>
+            </a:pPr>
+            <a:r>
+              <a:rPr lang="en-US" sz="1050" b="1" dirty="0">
                 <a:solidFill>
                   <a:srgbClr val="2F3C7E"/>
                 </a:solidFill>
@@ -10166,7 +10593,46 @@
                 <a:ea typeface="Calibri" pitchFamily="34" charset="-122"/>
                 <a:cs typeface="Calibri" pitchFamily="34" charset="-120"/>
               </a:rPr>
-              <a:t>ellos/ellas/Uds.  son</a:t>
+              <a:t>ellos/ellas/Uds.</a:t>
+            </a:r>
+            <a:endParaRPr lang="en-US" sz="1050" dirty="0"/>
+          </a:p>
+        </p:txBody>
+      </p:sp>
+      <p:sp>
+        <p:nvSpPr>
+          <p:cNvPr id="28" name="Text 26"/>
+          <p:cNvSpPr/>
+          <p:nvPr/>
+        </p:nvSpPr>
+        <p:spPr>
+          <a:xfrm>
+            <a:off x="2876702" y="3521202"/>
+            <a:ext cx="1039978" cy="204978"/>
+          </a:xfrm>
+          <a:prstGeom prst="rect">
+            <a:avLst/>
+          </a:prstGeom>
+          <a:noFill/>
+          <a:ln/>
+        </p:spPr>
+        <p:txBody>
+          <a:bodyPr wrap="square" lIns="0" tIns="0" rIns="0" bIns="0" rtlCol="0" anchor="ctr"/>
+          <a:lstStyle/>
+          <a:p>
+            <a:pPr algn="l" indent="0" marL="0">
+              <a:buNone/>
+            </a:pPr>
+            <a:r>
+              <a:rPr lang="en-US" sz="1100" b="1" dirty="0">
+                <a:solidFill>
+                  <a:srgbClr val="F96167"/>
+                </a:solidFill>
+                <a:latin typeface="Calibri" pitchFamily="34" charset="0"/>
+                <a:ea typeface="Calibri" pitchFamily="34" charset="-122"/>
+                <a:cs typeface="Calibri" pitchFamily="34" charset="-120"/>
+              </a:rPr>
+              <a:t>son</a:t>
             </a:r>
             <a:endParaRPr lang="en-US" sz="1100" dirty="0"/>
           </a:p>
@@ -10174,7 +10640,7 @@
       </p:sp>
       <p:sp>
         <p:nvSpPr>
-          <p:cNvPr id="11" name="Shape 9"/>
+          <p:cNvPr id="29" name="Shape 27"/>
           <p:cNvSpPr/>
           <p:nvPr/>
         </p:nvSpPr>
@@ -10203,7 +10669,7 @@
       </p:sp>
       <p:sp>
         <p:nvSpPr>
-          <p:cNvPr id="12" name="Shape 10"/>
+          <p:cNvPr id="30" name="Shape 28"/>
           <p:cNvSpPr/>
           <p:nvPr/>
         </p:nvSpPr>
@@ -10223,7 +10689,7 @@
       </p:sp>
       <p:sp>
         <p:nvSpPr>
-          <p:cNvPr id="13" name="Text 11"/>
+          <p:cNvPr id="31" name="Text 29"/>
           <p:cNvSpPr/>
           <p:nvPr/>
         </p:nvSpPr>
@@ -10259,7 +10725,7 @@
       </p:sp>
       <p:sp>
         <p:nvSpPr>
-          <p:cNvPr id="14" name="Text 12"/>
+          <p:cNvPr id="32" name="Text 30"/>
           <p:cNvSpPr/>
           <p:nvPr/>
         </p:nvSpPr>
@@ -10298,7 +10764,7 @@
       </p:sp>
       <p:sp>
         <p:nvSpPr>
-          <p:cNvPr id="15" name="Text 13"/>
+          <p:cNvPr id="33" name="Text 31"/>
           <p:cNvSpPr/>
           <p:nvPr/>
         </p:nvSpPr>
@@ -10337,36 +10803,73 @@
       </p:sp>
       <p:sp>
         <p:nvSpPr>
-          <p:cNvPr id="16" name="Text 14"/>
-          <p:cNvSpPr/>
-          <p:nvPr/>
-        </p:nvSpPr>
-        <p:spPr>
-          <a:xfrm>
-            <a:off x="4520184" y="2468880"/>
-            <a:ext cx="3148584" cy="1257300"/>
-          </a:xfrm>
-          <a:prstGeom prst="rect">
-            <a:avLst/>
-          </a:prstGeom>
-          <a:noFill/>
-          <a:ln/>
-        </p:spPr>
-        <p:txBody>
-          <a:bodyPr wrap="square" lIns="0" tIns="0" rIns="0" bIns="0" rtlCol="0" anchor="ctr"/>
-          <a:lstStyle/>
-          <a:p>
-            <a:pPr indent="0" marL="0">
-              <a:lnSpc>
-                <a:spcPct val="115000"/>
-              </a:lnSpc>
-              <a:spcAft>
-                <a:spcPts val="100"/>
-              </a:spcAft>
-              <a:buNone/>
-            </a:pPr>
-            <a:r>
-              <a:rPr lang="en-US" sz="1100" dirty="0">
+          <p:cNvPr id="34" name="Shape 32"/>
+          <p:cNvSpPr/>
+          <p:nvPr/>
+        </p:nvSpPr>
+        <p:spPr>
+          <a:xfrm>
+            <a:off x="4520184" y="2496312"/>
+            <a:ext cx="3148584" cy="1229868"/>
+          </a:xfrm>
+          <a:prstGeom prst="rect">
+            <a:avLst/>
+          </a:prstGeom>
+          <a:solidFill>
+            <a:srgbClr val="FFFFFF"/>
+          </a:solidFill>
+          <a:ln/>
+        </p:spPr>
+      </p:sp>
+      <p:sp>
+        <p:nvSpPr>
+          <p:cNvPr id="35" name="Shape 33"/>
+          <p:cNvSpPr/>
+          <p:nvPr/>
+        </p:nvSpPr>
+        <p:spPr>
+          <a:xfrm>
+            <a:off x="6537350" y="2551176"/>
+            <a:ext cx="0" cy="1120140"/>
+          </a:xfrm>
+          <a:prstGeom prst="line">
+            <a:avLst/>
+          </a:prstGeom>
+          <a:noFill/>
+          <a:ln w="12700">
+            <a:solidFill>
+              <a:srgbClr val="D8DBEA"/>
+            </a:solidFill>
+            <a:prstDash val="solid"/>
+          </a:ln>
+        </p:spPr>
+      </p:sp>
+      <p:sp>
+        <p:nvSpPr>
+          <p:cNvPr id="36" name="Text 34"/>
+          <p:cNvSpPr/>
+          <p:nvPr/>
+        </p:nvSpPr>
+        <p:spPr>
+          <a:xfrm>
+            <a:off x="4611624" y="2496312"/>
+            <a:ext cx="1742846" cy="204978"/>
+          </a:xfrm>
+          <a:prstGeom prst="rect">
+            <a:avLst/>
+          </a:prstGeom>
+          <a:noFill/>
+          <a:ln/>
+        </p:spPr>
+        <p:txBody>
+          <a:bodyPr wrap="square" lIns="0" tIns="0" rIns="0" bIns="0" rtlCol="0" anchor="ctr"/>
+          <a:lstStyle/>
+          <a:p>
+            <a:pPr algn="r" indent="0" marL="0">
+              <a:buNone/>
+            </a:pPr>
+            <a:r>
+              <a:rPr lang="en-US" sz="1050" b="1" dirty="0">
                 <a:solidFill>
                   <a:srgbClr val="2F3C7E"/>
                 </a:solidFill>
@@ -10374,22 +10877,100 @@
                 <a:ea typeface="Calibri" pitchFamily="34" charset="-122"/>
                 <a:cs typeface="Calibri" pitchFamily="34" charset="-120"/>
               </a:rPr>
-              <a:t>yo  tengo</a:t>
+              <a:t>yo</a:t>
+            </a:r>
+            <a:endParaRPr lang="en-US" sz="1050" dirty="0"/>
+          </a:p>
+        </p:txBody>
+      </p:sp>
+      <p:sp>
+        <p:nvSpPr>
+          <p:cNvPr id="37" name="Text 35"/>
+          <p:cNvSpPr/>
+          <p:nvPr/>
+        </p:nvSpPr>
+        <p:spPr>
+          <a:xfrm>
+            <a:off x="6665366" y="2496312"/>
+            <a:ext cx="1039978" cy="204978"/>
+          </a:xfrm>
+          <a:prstGeom prst="rect">
+            <a:avLst/>
+          </a:prstGeom>
+          <a:noFill/>
+          <a:ln/>
+        </p:spPr>
+        <p:txBody>
+          <a:bodyPr wrap="square" lIns="0" tIns="0" rIns="0" bIns="0" rtlCol="0" anchor="ctr"/>
+          <a:lstStyle/>
+          <a:p>
+            <a:pPr algn="l" indent="0" marL="0">
+              <a:buNone/>
+            </a:pPr>
+            <a:r>
+              <a:rPr lang="en-US" sz="1100" b="1" dirty="0">
+                <a:solidFill>
+                  <a:srgbClr val="F96167"/>
+                </a:solidFill>
+                <a:latin typeface="Calibri" pitchFamily="34" charset="0"/>
+                <a:ea typeface="Calibri" pitchFamily="34" charset="-122"/>
+                <a:cs typeface="Calibri" pitchFamily="34" charset="-120"/>
+              </a:rPr>
+              <a:t>tengo</a:t>
             </a:r>
             <a:endParaRPr lang="en-US" sz="1100" dirty="0"/>
           </a:p>
-          <a:p>
-            <a:pPr indent="0" marL="0">
-              <a:lnSpc>
-                <a:spcPct val="115000"/>
-              </a:lnSpc>
-              <a:spcAft>
-                <a:spcPts val="100"/>
-              </a:spcAft>
-              <a:buNone/>
-            </a:pPr>
-            <a:r>
-              <a:rPr lang="en-US" sz="1100" dirty="0">
+        </p:txBody>
+      </p:sp>
+      <p:sp>
+        <p:nvSpPr>
+          <p:cNvPr id="38" name="Shape 36"/>
+          <p:cNvSpPr/>
+          <p:nvPr/>
+        </p:nvSpPr>
+        <p:spPr>
+          <a:xfrm>
+            <a:off x="4575048" y="2701290"/>
+            <a:ext cx="3038856" cy="0"/>
+          </a:xfrm>
+          <a:prstGeom prst="line">
+            <a:avLst/>
+          </a:prstGeom>
+          <a:noFill/>
+          <a:ln w="9525">
+            <a:solidFill>
+              <a:srgbClr val="E7E9F3"/>
+            </a:solidFill>
+            <a:prstDash val="solid"/>
+          </a:ln>
+        </p:spPr>
+      </p:sp>
+      <p:sp>
+        <p:nvSpPr>
+          <p:cNvPr id="39" name="Text 37"/>
+          <p:cNvSpPr/>
+          <p:nvPr/>
+        </p:nvSpPr>
+        <p:spPr>
+          <a:xfrm>
+            <a:off x="4611624" y="2701290"/>
+            <a:ext cx="1742846" cy="204978"/>
+          </a:xfrm>
+          <a:prstGeom prst="rect">
+            <a:avLst/>
+          </a:prstGeom>
+          <a:noFill/>
+          <a:ln/>
+        </p:spPr>
+        <p:txBody>
+          <a:bodyPr wrap="square" lIns="0" tIns="0" rIns="0" bIns="0" rtlCol="0" anchor="ctr"/>
+          <a:lstStyle/>
+          <a:p>
+            <a:pPr algn="r" indent="0" marL="0">
+              <a:buNone/>
+            </a:pPr>
+            <a:r>
+              <a:rPr lang="en-US" sz="1050" b="1" dirty="0">
                 <a:solidFill>
                   <a:srgbClr val="2F3C7E"/>
                 </a:solidFill>
@@ -10397,22 +10978,100 @@
                 <a:ea typeface="Calibri" pitchFamily="34" charset="-122"/>
                 <a:cs typeface="Calibri" pitchFamily="34" charset="-120"/>
               </a:rPr>
-              <a:t>tú  tienes</a:t>
+              <a:t>tú</a:t>
+            </a:r>
+            <a:endParaRPr lang="en-US" sz="1050" dirty="0"/>
+          </a:p>
+        </p:txBody>
+      </p:sp>
+      <p:sp>
+        <p:nvSpPr>
+          <p:cNvPr id="40" name="Text 38"/>
+          <p:cNvSpPr/>
+          <p:nvPr/>
+        </p:nvSpPr>
+        <p:spPr>
+          <a:xfrm>
+            <a:off x="6665366" y="2701290"/>
+            <a:ext cx="1039978" cy="204978"/>
+          </a:xfrm>
+          <a:prstGeom prst="rect">
+            <a:avLst/>
+          </a:prstGeom>
+          <a:noFill/>
+          <a:ln/>
+        </p:spPr>
+        <p:txBody>
+          <a:bodyPr wrap="square" lIns="0" tIns="0" rIns="0" bIns="0" rtlCol="0" anchor="ctr"/>
+          <a:lstStyle/>
+          <a:p>
+            <a:pPr algn="l" indent="0" marL="0">
+              <a:buNone/>
+            </a:pPr>
+            <a:r>
+              <a:rPr lang="en-US" sz="1100" b="1" dirty="0">
+                <a:solidFill>
+                  <a:srgbClr val="F96167"/>
+                </a:solidFill>
+                <a:latin typeface="Calibri" pitchFamily="34" charset="0"/>
+                <a:ea typeface="Calibri" pitchFamily="34" charset="-122"/>
+                <a:cs typeface="Calibri" pitchFamily="34" charset="-120"/>
+              </a:rPr>
+              <a:t>tienes</a:t>
             </a:r>
             <a:endParaRPr lang="en-US" sz="1100" dirty="0"/>
           </a:p>
-          <a:p>
-            <a:pPr indent="0" marL="0">
-              <a:lnSpc>
-                <a:spcPct val="115000"/>
-              </a:lnSpc>
-              <a:spcAft>
-                <a:spcPts val="100"/>
-              </a:spcAft>
-              <a:buNone/>
-            </a:pPr>
-            <a:r>
-              <a:rPr lang="en-US" sz="1100" dirty="0">
+        </p:txBody>
+      </p:sp>
+      <p:sp>
+        <p:nvSpPr>
+          <p:cNvPr id="41" name="Shape 39"/>
+          <p:cNvSpPr/>
+          <p:nvPr/>
+        </p:nvSpPr>
+        <p:spPr>
+          <a:xfrm>
+            <a:off x="4575048" y="2906268"/>
+            <a:ext cx="3038856" cy="0"/>
+          </a:xfrm>
+          <a:prstGeom prst="line">
+            <a:avLst/>
+          </a:prstGeom>
+          <a:noFill/>
+          <a:ln w="9525">
+            <a:solidFill>
+              <a:srgbClr val="E7E9F3"/>
+            </a:solidFill>
+            <a:prstDash val="solid"/>
+          </a:ln>
+        </p:spPr>
+      </p:sp>
+      <p:sp>
+        <p:nvSpPr>
+          <p:cNvPr id="42" name="Text 40"/>
+          <p:cNvSpPr/>
+          <p:nvPr/>
+        </p:nvSpPr>
+        <p:spPr>
+          <a:xfrm>
+            <a:off x="4611624" y="2906268"/>
+            <a:ext cx="1742846" cy="204978"/>
+          </a:xfrm>
+          <a:prstGeom prst="rect">
+            <a:avLst/>
+          </a:prstGeom>
+          <a:noFill/>
+          <a:ln/>
+        </p:spPr>
+        <p:txBody>
+          <a:bodyPr wrap="square" lIns="0" tIns="0" rIns="0" bIns="0" rtlCol="0" anchor="ctr"/>
+          <a:lstStyle/>
+          <a:p>
+            <a:pPr algn="r" indent="0" marL="0">
+              <a:buNone/>
+            </a:pPr>
+            <a:r>
+              <a:rPr lang="en-US" sz="1050" b="1" dirty="0">
                 <a:solidFill>
                   <a:srgbClr val="2F3C7E"/>
                 </a:solidFill>
@@ -10420,22 +11079,100 @@
                 <a:ea typeface="Calibri" pitchFamily="34" charset="-122"/>
                 <a:cs typeface="Calibri" pitchFamily="34" charset="-120"/>
               </a:rPr>
-              <a:t>él/ella/Ud.  tiene</a:t>
+              <a:t>él/ella/Ud.</a:t>
+            </a:r>
+            <a:endParaRPr lang="en-US" sz="1050" dirty="0"/>
+          </a:p>
+        </p:txBody>
+      </p:sp>
+      <p:sp>
+        <p:nvSpPr>
+          <p:cNvPr id="43" name="Text 41"/>
+          <p:cNvSpPr/>
+          <p:nvPr/>
+        </p:nvSpPr>
+        <p:spPr>
+          <a:xfrm>
+            <a:off x="6665366" y="2906268"/>
+            <a:ext cx="1039978" cy="204978"/>
+          </a:xfrm>
+          <a:prstGeom prst="rect">
+            <a:avLst/>
+          </a:prstGeom>
+          <a:noFill/>
+          <a:ln/>
+        </p:spPr>
+        <p:txBody>
+          <a:bodyPr wrap="square" lIns="0" tIns="0" rIns="0" bIns="0" rtlCol="0" anchor="ctr"/>
+          <a:lstStyle/>
+          <a:p>
+            <a:pPr algn="l" indent="0" marL="0">
+              <a:buNone/>
+            </a:pPr>
+            <a:r>
+              <a:rPr lang="en-US" sz="1100" b="1" dirty="0">
+                <a:solidFill>
+                  <a:srgbClr val="F96167"/>
+                </a:solidFill>
+                <a:latin typeface="Calibri" pitchFamily="34" charset="0"/>
+                <a:ea typeface="Calibri" pitchFamily="34" charset="-122"/>
+                <a:cs typeface="Calibri" pitchFamily="34" charset="-120"/>
+              </a:rPr>
+              <a:t>tiene</a:t>
             </a:r>
             <a:endParaRPr lang="en-US" sz="1100" dirty="0"/>
           </a:p>
-          <a:p>
-            <a:pPr indent="0" marL="0">
-              <a:lnSpc>
-                <a:spcPct val="115000"/>
-              </a:lnSpc>
-              <a:spcAft>
-                <a:spcPts val="100"/>
-              </a:spcAft>
-              <a:buNone/>
-            </a:pPr>
-            <a:r>
-              <a:rPr lang="en-US" sz="1100" dirty="0">
+        </p:txBody>
+      </p:sp>
+      <p:sp>
+        <p:nvSpPr>
+          <p:cNvPr id="44" name="Shape 42"/>
+          <p:cNvSpPr/>
+          <p:nvPr/>
+        </p:nvSpPr>
+        <p:spPr>
+          <a:xfrm>
+            <a:off x="4575048" y="3111246"/>
+            <a:ext cx="3038856" cy="0"/>
+          </a:xfrm>
+          <a:prstGeom prst="line">
+            <a:avLst/>
+          </a:prstGeom>
+          <a:noFill/>
+          <a:ln w="9525">
+            <a:solidFill>
+              <a:srgbClr val="E7E9F3"/>
+            </a:solidFill>
+            <a:prstDash val="solid"/>
+          </a:ln>
+        </p:spPr>
+      </p:sp>
+      <p:sp>
+        <p:nvSpPr>
+          <p:cNvPr id="45" name="Text 43"/>
+          <p:cNvSpPr/>
+          <p:nvPr/>
+        </p:nvSpPr>
+        <p:spPr>
+          <a:xfrm>
+            <a:off x="4611624" y="3111246"/>
+            <a:ext cx="1742846" cy="204978"/>
+          </a:xfrm>
+          <a:prstGeom prst="rect">
+            <a:avLst/>
+          </a:prstGeom>
+          <a:noFill/>
+          <a:ln/>
+        </p:spPr>
+        <p:txBody>
+          <a:bodyPr wrap="square" lIns="0" tIns="0" rIns="0" bIns="0" rtlCol="0" anchor="ctr"/>
+          <a:lstStyle/>
+          <a:p>
+            <a:pPr algn="r" indent="0" marL="0">
+              <a:buNone/>
+            </a:pPr>
+            <a:r>
+              <a:rPr lang="en-US" sz="1050" b="1" dirty="0">
                 <a:solidFill>
                   <a:srgbClr val="2F3C7E"/>
                 </a:solidFill>
@@ -10443,22 +11180,100 @@
                 <a:ea typeface="Calibri" pitchFamily="34" charset="-122"/>
                 <a:cs typeface="Calibri" pitchFamily="34" charset="-120"/>
               </a:rPr>
-              <a:t>nosotros/nosotras  tenemos</a:t>
+              <a:t>nosotros/nosotras</a:t>
+            </a:r>
+            <a:endParaRPr lang="en-US" sz="1050" dirty="0"/>
+          </a:p>
+        </p:txBody>
+      </p:sp>
+      <p:sp>
+        <p:nvSpPr>
+          <p:cNvPr id="46" name="Text 44"/>
+          <p:cNvSpPr/>
+          <p:nvPr/>
+        </p:nvSpPr>
+        <p:spPr>
+          <a:xfrm>
+            <a:off x="6665366" y="3111246"/>
+            <a:ext cx="1039978" cy="204978"/>
+          </a:xfrm>
+          <a:prstGeom prst="rect">
+            <a:avLst/>
+          </a:prstGeom>
+          <a:noFill/>
+          <a:ln/>
+        </p:spPr>
+        <p:txBody>
+          <a:bodyPr wrap="square" lIns="0" tIns="0" rIns="0" bIns="0" rtlCol="0" anchor="ctr"/>
+          <a:lstStyle/>
+          <a:p>
+            <a:pPr algn="l" indent="0" marL="0">
+              <a:buNone/>
+            </a:pPr>
+            <a:r>
+              <a:rPr lang="en-US" sz="1100" b="1" dirty="0">
+                <a:solidFill>
+                  <a:srgbClr val="F96167"/>
+                </a:solidFill>
+                <a:latin typeface="Calibri" pitchFamily="34" charset="0"/>
+                <a:ea typeface="Calibri" pitchFamily="34" charset="-122"/>
+                <a:cs typeface="Calibri" pitchFamily="34" charset="-120"/>
+              </a:rPr>
+              <a:t>tenemos</a:t>
             </a:r>
             <a:endParaRPr lang="en-US" sz="1100" dirty="0"/>
           </a:p>
-          <a:p>
-            <a:pPr indent="0" marL="0">
-              <a:lnSpc>
-                <a:spcPct val="115000"/>
-              </a:lnSpc>
-              <a:spcAft>
-                <a:spcPts val="100"/>
-              </a:spcAft>
-              <a:buNone/>
-            </a:pPr>
-            <a:r>
-              <a:rPr lang="en-US" sz="1100" dirty="0">
+        </p:txBody>
+      </p:sp>
+      <p:sp>
+        <p:nvSpPr>
+          <p:cNvPr id="47" name="Shape 45"/>
+          <p:cNvSpPr/>
+          <p:nvPr/>
+        </p:nvSpPr>
+        <p:spPr>
+          <a:xfrm>
+            <a:off x="4575048" y="3316224"/>
+            <a:ext cx="3038856" cy="0"/>
+          </a:xfrm>
+          <a:prstGeom prst="line">
+            <a:avLst/>
+          </a:prstGeom>
+          <a:noFill/>
+          <a:ln w="9525">
+            <a:solidFill>
+              <a:srgbClr val="E7E9F3"/>
+            </a:solidFill>
+            <a:prstDash val="solid"/>
+          </a:ln>
+        </p:spPr>
+      </p:sp>
+      <p:sp>
+        <p:nvSpPr>
+          <p:cNvPr id="48" name="Text 46"/>
+          <p:cNvSpPr/>
+          <p:nvPr/>
+        </p:nvSpPr>
+        <p:spPr>
+          <a:xfrm>
+            <a:off x="4611624" y="3316224"/>
+            <a:ext cx="1742846" cy="204978"/>
+          </a:xfrm>
+          <a:prstGeom prst="rect">
+            <a:avLst/>
+          </a:prstGeom>
+          <a:noFill/>
+          <a:ln/>
+        </p:spPr>
+        <p:txBody>
+          <a:bodyPr wrap="square" lIns="0" tIns="0" rIns="0" bIns="0" rtlCol="0" anchor="ctr"/>
+          <a:lstStyle/>
+          <a:p>
+            <a:pPr algn="r" indent="0" marL="0">
+              <a:buNone/>
+            </a:pPr>
+            <a:r>
+              <a:rPr lang="en-US" sz="1050" b="1" dirty="0">
                 <a:solidFill>
                   <a:srgbClr val="2F3C7E"/>
                 </a:solidFill>
@@ -10466,22 +11281,100 @@
                 <a:ea typeface="Calibri" pitchFamily="34" charset="-122"/>
                 <a:cs typeface="Calibri" pitchFamily="34" charset="-120"/>
               </a:rPr>
-              <a:t>vosotros/vosotras  tenéis</a:t>
+              <a:t>vosotros/vosotras</a:t>
+            </a:r>
+            <a:endParaRPr lang="en-US" sz="1050" dirty="0"/>
+          </a:p>
+        </p:txBody>
+      </p:sp>
+      <p:sp>
+        <p:nvSpPr>
+          <p:cNvPr id="49" name="Text 47"/>
+          <p:cNvSpPr/>
+          <p:nvPr/>
+        </p:nvSpPr>
+        <p:spPr>
+          <a:xfrm>
+            <a:off x="6665366" y="3316224"/>
+            <a:ext cx="1039978" cy="204978"/>
+          </a:xfrm>
+          <a:prstGeom prst="rect">
+            <a:avLst/>
+          </a:prstGeom>
+          <a:noFill/>
+          <a:ln/>
+        </p:spPr>
+        <p:txBody>
+          <a:bodyPr wrap="square" lIns="0" tIns="0" rIns="0" bIns="0" rtlCol="0" anchor="ctr"/>
+          <a:lstStyle/>
+          <a:p>
+            <a:pPr algn="l" indent="0" marL="0">
+              <a:buNone/>
+            </a:pPr>
+            <a:r>
+              <a:rPr lang="en-US" sz="1100" b="1" dirty="0">
+                <a:solidFill>
+                  <a:srgbClr val="F96167"/>
+                </a:solidFill>
+                <a:latin typeface="Calibri" pitchFamily="34" charset="0"/>
+                <a:ea typeface="Calibri" pitchFamily="34" charset="-122"/>
+                <a:cs typeface="Calibri" pitchFamily="34" charset="-120"/>
+              </a:rPr>
+              <a:t>tenéis</a:t>
             </a:r>
             <a:endParaRPr lang="en-US" sz="1100" dirty="0"/>
           </a:p>
-          <a:p>
-            <a:pPr indent="0" marL="0">
-              <a:lnSpc>
-                <a:spcPct val="115000"/>
-              </a:lnSpc>
-              <a:spcAft>
-                <a:spcPts val="100"/>
-              </a:spcAft>
-              <a:buNone/>
-            </a:pPr>
-            <a:r>
-              <a:rPr lang="en-US" sz="1100" dirty="0">
+        </p:txBody>
+      </p:sp>
+      <p:sp>
+        <p:nvSpPr>
+          <p:cNvPr id="50" name="Shape 48"/>
+          <p:cNvSpPr/>
+          <p:nvPr/>
+        </p:nvSpPr>
+        <p:spPr>
+          <a:xfrm>
+            <a:off x="4575048" y="3521202"/>
+            <a:ext cx="3038856" cy="0"/>
+          </a:xfrm>
+          <a:prstGeom prst="line">
+            <a:avLst/>
+          </a:prstGeom>
+          <a:noFill/>
+          <a:ln w="9525">
+            <a:solidFill>
+              <a:srgbClr val="E7E9F3"/>
+            </a:solidFill>
+            <a:prstDash val="solid"/>
+          </a:ln>
+        </p:spPr>
+      </p:sp>
+      <p:sp>
+        <p:nvSpPr>
+          <p:cNvPr id="51" name="Text 49"/>
+          <p:cNvSpPr/>
+          <p:nvPr/>
+        </p:nvSpPr>
+        <p:spPr>
+          <a:xfrm>
+            <a:off x="4611624" y="3521202"/>
+            <a:ext cx="1742846" cy="204978"/>
+          </a:xfrm>
+          <a:prstGeom prst="rect">
+            <a:avLst/>
+          </a:prstGeom>
+          <a:noFill/>
+          <a:ln/>
+        </p:spPr>
+        <p:txBody>
+          <a:bodyPr wrap="square" lIns="0" tIns="0" rIns="0" bIns="0" rtlCol="0" anchor="ctr"/>
+          <a:lstStyle/>
+          <a:p>
+            <a:pPr algn="r" indent="0" marL="0">
+              <a:buNone/>
+            </a:pPr>
+            <a:r>
+              <a:rPr lang="en-US" sz="1050" b="1" dirty="0">
                 <a:solidFill>
                   <a:srgbClr val="2F3C7E"/>
                 </a:solidFill>
@@ -10489,7 +11382,46 @@
                 <a:ea typeface="Calibri" pitchFamily="34" charset="-122"/>
                 <a:cs typeface="Calibri" pitchFamily="34" charset="-120"/>
               </a:rPr>
-              <a:t>ellos/ellas/Uds.  tienen</a:t>
+              <a:t>ellos/ellas/Uds.</a:t>
+            </a:r>
+            <a:endParaRPr lang="en-US" sz="1050" dirty="0"/>
+          </a:p>
+        </p:txBody>
+      </p:sp>
+      <p:sp>
+        <p:nvSpPr>
+          <p:cNvPr id="52" name="Text 50"/>
+          <p:cNvSpPr/>
+          <p:nvPr/>
+        </p:nvSpPr>
+        <p:spPr>
+          <a:xfrm>
+            <a:off x="6665366" y="3521202"/>
+            <a:ext cx="1039978" cy="204978"/>
+          </a:xfrm>
+          <a:prstGeom prst="rect">
+            <a:avLst/>
+          </a:prstGeom>
+          <a:noFill/>
+          <a:ln/>
+        </p:spPr>
+        <p:txBody>
+          <a:bodyPr wrap="square" lIns="0" tIns="0" rIns="0" bIns="0" rtlCol="0" anchor="ctr"/>
+          <a:lstStyle/>
+          <a:p>
+            <a:pPr algn="l" indent="0" marL="0">
+              <a:buNone/>
+            </a:pPr>
+            <a:r>
+              <a:rPr lang="en-US" sz="1100" b="1" dirty="0">
+                <a:solidFill>
+                  <a:srgbClr val="F96167"/>
+                </a:solidFill>
+                <a:latin typeface="Calibri" pitchFamily="34" charset="0"/>
+                <a:ea typeface="Calibri" pitchFamily="34" charset="-122"/>
+                <a:cs typeface="Calibri" pitchFamily="34" charset="-120"/>
+              </a:rPr>
+              <a:t>tienen</a:t>
             </a:r>
             <a:endParaRPr lang="en-US" sz="1100" dirty="0"/>
           </a:p>
@@ -10497,7 +11429,7 @@
       </p:sp>
       <p:sp>
         <p:nvSpPr>
-          <p:cNvPr id="17" name="Shape 15"/>
+          <p:cNvPr id="53" name="Shape 51"/>
           <p:cNvSpPr/>
           <p:nvPr/>
         </p:nvSpPr>
@@ -10526,7 +11458,7 @@
       </p:sp>
       <p:sp>
         <p:nvSpPr>
-          <p:cNvPr id="18" name="Shape 16"/>
+          <p:cNvPr id="54" name="Shape 52"/>
           <p:cNvSpPr/>
           <p:nvPr/>
         </p:nvSpPr>
@@ -10546,7 +11478,7 @@
       </p:sp>
       <p:sp>
         <p:nvSpPr>
-          <p:cNvPr id="19" name="Text 17"/>
+          <p:cNvPr id="55" name="Text 53"/>
           <p:cNvSpPr/>
           <p:nvPr/>
         </p:nvSpPr>
@@ -10582,7 +11514,7 @@
       </p:sp>
       <p:sp>
         <p:nvSpPr>
-          <p:cNvPr id="20" name="Text 18"/>
+          <p:cNvPr id="56" name="Text 54"/>
           <p:cNvSpPr/>
           <p:nvPr/>
         </p:nvSpPr>
@@ -10621,7 +11553,7 @@
       </p:sp>
       <p:sp>
         <p:nvSpPr>
-          <p:cNvPr id="21" name="Text 19"/>
+          <p:cNvPr id="57" name="Text 55"/>
           <p:cNvSpPr/>
           <p:nvPr/>
         </p:nvSpPr>
@@ -10660,36 +11592,73 @@
       </p:sp>
       <p:sp>
         <p:nvSpPr>
-          <p:cNvPr id="22" name="Text 20"/>
-          <p:cNvSpPr/>
-          <p:nvPr/>
-        </p:nvSpPr>
-        <p:spPr>
-          <a:xfrm>
-            <a:off x="8308848" y="2468880"/>
-            <a:ext cx="3148584" cy="1257300"/>
-          </a:xfrm>
-          <a:prstGeom prst="rect">
-            <a:avLst/>
-          </a:prstGeom>
-          <a:noFill/>
-          <a:ln/>
-        </p:spPr>
-        <p:txBody>
-          <a:bodyPr wrap="square" lIns="0" tIns="0" rIns="0" bIns="0" rtlCol="0" anchor="ctr"/>
-          <a:lstStyle/>
-          <a:p>
-            <a:pPr indent="0" marL="0">
-              <a:lnSpc>
-                <a:spcPct val="115000"/>
-              </a:lnSpc>
-              <a:spcAft>
-                <a:spcPts val="100"/>
-              </a:spcAft>
-              <a:buNone/>
-            </a:pPr>
-            <a:r>
-              <a:rPr lang="en-US" sz="1100" dirty="0">
+          <p:cNvPr id="58" name="Shape 56"/>
+          <p:cNvSpPr/>
+          <p:nvPr/>
+        </p:nvSpPr>
+        <p:spPr>
+          <a:xfrm>
+            <a:off x="8308848" y="2496312"/>
+            <a:ext cx="3148584" cy="1229868"/>
+          </a:xfrm>
+          <a:prstGeom prst="rect">
+            <a:avLst/>
+          </a:prstGeom>
+          <a:solidFill>
+            <a:srgbClr val="FFFFFF"/>
+          </a:solidFill>
+          <a:ln/>
+        </p:spPr>
+      </p:sp>
+      <p:sp>
+        <p:nvSpPr>
+          <p:cNvPr id="59" name="Shape 57"/>
+          <p:cNvSpPr/>
+          <p:nvPr/>
+        </p:nvSpPr>
+        <p:spPr>
+          <a:xfrm>
+            <a:off x="10326014" y="2551176"/>
+            <a:ext cx="0" cy="1120140"/>
+          </a:xfrm>
+          <a:prstGeom prst="line">
+            <a:avLst/>
+          </a:prstGeom>
+          <a:noFill/>
+          <a:ln w="12700">
+            <a:solidFill>
+              <a:srgbClr val="D8DBEA"/>
+            </a:solidFill>
+            <a:prstDash val="solid"/>
+          </a:ln>
+        </p:spPr>
+      </p:sp>
+      <p:sp>
+        <p:nvSpPr>
+          <p:cNvPr id="60" name="Text 58"/>
+          <p:cNvSpPr/>
+          <p:nvPr/>
+        </p:nvSpPr>
+        <p:spPr>
+          <a:xfrm>
+            <a:off x="8400288" y="2496312"/>
+            <a:ext cx="1742846" cy="204978"/>
+          </a:xfrm>
+          <a:prstGeom prst="rect">
+            <a:avLst/>
+          </a:prstGeom>
+          <a:noFill/>
+          <a:ln/>
+        </p:spPr>
+        <p:txBody>
+          <a:bodyPr wrap="square" lIns="0" tIns="0" rIns="0" bIns="0" rtlCol="0" anchor="ctr"/>
+          <a:lstStyle/>
+          <a:p>
+            <a:pPr algn="r" indent="0" marL="0">
+              <a:buNone/>
+            </a:pPr>
+            <a:r>
+              <a:rPr lang="en-US" sz="1050" b="1" dirty="0">
                 <a:solidFill>
                   <a:srgbClr val="2F3C7E"/>
                 </a:solidFill>
@@ -10697,22 +11666,100 @@
                 <a:ea typeface="Calibri" pitchFamily="34" charset="-122"/>
                 <a:cs typeface="Calibri" pitchFamily="34" charset="-120"/>
               </a:rPr>
-              <a:t>yo  trabajo</a:t>
+              <a:t>yo</a:t>
+            </a:r>
+            <a:endParaRPr lang="en-US" sz="1050" dirty="0"/>
+          </a:p>
+        </p:txBody>
+      </p:sp>
+      <p:sp>
+        <p:nvSpPr>
+          <p:cNvPr id="61" name="Text 59"/>
+          <p:cNvSpPr/>
+          <p:nvPr/>
+        </p:nvSpPr>
+        <p:spPr>
+          <a:xfrm>
+            <a:off x="10454030" y="2496312"/>
+            <a:ext cx="1039978" cy="204978"/>
+          </a:xfrm>
+          <a:prstGeom prst="rect">
+            <a:avLst/>
+          </a:prstGeom>
+          <a:noFill/>
+          <a:ln/>
+        </p:spPr>
+        <p:txBody>
+          <a:bodyPr wrap="square" lIns="0" tIns="0" rIns="0" bIns="0" rtlCol="0" anchor="ctr"/>
+          <a:lstStyle/>
+          <a:p>
+            <a:pPr algn="l" indent="0" marL="0">
+              <a:buNone/>
+            </a:pPr>
+            <a:r>
+              <a:rPr lang="en-US" sz="1100" b="1" dirty="0">
+                <a:solidFill>
+                  <a:srgbClr val="F96167"/>
+                </a:solidFill>
+                <a:latin typeface="Calibri" pitchFamily="34" charset="0"/>
+                <a:ea typeface="Calibri" pitchFamily="34" charset="-122"/>
+                <a:cs typeface="Calibri" pitchFamily="34" charset="-120"/>
+              </a:rPr>
+              <a:t>trabajo</a:t>
             </a:r>
             <a:endParaRPr lang="en-US" sz="1100" dirty="0"/>
           </a:p>
-          <a:p>
-            <a:pPr indent="0" marL="0">
-              <a:lnSpc>
-                <a:spcPct val="115000"/>
-              </a:lnSpc>
-              <a:spcAft>
-                <a:spcPts val="100"/>
-              </a:spcAft>
-              <a:buNone/>
-            </a:pPr>
-            <a:r>
-              <a:rPr lang="en-US" sz="1100" dirty="0">
+        </p:txBody>
+      </p:sp>
+      <p:sp>
+        <p:nvSpPr>
+          <p:cNvPr id="62" name="Shape 60"/>
+          <p:cNvSpPr/>
+          <p:nvPr/>
+        </p:nvSpPr>
+        <p:spPr>
+          <a:xfrm>
+            <a:off x="8363712" y="2701290"/>
+            <a:ext cx="3038856" cy="0"/>
+          </a:xfrm>
+          <a:prstGeom prst="line">
+            <a:avLst/>
+          </a:prstGeom>
+          <a:noFill/>
+          <a:ln w="9525">
+            <a:solidFill>
+              <a:srgbClr val="E7E9F3"/>
+            </a:solidFill>
+            <a:prstDash val="solid"/>
+          </a:ln>
+        </p:spPr>
+      </p:sp>
+      <p:sp>
+        <p:nvSpPr>
+          <p:cNvPr id="63" name="Text 61"/>
+          <p:cNvSpPr/>
+          <p:nvPr/>
+        </p:nvSpPr>
+        <p:spPr>
+          <a:xfrm>
+            <a:off x="8400288" y="2701290"/>
+            <a:ext cx="1742846" cy="204978"/>
+          </a:xfrm>
+          <a:prstGeom prst="rect">
+            <a:avLst/>
+          </a:prstGeom>
+          <a:noFill/>
+          <a:ln/>
+        </p:spPr>
+        <p:txBody>
+          <a:bodyPr wrap="square" lIns="0" tIns="0" rIns="0" bIns="0" rtlCol="0" anchor="ctr"/>
+          <a:lstStyle/>
+          <a:p>
+            <a:pPr algn="r" indent="0" marL="0">
+              <a:buNone/>
+            </a:pPr>
+            <a:r>
+              <a:rPr lang="en-US" sz="1050" b="1" dirty="0">
                 <a:solidFill>
                   <a:srgbClr val="2F3C7E"/>
                 </a:solidFill>
@@ -10720,22 +11767,100 @@
                 <a:ea typeface="Calibri" pitchFamily="34" charset="-122"/>
                 <a:cs typeface="Calibri" pitchFamily="34" charset="-120"/>
               </a:rPr>
-              <a:t>tú  trabajas</a:t>
+              <a:t>tú</a:t>
+            </a:r>
+            <a:endParaRPr lang="en-US" sz="1050" dirty="0"/>
+          </a:p>
+        </p:txBody>
+      </p:sp>
+      <p:sp>
+        <p:nvSpPr>
+          <p:cNvPr id="64" name="Text 62"/>
+          <p:cNvSpPr/>
+          <p:nvPr/>
+        </p:nvSpPr>
+        <p:spPr>
+          <a:xfrm>
+            <a:off x="10454030" y="2701290"/>
+            <a:ext cx="1039978" cy="204978"/>
+          </a:xfrm>
+          <a:prstGeom prst="rect">
+            <a:avLst/>
+          </a:prstGeom>
+          <a:noFill/>
+          <a:ln/>
+        </p:spPr>
+        <p:txBody>
+          <a:bodyPr wrap="square" lIns="0" tIns="0" rIns="0" bIns="0" rtlCol="0" anchor="ctr"/>
+          <a:lstStyle/>
+          <a:p>
+            <a:pPr algn="l" indent="0" marL="0">
+              <a:buNone/>
+            </a:pPr>
+            <a:r>
+              <a:rPr lang="en-US" sz="1100" b="1" dirty="0">
+                <a:solidFill>
+                  <a:srgbClr val="F96167"/>
+                </a:solidFill>
+                <a:latin typeface="Calibri" pitchFamily="34" charset="0"/>
+                <a:ea typeface="Calibri" pitchFamily="34" charset="-122"/>
+                <a:cs typeface="Calibri" pitchFamily="34" charset="-120"/>
+              </a:rPr>
+              <a:t>trabajas</a:t>
             </a:r>
             <a:endParaRPr lang="en-US" sz="1100" dirty="0"/>
           </a:p>
-          <a:p>
-            <a:pPr indent="0" marL="0">
-              <a:lnSpc>
-                <a:spcPct val="115000"/>
-              </a:lnSpc>
-              <a:spcAft>
-                <a:spcPts val="100"/>
-              </a:spcAft>
-              <a:buNone/>
-            </a:pPr>
-            <a:r>
-              <a:rPr lang="en-US" sz="1100" dirty="0">
+        </p:txBody>
+      </p:sp>
+      <p:sp>
+        <p:nvSpPr>
+          <p:cNvPr id="65" name="Shape 63"/>
+          <p:cNvSpPr/>
+          <p:nvPr/>
+        </p:nvSpPr>
+        <p:spPr>
+          <a:xfrm>
+            <a:off x="8363712" y="2906268"/>
+            <a:ext cx="3038856" cy="0"/>
+          </a:xfrm>
+          <a:prstGeom prst="line">
+            <a:avLst/>
+          </a:prstGeom>
+          <a:noFill/>
+          <a:ln w="9525">
+            <a:solidFill>
+              <a:srgbClr val="E7E9F3"/>
+            </a:solidFill>
+            <a:prstDash val="solid"/>
+          </a:ln>
+        </p:spPr>
+      </p:sp>
+      <p:sp>
+        <p:nvSpPr>
+          <p:cNvPr id="66" name="Text 64"/>
+          <p:cNvSpPr/>
+          <p:nvPr/>
+        </p:nvSpPr>
+        <p:spPr>
+          <a:xfrm>
+            <a:off x="8400288" y="2906268"/>
+            <a:ext cx="1742846" cy="204978"/>
+          </a:xfrm>
+          <a:prstGeom prst="rect">
+            <a:avLst/>
+          </a:prstGeom>
+          <a:noFill/>
+          <a:ln/>
+        </p:spPr>
+        <p:txBody>
+          <a:bodyPr wrap="square" lIns="0" tIns="0" rIns="0" bIns="0" rtlCol="0" anchor="ctr"/>
+          <a:lstStyle/>
+          <a:p>
+            <a:pPr algn="r" indent="0" marL="0">
+              <a:buNone/>
+            </a:pPr>
+            <a:r>
+              <a:rPr lang="en-US" sz="1050" b="1" dirty="0">
                 <a:solidFill>
                   <a:srgbClr val="2F3C7E"/>
                 </a:solidFill>
@@ -10743,22 +11868,100 @@
                 <a:ea typeface="Calibri" pitchFamily="34" charset="-122"/>
                 <a:cs typeface="Calibri" pitchFamily="34" charset="-120"/>
               </a:rPr>
-              <a:t>él/ella/Ud.  trabaja</a:t>
+              <a:t>él/ella/Ud.</a:t>
+            </a:r>
+            <a:endParaRPr lang="en-US" sz="1050" dirty="0"/>
+          </a:p>
+        </p:txBody>
+      </p:sp>
+      <p:sp>
+        <p:nvSpPr>
+          <p:cNvPr id="67" name="Text 65"/>
+          <p:cNvSpPr/>
+          <p:nvPr/>
+        </p:nvSpPr>
+        <p:spPr>
+          <a:xfrm>
+            <a:off x="10454030" y="2906268"/>
+            <a:ext cx="1039978" cy="204978"/>
+          </a:xfrm>
+          <a:prstGeom prst="rect">
+            <a:avLst/>
+          </a:prstGeom>
+          <a:noFill/>
+          <a:ln/>
+        </p:spPr>
+        <p:txBody>
+          <a:bodyPr wrap="square" lIns="0" tIns="0" rIns="0" bIns="0" rtlCol="0" anchor="ctr"/>
+          <a:lstStyle/>
+          <a:p>
+            <a:pPr algn="l" indent="0" marL="0">
+              <a:buNone/>
+            </a:pPr>
+            <a:r>
+              <a:rPr lang="en-US" sz="1100" b="1" dirty="0">
+                <a:solidFill>
+                  <a:srgbClr val="F96167"/>
+                </a:solidFill>
+                <a:latin typeface="Calibri" pitchFamily="34" charset="0"/>
+                <a:ea typeface="Calibri" pitchFamily="34" charset="-122"/>
+                <a:cs typeface="Calibri" pitchFamily="34" charset="-120"/>
+              </a:rPr>
+              <a:t>trabaja</a:t>
             </a:r>
             <a:endParaRPr lang="en-US" sz="1100" dirty="0"/>
           </a:p>
-          <a:p>
-            <a:pPr indent="0" marL="0">
-              <a:lnSpc>
-                <a:spcPct val="115000"/>
-              </a:lnSpc>
-              <a:spcAft>
-                <a:spcPts val="100"/>
-              </a:spcAft>
-              <a:buNone/>
-            </a:pPr>
-            <a:r>
-              <a:rPr lang="en-US" sz="1100" dirty="0">
+        </p:txBody>
+      </p:sp>
+      <p:sp>
+        <p:nvSpPr>
+          <p:cNvPr id="68" name="Shape 66"/>
+          <p:cNvSpPr/>
+          <p:nvPr/>
+        </p:nvSpPr>
+        <p:spPr>
+          <a:xfrm>
+            <a:off x="8363712" y="3111246"/>
+            <a:ext cx="3038856" cy="0"/>
+          </a:xfrm>
+          <a:prstGeom prst="line">
+            <a:avLst/>
+          </a:prstGeom>
+          <a:noFill/>
+          <a:ln w="9525">
+            <a:solidFill>
+              <a:srgbClr val="E7E9F3"/>
+            </a:solidFill>
+            <a:prstDash val="solid"/>
+          </a:ln>
+        </p:spPr>
+      </p:sp>
+      <p:sp>
+        <p:nvSpPr>
+          <p:cNvPr id="69" name="Text 67"/>
+          <p:cNvSpPr/>
+          <p:nvPr/>
+        </p:nvSpPr>
+        <p:spPr>
+          <a:xfrm>
+            <a:off x="8400288" y="3111246"/>
+            <a:ext cx="1742846" cy="204978"/>
+          </a:xfrm>
+          <a:prstGeom prst="rect">
+            <a:avLst/>
+          </a:prstGeom>
+          <a:noFill/>
+          <a:ln/>
+        </p:spPr>
+        <p:txBody>
+          <a:bodyPr wrap="square" lIns="0" tIns="0" rIns="0" bIns="0" rtlCol="0" anchor="ctr"/>
+          <a:lstStyle/>
+          <a:p>
+            <a:pPr algn="r" indent="0" marL="0">
+              <a:buNone/>
+            </a:pPr>
+            <a:r>
+              <a:rPr lang="en-US" sz="1050" b="1" dirty="0">
                 <a:solidFill>
                   <a:srgbClr val="2F3C7E"/>
                 </a:solidFill>
@@ -10766,22 +11969,100 @@
                 <a:ea typeface="Calibri" pitchFamily="34" charset="-122"/>
                 <a:cs typeface="Calibri" pitchFamily="34" charset="-120"/>
               </a:rPr>
-              <a:t>nosotros/nosotras  trabajamos</a:t>
+              <a:t>nosotros/nosotras</a:t>
+            </a:r>
+            <a:endParaRPr lang="en-US" sz="1050" dirty="0"/>
+          </a:p>
+        </p:txBody>
+      </p:sp>
+      <p:sp>
+        <p:nvSpPr>
+          <p:cNvPr id="70" name="Text 68"/>
+          <p:cNvSpPr/>
+          <p:nvPr/>
+        </p:nvSpPr>
+        <p:spPr>
+          <a:xfrm>
+            <a:off x="10454030" y="3111246"/>
+            <a:ext cx="1039978" cy="204978"/>
+          </a:xfrm>
+          <a:prstGeom prst="rect">
+            <a:avLst/>
+          </a:prstGeom>
+          <a:noFill/>
+          <a:ln/>
+        </p:spPr>
+        <p:txBody>
+          <a:bodyPr wrap="square" lIns="0" tIns="0" rIns="0" bIns="0" rtlCol="0" anchor="ctr"/>
+          <a:lstStyle/>
+          <a:p>
+            <a:pPr algn="l" indent="0" marL="0">
+              <a:buNone/>
+            </a:pPr>
+            <a:r>
+              <a:rPr lang="en-US" sz="1100" b="1" dirty="0">
+                <a:solidFill>
+                  <a:srgbClr val="F96167"/>
+                </a:solidFill>
+                <a:latin typeface="Calibri" pitchFamily="34" charset="0"/>
+                <a:ea typeface="Calibri" pitchFamily="34" charset="-122"/>
+                <a:cs typeface="Calibri" pitchFamily="34" charset="-120"/>
+              </a:rPr>
+              <a:t>trabajamos</a:t>
             </a:r>
             <a:endParaRPr lang="en-US" sz="1100" dirty="0"/>
           </a:p>
-          <a:p>
-            <a:pPr indent="0" marL="0">
-              <a:lnSpc>
-                <a:spcPct val="115000"/>
-              </a:lnSpc>
-              <a:spcAft>
-                <a:spcPts val="100"/>
-              </a:spcAft>
-              <a:buNone/>
-            </a:pPr>
-            <a:r>
-              <a:rPr lang="en-US" sz="1100" dirty="0">
+        </p:txBody>
+      </p:sp>
+      <p:sp>
+        <p:nvSpPr>
+          <p:cNvPr id="71" name="Shape 69"/>
+          <p:cNvSpPr/>
+          <p:nvPr/>
+        </p:nvSpPr>
+        <p:spPr>
+          <a:xfrm>
+            <a:off x="8363712" y="3316224"/>
+            <a:ext cx="3038856" cy="0"/>
+          </a:xfrm>
+          <a:prstGeom prst="line">
+            <a:avLst/>
+          </a:prstGeom>
+          <a:noFill/>
+          <a:ln w="9525">
+            <a:solidFill>
+              <a:srgbClr val="E7E9F3"/>
+            </a:solidFill>
+            <a:prstDash val="solid"/>
+          </a:ln>
+        </p:spPr>
+      </p:sp>
+      <p:sp>
+        <p:nvSpPr>
+          <p:cNvPr id="72" name="Text 70"/>
+          <p:cNvSpPr/>
+          <p:nvPr/>
+        </p:nvSpPr>
+        <p:spPr>
+          <a:xfrm>
+            <a:off x="8400288" y="3316224"/>
+            <a:ext cx="1742846" cy="204978"/>
+          </a:xfrm>
+          <a:prstGeom prst="rect">
+            <a:avLst/>
+          </a:prstGeom>
+          <a:noFill/>
+          <a:ln/>
+        </p:spPr>
+        <p:txBody>
+          <a:bodyPr wrap="square" lIns="0" tIns="0" rIns="0" bIns="0" rtlCol="0" anchor="ctr"/>
+          <a:lstStyle/>
+          <a:p>
+            <a:pPr algn="r" indent="0" marL="0">
+              <a:buNone/>
+            </a:pPr>
+            <a:r>
+              <a:rPr lang="en-US" sz="1050" b="1" dirty="0">
                 <a:solidFill>
                   <a:srgbClr val="2F3C7E"/>
                 </a:solidFill>
@@ -10789,22 +12070,100 @@
                 <a:ea typeface="Calibri" pitchFamily="34" charset="-122"/>
                 <a:cs typeface="Calibri" pitchFamily="34" charset="-120"/>
               </a:rPr>
-              <a:t>vosotros/vosotras  trabajáis</a:t>
+              <a:t>vosotros/vosotras</a:t>
+            </a:r>
+            <a:endParaRPr lang="en-US" sz="1050" dirty="0"/>
+          </a:p>
+        </p:txBody>
+      </p:sp>
+      <p:sp>
+        <p:nvSpPr>
+          <p:cNvPr id="73" name="Text 71"/>
+          <p:cNvSpPr/>
+          <p:nvPr/>
+        </p:nvSpPr>
+        <p:spPr>
+          <a:xfrm>
+            <a:off x="10454030" y="3316224"/>
+            <a:ext cx="1039978" cy="204978"/>
+          </a:xfrm>
+          <a:prstGeom prst="rect">
+            <a:avLst/>
+          </a:prstGeom>
+          <a:noFill/>
+          <a:ln/>
+        </p:spPr>
+        <p:txBody>
+          <a:bodyPr wrap="square" lIns="0" tIns="0" rIns="0" bIns="0" rtlCol="0" anchor="ctr"/>
+          <a:lstStyle/>
+          <a:p>
+            <a:pPr algn="l" indent="0" marL="0">
+              <a:buNone/>
+            </a:pPr>
+            <a:r>
+              <a:rPr lang="en-US" sz="1100" b="1" dirty="0">
+                <a:solidFill>
+                  <a:srgbClr val="F96167"/>
+                </a:solidFill>
+                <a:latin typeface="Calibri" pitchFamily="34" charset="0"/>
+                <a:ea typeface="Calibri" pitchFamily="34" charset="-122"/>
+                <a:cs typeface="Calibri" pitchFamily="34" charset="-120"/>
+              </a:rPr>
+              <a:t>trabajáis</a:t>
             </a:r>
             <a:endParaRPr lang="en-US" sz="1100" dirty="0"/>
           </a:p>
-          <a:p>
-            <a:pPr indent="0" marL="0">
-              <a:lnSpc>
-                <a:spcPct val="115000"/>
-              </a:lnSpc>
-              <a:spcAft>
-                <a:spcPts val="100"/>
-              </a:spcAft>
-              <a:buNone/>
-            </a:pPr>
-            <a:r>
-              <a:rPr lang="en-US" sz="1100" dirty="0">
+        </p:txBody>
+      </p:sp>
+      <p:sp>
+        <p:nvSpPr>
+          <p:cNvPr id="74" name="Shape 72"/>
+          <p:cNvSpPr/>
+          <p:nvPr/>
+        </p:nvSpPr>
+        <p:spPr>
+          <a:xfrm>
+            <a:off x="8363712" y="3521202"/>
+            <a:ext cx="3038856" cy="0"/>
+          </a:xfrm>
+          <a:prstGeom prst="line">
+            <a:avLst/>
+          </a:prstGeom>
+          <a:noFill/>
+          <a:ln w="9525">
+            <a:solidFill>
+              <a:srgbClr val="E7E9F3"/>
+            </a:solidFill>
+            <a:prstDash val="solid"/>
+          </a:ln>
+        </p:spPr>
+      </p:sp>
+      <p:sp>
+        <p:nvSpPr>
+          <p:cNvPr id="75" name="Text 73"/>
+          <p:cNvSpPr/>
+          <p:nvPr/>
+        </p:nvSpPr>
+        <p:spPr>
+          <a:xfrm>
+            <a:off x="8400288" y="3521202"/>
+            <a:ext cx="1742846" cy="204978"/>
+          </a:xfrm>
+          <a:prstGeom prst="rect">
+            <a:avLst/>
+          </a:prstGeom>
+          <a:noFill/>
+          <a:ln/>
+        </p:spPr>
+        <p:txBody>
+          <a:bodyPr wrap="square" lIns="0" tIns="0" rIns="0" bIns="0" rtlCol="0" anchor="ctr"/>
+          <a:lstStyle/>
+          <a:p>
+            <a:pPr algn="r" indent="0" marL="0">
+              <a:buNone/>
+            </a:pPr>
+            <a:r>
+              <a:rPr lang="en-US" sz="1050" b="1" dirty="0">
                 <a:solidFill>
                   <a:srgbClr val="2F3C7E"/>
                 </a:solidFill>
@@ -10812,7 +12171,46 @@
                 <a:ea typeface="Calibri" pitchFamily="34" charset="-122"/>
                 <a:cs typeface="Calibri" pitchFamily="34" charset="-120"/>
               </a:rPr>
-              <a:t>ellos/ellas/Uds.  trabajan</a:t>
+              <a:t>ellos/ellas/Uds.</a:t>
+            </a:r>
+            <a:endParaRPr lang="en-US" sz="1050" dirty="0"/>
+          </a:p>
+        </p:txBody>
+      </p:sp>
+      <p:sp>
+        <p:nvSpPr>
+          <p:cNvPr id="76" name="Text 74"/>
+          <p:cNvSpPr/>
+          <p:nvPr/>
+        </p:nvSpPr>
+        <p:spPr>
+          <a:xfrm>
+            <a:off x="10454030" y="3521202"/>
+            <a:ext cx="1039978" cy="204978"/>
+          </a:xfrm>
+          <a:prstGeom prst="rect">
+            <a:avLst/>
+          </a:prstGeom>
+          <a:noFill/>
+          <a:ln/>
+        </p:spPr>
+        <p:txBody>
+          <a:bodyPr wrap="square" lIns="0" tIns="0" rIns="0" bIns="0" rtlCol="0" anchor="ctr"/>
+          <a:lstStyle/>
+          <a:p>
+            <a:pPr algn="l" indent="0" marL="0">
+              <a:buNone/>
+            </a:pPr>
+            <a:r>
+              <a:rPr lang="en-US" sz="1100" b="1" dirty="0">
+                <a:solidFill>
+                  <a:srgbClr val="F96167"/>
+                </a:solidFill>
+                <a:latin typeface="Calibri" pitchFamily="34" charset="0"/>
+                <a:ea typeface="Calibri" pitchFamily="34" charset="-122"/>
+                <a:cs typeface="Calibri" pitchFamily="34" charset="-120"/>
+              </a:rPr>
+              <a:t>trabajan</a:t>
             </a:r>
             <a:endParaRPr lang="en-US" sz="1100" dirty="0"/>
           </a:p>
@@ -10820,7 +12218,7 @@
       </p:sp>
       <p:sp>
         <p:nvSpPr>
-          <p:cNvPr id="23" name="Shape 21"/>
+          <p:cNvPr id="77" name="Shape 75"/>
           <p:cNvSpPr/>
           <p:nvPr/>
         </p:nvSpPr>
@@ -10849,7 +12247,7 @@
       </p:sp>
       <p:sp>
         <p:nvSpPr>
-          <p:cNvPr id="24" name="Shape 22"/>
+          <p:cNvPr id="78" name="Shape 76"/>
           <p:cNvSpPr/>
           <p:nvPr/>
         </p:nvSpPr>
@@ -10869,7 +12267,7 @@
       </p:sp>
       <p:sp>
         <p:nvSpPr>
-          <p:cNvPr id="25" name="Text 23"/>
+          <p:cNvPr id="79" name="Text 77"/>
           <p:cNvSpPr/>
           <p:nvPr/>
         </p:nvSpPr>
@@ -10905,7 +12303,7 @@
       </p:sp>
       <p:sp>
         <p:nvSpPr>
-          <p:cNvPr id="26" name="Text 24"/>
+          <p:cNvPr id="80" name="Text 78"/>
           <p:cNvSpPr/>
           <p:nvPr/>
         </p:nvSpPr>
@@ -10944,7 +12342,7 @@
       </p:sp>
       <p:sp>
         <p:nvSpPr>
-          <p:cNvPr id="27" name="Text 25"/>
+          <p:cNvPr id="81" name="Text 79"/>
           <p:cNvSpPr/>
           <p:nvPr/>
         </p:nvSpPr>
@@ -10983,36 +12381,73 @@
       </p:sp>
       <p:sp>
         <p:nvSpPr>
-          <p:cNvPr id="28" name="Text 26"/>
-          <p:cNvSpPr/>
-          <p:nvPr/>
-        </p:nvSpPr>
-        <p:spPr>
-          <a:xfrm>
-            <a:off x="2625852" y="5006340"/>
-            <a:ext cx="3148584" cy="1257300"/>
-          </a:xfrm>
-          <a:prstGeom prst="rect">
-            <a:avLst/>
-          </a:prstGeom>
-          <a:noFill/>
-          <a:ln/>
-        </p:spPr>
-        <p:txBody>
-          <a:bodyPr wrap="square" lIns="0" tIns="0" rIns="0" bIns="0" rtlCol="0" anchor="ctr"/>
-          <a:lstStyle/>
-          <a:p>
-            <a:pPr indent="0" marL="0">
-              <a:lnSpc>
-                <a:spcPct val="115000"/>
-              </a:lnSpc>
-              <a:spcAft>
-                <a:spcPts val="100"/>
-              </a:spcAft>
-              <a:buNone/>
-            </a:pPr>
-            <a:r>
-              <a:rPr lang="en-US" sz="1100" dirty="0">
+          <p:cNvPr id="82" name="Shape 80"/>
+          <p:cNvSpPr/>
+          <p:nvPr/>
+        </p:nvSpPr>
+        <p:spPr>
+          <a:xfrm>
+            <a:off x="2625852" y="5033772"/>
+            <a:ext cx="3148584" cy="1229868"/>
+          </a:xfrm>
+          <a:prstGeom prst="rect">
+            <a:avLst/>
+          </a:prstGeom>
+          <a:solidFill>
+            <a:srgbClr val="FFFFFF"/>
+          </a:solidFill>
+          <a:ln/>
+        </p:spPr>
+      </p:sp>
+      <p:sp>
+        <p:nvSpPr>
+          <p:cNvPr id="83" name="Shape 81"/>
+          <p:cNvSpPr/>
+          <p:nvPr/>
+        </p:nvSpPr>
+        <p:spPr>
+          <a:xfrm>
+            <a:off x="4643018" y="5088636"/>
+            <a:ext cx="0" cy="1120140"/>
+          </a:xfrm>
+          <a:prstGeom prst="line">
+            <a:avLst/>
+          </a:prstGeom>
+          <a:noFill/>
+          <a:ln w="12700">
+            <a:solidFill>
+              <a:srgbClr val="D8DBEA"/>
+            </a:solidFill>
+            <a:prstDash val="solid"/>
+          </a:ln>
+        </p:spPr>
+      </p:sp>
+      <p:sp>
+        <p:nvSpPr>
+          <p:cNvPr id="84" name="Text 82"/>
+          <p:cNvSpPr/>
+          <p:nvPr/>
+        </p:nvSpPr>
+        <p:spPr>
+          <a:xfrm>
+            <a:off x="2717292" y="5033772"/>
+            <a:ext cx="1742846" cy="204978"/>
+          </a:xfrm>
+          <a:prstGeom prst="rect">
+            <a:avLst/>
+          </a:prstGeom>
+          <a:noFill/>
+          <a:ln/>
+        </p:spPr>
+        <p:txBody>
+          <a:bodyPr wrap="square" lIns="0" tIns="0" rIns="0" bIns="0" rtlCol="0" anchor="ctr"/>
+          <a:lstStyle/>
+          <a:p>
+            <a:pPr algn="r" indent="0" marL="0">
+              <a:buNone/>
+            </a:pPr>
+            <a:r>
+              <a:rPr lang="en-US" sz="1050" b="1" dirty="0">
                 <a:solidFill>
                   <a:srgbClr val="2F3C7E"/>
                 </a:solidFill>
@@ -11020,22 +12455,100 @@
                 <a:ea typeface="Calibri" pitchFamily="34" charset="-122"/>
                 <a:cs typeface="Calibri" pitchFamily="34" charset="-120"/>
               </a:rPr>
-              <a:t>yo  como</a:t>
+              <a:t>yo</a:t>
+            </a:r>
+            <a:endParaRPr lang="en-US" sz="1050" dirty="0"/>
+          </a:p>
+        </p:txBody>
+      </p:sp>
+      <p:sp>
+        <p:nvSpPr>
+          <p:cNvPr id="85" name="Text 83"/>
+          <p:cNvSpPr/>
+          <p:nvPr/>
+        </p:nvSpPr>
+        <p:spPr>
+          <a:xfrm>
+            <a:off x="4771034" y="5033772"/>
+            <a:ext cx="1039978" cy="204978"/>
+          </a:xfrm>
+          <a:prstGeom prst="rect">
+            <a:avLst/>
+          </a:prstGeom>
+          <a:noFill/>
+          <a:ln/>
+        </p:spPr>
+        <p:txBody>
+          <a:bodyPr wrap="square" lIns="0" tIns="0" rIns="0" bIns="0" rtlCol="0" anchor="ctr"/>
+          <a:lstStyle/>
+          <a:p>
+            <a:pPr algn="l" indent="0" marL="0">
+              <a:buNone/>
+            </a:pPr>
+            <a:r>
+              <a:rPr lang="en-US" sz="1100" b="1" dirty="0">
+                <a:solidFill>
+                  <a:srgbClr val="F96167"/>
+                </a:solidFill>
+                <a:latin typeface="Calibri" pitchFamily="34" charset="0"/>
+                <a:ea typeface="Calibri" pitchFamily="34" charset="-122"/>
+                <a:cs typeface="Calibri" pitchFamily="34" charset="-120"/>
+              </a:rPr>
+              <a:t>como</a:t>
             </a:r>
             <a:endParaRPr lang="en-US" sz="1100" dirty="0"/>
           </a:p>
-          <a:p>
-            <a:pPr indent="0" marL="0">
-              <a:lnSpc>
-                <a:spcPct val="115000"/>
-              </a:lnSpc>
-              <a:spcAft>
-                <a:spcPts val="100"/>
-              </a:spcAft>
-              <a:buNone/>
-            </a:pPr>
-            <a:r>
-              <a:rPr lang="en-US" sz="1100" dirty="0">
+        </p:txBody>
+      </p:sp>
+      <p:sp>
+        <p:nvSpPr>
+          <p:cNvPr id="86" name="Shape 84"/>
+          <p:cNvSpPr/>
+          <p:nvPr/>
+        </p:nvSpPr>
+        <p:spPr>
+          <a:xfrm>
+            <a:off x="2680716" y="5238750"/>
+            <a:ext cx="3038856" cy="0"/>
+          </a:xfrm>
+          <a:prstGeom prst="line">
+            <a:avLst/>
+          </a:prstGeom>
+          <a:noFill/>
+          <a:ln w="9525">
+            <a:solidFill>
+              <a:srgbClr val="E7E9F3"/>
+            </a:solidFill>
+            <a:prstDash val="solid"/>
+          </a:ln>
+        </p:spPr>
+      </p:sp>
+      <p:sp>
+        <p:nvSpPr>
+          <p:cNvPr id="87" name="Text 85"/>
+          <p:cNvSpPr/>
+          <p:nvPr/>
+        </p:nvSpPr>
+        <p:spPr>
+          <a:xfrm>
+            <a:off x="2717292" y="5238750"/>
+            <a:ext cx="1742846" cy="204978"/>
+          </a:xfrm>
+          <a:prstGeom prst="rect">
+            <a:avLst/>
+          </a:prstGeom>
+          <a:noFill/>
+          <a:ln/>
+        </p:spPr>
+        <p:txBody>
+          <a:bodyPr wrap="square" lIns="0" tIns="0" rIns="0" bIns="0" rtlCol="0" anchor="ctr"/>
+          <a:lstStyle/>
+          <a:p>
+            <a:pPr algn="r" indent="0" marL="0">
+              <a:buNone/>
+            </a:pPr>
+            <a:r>
+              <a:rPr lang="en-US" sz="1050" b="1" dirty="0">
                 <a:solidFill>
                   <a:srgbClr val="2F3C7E"/>
                 </a:solidFill>
@@ -11043,22 +12556,100 @@
                 <a:ea typeface="Calibri" pitchFamily="34" charset="-122"/>
                 <a:cs typeface="Calibri" pitchFamily="34" charset="-120"/>
               </a:rPr>
-              <a:t>tú  comes</a:t>
+              <a:t>tú</a:t>
+            </a:r>
+            <a:endParaRPr lang="en-US" sz="1050" dirty="0"/>
+          </a:p>
+        </p:txBody>
+      </p:sp>
+      <p:sp>
+        <p:nvSpPr>
+          <p:cNvPr id="88" name="Text 86"/>
+          <p:cNvSpPr/>
+          <p:nvPr/>
+        </p:nvSpPr>
+        <p:spPr>
+          <a:xfrm>
+            <a:off x="4771034" y="5238750"/>
+            <a:ext cx="1039978" cy="204978"/>
+          </a:xfrm>
+          <a:prstGeom prst="rect">
+            <a:avLst/>
+          </a:prstGeom>
+          <a:noFill/>
+          <a:ln/>
+        </p:spPr>
+        <p:txBody>
+          <a:bodyPr wrap="square" lIns="0" tIns="0" rIns="0" bIns="0" rtlCol="0" anchor="ctr"/>
+          <a:lstStyle/>
+          <a:p>
+            <a:pPr algn="l" indent="0" marL="0">
+              <a:buNone/>
+            </a:pPr>
+            <a:r>
+              <a:rPr lang="en-US" sz="1100" b="1" dirty="0">
+                <a:solidFill>
+                  <a:srgbClr val="F96167"/>
+                </a:solidFill>
+                <a:latin typeface="Calibri" pitchFamily="34" charset="0"/>
+                <a:ea typeface="Calibri" pitchFamily="34" charset="-122"/>
+                <a:cs typeface="Calibri" pitchFamily="34" charset="-120"/>
+              </a:rPr>
+              <a:t>comes</a:t>
             </a:r>
             <a:endParaRPr lang="en-US" sz="1100" dirty="0"/>
           </a:p>
-          <a:p>
-            <a:pPr indent="0" marL="0">
-              <a:lnSpc>
-                <a:spcPct val="115000"/>
-              </a:lnSpc>
-              <a:spcAft>
-                <a:spcPts val="100"/>
-              </a:spcAft>
-              <a:buNone/>
-            </a:pPr>
-            <a:r>
-              <a:rPr lang="en-US" sz="1100" dirty="0">
+        </p:txBody>
+      </p:sp>
+      <p:sp>
+        <p:nvSpPr>
+          <p:cNvPr id="89" name="Shape 87"/>
+          <p:cNvSpPr/>
+          <p:nvPr/>
+        </p:nvSpPr>
+        <p:spPr>
+          <a:xfrm>
+            <a:off x="2680716" y="5443728"/>
+            <a:ext cx="3038856" cy="0"/>
+          </a:xfrm>
+          <a:prstGeom prst="line">
+            <a:avLst/>
+          </a:prstGeom>
+          <a:noFill/>
+          <a:ln w="9525">
+            <a:solidFill>
+              <a:srgbClr val="E7E9F3"/>
+            </a:solidFill>
+            <a:prstDash val="solid"/>
+          </a:ln>
+        </p:spPr>
+      </p:sp>
+      <p:sp>
+        <p:nvSpPr>
+          <p:cNvPr id="90" name="Text 88"/>
+          <p:cNvSpPr/>
+          <p:nvPr/>
+        </p:nvSpPr>
+        <p:spPr>
+          <a:xfrm>
+            <a:off x="2717292" y="5443728"/>
+            <a:ext cx="1742846" cy="204978"/>
+          </a:xfrm>
+          <a:prstGeom prst="rect">
+            <a:avLst/>
+          </a:prstGeom>
+          <a:noFill/>
+          <a:ln/>
+        </p:spPr>
+        <p:txBody>
+          <a:bodyPr wrap="square" lIns="0" tIns="0" rIns="0" bIns="0" rtlCol="0" anchor="ctr"/>
+          <a:lstStyle/>
+          <a:p>
+            <a:pPr algn="r" indent="0" marL="0">
+              <a:buNone/>
+            </a:pPr>
+            <a:r>
+              <a:rPr lang="en-US" sz="1050" b="1" dirty="0">
                 <a:solidFill>
                   <a:srgbClr val="2F3C7E"/>
                 </a:solidFill>
@@ -11066,22 +12657,100 @@
                 <a:ea typeface="Calibri" pitchFamily="34" charset="-122"/>
                 <a:cs typeface="Calibri" pitchFamily="34" charset="-120"/>
               </a:rPr>
-              <a:t>él/ella/Ud.  come</a:t>
+              <a:t>él/ella/Ud.</a:t>
+            </a:r>
+            <a:endParaRPr lang="en-US" sz="1050" dirty="0"/>
+          </a:p>
+        </p:txBody>
+      </p:sp>
+      <p:sp>
+        <p:nvSpPr>
+          <p:cNvPr id="91" name="Text 89"/>
+          <p:cNvSpPr/>
+          <p:nvPr/>
+        </p:nvSpPr>
+        <p:spPr>
+          <a:xfrm>
+            <a:off x="4771034" y="5443728"/>
+            <a:ext cx="1039978" cy="204978"/>
+          </a:xfrm>
+          <a:prstGeom prst="rect">
+            <a:avLst/>
+          </a:prstGeom>
+          <a:noFill/>
+          <a:ln/>
+        </p:spPr>
+        <p:txBody>
+          <a:bodyPr wrap="square" lIns="0" tIns="0" rIns="0" bIns="0" rtlCol="0" anchor="ctr"/>
+          <a:lstStyle/>
+          <a:p>
+            <a:pPr algn="l" indent="0" marL="0">
+              <a:buNone/>
+            </a:pPr>
+            <a:r>
+              <a:rPr lang="en-US" sz="1100" b="1" dirty="0">
+                <a:solidFill>
+                  <a:srgbClr val="F96167"/>
+                </a:solidFill>
+                <a:latin typeface="Calibri" pitchFamily="34" charset="0"/>
+                <a:ea typeface="Calibri" pitchFamily="34" charset="-122"/>
+                <a:cs typeface="Calibri" pitchFamily="34" charset="-120"/>
+              </a:rPr>
+              <a:t>come</a:t>
             </a:r>
             <a:endParaRPr lang="en-US" sz="1100" dirty="0"/>
           </a:p>
-          <a:p>
-            <a:pPr indent="0" marL="0">
-              <a:lnSpc>
-                <a:spcPct val="115000"/>
-              </a:lnSpc>
-              <a:spcAft>
-                <a:spcPts val="100"/>
-              </a:spcAft>
-              <a:buNone/>
-            </a:pPr>
-            <a:r>
-              <a:rPr lang="en-US" sz="1100" dirty="0">
+        </p:txBody>
+      </p:sp>
+      <p:sp>
+        <p:nvSpPr>
+          <p:cNvPr id="92" name="Shape 90"/>
+          <p:cNvSpPr/>
+          <p:nvPr/>
+        </p:nvSpPr>
+        <p:spPr>
+          <a:xfrm>
+            <a:off x="2680716" y="5648706"/>
+            <a:ext cx="3038856" cy="0"/>
+          </a:xfrm>
+          <a:prstGeom prst="line">
+            <a:avLst/>
+          </a:prstGeom>
+          <a:noFill/>
+          <a:ln w="9525">
+            <a:solidFill>
+              <a:srgbClr val="E7E9F3"/>
+            </a:solidFill>
+            <a:prstDash val="solid"/>
+          </a:ln>
+        </p:spPr>
+      </p:sp>
+      <p:sp>
+        <p:nvSpPr>
+          <p:cNvPr id="93" name="Text 91"/>
+          <p:cNvSpPr/>
+          <p:nvPr/>
+        </p:nvSpPr>
+        <p:spPr>
+          <a:xfrm>
+            <a:off x="2717292" y="5648706"/>
+            <a:ext cx="1742846" cy="204978"/>
+          </a:xfrm>
+          <a:prstGeom prst="rect">
+            <a:avLst/>
+          </a:prstGeom>
+          <a:noFill/>
+          <a:ln/>
+        </p:spPr>
+        <p:txBody>
+          <a:bodyPr wrap="square" lIns="0" tIns="0" rIns="0" bIns="0" rtlCol="0" anchor="ctr"/>
+          <a:lstStyle/>
+          <a:p>
+            <a:pPr algn="r" indent="0" marL="0">
+              <a:buNone/>
+            </a:pPr>
+            <a:r>
+              <a:rPr lang="en-US" sz="1050" b="1" dirty="0">
                 <a:solidFill>
                   <a:srgbClr val="2F3C7E"/>
                 </a:solidFill>
@@ -11089,22 +12758,100 @@
                 <a:ea typeface="Calibri" pitchFamily="34" charset="-122"/>
                 <a:cs typeface="Calibri" pitchFamily="34" charset="-120"/>
               </a:rPr>
-              <a:t>nosotros/nosotras  comemos</a:t>
+              <a:t>nosotros/nosotras</a:t>
+            </a:r>
+            <a:endParaRPr lang="en-US" sz="1050" dirty="0"/>
+          </a:p>
+        </p:txBody>
+      </p:sp>
+      <p:sp>
+        <p:nvSpPr>
+          <p:cNvPr id="94" name="Text 92"/>
+          <p:cNvSpPr/>
+          <p:nvPr/>
+        </p:nvSpPr>
+        <p:spPr>
+          <a:xfrm>
+            <a:off x="4771034" y="5648706"/>
+            <a:ext cx="1039978" cy="204978"/>
+          </a:xfrm>
+          <a:prstGeom prst="rect">
+            <a:avLst/>
+          </a:prstGeom>
+          <a:noFill/>
+          <a:ln/>
+        </p:spPr>
+        <p:txBody>
+          <a:bodyPr wrap="square" lIns="0" tIns="0" rIns="0" bIns="0" rtlCol="0" anchor="ctr"/>
+          <a:lstStyle/>
+          <a:p>
+            <a:pPr algn="l" indent="0" marL="0">
+              <a:buNone/>
+            </a:pPr>
+            <a:r>
+              <a:rPr lang="en-US" sz="1100" b="1" dirty="0">
+                <a:solidFill>
+                  <a:srgbClr val="F96167"/>
+                </a:solidFill>
+                <a:latin typeface="Calibri" pitchFamily="34" charset="0"/>
+                <a:ea typeface="Calibri" pitchFamily="34" charset="-122"/>
+                <a:cs typeface="Calibri" pitchFamily="34" charset="-120"/>
+              </a:rPr>
+              <a:t>comemos</a:t>
             </a:r>
             <a:endParaRPr lang="en-US" sz="1100" dirty="0"/>
           </a:p>
-          <a:p>
-            <a:pPr indent="0" marL="0">
-              <a:lnSpc>
-                <a:spcPct val="115000"/>
-              </a:lnSpc>
-              <a:spcAft>
-                <a:spcPts val="100"/>
-              </a:spcAft>
-              <a:buNone/>
-            </a:pPr>
-            <a:r>
-              <a:rPr lang="en-US" sz="1100" dirty="0">
+        </p:txBody>
+      </p:sp>
+      <p:sp>
+        <p:nvSpPr>
+          <p:cNvPr id="95" name="Shape 93"/>
+          <p:cNvSpPr/>
+          <p:nvPr/>
+        </p:nvSpPr>
+        <p:spPr>
+          <a:xfrm>
+            <a:off x="2680716" y="5853684"/>
+            <a:ext cx="3038856" cy="0"/>
+          </a:xfrm>
+          <a:prstGeom prst="line">
+            <a:avLst/>
+          </a:prstGeom>
+          <a:noFill/>
+          <a:ln w="9525">
+            <a:solidFill>
+              <a:srgbClr val="E7E9F3"/>
+            </a:solidFill>
+            <a:prstDash val="solid"/>
+          </a:ln>
+        </p:spPr>
+      </p:sp>
+      <p:sp>
+        <p:nvSpPr>
+          <p:cNvPr id="96" name="Text 94"/>
+          <p:cNvSpPr/>
+          <p:nvPr/>
+        </p:nvSpPr>
+        <p:spPr>
+          <a:xfrm>
+            <a:off x="2717292" y="5853684"/>
+            <a:ext cx="1742846" cy="204978"/>
+          </a:xfrm>
+          <a:prstGeom prst="rect">
+            <a:avLst/>
+          </a:prstGeom>
+          <a:noFill/>
+          <a:ln/>
+        </p:spPr>
+        <p:txBody>
+          <a:bodyPr wrap="square" lIns="0" tIns="0" rIns="0" bIns="0" rtlCol="0" anchor="ctr"/>
+          <a:lstStyle/>
+          <a:p>
+            <a:pPr algn="r" indent="0" marL="0">
+              <a:buNone/>
+            </a:pPr>
+            <a:r>
+              <a:rPr lang="en-US" sz="1050" b="1" dirty="0">
                 <a:solidFill>
                   <a:srgbClr val="2F3C7E"/>
                 </a:solidFill>
@@ -11112,22 +12859,100 @@
                 <a:ea typeface="Calibri" pitchFamily="34" charset="-122"/>
                 <a:cs typeface="Calibri" pitchFamily="34" charset="-120"/>
               </a:rPr>
-              <a:t>vosotros/vosotras  coméis</a:t>
+              <a:t>vosotros/vosotras</a:t>
+            </a:r>
+            <a:endParaRPr lang="en-US" sz="1050" dirty="0"/>
+          </a:p>
+        </p:txBody>
+      </p:sp>
+      <p:sp>
+        <p:nvSpPr>
+          <p:cNvPr id="97" name="Text 95"/>
+          <p:cNvSpPr/>
+          <p:nvPr/>
+        </p:nvSpPr>
+        <p:spPr>
+          <a:xfrm>
+            <a:off x="4771034" y="5853684"/>
+            <a:ext cx="1039978" cy="204978"/>
+          </a:xfrm>
+          <a:prstGeom prst="rect">
+            <a:avLst/>
+          </a:prstGeom>
+          <a:noFill/>
+          <a:ln/>
+        </p:spPr>
+        <p:txBody>
+          <a:bodyPr wrap="square" lIns="0" tIns="0" rIns="0" bIns="0" rtlCol="0" anchor="ctr"/>
+          <a:lstStyle/>
+          <a:p>
+            <a:pPr algn="l" indent="0" marL="0">
+              <a:buNone/>
+            </a:pPr>
+            <a:r>
+              <a:rPr lang="en-US" sz="1100" b="1" dirty="0">
+                <a:solidFill>
+                  <a:srgbClr val="F96167"/>
+                </a:solidFill>
+                <a:latin typeface="Calibri" pitchFamily="34" charset="0"/>
+                <a:ea typeface="Calibri" pitchFamily="34" charset="-122"/>
+                <a:cs typeface="Calibri" pitchFamily="34" charset="-120"/>
+              </a:rPr>
+              <a:t>coméis</a:t>
             </a:r>
             <a:endParaRPr lang="en-US" sz="1100" dirty="0"/>
           </a:p>
-          <a:p>
-            <a:pPr indent="0" marL="0">
-              <a:lnSpc>
-                <a:spcPct val="115000"/>
-              </a:lnSpc>
-              <a:spcAft>
-                <a:spcPts val="100"/>
-              </a:spcAft>
-              <a:buNone/>
-            </a:pPr>
-            <a:r>
-              <a:rPr lang="en-US" sz="1100" dirty="0">
+        </p:txBody>
+      </p:sp>
+      <p:sp>
+        <p:nvSpPr>
+          <p:cNvPr id="98" name="Shape 96"/>
+          <p:cNvSpPr/>
+          <p:nvPr/>
+        </p:nvSpPr>
+        <p:spPr>
+          <a:xfrm>
+            <a:off x="2680716" y="6058662"/>
+            <a:ext cx="3038856" cy="0"/>
+          </a:xfrm>
+          <a:prstGeom prst="line">
+            <a:avLst/>
+          </a:prstGeom>
+          <a:noFill/>
+          <a:ln w="9525">
+            <a:solidFill>
+              <a:srgbClr val="E7E9F3"/>
+            </a:solidFill>
+            <a:prstDash val="solid"/>
+          </a:ln>
+        </p:spPr>
+      </p:sp>
+      <p:sp>
+        <p:nvSpPr>
+          <p:cNvPr id="99" name="Text 97"/>
+          <p:cNvSpPr/>
+          <p:nvPr/>
+        </p:nvSpPr>
+        <p:spPr>
+          <a:xfrm>
+            <a:off x="2717292" y="6058662"/>
+            <a:ext cx="1742846" cy="204978"/>
+          </a:xfrm>
+          <a:prstGeom prst="rect">
+            <a:avLst/>
+          </a:prstGeom>
+          <a:noFill/>
+          <a:ln/>
+        </p:spPr>
+        <p:txBody>
+          <a:bodyPr wrap="square" lIns="0" tIns="0" rIns="0" bIns="0" rtlCol="0" anchor="ctr"/>
+          <a:lstStyle/>
+          <a:p>
+            <a:pPr algn="r" indent="0" marL="0">
+              <a:buNone/>
+            </a:pPr>
+            <a:r>
+              <a:rPr lang="en-US" sz="1050" b="1" dirty="0">
                 <a:solidFill>
                   <a:srgbClr val="2F3C7E"/>
                 </a:solidFill>
@@ -11135,7 +12960,46 @@
                 <a:ea typeface="Calibri" pitchFamily="34" charset="-122"/>
                 <a:cs typeface="Calibri" pitchFamily="34" charset="-120"/>
               </a:rPr>
-              <a:t>ellos/ellas/Uds.  comen</a:t>
+              <a:t>ellos/ellas/Uds.</a:t>
+            </a:r>
+            <a:endParaRPr lang="en-US" sz="1050" dirty="0"/>
+          </a:p>
+        </p:txBody>
+      </p:sp>
+      <p:sp>
+        <p:nvSpPr>
+          <p:cNvPr id="100" name="Text 98"/>
+          <p:cNvSpPr/>
+          <p:nvPr/>
+        </p:nvSpPr>
+        <p:spPr>
+          <a:xfrm>
+            <a:off x="4771034" y="6058662"/>
+            <a:ext cx="1039978" cy="204978"/>
+          </a:xfrm>
+          <a:prstGeom prst="rect">
+            <a:avLst/>
+          </a:prstGeom>
+          <a:noFill/>
+          <a:ln/>
+        </p:spPr>
+        <p:txBody>
+          <a:bodyPr wrap="square" lIns="0" tIns="0" rIns="0" bIns="0" rtlCol="0" anchor="ctr"/>
+          <a:lstStyle/>
+          <a:p>
+            <a:pPr algn="l" indent="0" marL="0">
+              <a:buNone/>
+            </a:pPr>
+            <a:r>
+              <a:rPr lang="en-US" sz="1100" b="1" dirty="0">
+                <a:solidFill>
+                  <a:srgbClr val="F96167"/>
+                </a:solidFill>
+                <a:latin typeface="Calibri" pitchFamily="34" charset="0"/>
+                <a:ea typeface="Calibri" pitchFamily="34" charset="-122"/>
+                <a:cs typeface="Calibri" pitchFamily="34" charset="-120"/>
+              </a:rPr>
+              <a:t>comen</a:t>
             </a:r>
             <a:endParaRPr lang="en-US" sz="1100" dirty="0"/>
           </a:p>
@@ -11143,7 +13007,7 @@
       </p:sp>
       <p:sp>
         <p:nvSpPr>
-          <p:cNvPr id="29" name="Shape 27"/>
+          <p:cNvPr id="101" name="Shape 99"/>
           <p:cNvSpPr/>
           <p:nvPr/>
         </p:nvSpPr>
@@ -11172,7 +13036,7 @@
       </p:sp>
       <p:sp>
         <p:nvSpPr>
-          <p:cNvPr id="30" name="Shape 28"/>
+          <p:cNvPr id="102" name="Shape 100"/>
           <p:cNvSpPr/>
           <p:nvPr/>
         </p:nvSpPr>
@@ -11192,7 +13056,7 @@
       </p:sp>
       <p:sp>
         <p:nvSpPr>
-          <p:cNvPr id="31" name="Text 29"/>
+          <p:cNvPr id="103" name="Text 101"/>
           <p:cNvSpPr/>
           <p:nvPr/>
         </p:nvSpPr>
@@ -11228,7 +13092,7 @@
       </p:sp>
       <p:sp>
         <p:nvSpPr>
-          <p:cNvPr id="32" name="Text 30"/>
+          <p:cNvPr id="104" name="Text 102"/>
           <p:cNvSpPr/>
           <p:nvPr/>
         </p:nvSpPr>
@@ -11267,7 +13131,7 @@
       </p:sp>
       <p:sp>
         <p:nvSpPr>
-          <p:cNvPr id="33" name="Text 31"/>
+          <p:cNvPr id="105" name="Text 103"/>
           <p:cNvSpPr/>
           <p:nvPr/>
         </p:nvSpPr>
@@ -11306,36 +13170,73 @@
       </p:sp>
       <p:sp>
         <p:nvSpPr>
-          <p:cNvPr id="34" name="Text 32"/>
-          <p:cNvSpPr/>
-          <p:nvPr/>
-        </p:nvSpPr>
-        <p:spPr>
-          <a:xfrm>
-            <a:off x="6414516" y="5006340"/>
-            <a:ext cx="3148584" cy="1257300"/>
-          </a:xfrm>
-          <a:prstGeom prst="rect">
-            <a:avLst/>
-          </a:prstGeom>
-          <a:noFill/>
-          <a:ln/>
-        </p:spPr>
-        <p:txBody>
-          <a:bodyPr wrap="square" lIns="0" tIns="0" rIns="0" bIns="0" rtlCol="0" anchor="ctr"/>
-          <a:lstStyle/>
-          <a:p>
-            <a:pPr indent="0" marL="0">
-              <a:lnSpc>
-                <a:spcPct val="115000"/>
-              </a:lnSpc>
-              <a:spcAft>
-                <a:spcPts val="100"/>
-              </a:spcAft>
-              <a:buNone/>
-            </a:pPr>
-            <a:r>
-              <a:rPr lang="en-US" sz="1100" dirty="0">
+          <p:cNvPr id="106" name="Shape 104"/>
+          <p:cNvSpPr/>
+          <p:nvPr/>
+        </p:nvSpPr>
+        <p:spPr>
+          <a:xfrm>
+            <a:off x="6414516" y="5033772"/>
+            <a:ext cx="3148584" cy="1229868"/>
+          </a:xfrm>
+          <a:prstGeom prst="rect">
+            <a:avLst/>
+          </a:prstGeom>
+          <a:solidFill>
+            <a:srgbClr val="FFFFFF"/>
+          </a:solidFill>
+          <a:ln/>
+        </p:spPr>
+      </p:sp>
+      <p:sp>
+        <p:nvSpPr>
+          <p:cNvPr id="107" name="Shape 105"/>
+          <p:cNvSpPr/>
+          <p:nvPr/>
+        </p:nvSpPr>
+        <p:spPr>
+          <a:xfrm>
+            <a:off x="8431682" y="5088636"/>
+            <a:ext cx="0" cy="1120140"/>
+          </a:xfrm>
+          <a:prstGeom prst="line">
+            <a:avLst/>
+          </a:prstGeom>
+          <a:noFill/>
+          <a:ln w="12700">
+            <a:solidFill>
+              <a:srgbClr val="D8DBEA"/>
+            </a:solidFill>
+            <a:prstDash val="solid"/>
+          </a:ln>
+        </p:spPr>
+      </p:sp>
+      <p:sp>
+        <p:nvSpPr>
+          <p:cNvPr id="108" name="Text 106"/>
+          <p:cNvSpPr/>
+          <p:nvPr/>
+        </p:nvSpPr>
+        <p:spPr>
+          <a:xfrm>
+            <a:off x="6505956" y="5033772"/>
+            <a:ext cx="1742846" cy="204978"/>
+          </a:xfrm>
+          <a:prstGeom prst="rect">
+            <a:avLst/>
+          </a:prstGeom>
+          <a:noFill/>
+          <a:ln/>
+        </p:spPr>
+        <p:txBody>
+          <a:bodyPr wrap="square" lIns="0" tIns="0" rIns="0" bIns="0" rtlCol="0" anchor="ctr"/>
+          <a:lstStyle/>
+          <a:p>
+            <a:pPr algn="r" indent="0" marL="0">
+              <a:buNone/>
+            </a:pPr>
+            <a:r>
+              <a:rPr lang="en-US" sz="1050" b="1" dirty="0">
                 <a:solidFill>
                   <a:srgbClr val="2F3C7E"/>
                 </a:solidFill>
@@ -11343,22 +13244,100 @@
                 <a:ea typeface="Calibri" pitchFamily="34" charset="-122"/>
                 <a:cs typeface="Calibri" pitchFamily="34" charset="-120"/>
               </a:rPr>
-              <a:t>yo  vivo</a:t>
+              <a:t>yo</a:t>
+            </a:r>
+            <a:endParaRPr lang="en-US" sz="1050" dirty="0"/>
+          </a:p>
+        </p:txBody>
+      </p:sp>
+      <p:sp>
+        <p:nvSpPr>
+          <p:cNvPr id="109" name="Text 107"/>
+          <p:cNvSpPr/>
+          <p:nvPr/>
+        </p:nvSpPr>
+        <p:spPr>
+          <a:xfrm>
+            <a:off x="8559698" y="5033772"/>
+            <a:ext cx="1039978" cy="204978"/>
+          </a:xfrm>
+          <a:prstGeom prst="rect">
+            <a:avLst/>
+          </a:prstGeom>
+          <a:noFill/>
+          <a:ln/>
+        </p:spPr>
+        <p:txBody>
+          <a:bodyPr wrap="square" lIns="0" tIns="0" rIns="0" bIns="0" rtlCol="0" anchor="ctr"/>
+          <a:lstStyle/>
+          <a:p>
+            <a:pPr algn="l" indent="0" marL="0">
+              <a:buNone/>
+            </a:pPr>
+            <a:r>
+              <a:rPr lang="en-US" sz="1100" b="1" dirty="0">
+                <a:solidFill>
+                  <a:srgbClr val="F96167"/>
+                </a:solidFill>
+                <a:latin typeface="Calibri" pitchFamily="34" charset="0"/>
+                <a:ea typeface="Calibri" pitchFamily="34" charset="-122"/>
+                <a:cs typeface="Calibri" pitchFamily="34" charset="-120"/>
+              </a:rPr>
+              <a:t>vivo</a:t>
             </a:r>
             <a:endParaRPr lang="en-US" sz="1100" dirty="0"/>
           </a:p>
-          <a:p>
-            <a:pPr indent="0" marL="0">
-              <a:lnSpc>
-                <a:spcPct val="115000"/>
-              </a:lnSpc>
-              <a:spcAft>
-                <a:spcPts val="100"/>
-              </a:spcAft>
-              <a:buNone/>
-            </a:pPr>
-            <a:r>
-              <a:rPr lang="en-US" sz="1100" dirty="0">
+        </p:txBody>
+      </p:sp>
+      <p:sp>
+        <p:nvSpPr>
+          <p:cNvPr id="110" name="Shape 108"/>
+          <p:cNvSpPr/>
+          <p:nvPr/>
+        </p:nvSpPr>
+        <p:spPr>
+          <a:xfrm>
+            <a:off x="6469380" y="5238750"/>
+            <a:ext cx="3038856" cy="0"/>
+          </a:xfrm>
+          <a:prstGeom prst="line">
+            <a:avLst/>
+          </a:prstGeom>
+          <a:noFill/>
+          <a:ln w="9525">
+            <a:solidFill>
+              <a:srgbClr val="E7E9F3"/>
+            </a:solidFill>
+            <a:prstDash val="solid"/>
+          </a:ln>
+        </p:spPr>
+      </p:sp>
+      <p:sp>
+        <p:nvSpPr>
+          <p:cNvPr id="111" name="Text 109"/>
+          <p:cNvSpPr/>
+          <p:nvPr/>
+        </p:nvSpPr>
+        <p:spPr>
+          <a:xfrm>
+            <a:off x="6505956" y="5238750"/>
+            <a:ext cx="1742846" cy="204978"/>
+          </a:xfrm>
+          <a:prstGeom prst="rect">
+            <a:avLst/>
+          </a:prstGeom>
+          <a:noFill/>
+          <a:ln/>
+        </p:spPr>
+        <p:txBody>
+          <a:bodyPr wrap="square" lIns="0" tIns="0" rIns="0" bIns="0" rtlCol="0" anchor="ctr"/>
+          <a:lstStyle/>
+          <a:p>
+            <a:pPr algn="r" indent="0" marL="0">
+              <a:buNone/>
+            </a:pPr>
+            <a:r>
+              <a:rPr lang="en-US" sz="1050" b="1" dirty="0">
                 <a:solidFill>
                   <a:srgbClr val="2F3C7E"/>
                 </a:solidFill>
@@ -11366,22 +13345,100 @@
                 <a:ea typeface="Calibri" pitchFamily="34" charset="-122"/>
                 <a:cs typeface="Calibri" pitchFamily="34" charset="-120"/>
               </a:rPr>
-              <a:t>tú  vives</a:t>
+              <a:t>tú</a:t>
+            </a:r>
+            <a:endParaRPr lang="en-US" sz="1050" dirty="0"/>
+          </a:p>
+        </p:txBody>
+      </p:sp>
+      <p:sp>
+        <p:nvSpPr>
+          <p:cNvPr id="112" name="Text 110"/>
+          <p:cNvSpPr/>
+          <p:nvPr/>
+        </p:nvSpPr>
+        <p:spPr>
+          <a:xfrm>
+            <a:off x="8559698" y="5238750"/>
+            <a:ext cx="1039978" cy="204978"/>
+          </a:xfrm>
+          <a:prstGeom prst="rect">
+            <a:avLst/>
+          </a:prstGeom>
+          <a:noFill/>
+          <a:ln/>
+        </p:spPr>
+        <p:txBody>
+          <a:bodyPr wrap="square" lIns="0" tIns="0" rIns="0" bIns="0" rtlCol="0" anchor="ctr"/>
+          <a:lstStyle/>
+          <a:p>
+            <a:pPr algn="l" indent="0" marL="0">
+              <a:buNone/>
+            </a:pPr>
+            <a:r>
+              <a:rPr lang="en-US" sz="1100" b="1" dirty="0">
+                <a:solidFill>
+                  <a:srgbClr val="F96167"/>
+                </a:solidFill>
+                <a:latin typeface="Calibri" pitchFamily="34" charset="0"/>
+                <a:ea typeface="Calibri" pitchFamily="34" charset="-122"/>
+                <a:cs typeface="Calibri" pitchFamily="34" charset="-120"/>
+              </a:rPr>
+              <a:t>vives</a:t>
             </a:r>
             <a:endParaRPr lang="en-US" sz="1100" dirty="0"/>
           </a:p>
-          <a:p>
-            <a:pPr indent="0" marL="0">
-              <a:lnSpc>
-                <a:spcPct val="115000"/>
-              </a:lnSpc>
-              <a:spcAft>
-                <a:spcPts val="100"/>
-              </a:spcAft>
-              <a:buNone/>
-            </a:pPr>
-            <a:r>
-              <a:rPr lang="en-US" sz="1100" dirty="0">
+        </p:txBody>
+      </p:sp>
+      <p:sp>
+        <p:nvSpPr>
+          <p:cNvPr id="113" name="Shape 111"/>
+          <p:cNvSpPr/>
+          <p:nvPr/>
+        </p:nvSpPr>
+        <p:spPr>
+          <a:xfrm>
+            <a:off x="6469380" y="5443728"/>
+            <a:ext cx="3038856" cy="0"/>
+          </a:xfrm>
+          <a:prstGeom prst="line">
+            <a:avLst/>
+          </a:prstGeom>
+          <a:noFill/>
+          <a:ln w="9525">
+            <a:solidFill>
+              <a:srgbClr val="E7E9F3"/>
+            </a:solidFill>
+            <a:prstDash val="solid"/>
+          </a:ln>
+        </p:spPr>
+      </p:sp>
+      <p:sp>
+        <p:nvSpPr>
+          <p:cNvPr id="114" name="Text 112"/>
+          <p:cNvSpPr/>
+          <p:nvPr/>
+        </p:nvSpPr>
+        <p:spPr>
+          <a:xfrm>
+            <a:off x="6505956" y="5443728"/>
+            <a:ext cx="1742846" cy="204978"/>
+          </a:xfrm>
+          <a:prstGeom prst="rect">
+            <a:avLst/>
+          </a:prstGeom>
+          <a:noFill/>
+          <a:ln/>
+        </p:spPr>
+        <p:txBody>
+          <a:bodyPr wrap="square" lIns="0" tIns="0" rIns="0" bIns="0" rtlCol="0" anchor="ctr"/>
+          <a:lstStyle/>
+          <a:p>
+            <a:pPr algn="r" indent="0" marL="0">
+              <a:buNone/>
+            </a:pPr>
+            <a:r>
+              <a:rPr lang="en-US" sz="1050" b="1" dirty="0">
                 <a:solidFill>
                   <a:srgbClr val="2F3C7E"/>
                 </a:solidFill>
@@ -11389,22 +13446,100 @@
                 <a:ea typeface="Calibri" pitchFamily="34" charset="-122"/>
                 <a:cs typeface="Calibri" pitchFamily="34" charset="-120"/>
               </a:rPr>
-              <a:t>él/ella/Ud.  vive</a:t>
+              <a:t>él/ella/Ud.</a:t>
+            </a:r>
+            <a:endParaRPr lang="en-US" sz="1050" dirty="0"/>
+          </a:p>
+        </p:txBody>
+      </p:sp>
+      <p:sp>
+        <p:nvSpPr>
+          <p:cNvPr id="115" name="Text 113"/>
+          <p:cNvSpPr/>
+          <p:nvPr/>
+        </p:nvSpPr>
+        <p:spPr>
+          <a:xfrm>
+            <a:off x="8559698" y="5443728"/>
+            <a:ext cx="1039978" cy="204978"/>
+          </a:xfrm>
+          <a:prstGeom prst="rect">
+            <a:avLst/>
+          </a:prstGeom>
+          <a:noFill/>
+          <a:ln/>
+        </p:spPr>
+        <p:txBody>
+          <a:bodyPr wrap="square" lIns="0" tIns="0" rIns="0" bIns="0" rtlCol="0" anchor="ctr"/>
+          <a:lstStyle/>
+          <a:p>
+            <a:pPr algn="l" indent="0" marL="0">
+              <a:buNone/>
+            </a:pPr>
+            <a:r>
+              <a:rPr lang="en-US" sz="1100" b="1" dirty="0">
+                <a:solidFill>
+                  <a:srgbClr val="F96167"/>
+                </a:solidFill>
+                <a:latin typeface="Calibri" pitchFamily="34" charset="0"/>
+                <a:ea typeface="Calibri" pitchFamily="34" charset="-122"/>
+                <a:cs typeface="Calibri" pitchFamily="34" charset="-120"/>
+              </a:rPr>
+              <a:t>vive</a:t>
             </a:r>
             <a:endParaRPr lang="en-US" sz="1100" dirty="0"/>
           </a:p>
-          <a:p>
-            <a:pPr indent="0" marL="0">
-              <a:lnSpc>
-                <a:spcPct val="115000"/>
-              </a:lnSpc>
-              <a:spcAft>
-                <a:spcPts val="100"/>
-              </a:spcAft>
-              <a:buNone/>
-            </a:pPr>
-            <a:r>
-              <a:rPr lang="en-US" sz="1100" dirty="0">
+        </p:txBody>
+      </p:sp>
+      <p:sp>
+        <p:nvSpPr>
+          <p:cNvPr id="116" name="Shape 114"/>
+          <p:cNvSpPr/>
+          <p:nvPr/>
+        </p:nvSpPr>
+        <p:spPr>
+          <a:xfrm>
+            <a:off x="6469380" y="5648706"/>
+            <a:ext cx="3038856" cy="0"/>
+          </a:xfrm>
+          <a:prstGeom prst="line">
+            <a:avLst/>
+          </a:prstGeom>
+          <a:noFill/>
+          <a:ln w="9525">
+            <a:solidFill>
+              <a:srgbClr val="E7E9F3"/>
+            </a:solidFill>
+            <a:prstDash val="solid"/>
+          </a:ln>
+        </p:spPr>
+      </p:sp>
+      <p:sp>
+        <p:nvSpPr>
+          <p:cNvPr id="117" name="Text 115"/>
+          <p:cNvSpPr/>
+          <p:nvPr/>
+        </p:nvSpPr>
+        <p:spPr>
+          <a:xfrm>
+            <a:off x="6505956" y="5648706"/>
+            <a:ext cx="1742846" cy="204978"/>
+          </a:xfrm>
+          <a:prstGeom prst="rect">
+            <a:avLst/>
+          </a:prstGeom>
+          <a:noFill/>
+          <a:ln/>
+        </p:spPr>
+        <p:txBody>
+          <a:bodyPr wrap="square" lIns="0" tIns="0" rIns="0" bIns="0" rtlCol="0" anchor="ctr"/>
+          <a:lstStyle/>
+          <a:p>
+            <a:pPr algn="r" indent="0" marL="0">
+              <a:buNone/>
+            </a:pPr>
+            <a:r>
+              <a:rPr lang="en-US" sz="1050" b="1" dirty="0">
                 <a:solidFill>
                   <a:srgbClr val="2F3C7E"/>
                 </a:solidFill>
@@ -11412,22 +13547,100 @@
                 <a:ea typeface="Calibri" pitchFamily="34" charset="-122"/>
                 <a:cs typeface="Calibri" pitchFamily="34" charset="-120"/>
               </a:rPr>
-              <a:t>nosotros/nosotras  vivimos</a:t>
+              <a:t>nosotros/nosotras</a:t>
+            </a:r>
+            <a:endParaRPr lang="en-US" sz="1050" dirty="0"/>
+          </a:p>
+        </p:txBody>
+      </p:sp>
+      <p:sp>
+        <p:nvSpPr>
+          <p:cNvPr id="118" name="Text 116"/>
+          <p:cNvSpPr/>
+          <p:nvPr/>
+        </p:nvSpPr>
+        <p:spPr>
+          <a:xfrm>
+            <a:off x="8559698" y="5648706"/>
+            <a:ext cx="1039978" cy="204978"/>
+          </a:xfrm>
+          <a:prstGeom prst="rect">
+            <a:avLst/>
+          </a:prstGeom>
+          <a:noFill/>
+          <a:ln/>
+        </p:spPr>
+        <p:txBody>
+          <a:bodyPr wrap="square" lIns="0" tIns="0" rIns="0" bIns="0" rtlCol="0" anchor="ctr"/>
+          <a:lstStyle/>
+          <a:p>
+            <a:pPr algn="l" indent="0" marL="0">
+              <a:buNone/>
+            </a:pPr>
+            <a:r>
+              <a:rPr lang="en-US" sz="1100" b="1" dirty="0">
+                <a:solidFill>
+                  <a:srgbClr val="F96167"/>
+                </a:solidFill>
+                <a:latin typeface="Calibri" pitchFamily="34" charset="0"/>
+                <a:ea typeface="Calibri" pitchFamily="34" charset="-122"/>
+                <a:cs typeface="Calibri" pitchFamily="34" charset="-120"/>
+              </a:rPr>
+              <a:t>vivimos</a:t>
             </a:r>
             <a:endParaRPr lang="en-US" sz="1100" dirty="0"/>
           </a:p>
-          <a:p>
-            <a:pPr indent="0" marL="0">
-              <a:lnSpc>
-                <a:spcPct val="115000"/>
-              </a:lnSpc>
-              <a:spcAft>
-                <a:spcPts val="100"/>
-              </a:spcAft>
-              <a:buNone/>
-            </a:pPr>
-            <a:r>
-              <a:rPr lang="en-US" sz="1100" dirty="0">
+        </p:txBody>
+      </p:sp>
+      <p:sp>
+        <p:nvSpPr>
+          <p:cNvPr id="119" name="Shape 117"/>
+          <p:cNvSpPr/>
+          <p:nvPr/>
+        </p:nvSpPr>
+        <p:spPr>
+          <a:xfrm>
+            <a:off x="6469380" y="5853684"/>
+            <a:ext cx="3038856" cy="0"/>
+          </a:xfrm>
+          <a:prstGeom prst="line">
+            <a:avLst/>
+          </a:prstGeom>
+          <a:noFill/>
+          <a:ln w="9525">
+            <a:solidFill>
+              <a:srgbClr val="E7E9F3"/>
+            </a:solidFill>
+            <a:prstDash val="solid"/>
+          </a:ln>
+        </p:spPr>
+      </p:sp>
+      <p:sp>
+        <p:nvSpPr>
+          <p:cNvPr id="120" name="Text 118"/>
+          <p:cNvSpPr/>
+          <p:nvPr/>
+        </p:nvSpPr>
+        <p:spPr>
+          <a:xfrm>
+            <a:off x="6505956" y="5853684"/>
+            <a:ext cx="1742846" cy="204978"/>
+          </a:xfrm>
+          <a:prstGeom prst="rect">
+            <a:avLst/>
+          </a:prstGeom>
+          <a:noFill/>
+          <a:ln/>
+        </p:spPr>
+        <p:txBody>
+          <a:bodyPr wrap="square" lIns="0" tIns="0" rIns="0" bIns="0" rtlCol="0" anchor="ctr"/>
+          <a:lstStyle/>
+          <a:p>
+            <a:pPr algn="r" indent="0" marL="0">
+              <a:buNone/>
+            </a:pPr>
+            <a:r>
+              <a:rPr lang="en-US" sz="1050" b="1" dirty="0">
                 <a:solidFill>
                   <a:srgbClr val="2F3C7E"/>
                 </a:solidFill>
@@ -11435,22 +13648,100 @@
                 <a:ea typeface="Calibri" pitchFamily="34" charset="-122"/>
                 <a:cs typeface="Calibri" pitchFamily="34" charset="-120"/>
               </a:rPr>
-              <a:t>vosotros/vosotras  vivís</a:t>
+              <a:t>vosotros/vosotras</a:t>
+            </a:r>
+            <a:endParaRPr lang="en-US" sz="1050" dirty="0"/>
+          </a:p>
+        </p:txBody>
+      </p:sp>
+      <p:sp>
+        <p:nvSpPr>
+          <p:cNvPr id="121" name="Text 119"/>
+          <p:cNvSpPr/>
+          <p:nvPr/>
+        </p:nvSpPr>
+        <p:spPr>
+          <a:xfrm>
+            <a:off x="8559698" y="5853684"/>
+            <a:ext cx="1039978" cy="204978"/>
+          </a:xfrm>
+          <a:prstGeom prst="rect">
+            <a:avLst/>
+          </a:prstGeom>
+          <a:noFill/>
+          <a:ln/>
+        </p:spPr>
+        <p:txBody>
+          <a:bodyPr wrap="square" lIns="0" tIns="0" rIns="0" bIns="0" rtlCol="0" anchor="ctr"/>
+          <a:lstStyle/>
+          <a:p>
+            <a:pPr algn="l" indent="0" marL="0">
+              <a:buNone/>
+            </a:pPr>
+            <a:r>
+              <a:rPr lang="en-US" sz="1100" b="1" dirty="0">
+                <a:solidFill>
+                  <a:srgbClr val="F96167"/>
+                </a:solidFill>
+                <a:latin typeface="Calibri" pitchFamily="34" charset="0"/>
+                <a:ea typeface="Calibri" pitchFamily="34" charset="-122"/>
+                <a:cs typeface="Calibri" pitchFamily="34" charset="-120"/>
+              </a:rPr>
+              <a:t>vivís</a:t>
             </a:r>
             <a:endParaRPr lang="en-US" sz="1100" dirty="0"/>
           </a:p>
-          <a:p>
-            <a:pPr indent="0" marL="0">
-              <a:lnSpc>
-                <a:spcPct val="115000"/>
-              </a:lnSpc>
-              <a:spcAft>
-                <a:spcPts val="100"/>
-              </a:spcAft>
-              <a:buNone/>
-            </a:pPr>
-            <a:r>
-              <a:rPr lang="en-US" sz="1100" dirty="0">
+        </p:txBody>
+      </p:sp>
+      <p:sp>
+        <p:nvSpPr>
+          <p:cNvPr id="122" name="Shape 120"/>
+          <p:cNvSpPr/>
+          <p:nvPr/>
+        </p:nvSpPr>
+        <p:spPr>
+          <a:xfrm>
+            <a:off x="6469380" y="6058662"/>
+            <a:ext cx="3038856" cy="0"/>
+          </a:xfrm>
+          <a:prstGeom prst="line">
+            <a:avLst/>
+          </a:prstGeom>
+          <a:noFill/>
+          <a:ln w="9525">
+            <a:solidFill>
+              <a:srgbClr val="E7E9F3"/>
+            </a:solidFill>
+            <a:prstDash val="solid"/>
+          </a:ln>
+        </p:spPr>
+      </p:sp>
+      <p:sp>
+        <p:nvSpPr>
+          <p:cNvPr id="123" name="Text 121"/>
+          <p:cNvSpPr/>
+          <p:nvPr/>
+        </p:nvSpPr>
+        <p:spPr>
+          <a:xfrm>
+            <a:off x="6505956" y="6058662"/>
+            <a:ext cx="1742846" cy="204978"/>
+          </a:xfrm>
+          <a:prstGeom prst="rect">
+            <a:avLst/>
+          </a:prstGeom>
+          <a:noFill/>
+          <a:ln/>
+        </p:spPr>
+        <p:txBody>
+          <a:bodyPr wrap="square" lIns="0" tIns="0" rIns="0" bIns="0" rtlCol="0" anchor="ctr"/>
+          <a:lstStyle/>
+          <a:p>
+            <a:pPr algn="r" indent="0" marL="0">
+              <a:buNone/>
+            </a:pPr>
+            <a:r>
+              <a:rPr lang="en-US" sz="1050" b="1" dirty="0">
                 <a:solidFill>
                   <a:srgbClr val="2F3C7E"/>
                 </a:solidFill>
@@ -11458,7 +13749,46 @@
                 <a:ea typeface="Calibri" pitchFamily="34" charset="-122"/>
                 <a:cs typeface="Calibri" pitchFamily="34" charset="-120"/>
               </a:rPr>
-              <a:t>ellos/ellas/Uds.  viven</a:t>
+              <a:t>ellos/ellas/Uds.</a:t>
+            </a:r>
+            <a:endParaRPr lang="en-US" sz="1050" dirty="0"/>
+          </a:p>
+        </p:txBody>
+      </p:sp>
+      <p:sp>
+        <p:nvSpPr>
+          <p:cNvPr id="124" name="Text 122"/>
+          <p:cNvSpPr/>
+          <p:nvPr/>
+        </p:nvSpPr>
+        <p:spPr>
+          <a:xfrm>
+            <a:off x="8559698" y="6058662"/>
+            <a:ext cx="1039978" cy="204978"/>
+          </a:xfrm>
+          <a:prstGeom prst="rect">
+            <a:avLst/>
+          </a:prstGeom>
+          <a:noFill/>
+          <a:ln/>
+        </p:spPr>
+        <p:txBody>
+          <a:bodyPr wrap="square" lIns="0" tIns="0" rIns="0" bIns="0" rtlCol="0" anchor="ctr"/>
+          <a:lstStyle/>
+          <a:p>
+            <a:pPr algn="l" indent="0" marL="0">
+              <a:buNone/>
+            </a:pPr>
+            <a:r>
+              <a:rPr lang="en-US" sz="1100" b="1" dirty="0">
+                <a:solidFill>
+                  <a:srgbClr val="F96167"/>
+                </a:solidFill>
+                <a:latin typeface="Calibri" pitchFamily="34" charset="0"/>
+                <a:ea typeface="Calibri" pitchFamily="34" charset="-122"/>
+                <a:cs typeface="Calibri" pitchFamily="34" charset="-120"/>
+              </a:rPr>
+              <a:t>viven</a:t>
             </a:r>
             <a:endParaRPr lang="en-US" sz="1100" dirty="0"/>
           </a:p>
@@ -11466,7 +13796,7 @@
       </p:sp>
       <p:sp>
         <p:nvSpPr>
-          <p:cNvPr id="35" name="Text 33"/>
+          <p:cNvPr id="125" name="Text 123"/>
           <p:cNvSpPr/>
           <p:nvPr/>
         </p:nvSpPr>
@@ -11505,7 +13835,7 @@
       </p:sp>
       <p:sp>
         <p:nvSpPr>
-          <p:cNvPr id="36" name="Text 34"/>
+          <p:cNvPr id="126" name="Text 124"/>
           <p:cNvSpPr/>
           <p:nvPr/>
         </p:nvSpPr>
@@ -11536,7 +13866,7 @@
                 <a:ea typeface="Calibri" pitchFamily="34" charset="-122"/>
                 <a:cs typeface="Calibri" pitchFamily="34" charset="-120"/>
               </a:rPr>
-              <a:t>© Ángel Luis Acosta González</a:t>
+              <a:t>© Angel Luis Acosta González</a:t>
             </a:r>
             <a:endParaRPr lang="en-US" sz="900" dirty="0"/>
           </a:p>
@@ -14391,7 +16721,7 @@
                 <a:ea typeface="Calibri" pitchFamily="34" charset="-122"/>
                 <a:cs typeface="Calibri" pitchFamily="34" charset="-120"/>
               </a:rPr>
-              <a:t>© Ángel Luis Acosta González</a:t>
+              <a:t>© Angel Luis Acosta González</a:t>
             </a:r>
             <a:endParaRPr lang="en-US" sz="900" dirty="0"/>
           </a:p>
@@ -14655,7 +16985,7 @@
                 <a:ea typeface="Cambria" pitchFamily="34" charset="-122"/>
                 <a:cs typeface="Cambria" pitchFamily="34" charset="-120"/>
               </a:rPr>
-              <a:t>— Ángel Luis Acosta González, tu profesor de español</a:t>
+              <a:t>— Angel Luis Acosta González, tu profesor de español</a:t>
             </a:r>
             <a:endParaRPr lang="en-US" sz="1500" dirty="0"/>
           </a:p>
@@ -16979,7 +19309,7 @@
                 <a:ea typeface="Calibri" pitchFamily="34" charset="-122"/>
                 <a:cs typeface="Calibri" pitchFamily="34" charset="-120"/>
               </a:rPr>
-              <a:t>© Ángel Luis Acosta González</a:t>
+              <a:t>© Angel Luis Acosta González</a:t>
             </a:r>
             <a:endParaRPr lang="en-US" sz="900" dirty="0"/>
           </a:p>
@@ -18823,7 +21153,7 @@
                 <a:ea typeface="Calibri" pitchFamily="34" charset="-122"/>
                 <a:cs typeface="Calibri" pitchFamily="34" charset="-120"/>
               </a:rPr>
-              <a:t>© Ángel Luis Acosta González</a:t>
+              <a:t>© Angel Luis Acosta González</a:t>
             </a:r>
             <a:endParaRPr lang="en-US" sz="900" dirty="0"/>
           </a:p>
@@ -20520,7 +22850,7 @@
                 <a:ea typeface="Calibri" pitchFamily="34" charset="-122"/>
                 <a:cs typeface="Calibri" pitchFamily="34" charset="-120"/>
               </a:rPr>
-              <a:t>© Ángel Luis Acosta González</a:t>
+              <a:t>© Angel Luis Acosta González</a:t>
             </a:r>
             <a:endParaRPr lang="en-US" sz="900" dirty="0"/>
           </a:p>
@@ -20669,7 +22999,7 @@
                 <a:ea typeface="Calibri" pitchFamily="34" charset="-122"/>
                 <a:cs typeface="Calibri" pitchFamily="34" charset="-120"/>
               </a:rPr>
-              <a:t>Las palabras clave para preguntar</a:t>
+              <a:t>Dónde, de dónde y adónde: no son lo mismo</a:t>
             </a:r>
             <a:endParaRPr lang="en-US" sz="1400" dirty="0"/>
           </a:p>
@@ -20683,12 +23013,12 @@
         </p:nvSpPr>
         <p:spPr>
           <a:xfrm>
-            <a:off x="548640" y="1746504"/>
-            <a:ext cx="3563112" cy="1371600"/>
+            <a:off x="548640" y="1600200"/>
+            <a:ext cx="11091672" cy="2148840"/>
           </a:xfrm>
           <a:prstGeom prst="roundRect">
             <a:avLst>
-              <a:gd name="adj" fmla="val 6000"/>
+              <a:gd name="adj" fmla="val 4255"/>
             </a:avLst>
           </a:prstGeom>
           <a:solidFill>
@@ -20712,8 +23042,8 @@
         </p:nvSpPr>
         <p:spPr>
           <a:xfrm>
-            <a:off x="676656" y="2176272"/>
-            <a:ext cx="512064" cy="512064"/>
+            <a:off x="1778508" y="1856232"/>
+            <a:ext cx="603504" cy="603504"/>
           </a:xfrm>
           <a:prstGeom prst="ellipse">
             <a:avLst/>
@@ -20732,8 +23062,8 @@
         </p:nvSpPr>
         <p:spPr>
           <a:xfrm>
-            <a:off x="676656" y="2176272"/>
-            <a:ext cx="512064" cy="512064"/>
+            <a:off x="1778508" y="1856232"/>
+            <a:ext cx="603504" cy="603504"/>
           </a:xfrm>
           <a:prstGeom prst="rect">
             <a:avLst/>
@@ -20749,12 +23079,51 @@
               <a:buNone/>
             </a:pPr>
             <a:r>
-              <a:rPr lang="en-US" sz="1900" dirty="0">
+              <a:rPr lang="en-US" sz="3200" dirty="0">
                 <a:solidFill>
                   <a:srgbClr val="000000"/>
                 </a:solidFill>
               </a:rPr>
-              <a:t>❓</a:t>
+              <a:t>🏠</a:t>
+            </a:r>
+            <a:endParaRPr lang="en-US" sz="3200" dirty="0"/>
+          </a:p>
+        </p:txBody>
+      </p:sp>
+      <p:sp>
+        <p:nvSpPr>
+          <p:cNvPr id="8" name="Text 6"/>
+          <p:cNvSpPr/>
+          <p:nvPr/>
+        </p:nvSpPr>
+        <p:spPr>
+          <a:xfrm>
+            <a:off x="548640" y="2569464"/>
+            <a:ext cx="3063240" cy="365760"/>
+          </a:xfrm>
+          <a:prstGeom prst="rect">
+            <a:avLst/>
+          </a:prstGeom>
+          <a:noFill/>
+          <a:ln/>
+        </p:spPr>
+        <p:txBody>
+          <a:bodyPr wrap="square" lIns="0" tIns="0" rIns="0" bIns="0" rtlCol="0" anchor="ctr"/>
+          <a:lstStyle/>
+          <a:p>
+            <a:pPr algn="ctr" indent="0" marL="0">
+              <a:buNone/>
+            </a:pPr>
+            <a:r>
+              <a:rPr lang="en-US" sz="1900" b="1" dirty="0">
+                <a:solidFill>
+                  <a:srgbClr val="2F3C7E"/>
+                </a:solidFill>
+                <a:latin typeface="Calibri" pitchFamily="34" charset="0"/>
+                <a:ea typeface="Calibri" pitchFamily="34" charset="-122"/>
+                <a:cs typeface="Calibri" pitchFamily="34" charset="-120"/>
+              </a:rPr>
+              <a:t>de dónde</a:t>
             </a:r>
             <a:endParaRPr lang="en-US" sz="1900" dirty="0"/>
           </a:p>
@@ -20762,33 +23131,164 @@
       </p:sp>
       <p:sp>
         <p:nvSpPr>
-          <p:cNvPr id="8" name="Text 6"/>
-          <p:cNvSpPr/>
-          <p:nvPr/>
-        </p:nvSpPr>
-        <p:spPr>
-          <a:xfrm>
-            <a:off x="1316736" y="1792224"/>
-            <a:ext cx="2685288" cy="1280160"/>
-          </a:xfrm>
-          <a:prstGeom prst="rect">
-            <a:avLst/>
-          </a:prstGeom>
-          <a:noFill/>
-          <a:ln/>
-        </p:spPr>
-        <p:txBody>
-          <a:bodyPr wrap="square" lIns="0" tIns="0" rIns="0" bIns="0" rtlCol="0" anchor="ctr"/>
-          <a:lstStyle/>
-          <a:p>
-            <a:pPr indent="0" marL="0">
-              <a:lnSpc>
-                <a:spcPct val="105000"/>
-              </a:lnSpc>
-              <a:buNone/>
-            </a:pPr>
-            <a:r>
-              <a:rPr lang="en-US" sz="1500" b="1" dirty="0">
+          <p:cNvPr id="9" name="Text 7"/>
+          <p:cNvSpPr/>
+          <p:nvPr/>
+        </p:nvSpPr>
+        <p:spPr>
+          <a:xfrm>
+            <a:off x="548640" y="2935224"/>
+            <a:ext cx="3063240" cy="292608"/>
+          </a:xfrm>
+          <a:prstGeom prst="rect">
+            <a:avLst/>
+          </a:prstGeom>
+          <a:noFill/>
+          <a:ln/>
+        </p:spPr>
+        <p:txBody>
+          <a:bodyPr wrap="square" lIns="0" tIns="0" rIns="0" bIns="0" rtlCol="0" anchor="ctr"/>
+          <a:lstStyle/>
+          <a:p>
+            <a:pPr algn="ctr" indent="0" marL="0">
+              <a:buNone/>
+            </a:pPr>
+            <a:r>
+              <a:rPr lang="en-US" sz="1250" dirty="0">
+                <a:solidFill>
+                  <a:srgbClr val="5C6690"/>
+                </a:solidFill>
+                <a:latin typeface="Calibri" pitchFamily="34" charset="0"/>
+                <a:ea typeface="Calibri" pitchFamily="34" charset="-122"/>
+                <a:cs typeface="Calibri" pitchFamily="34" charset="-120"/>
+              </a:rPr>
+              <a:t>откуда</a:t>
+            </a:r>
+            <a:endParaRPr lang="en-US" sz="1250" dirty="0"/>
+          </a:p>
+        </p:txBody>
+      </p:sp>
+      <p:sp>
+        <p:nvSpPr>
+          <p:cNvPr id="10" name="Text 8"/>
+          <p:cNvSpPr/>
+          <p:nvPr/>
+        </p:nvSpPr>
+        <p:spPr>
+          <a:xfrm>
+            <a:off x="640080" y="3227832"/>
+            <a:ext cx="2880360" cy="365760"/>
+          </a:xfrm>
+          <a:prstGeom prst="rect">
+            <a:avLst/>
+          </a:prstGeom>
+          <a:noFill/>
+          <a:ln/>
+        </p:spPr>
+        <p:txBody>
+          <a:bodyPr wrap="square" lIns="0" tIns="0" rIns="0" bIns="0" rtlCol="0" anchor="ctr"/>
+          <a:lstStyle/>
+          <a:p>
+            <a:pPr algn="ctr" indent="0" marL="0">
+              <a:buNone/>
+            </a:pPr>
+            <a:r>
+              <a:rPr lang="en-US" sz="1050" i="1" dirty="0">
+                <a:solidFill>
+                  <a:srgbClr val="5C6690"/>
+                </a:solidFill>
+                <a:latin typeface="Calibri" pitchFamily="34" charset="0"/>
+                <a:ea typeface="Calibri" pitchFamily="34" charset="-122"/>
+                <a:cs typeface="Calibri" pitchFamily="34" charset="-120"/>
+              </a:rPr>
+              <a:t>(punto de partida: ¿de dónde eres?)</a:t>
+            </a:r>
+            <a:endParaRPr lang="en-US" sz="1050" dirty="0"/>
+          </a:p>
+        </p:txBody>
+      </p:sp>
+      <p:sp>
+        <p:nvSpPr>
+          <p:cNvPr id="11" name="Shape 9"/>
+          <p:cNvSpPr/>
+          <p:nvPr/>
+        </p:nvSpPr>
+        <p:spPr>
+          <a:xfrm>
+            <a:off x="5792724" y="1856232"/>
+            <a:ext cx="603504" cy="603504"/>
+          </a:xfrm>
+          <a:prstGeom prst="ellipse">
+            <a:avLst/>
+          </a:prstGeom>
+          <a:solidFill>
+            <a:srgbClr val="F96167"/>
+          </a:solidFill>
+          <a:ln/>
+        </p:spPr>
+      </p:sp>
+      <p:sp>
+        <p:nvSpPr>
+          <p:cNvPr id="12" name="Text 10"/>
+          <p:cNvSpPr/>
+          <p:nvPr/>
+        </p:nvSpPr>
+        <p:spPr>
+          <a:xfrm>
+            <a:off x="5792724" y="1856232"/>
+            <a:ext cx="603504" cy="603504"/>
+          </a:xfrm>
+          <a:prstGeom prst="rect">
+            <a:avLst/>
+          </a:prstGeom>
+          <a:noFill/>
+          <a:ln/>
+        </p:spPr>
+        <p:txBody>
+          <a:bodyPr wrap="square" lIns="0" tIns="0" rIns="0" bIns="0" rtlCol="0" anchor="ctr"/>
+          <a:lstStyle/>
+          <a:p>
+            <a:pPr algn="ctr" indent="0" marL="0">
+              <a:buNone/>
+            </a:pPr>
+            <a:r>
+              <a:rPr lang="en-US" sz="3200" dirty="0">
+                <a:solidFill>
+                  <a:srgbClr val="000000"/>
+                </a:solidFill>
+              </a:rPr>
+              <a:t>📍</a:t>
+            </a:r>
+            <a:endParaRPr lang="en-US" sz="3200" dirty="0"/>
+          </a:p>
+        </p:txBody>
+      </p:sp>
+      <p:sp>
+        <p:nvSpPr>
+          <p:cNvPr id="13" name="Text 11"/>
+          <p:cNvSpPr/>
+          <p:nvPr/>
+        </p:nvSpPr>
+        <p:spPr>
+          <a:xfrm>
+            <a:off x="4562856" y="2569464"/>
+            <a:ext cx="3063240" cy="365760"/>
+          </a:xfrm>
+          <a:prstGeom prst="rect">
+            <a:avLst/>
+          </a:prstGeom>
+          <a:noFill/>
+          <a:ln/>
+        </p:spPr>
+        <p:txBody>
+          <a:bodyPr wrap="square" lIns="0" tIns="0" rIns="0" bIns="0" rtlCol="0" anchor="ctr"/>
+          <a:lstStyle/>
+          <a:p>
+            <a:pPr algn="ctr" indent="0" marL="0">
+              <a:buNone/>
+            </a:pPr>
+            <a:r>
+              <a:rPr lang="en-US" sz="1900" b="1" dirty="0">
                 <a:solidFill>
                   <a:srgbClr val="2F3C7E"/>
                 </a:solidFill>
@@ -20796,19 +23296,38 @@
                 <a:ea typeface="Calibri" pitchFamily="34" charset="-122"/>
                 <a:cs typeface="Calibri" pitchFamily="34" charset="-120"/>
               </a:rPr>
-              <a:t>qué</a:t>
-            </a:r>
-            <a:endParaRPr lang="en-US" sz="1500" dirty="0"/>
-          </a:p>
-          <a:p>
-            <a:pPr indent="0" marL="0">
-              <a:lnSpc>
-                <a:spcPct val="105000"/>
-              </a:lnSpc>
-              <a:buNone/>
-            </a:pPr>
-            <a:r>
-              <a:rPr lang="en-US" sz="1100" dirty="0">
+              <a:t>dónde</a:t>
+            </a:r>
+            <a:endParaRPr lang="en-US" sz="1900" dirty="0"/>
+          </a:p>
+        </p:txBody>
+      </p:sp>
+      <p:sp>
+        <p:nvSpPr>
+          <p:cNvPr id="14" name="Text 12"/>
+          <p:cNvSpPr/>
+          <p:nvPr/>
+        </p:nvSpPr>
+        <p:spPr>
+          <a:xfrm>
+            <a:off x="4562856" y="2935224"/>
+            <a:ext cx="3063240" cy="292608"/>
+          </a:xfrm>
+          <a:prstGeom prst="rect">
+            <a:avLst/>
+          </a:prstGeom>
+          <a:noFill/>
+          <a:ln/>
+        </p:spPr>
+        <p:txBody>
+          <a:bodyPr wrap="square" lIns="0" tIns="0" rIns="0" bIns="0" rtlCol="0" anchor="ctr"/>
+          <a:lstStyle/>
+          <a:p>
+            <a:pPr algn="ctr" indent="0" marL="0">
+              <a:buNone/>
+            </a:pPr>
+            <a:r>
+              <a:rPr lang="en-US" sz="1250" dirty="0">
                 <a:solidFill>
                   <a:srgbClr val="5C6690"/>
                 </a:solidFill>
@@ -20816,26 +23335,316 @@
                 <a:ea typeface="Calibri" pitchFamily="34" charset="-122"/>
                 <a:cs typeface="Calibri" pitchFamily="34" charset="-120"/>
               </a:rPr>
-              <a:t>что / какой</a:t>
-            </a:r>
-            <a:endParaRPr lang="en-US" sz="1500" dirty="0"/>
-          </a:p>
-        </p:txBody>
-      </p:sp>
-      <p:sp>
-        <p:nvSpPr>
-          <p:cNvPr id="9" name="Shape 7"/>
-          <p:cNvSpPr/>
-          <p:nvPr/>
-        </p:nvSpPr>
-        <p:spPr>
-          <a:xfrm>
-            <a:off x="4312920" y="1746504"/>
-            <a:ext cx="3563112" cy="1371600"/>
+              <a:t>где</a:t>
+            </a:r>
+            <a:endParaRPr lang="en-US" sz="1250" dirty="0"/>
+          </a:p>
+        </p:txBody>
+      </p:sp>
+      <p:sp>
+        <p:nvSpPr>
+          <p:cNvPr id="15" name="Text 13"/>
+          <p:cNvSpPr/>
+          <p:nvPr/>
+        </p:nvSpPr>
+        <p:spPr>
+          <a:xfrm>
+            <a:off x="4654296" y="3227832"/>
+            <a:ext cx="2880360" cy="365760"/>
+          </a:xfrm>
+          <a:prstGeom prst="rect">
+            <a:avLst/>
+          </a:prstGeom>
+          <a:noFill/>
+          <a:ln/>
+        </p:spPr>
+        <p:txBody>
+          <a:bodyPr wrap="square" lIns="0" tIns="0" rIns="0" bIns="0" rtlCol="0" anchor="ctr"/>
+          <a:lstStyle/>
+          <a:p>
+            <a:pPr algn="ctr" indent="0" marL="0">
+              <a:buNone/>
+            </a:pPr>
+            <a:r>
+              <a:rPr lang="en-US" sz="1050" i="1" dirty="0">
+                <a:solidFill>
+                  <a:srgbClr val="5C6690"/>
+                </a:solidFill>
+                <a:latin typeface="Calibri" pitchFamily="34" charset="0"/>
+                <a:ea typeface="Calibri" pitchFamily="34" charset="-122"/>
+                <a:cs typeface="Calibri" pitchFamily="34" charset="-120"/>
+              </a:rPr>
+              <a:t>(lugar / posición: ¿dónde estás?)</a:t>
+            </a:r>
+            <a:endParaRPr lang="en-US" sz="1050" dirty="0"/>
+          </a:p>
+        </p:txBody>
+      </p:sp>
+      <p:sp>
+        <p:nvSpPr>
+          <p:cNvPr id="16" name="Shape 14"/>
+          <p:cNvSpPr/>
+          <p:nvPr/>
+        </p:nvSpPr>
+        <p:spPr>
+          <a:xfrm>
+            <a:off x="9806940" y="1856232"/>
+            <a:ext cx="603504" cy="603504"/>
+          </a:xfrm>
+          <a:prstGeom prst="ellipse">
+            <a:avLst/>
+          </a:prstGeom>
+          <a:solidFill>
+            <a:srgbClr val="F96167"/>
+          </a:solidFill>
+          <a:ln/>
+        </p:spPr>
+      </p:sp>
+      <p:sp>
+        <p:nvSpPr>
+          <p:cNvPr id="17" name="Text 15"/>
+          <p:cNvSpPr/>
+          <p:nvPr/>
+        </p:nvSpPr>
+        <p:spPr>
+          <a:xfrm>
+            <a:off x="9806940" y="1856232"/>
+            <a:ext cx="603504" cy="603504"/>
+          </a:xfrm>
+          <a:prstGeom prst="rect">
+            <a:avLst/>
+          </a:prstGeom>
+          <a:noFill/>
+          <a:ln/>
+        </p:spPr>
+        <p:txBody>
+          <a:bodyPr wrap="square" lIns="0" tIns="0" rIns="0" bIns="0" rtlCol="0" anchor="ctr"/>
+          <a:lstStyle/>
+          <a:p>
+            <a:pPr algn="ctr" indent="0" marL="0">
+              <a:buNone/>
+            </a:pPr>
+            <a:r>
+              <a:rPr lang="en-US" sz="3200" dirty="0">
+                <a:solidFill>
+                  <a:srgbClr val="000000"/>
+                </a:solidFill>
+              </a:rPr>
+              <a:t>🏁</a:t>
+            </a:r>
+            <a:endParaRPr lang="en-US" sz="3200" dirty="0"/>
+          </a:p>
+        </p:txBody>
+      </p:sp>
+      <p:sp>
+        <p:nvSpPr>
+          <p:cNvPr id="18" name="Text 16"/>
+          <p:cNvSpPr/>
+          <p:nvPr/>
+        </p:nvSpPr>
+        <p:spPr>
+          <a:xfrm>
+            <a:off x="8577072" y="2569464"/>
+            <a:ext cx="3063240" cy="365760"/>
+          </a:xfrm>
+          <a:prstGeom prst="rect">
+            <a:avLst/>
+          </a:prstGeom>
+          <a:noFill/>
+          <a:ln/>
+        </p:spPr>
+        <p:txBody>
+          <a:bodyPr wrap="square" lIns="0" tIns="0" rIns="0" bIns="0" rtlCol="0" anchor="ctr"/>
+          <a:lstStyle/>
+          <a:p>
+            <a:pPr algn="ctr" indent="0" marL="0">
+              <a:buNone/>
+            </a:pPr>
+            <a:r>
+              <a:rPr lang="en-US" sz="1900" b="1" dirty="0">
+                <a:solidFill>
+                  <a:srgbClr val="2F3C7E"/>
+                </a:solidFill>
+                <a:latin typeface="Calibri" pitchFamily="34" charset="0"/>
+                <a:ea typeface="Calibri" pitchFamily="34" charset="-122"/>
+                <a:cs typeface="Calibri" pitchFamily="34" charset="-120"/>
+              </a:rPr>
+              <a:t>adónde</a:t>
+            </a:r>
+            <a:endParaRPr lang="en-US" sz="1900" dirty="0"/>
+          </a:p>
+        </p:txBody>
+      </p:sp>
+      <p:sp>
+        <p:nvSpPr>
+          <p:cNvPr id="19" name="Text 17"/>
+          <p:cNvSpPr/>
+          <p:nvPr/>
+        </p:nvSpPr>
+        <p:spPr>
+          <a:xfrm>
+            <a:off x="8577072" y="2935224"/>
+            <a:ext cx="3063240" cy="292608"/>
+          </a:xfrm>
+          <a:prstGeom prst="rect">
+            <a:avLst/>
+          </a:prstGeom>
+          <a:noFill/>
+          <a:ln/>
+        </p:spPr>
+        <p:txBody>
+          <a:bodyPr wrap="square" lIns="0" tIns="0" rIns="0" bIns="0" rtlCol="0" anchor="ctr"/>
+          <a:lstStyle/>
+          <a:p>
+            <a:pPr algn="ctr" indent="0" marL="0">
+              <a:buNone/>
+            </a:pPr>
+            <a:r>
+              <a:rPr lang="en-US" sz="1250" dirty="0">
+                <a:solidFill>
+                  <a:srgbClr val="5C6690"/>
+                </a:solidFill>
+                <a:latin typeface="Calibri" pitchFamily="34" charset="0"/>
+                <a:ea typeface="Calibri" pitchFamily="34" charset="-122"/>
+                <a:cs typeface="Calibri" pitchFamily="34" charset="-120"/>
+              </a:rPr>
+              <a:t>куда</a:t>
+            </a:r>
+            <a:endParaRPr lang="en-US" sz="1250" dirty="0"/>
+          </a:p>
+        </p:txBody>
+      </p:sp>
+      <p:sp>
+        <p:nvSpPr>
+          <p:cNvPr id="20" name="Text 18"/>
+          <p:cNvSpPr/>
+          <p:nvPr/>
+        </p:nvSpPr>
+        <p:spPr>
+          <a:xfrm>
+            <a:off x="8668512" y="3227832"/>
+            <a:ext cx="2880360" cy="365760"/>
+          </a:xfrm>
+          <a:prstGeom prst="rect">
+            <a:avLst/>
+          </a:prstGeom>
+          <a:noFill/>
+          <a:ln/>
+        </p:spPr>
+        <p:txBody>
+          <a:bodyPr wrap="square" lIns="0" tIns="0" rIns="0" bIns="0" rtlCol="0" anchor="ctr"/>
+          <a:lstStyle/>
+          <a:p>
+            <a:pPr algn="ctr" indent="0" marL="0">
+              <a:buNone/>
+            </a:pPr>
+            <a:r>
+              <a:rPr lang="en-US" sz="1050" i="1" dirty="0">
+                <a:solidFill>
+                  <a:srgbClr val="5C6690"/>
+                </a:solidFill>
+                <a:latin typeface="Calibri" pitchFamily="34" charset="0"/>
+                <a:ea typeface="Calibri" pitchFamily="34" charset="-122"/>
+                <a:cs typeface="Calibri" pitchFamily="34" charset="-120"/>
+              </a:rPr>
+              <a:t>(destino: ¿adónde vas?)</a:t>
+            </a:r>
+            <a:endParaRPr lang="en-US" sz="1050" dirty="0"/>
+          </a:p>
+        </p:txBody>
+      </p:sp>
+      <p:sp>
+        <p:nvSpPr>
+          <p:cNvPr id="21" name="Text 19"/>
+          <p:cNvSpPr/>
+          <p:nvPr/>
+        </p:nvSpPr>
+        <p:spPr>
+          <a:xfrm>
+            <a:off x="3611880" y="1801368"/>
+            <a:ext cx="950976" cy="603504"/>
+          </a:xfrm>
+          <a:prstGeom prst="rect">
+            <a:avLst/>
+          </a:prstGeom>
+          <a:noFill/>
+          <a:ln/>
+        </p:spPr>
+        <p:txBody>
+          <a:bodyPr wrap="square" lIns="0" tIns="0" rIns="0" bIns="0" rtlCol="0" anchor="ctr"/>
+          <a:lstStyle/>
+          <a:p>
+            <a:pPr algn="ctr" indent="0" marL="0">
+              <a:buNone/>
+            </a:pPr>
+            <a:r>
+              <a:rPr lang="en-US" sz="3000" b="1" dirty="0">
+                <a:solidFill>
+                  <a:srgbClr val="F96167"/>
+                </a:solidFill>
+                <a:latin typeface="Calibri" pitchFamily="34" charset="0"/>
+                <a:ea typeface="Calibri" pitchFamily="34" charset="-122"/>
+                <a:cs typeface="Calibri" pitchFamily="34" charset="-120"/>
+              </a:rPr>
+              <a:t>➜</a:t>
+            </a:r>
+            <a:endParaRPr lang="en-US" sz="3000" dirty="0"/>
+          </a:p>
+        </p:txBody>
+      </p:sp>
+      <p:sp>
+        <p:nvSpPr>
+          <p:cNvPr id="22" name="Text 20"/>
+          <p:cNvSpPr/>
+          <p:nvPr/>
+        </p:nvSpPr>
+        <p:spPr>
+          <a:xfrm>
+            <a:off x="7626096" y="1801368"/>
+            <a:ext cx="950976" cy="603504"/>
+          </a:xfrm>
+          <a:prstGeom prst="rect">
+            <a:avLst/>
+          </a:prstGeom>
+          <a:noFill/>
+          <a:ln/>
+        </p:spPr>
+        <p:txBody>
+          <a:bodyPr wrap="square" lIns="0" tIns="0" rIns="0" bIns="0" rtlCol="0" anchor="ctr"/>
+          <a:lstStyle/>
+          <a:p>
+            <a:pPr algn="ctr" indent="0" marL="0">
+              <a:buNone/>
+            </a:pPr>
+            <a:r>
+              <a:rPr lang="en-US" sz="3000" b="1" dirty="0">
+                <a:solidFill>
+                  <a:srgbClr val="F96167"/>
+                </a:solidFill>
+                <a:latin typeface="Calibri" pitchFamily="34" charset="0"/>
+                <a:ea typeface="Calibri" pitchFamily="34" charset="-122"/>
+                <a:cs typeface="Calibri" pitchFamily="34" charset="-120"/>
+              </a:rPr>
+              <a:t>➜</a:t>
+            </a:r>
+            <a:endParaRPr lang="en-US" sz="3000" dirty="0"/>
+          </a:p>
+        </p:txBody>
+      </p:sp>
+      <p:sp>
+        <p:nvSpPr>
+          <p:cNvPr id="23" name="Shape 21"/>
+          <p:cNvSpPr/>
+          <p:nvPr/>
+        </p:nvSpPr>
+        <p:spPr>
+          <a:xfrm>
+            <a:off x="548640" y="3950208"/>
+            <a:ext cx="2057400" cy="2450592"/>
           </a:xfrm>
           <a:prstGeom prst="roundRect">
             <a:avLst>
-              <a:gd name="adj" fmla="val 6000"/>
+              <a:gd name="adj" fmla="val 4000"/>
             </a:avLst>
           </a:prstGeom>
           <a:solidFill>
@@ -20853,14 +23662,14 @@
       </p:sp>
       <p:sp>
         <p:nvSpPr>
-          <p:cNvPr id="10" name="Shape 8"/>
-          <p:cNvSpPr/>
-          <p:nvPr/>
-        </p:nvSpPr>
-        <p:spPr>
-          <a:xfrm>
-            <a:off x="4440936" y="2176272"/>
-            <a:ext cx="512064" cy="512064"/>
+          <p:cNvPr id="24" name="Shape 22"/>
+          <p:cNvSpPr/>
+          <p:nvPr/>
+        </p:nvSpPr>
+        <p:spPr>
+          <a:xfrm>
+            <a:off x="694944" y="4974336"/>
+            <a:ext cx="402336" cy="402336"/>
           </a:xfrm>
           <a:prstGeom prst="ellipse">
             <a:avLst/>
@@ -20873,14 +23682,14 @@
       </p:sp>
       <p:sp>
         <p:nvSpPr>
-          <p:cNvPr id="11" name="Text 9"/>
-          <p:cNvSpPr/>
-          <p:nvPr/>
-        </p:nvSpPr>
-        <p:spPr>
-          <a:xfrm>
-            <a:off x="4440936" y="2176272"/>
-            <a:ext cx="512064" cy="512064"/>
+          <p:cNvPr id="25" name="Text 23"/>
+          <p:cNvSpPr/>
+          <p:nvPr/>
+        </p:nvSpPr>
+        <p:spPr>
+          <a:xfrm>
+            <a:off x="694944" y="4974336"/>
+            <a:ext cx="402336" cy="402336"/>
           </a:xfrm>
           <a:prstGeom prst="rect">
             <a:avLst/>
@@ -20896,27 +23705,27 @@
               <a:buNone/>
             </a:pPr>
             <a:r>
-              <a:rPr lang="en-US" sz="1900" dirty="0">
+              <a:rPr lang="en-US" sz="2000" dirty="0">
                 <a:solidFill>
                   <a:srgbClr val="000000"/>
                 </a:solidFill>
               </a:rPr>
-              <a:t>📍</a:t>
-            </a:r>
-            <a:endParaRPr lang="en-US" sz="1900" dirty="0"/>
-          </a:p>
-        </p:txBody>
-      </p:sp>
-      <p:sp>
-        <p:nvSpPr>
-          <p:cNvPr id="12" name="Text 10"/>
-          <p:cNvSpPr/>
-          <p:nvPr/>
-        </p:nvSpPr>
-        <p:spPr>
-          <a:xfrm>
-            <a:off x="5081016" y="1792224"/>
-            <a:ext cx="2685288" cy="1280160"/>
+              <a:t>❓</a:t>
+            </a:r>
+            <a:endParaRPr lang="en-US" sz="2000" dirty="0"/>
+          </a:p>
+        </p:txBody>
+      </p:sp>
+      <p:sp>
+        <p:nvSpPr>
+          <p:cNvPr id="26" name="Text 24"/>
+          <p:cNvSpPr/>
+          <p:nvPr/>
+        </p:nvSpPr>
+        <p:spPr>
+          <a:xfrm>
+            <a:off x="1188720" y="4005072"/>
+            <a:ext cx="1289304" cy="2340864"/>
           </a:xfrm>
           <a:prstGeom prst="rect">
             <a:avLst/>
@@ -20930,12 +23739,12 @@
           <a:p>
             <a:pPr indent="0" marL="0">
               <a:lnSpc>
-                <a:spcPct val="105000"/>
+                <a:spcPct val="100000"/>
               </a:lnSpc>
               <a:buNone/>
             </a:pPr>
             <a:r>
-              <a:rPr lang="en-US" sz="1500" b="1" dirty="0">
+              <a:rPr lang="en-US" sz="1300" b="1" dirty="0">
                 <a:solidFill>
                   <a:srgbClr val="2F3C7E"/>
                 </a:solidFill>
@@ -20943,19 +23752,19 @@
                 <a:ea typeface="Calibri" pitchFamily="34" charset="-122"/>
                 <a:cs typeface="Calibri" pitchFamily="34" charset="-120"/>
               </a:rPr>
-              <a:t>dónde</a:t>
-            </a:r>
-            <a:endParaRPr lang="en-US" sz="1500" dirty="0"/>
+              <a:t>qué</a:t>
+            </a:r>
+            <a:endParaRPr lang="en-US" sz="1300" dirty="0"/>
           </a:p>
           <a:p>
             <a:pPr indent="0" marL="0">
               <a:lnSpc>
-                <a:spcPct val="105000"/>
+                <a:spcPct val="100000"/>
               </a:lnSpc>
               <a:buNone/>
             </a:pPr>
             <a:r>
-              <a:rPr lang="en-US" sz="1100" dirty="0">
+              <a:rPr lang="en-US" sz="1000" dirty="0">
                 <a:solidFill>
                   <a:srgbClr val="5C6690"/>
                 </a:solidFill>
@@ -20963,26 +23772,26 @@
                 <a:ea typeface="Calibri" pitchFamily="34" charset="-122"/>
                 <a:cs typeface="Calibri" pitchFamily="34" charset="-120"/>
               </a:rPr>
-              <a:t>где</a:t>
-            </a:r>
-            <a:endParaRPr lang="en-US" sz="1500" dirty="0"/>
-          </a:p>
-        </p:txBody>
-      </p:sp>
-      <p:sp>
-        <p:nvSpPr>
-          <p:cNvPr id="13" name="Shape 11"/>
-          <p:cNvSpPr/>
-          <p:nvPr/>
-        </p:nvSpPr>
-        <p:spPr>
-          <a:xfrm>
-            <a:off x="8077200" y="1746504"/>
-            <a:ext cx="3563112" cy="1371600"/>
+              <a:t>что / какой</a:t>
+            </a:r>
+            <a:endParaRPr lang="en-US" sz="1300" dirty="0"/>
+          </a:p>
+        </p:txBody>
+      </p:sp>
+      <p:sp>
+        <p:nvSpPr>
+          <p:cNvPr id="27" name="Shape 25"/>
+          <p:cNvSpPr/>
+          <p:nvPr/>
+        </p:nvSpPr>
+        <p:spPr>
+          <a:xfrm>
+            <a:off x="2807208" y="3950208"/>
+            <a:ext cx="2057400" cy="2450592"/>
           </a:xfrm>
           <a:prstGeom prst="roundRect">
             <a:avLst>
-              <a:gd name="adj" fmla="val 6000"/>
+              <a:gd name="adj" fmla="val 4000"/>
             </a:avLst>
           </a:prstGeom>
           <a:solidFill>
@@ -21000,14 +23809,14 @@
       </p:sp>
       <p:sp>
         <p:nvSpPr>
-          <p:cNvPr id="14" name="Shape 12"/>
-          <p:cNvSpPr/>
-          <p:nvPr/>
-        </p:nvSpPr>
-        <p:spPr>
-          <a:xfrm>
-            <a:off x="8205216" y="2176272"/>
-            <a:ext cx="512064" cy="512064"/>
+          <p:cNvPr id="28" name="Shape 26"/>
+          <p:cNvSpPr/>
+          <p:nvPr/>
+        </p:nvSpPr>
+        <p:spPr>
+          <a:xfrm>
+            <a:off x="2953512" y="4974336"/>
+            <a:ext cx="402336" cy="402336"/>
           </a:xfrm>
           <a:prstGeom prst="ellipse">
             <a:avLst/>
@@ -21020,14 +23829,14 @@
       </p:sp>
       <p:sp>
         <p:nvSpPr>
-          <p:cNvPr id="15" name="Text 13"/>
-          <p:cNvSpPr/>
-          <p:nvPr/>
-        </p:nvSpPr>
-        <p:spPr>
-          <a:xfrm>
-            <a:off x="8205216" y="2176272"/>
-            <a:ext cx="512064" cy="512064"/>
+          <p:cNvPr id="29" name="Text 27"/>
+          <p:cNvSpPr/>
+          <p:nvPr/>
+        </p:nvSpPr>
+        <p:spPr>
+          <a:xfrm>
+            <a:off x="2953512" y="4974336"/>
+            <a:ext cx="402336" cy="402336"/>
           </a:xfrm>
           <a:prstGeom prst="rect">
             <a:avLst/>
@@ -21043,27 +23852,27 @@
               <a:buNone/>
             </a:pPr>
             <a:r>
-              <a:rPr lang="en-US" sz="1900" dirty="0">
+              <a:rPr lang="en-US" sz="2000" dirty="0">
                 <a:solidFill>
                   <a:srgbClr val="000000"/>
                 </a:solidFill>
               </a:rPr>
-              <a:t>🧭</a:t>
-            </a:r>
-            <a:endParaRPr lang="en-US" sz="1900" dirty="0"/>
-          </a:p>
-        </p:txBody>
-      </p:sp>
-      <p:sp>
-        <p:nvSpPr>
-          <p:cNvPr id="16" name="Text 14"/>
-          <p:cNvSpPr/>
-          <p:nvPr/>
-        </p:nvSpPr>
-        <p:spPr>
-          <a:xfrm>
-            <a:off x="8845296" y="1792224"/>
-            <a:ext cx="2685288" cy="1280160"/>
+              <a:t>🤔</a:t>
+            </a:r>
+            <a:endParaRPr lang="en-US" sz="2000" dirty="0"/>
+          </a:p>
+        </p:txBody>
+      </p:sp>
+      <p:sp>
+        <p:nvSpPr>
+          <p:cNvPr id="30" name="Text 28"/>
+          <p:cNvSpPr/>
+          <p:nvPr/>
+        </p:nvSpPr>
+        <p:spPr>
+          <a:xfrm>
+            <a:off x="3447288" y="4005072"/>
+            <a:ext cx="1289304" cy="2340864"/>
           </a:xfrm>
           <a:prstGeom prst="rect">
             <a:avLst/>
@@ -21077,12 +23886,12 @@
           <a:p>
             <a:pPr indent="0" marL="0">
               <a:lnSpc>
-                <a:spcPct val="105000"/>
+                <a:spcPct val="100000"/>
               </a:lnSpc>
               <a:buNone/>
             </a:pPr>
             <a:r>
-              <a:rPr lang="en-US" sz="1500" b="1" dirty="0">
+              <a:rPr lang="en-US" sz="1300" b="1" dirty="0">
                 <a:solidFill>
                   <a:srgbClr val="2F3C7E"/>
                 </a:solidFill>
@@ -21090,19 +23899,19 @@
                 <a:ea typeface="Calibri" pitchFamily="34" charset="-122"/>
                 <a:cs typeface="Calibri" pitchFamily="34" charset="-120"/>
               </a:rPr>
-              <a:t>de dónde</a:t>
-            </a:r>
-            <a:endParaRPr lang="en-US" sz="1500" dirty="0"/>
+              <a:t>cómo</a:t>
+            </a:r>
+            <a:endParaRPr lang="en-US" sz="1300" dirty="0"/>
           </a:p>
           <a:p>
             <a:pPr indent="0" marL="0">
               <a:lnSpc>
-                <a:spcPct val="105000"/>
+                <a:spcPct val="100000"/>
               </a:lnSpc>
               <a:buNone/>
             </a:pPr>
             <a:r>
-              <a:rPr lang="en-US" sz="1100" dirty="0">
+              <a:rPr lang="en-US" sz="1000" dirty="0">
                 <a:solidFill>
                   <a:srgbClr val="5C6690"/>
                 </a:solidFill>
@@ -21110,26 +23919,26 @@
                 <a:ea typeface="Calibri" pitchFamily="34" charset="-122"/>
                 <a:cs typeface="Calibri" pitchFamily="34" charset="-120"/>
               </a:rPr>
-              <a:t>откуда</a:t>
-            </a:r>
-            <a:endParaRPr lang="en-US" sz="1500" dirty="0"/>
-          </a:p>
-        </p:txBody>
-      </p:sp>
-      <p:sp>
-        <p:nvSpPr>
-          <p:cNvPr id="17" name="Shape 15"/>
-          <p:cNvSpPr/>
-          <p:nvPr/>
-        </p:nvSpPr>
-        <p:spPr>
-          <a:xfrm>
-            <a:off x="548640" y="3300984"/>
-            <a:ext cx="3563112" cy="1371600"/>
+              <a:t>как</a:t>
+            </a:r>
+            <a:endParaRPr lang="en-US" sz="1300" dirty="0"/>
+          </a:p>
+        </p:txBody>
+      </p:sp>
+      <p:sp>
+        <p:nvSpPr>
+          <p:cNvPr id="31" name="Shape 29"/>
+          <p:cNvSpPr/>
+          <p:nvPr/>
+        </p:nvSpPr>
+        <p:spPr>
+          <a:xfrm>
+            <a:off x="5065776" y="3950208"/>
+            <a:ext cx="2057400" cy="2450592"/>
           </a:xfrm>
           <a:prstGeom prst="roundRect">
             <a:avLst>
-              <a:gd name="adj" fmla="val 6000"/>
+              <a:gd name="adj" fmla="val 4000"/>
             </a:avLst>
           </a:prstGeom>
           <a:solidFill>
@@ -21147,14 +23956,14 @@
       </p:sp>
       <p:sp>
         <p:nvSpPr>
-          <p:cNvPr id="18" name="Shape 16"/>
-          <p:cNvSpPr/>
-          <p:nvPr/>
-        </p:nvSpPr>
-        <p:spPr>
-          <a:xfrm>
-            <a:off x="676656" y="3730752"/>
-            <a:ext cx="512064" cy="512064"/>
+          <p:cNvPr id="32" name="Shape 30"/>
+          <p:cNvSpPr/>
+          <p:nvPr/>
+        </p:nvSpPr>
+        <p:spPr>
+          <a:xfrm>
+            <a:off x="5212080" y="4974336"/>
+            <a:ext cx="402336" cy="402336"/>
           </a:xfrm>
           <a:prstGeom prst="ellipse">
             <a:avLst/>
@@ -21167,14 +23976,14 @@
       </p:sp>
       <p:sp>
         <p:nvSpPr>
-          <p:cNvPr id="19" name="Text 17"/>
-          <p:cNvSpPr/>
-          <p:nvPr/>
-        </p:nvSpPr>
-        <p:spPr>
-          <a:xfrm>
-            <a:off x="676656" y="3730752"/>
-            <a:ext cx="512064" cy="512064"/>
+          <p:cNvPr id="33" name="Text 31"/>
+          <p:cNvSpPr/>
+          <p:nvPr/>
+        </p:nvSpPr>
+        <p:spPr>
+          <a:xfrm>
+            <a:off x="5212080" y="4974336"/>
+            <a:ext cx="402336" cy="402336"/>
           </a:xfrm>
           <a:prstGeom prst="rect">
             <a:avLst/>
@@ -21190,27 +23999,27 @@
               <a:buNone/>
             </a:pPr>
             <a:r>
-              <a:rPr lang="en-US" sz="1900" dirty="0">
+              <a:rPr lang="en-US" sz="2000" dirty="0">
                 <a:solidFill>
                   <a:srgbClr val="000000"/>
                 </a:solidFill>
               </a:rPr>
-              <a:t>➡️</a:t>
-            </a:r>
-            <a:endParaRPr lang="en-US" sz="1900" dirty="0"/>
-          </a:p>
-        </p:txBody>
-      </p:sp>
-      <p:sp>
-        <p:nvSpPr>
-          <p:cNvPr id="20" name="Text 18"/>
-          <p:cNvSpPr/>
-          <p:nvPr/>
-        </p:nvSpPr>
-        <p:spPr>
-          <a:xfrm>
-            <a:off x="1316736" y="3346704"/>
-            <a:ext cx="2685288" cy="1280160"/>
+              <a:t>🔀</a:t>
+            </a:r>
+            <a:endParaRPr lang="en-US" sz="2000" dirty="0"/>
+          </a:p>
+        </p:txBody>
+      </p:sp>
+      <p:sp>
+        <p:nvSpPr>
+          <p:cNvPr id="34" name="Text 32"/>
+          <p:cNvSpPr/>
+          <p:nvPr/>
+        </p:nvSpPr>
+        <p:spPr>
+          <a:xfrm>
+            <a:off x="5705856" y="4005072"/>
+            <a:ext cx="1289304" cy="2340864"/>
           </a:xfrm>
           <a:prstGeom prst="rect">
             <a:avLst/>
@@ -21224,12 +24033,12 @@
           <a:p>
             <a:pPr indent="0" marL="0">
               <a:lnSpc>
-                <a:spcPct val="105000"/>
+                <a:spcPct val="100000"/>
               </a:lnSpc>
               <a:buNone/>
             </a:pPr>
             <a:r>
-              <a:rPr lang="en-US" sz="1500" b="1" dirty="0">
+              <a:rPr lang="en-US" sz="1300" b="1" dirty="0">
                 <a:solidFill>
                   <a:srgbClr val="2F3C7E"/>
                 </a:solidFill>
@@ -21237,19 +24046,19 @@
                 <a:ea typeface="Calibri" pitchFamily="34" charset="-122"/>
                 <a:cs typeface="Calibri" pitchFamily="34" charset="-120"/>
               </a:rPr>
-              <a:t>adónde</a:t>
-            </a:r>
-            <a:endParaRPr lang="en-US" sz="1500" dirty="0"/>
+              <a:t>cuál</a:t>
+            </a:r>
+            <a:endParaRPr lang="en-US" sz="1300" dirty="0"/>
           </a:p>
           <a:p>
             <a:pPr indent="0" marL="0">
               <a:lnSpc>
-                <a:spcPct val="105000"/>
+                <a:spcPct val="100000"/>
               </a:lnSpc>
               <a:buNone/>
             </a:pPr>
             <a:r>
-              <a:rPr lang="en-US" sz="1100" dirty="0">
+              <a:rPr lang="en-US" sz="1000" dirty="0">
                 <a:solidFill>
                   <a:srgbClr val="5C6690"/>
                 </a:solidFill>
@@ -21257,26 +24066,26 @@
                 <a:ea typeface="Calibri" pitchFamily="34" charset="-122"/>
                 <a:cs typeface="Calibri" pitchFamily="34" charset="-120"/>
               </a:rPr>
-              <a:t>куда</a:t>
-            </a:r>
-            <a:endParaRPr lang="en-US" sz="1500" dirty="0"/>
-          </a:p>
-        </p:txBody>
-      </p:sp>
-      <p:sp>
-        <p:nvSpPr>
-          <p:cNvPr id="21" name="Shape 19"/>
-          <p:cNvSpPr/>
-          <p:nvPr/>
-        </p:nvSpPr>
-        <p:spPr>
-          <a:xfrm>
-            <a:off x="4312920" y="3300984"/>
-            <a:ext cx="3563112" cy="1371600"/>
+              <a:t>какой (из вариантов)</a:t>
+            </a:r>
+            <a:endParaRPr lang="en-US" sz="1300" dirty="0"/>
+          </a:p>
+        </p:txBody>
+      </p:sp>
+      <p:sp>
+        <p:nvSpPr>
+          <p:cNvPr id="35" name="Shape 33"/>
+          <p:cNvSpPr/>
+          <p:nvPr/>
+        </p:nvSpPr>
+        <p:spPr>
+          <a:xfrm>
+            <a:off x="7324344" y="3950208"/>
+            <a:ext cx="2057400" cy="2450592"/>
           </a:xfrm>
           <a:prstGeom prst="roundRect">
             <a:avLst>
-              <a:gd name="adj" fmla="val 6000"/>
+              <a:gd name="adj" fmla="val 4000"/>
             </a:avLst>
           </a:prstGeom>
           <a:solidFill>
@@ -21294,14 +24103,14 @@
       </p:sp>
       <p:sp>
         <p:nvSpPr>
-          <p:cNvPr id="22" name="Shape 20"/>
-          <p:cNvSpPr/>
-          <p:nvPr/>
-        </p:nvSpPr>
-        <p:spPr>
-          <a:xfrm>
-            <a:off x="4440936" y="3730752"/>
-            <a:ext cx="512064" cy="512064"/>
+          <p:cNvPr id="36" name="Shape 34"/>
+          <p:cNvSpPr/>
+          <p:nvPr/>
+        </p:nvSpPr>
+        <p:spPr>
+          <a:xfrm>
+            <a:off x="7470648" y="4974336"/>
+            <a:ext cx="402336" cy="402336"/>
           </a:xfrm>
           <a:prstGeom prst="ellipse">
             <a:avLst/>
@@ -21314,14 +24123,14 @@
       </p:sp>
       <p:sp>
         <p:nvSpPr>
-          <p:cNvPr id="23" name="Text 21"/>
-          <p:cNvSpPr/>
-          <p:nvPr/>
-        </p:nvSpPr>
-        <p:spPr>
-          <a:xfrm>
-            <a:off x="4440936" y="3730752"/>
-            <a:ext cx="512064" cy="512064"/>
+          <p:cNvPr id="37" name="Text 35"/>
+          <p:cNvSpPr/>
+          <p:nvPr/>
+        </p:nvSpPr>
+        <p:spPr>
+          <a:xfrm>
+            <a:off x="7470648" y="4974336"/>
+            <a:ext cx="402336" cy="402336"/>
           </a:xfrm>
           <a:prstGeom prst="rect">
             <a:avLst/>
@@ -21337,27 +24146,27 @@
               <a:buNone/>
             </a:pPr>
             <a:r>
-              <a:rPr lang="en-US" sz="1900" dirty="0">
+              <a:rPr lang="en-US" sz="2000" dirty="0">
                 <a:solidFill>
                   <a:srgbClr val="000000"/>
                 </a:solidFill>
               </a:rPr>
-              <a:t>🤔</a:t>
-            </a:r>
-            <a:endParaRPr lang="en-US" sz="1900" dirty="0"/>
-          </a:p>
-        </p:txBody>
-      </p:sp>
-      <p:sp>
-        <p:nvSpPr>
-          <p:cNvPr id="24" name="Text 22"/>
-          <p:cNvSpPr/>
-          <p:nvPr/>
-        </p:nvSpPr>
-        <p:spPr>
-          <a:xfrm>
-            <a:off x="5081016" y="3346704"/>
-            <a:ext cx="2685288" cy="1280160"/>
+              <a:t>🙋</a:t>
+            </a:r>
+            <a:endParaRPr lang="en-US" sz="2000" dirty="0"/>
+          </a:p>
+        </p:txBody>
+      </p:sp>
+      <p:sp>
+        <p:nvSpPr>
+          <p:cNvPr id="38" name="Text 36"/>
+          <p:cNvSpPr/>
+          <p:nvPr/>
+        </p:nvSpPr>
+        <p:spPr>
+          <a:xfrm>
+            <a:off x="7964424" y="4005072"/>
+            <a:ext cx="1289304" cy="2340864"/>
           </a:xfrm>
           <a:prstGeom prst="rect">
             <a:avLst/>
@@ -21371,12 +24180,12 @@
           <a:p>
             <a:pPr indent="0" marL="0">
               <a:lnSpc>
-                <a:spcPct val="105000"/>
+                <a:spcPct val="100000"/>
               </a:lnSpc>
               <a:buNone/>
             </a:pPr>
             <a:r>
-              <a:rPr lang="en-US" sz="1500" b="1" dirty="0">
+              <a:rPr lang="en-US" sz="1300" b="1" dirty="0">
                 <a:solidFill>
                   <a:srgbClr val="2F3C7E"/>
                 </a:solidFill>
@@ -21384,19 +24193,19 @@
                 <a:ea typeface="Calibri" pitchFamily="34" charset="-122"/>
                 <a:cs typeface="Calibri" pitchFamily="34" charset="-120"/>
               </a:rPr>
-              <a:t>cómo</a:t>
-            </a:r>
-            <a:endParaRPr lang="en-US" sz="1500" dirty="0"/>
+              <a:t>quién / quiénes</a:t>
+            </a:r>
+            <a:endParaRPr lang="en-US" sz="1300" dirty="0"/>
           </a:p>
           <a:p>
             <a:pPr indent="0" marL="0">
               <a:lnSpc>
-                <a:spcPct val="105000"/>
+                <a:spcPct val="100000"/>
               </a:lnSpc>
               <a:buNone/>
             </a:pPr>
             <a:r>
-              <a:rPr lang="en-US" sz="1100" dirty="0">
+              <a:rPr lang="en-US" sz="1000" dirty="0">
                 <a:solidFill>
                   <a:srgbClr val="5C6690"/>
                 </a:solidFill>
@@ -21404,26 +24213,26 @@
                 <a:ea typeface="Calibri" pitchFamily="34" charset="-122"/>
                 <a:cs typeface="Calibri" pitchFamily="34" charset="-120"/>
               </a:rPr>
-              <a:t>как</a:t>
-            </a:r>
-            <a:endParaRPr lang="en-US" sz="1500" dirty="0"/>
-          </a:p>
-        </p:txBody>
-      </p:sp>
-      <p:sp>
-        <p:nvSpPr>
-          <p:cNvPr id="25" name="Shape 23"/>
-          <p:cNvSpPr/>
-          <p:nvPr/>
-        </p:nvSpPr>
-        <p:spPr>
-          <a:xfrm>
-            <a:off x="8077200" y="3300984"/>
-            <a:ext cx="3563112" cy="1371600"/>
+              <a:t>кто</a:t>
+            </a:r>
+            <a:endParaRPr lang="en-US" sz="1300" dirty="0"/>
+          </a:p>
+        </p:txBody>
+      </p:sp>
+      <p:sp>
+        <p:nvSpPr>
+          <p:cNvPr id="39" name="Shape 37"/>
+          <p:cNvSpPr/>
+          <p:nvPr/>
+        </p:nvSpPr>
+        <p:spPr>
+          <a:xfrm>
+            <a:off x="9582912" y="3950208"/>
+            <a:ext cx="2057400" cy="2450592"/>
           </a:xfrm>
           <a:prstGeom prst="roundRect">
             <a:avLst>
-              <a:gd name="adj" fmla="val 6000"/>
+              <a:gd name="adj" fmla="val 4000"/>
             </a:avLst>
           </a:prstGeom>
           <a:solidFill>
@@ -21441,14 +24250,14 @@
       </p:sp>
       <p:sp>
         <p:nvSpPr>
-          <p:cNvPr id="26" name="Shape 24"/>
-          <p:cNvSpPr/>
-          <p:nvPr/>
-        </p:nvSpPr>
-        <p:spPr>
-          <a:xfrm>
-            <a:off x="8205216" y="3730752"/>
-            <a:ext cx="512064" cy="512064"/>
+          <p:cNvPr id="40" name="Shape 38"/>
+          <p:cNvSpPr/>
+          <p:nvPr/>
+        </p:nvSpPr>
+        <p:spPr>
+          <a:xfrm>
+            <a:off x="9729216" y="4974336"/>
+            <a:ext cx="402336" cy="402336"/>
           </a:xfrm>
           <a:prstGeom prst="ellipse">
             <a:avLst/>
@@ -21461,14 +24270,14 @@
       </p:sp>
       <p:sp>
         <p:nvSpPr>
-          <p:cNvPr id="27" name="Text 25"/>
-          <p:cNvSpPr/>
-          <p:nvPr/>
-        </p:nvSpPr>
-        <p:spPr>
-          <a:xfrm>
-            <a:off x="8205216" y="3730752"/>
-            <a:ext cx="512064" cy="512064"/>
+          <p:cNvPr id="41" name="Text 39"/>
+          <p:cNvSpPr/>
+          <p:nvPr/>
+        </p:nvSpPr>
+        <p:spPr>
+          <a:xfrm>
+            <a:off x="9729216" y="4974336"/>
+            <a:ext cx="402336" cy="402336"/>
           </a:xfrm>
           <a:prstGeom prst="rect">
             <a:avLst/>
@@ -21484,27 +24293,27 @@
               <a:buNone/>
             </a:pPr>
             <a:r>
-              <a:rPr lang="en-US" sz="1900" dirty="0">
+              <a:rPr lang="en-US" sz="2000" dirty="0">
                 <a:solidFill>
                   <a:srgbClr val="000000"/>
                 </a:solidFill>
               </a:rPr>
-              <a:t>🔀</a:t>
-            </a:r>
-            <a:endParaRPr lang="en-US" sz="1900" dirty="0"/>
-          </a:p>
-        </p:txBody>
-      </p:sp>
-      <p:sp>
-        <p:nvSpPr>
-          <p:cNvPr id="28" name="Text 26"/>
-          <p:cNvSpPr/>
-          <p:nvPr/>
-        </p:nvSpPr>
-        <p:spPr>
-          <a:xfrm>
-            <a:off x="8845296" y="3346704"/>
-            <a:ext cx="2685288" cy="1280160"/>
+              <a:t>🔢</a:t>
+            </a:r>
+            <a:endParaRPr lang="en-US" sz="2000" dirty="0"/>
+          </a:p>
+        </p:txBody>
+      </p:sp>
+      <p:sp>
+        <p:nvSpPr>
+          <p:cNvPr id="42" name="Text 40"/>
+          <p:cNvSpPr/>
+          <p:nvPr/>
+        </p:nvSpPr>
+        <p:spPr>
+          <a:xfrm>
+            <a:off x="10222992" y="4005072"/>
+            <a:ext cx="1289304" cy="2340864"/>
           </a:xfrm>
           <a:prstGeom prst="rect">
             <a:avLst/>
@@ -21518,12 +24327,12 @@
           <a:p>
             <a:pPr indent="0" marL="0">
               <a:lnSpc>
-                <a:spcPct val="105000"/>
+                <a:spcPct val="100000"/>
               </a:lnSpc>
               <a:buNone/>
             </a:pPr>
             <a:r>
-              <a:rPr lang="en-US" sz="1500" b="1" dirty="0">
+              <a:rPr lang="en-US" sz="1300" b="1" dirty="0">
                 <a:solidFill>
                   <a:srgbClr val="2F3C7E"/>
                 </a:solidFill>
@@ -21531,19 +24340,19 @@
                 <a:ea typeface="Calibri" pitchFamily="34" charset="-122"/>
                 <a:cs typeface="Calibri" pitchFamily="34" charset="-120"/>
               </a:rPr>
-              <a:t>cuál</a:t>
-            </a:r>
-            <a:endParaRPr lang="en-US" sz="1500" dirty="0"/>
+              <a:t>cuánto/a/os/as</a:t>
+            </a:r>
+            <a:endParaRPr lang="en-US" sz="1300" dirty="0"/>
           </a:p>
           <a:p>
             <a:pPr indent="0" marL="0">
               <a:lnSpc>
-                <a:spcPct val="105000"/>
+                <a:spcPct val="100000"/>
               </a:lnSpc>
               <a:buNone/>
             </a:pPr>
             <a:r>
-              <a:rPr lang="en-US" sz="1100" dirty="0">
+              <a:rPr lang="en-US" sz="1000" dirty="0">
                 <a:solidFill>
                   <a:srgbClr val="5C6690"/>
                 </a:solidFill>
@@ -21551,309 +24360,15 @@
                 <a:ea typeface="Calibri" pitchFamily="34" charset="-122"/>
                 <a:cs typeface="Calibri" pitchFamily="34" charset="-120"/>
               </a:rPr>
-              <a:t>какой (из вариантов)</a:t>
-            </a:r>
-            <a:endParaRPr lang="en-US" sz="1500" dirty="0"/>
-          </a:p>
-        </p:txBody>
-      </p:sp>
-      <p:sp>
-        <p:nvSpPr>
-          <p:cNvPr id="29" name="Shape 27"/>
-          <p:cNvSpPr/>
-          <p:nvPr/>
-        </p:nvSpPr>
-        <p:spPr>
-          <a:xfrm>
-            <a:off x="548640" y="4855464"/>
-            <a:ext cx="3563112" cy="1371600"/>
-          </a:xfrm>
-          <a:prstGeom prst="roundRect">
-            <a:avLst>
-              <a:gd name="adj" fmla="val 6000"/>
-            </a:avLst>
-          </a:prstGeom>
-          <a:solidFill>
-            <a:srgbClr val="F5F6FB"/>
-          </a:solidFill>
-          <a:ln/>
-          <a:effectLst>
-            <a:outerShdw sx="100000" sy="100000" kx="0" ky="0" algn="bl" rotWithShape="0" blurRad="76200" dist="38100" dir="5400000">
-              <a:srgbClr val="1B2340">
-                <a:alpha val="18000"/>
-              </a:srgbClr>
-            </a:outerShdw>
-          </a:effectLst>
-        </p:spPr>
-      </p:sp>
-      <p:sp>
-        <p:nvSpPr>
-          <p:cNvPr id="30" name="Shape 28"/>
-          <p:cNvSpPr/>
-          <p:nvPr/>
-        </p:nvSpPr>
-        <p:spPr>
-          <a:xfrm>
-            <a:off x="676656" y="5285232"/>
-            <a:ext cx="512064" cy="512064"/>
-          </a:xfrm>
-          <a:prstGeom prst="ellipse">
-            <a:avLst/>
-          </a:prstGeom>
-          <a:solidFill>
-            <a:srgbClr val="F96167"/>
-          </a:solidFill>
-          <a:ln/>
-        </p:spPr>
-      </p:sp>
-      <p:sp>
-        <p:nvSpPr>
-          <p:cNvPr id="31" name="Text 29"/>
-          <p:cNvSpPr/>
-          <p:nvPr/>
-        </p:nvSpPr>
-        <p:spPr>
-          <a:xfrm>
-            <a:off x="676656" y="5285232"/>
-            <a:ext cx="512064" cy="512064"/>
-          </a:xfrm>
-          <a:prstGeom prst="rect">
-            <a:avLst/>
-          </a:prstGeom>
-          <a:noFill/>
-          <a:ln/>
-        </p:spPr>
-        <p:txBody>
-          <a:bodyPr wrap="square" lIns="0" tIns="0" rIns="0" bIns="0" rtlCol="0" anchor="ctr"/>
-          <a:lstStyle/>
-          <a:p>
-            <a:pPr algn="ctr" indent="0" marL="0">
-              <a:buNone/>
-            </a:pPr>
-            <a:r>
-              <a:rPr lang="en-US" sz="1900" dirty="0">
-                <a:solidFill>
-                  <a:srgbClr val="000000"/>
-                </a:solidFill>
-              </a:rPr>
-              <a:t>🙋</a:t>
-            </a:r>
-            <a:endParaRPr lang="en-US" sz="1900" dirty="0"/>
-          </a:p>
-        </p:txBody>
-      </p:sp>
-      <p:sp>
-        <p:nvSpPr>
-          <p:cNvPr id="32" name="Text 30"/>
-          <p:cNvSpPr/>
-          <p:nvPr/>
-        </p:nvSpPr>
-        <p:spPr>
-          <a:xfrm>
-            <a:off x="1316736" y="4901184"/>
-            <a:ext cx="2685288" cy="1280160"/>
-          </a:xfrm>
-          <a:prstGeom prst="rect">
-            <a:avLst/>
-          </a:prstGeom>
-          <a:noFill/>
-          <a:ln/>
-        </p:spPr>
-        <p:txBody>
-          <a:bodyPr wrap="square" lIns="0" tIns="0" rIns="0" bIns="0" rtlCol="0" anchor="ctr"/>
-          <a:lstStyle/>
-          <a:p>
-            <a:pPr indent="0" marL="0">
-              <a:lnSpc>
-                <a:spcPct val="105000"/>
-              </a:lnSpc>
-              <a:buNone/>
-            </a:pPr>
-            <a:r>
-              <a:rPr lang="en-US" sz="1500" b="1" dirty="0">
-                <a:solidFill>
-                  <a:srgbClr val="2F3C7E"/>
-                </a:solidFill>
-                <a:latin typeface="Calibri" pitchFamily="34" charset="0"/>
-                <a:ea typeface="Calibri" pitchFamily="34" charset="-122"/>
-                <a:cs typeface="Calibri" pitchFamily="34" charset="-120"/>
-              </a:rPr>
-              <a:t>quién / quiénes</a:t>
-            </a:r>
-            <a:endParaRPr lang="en-US" sz="1500" dirty="0"/>
-          </a:p>
-          <a:p>
-            <a:pPr indent="0" marL="0">
-              <a:lnSpc>
-                <a:spcPct val="105000"/>
-              </a:lnSpc>
-              <a:buNone/>
-            </a:pPr>
-            <a:r>
-              <a:rPr lang="en-US" sz="1100" dirty="0">
-                <a:solidFill>
-                  <a:srgbClr val="5C6690"/>
-                </a:solidFill>
-                <a:latin typeface="Calibri" pitchFamily="34" charset="0"/>
-                <a:ea typeface="Calibri" pitchFamily="34" charset="-122"/>
-                <a:cs typeface="Calibri" pitchFamily="34" charset="-120"/>
-              </a:rPr>
-              <a:t>кто</a:t>
-            </a:r>
-            <a:endParaRPr lang="en-US" sz="1500" dirty="0"/>
-          </a:p>
-        </p:txBody>
-      </p:sp>
-      <p:sp>
-        <p:nvSpPr>
-          <p:cNvPr id="33" name="Shape 31"/>
-          <p:cNvSpPr/>
-          <p:nvPr/>
-        </p:nvSpPr>
-        <p:spPr>
-          <a:xfrm>
-            <a:off x="4312920" y="4855464"/>
-            <a:ext cx="3563112" cy="1371600"/>
-          </a:xfrm>
-          <a:prstGeom prst="roundRect">
-            <a:avLst>
-              <a:gd name="adj" fmla="val 6000"/>
-            </a:avLst>
-          </a:prstGeom>
-          <a:solidFill>
-            <a:srgbClr val="F5F6FB"/>
-          </a:solidFill>
-          <a:ln/>
-          <a:effectLst>
-            <a:outerShdw sx="100000" sy="100000" kx="0" ky="0" algn="bl" rotWithShape="0" blurRad="76200" dist="38100" dir="5400000">
-              <a:srgbClr val="1B2340">
-                <a:alpha val="18000"/>
-              </a:srgbClr>
-            </a:outerShdw>
-          </a:effectLst>
-        </p:spPr>
-      </p:sp>
-      <p:sp>
-        <p:nvSpPr>
-          <p:cNvPr id="34" name="Shape 32"/>
-          <p:cNvSpPr/>
-          <p:nvPr/>
-        </p:nvSpPr>
-        <p:spPr>
-          <a:xfrm>
-            <a:off x="4440936" y="5285232"/>
-            <a:ext cx="512064" cy="512064"/>
-          </a:xfrm>
-          <a:prstGeom prst="ellipse">
-            <a:avLst/>
-          </a:prstGeom>
-          <a:solidFill>
-            <a:srgbClr val="F96167"/>
-          </a:solidFill>
-          <a:ln/>
-        </p:spPr>
-      </p:sp>
-      <p:sp>
-        <p:nvSpPr>
-          <p:cNvPr id="35" name="Text 33"/>
-          <p:cNvSpPr/>
-          <p:nvPr/>
-        </p:nvSpPr>
-        <p:spPr>
-          <a:xfrm>
-            <a:off x="4440936" y="5285232"/>
-            <a:ext cx="512064" cy="512064"/>
-          </a:xfrm>
-          <a:prstGeom prst="rect">
-            <a:avLst/>
-          </a:prstGeom>
-          <a:noFill/>
-          <a:ln/>
-        </p:spPr>
-        <p:txBody>
-          <a:bodyPr wrap="square" lIns="0" tIns="0" rIns="0" bIns="0" rtlCol="0" anchor="ctr"/>
-          <a:lstStyle/>
-          <a:p>
-            <a:pPr algn="ctr" indent="0" marL="0">
-              <a:buNone/>
-            </a:pPr>
-            <a:r>
-              <a:rPr lang="en-US" sz="1900" dirty="0">
-                <a:solidFill>
-                  <a:srgbClr val="000000"/>
-                </a:solidFill>
-              </a:rPr>
-              <a:t>🔢</a:t>
-            </a:r>
-            <a:endParaRPr lang="en-US" sz="1900" dirty="0"/>
-          </a:p>
-        </p:txBody>
-      </p:sp>
-      <p:sp>
-        <p:nvSpPr>
-          <p:cNvPr id="36" name="Text 34"/>
-          <p:cNvSpPr/>
-          <p:nvPr/>
-        </p:nvSpPr>
-        <p:spPr>
-          <a:xfrm>
-            <a:off x="5081016" y="4901184"/>
-            <a:ext cx="2685288" cy="1280160"/>
-          </a:xfrm>
-          <a:prstGeom prst="rect">
-            <a:avLst/>
-          </a:prstGeom>
-          <a:noFill/>
-          <a:ln/>
-        </p:spPr>
-        <p:txBody>
-          <a:bodyPr wrap="square" lIns="0" tIns="0" rIns="0" bIns="0" rtlCol="0" anchor="ctr"/>
-          <a:lstStyle/>
-          <a:p>
-            <a:pPr indent="0" marL="0">
-              <a:lnSpc>
-                <a:spcPct val="105000"/>
-              </a:lnSpc>
-              <a:buNone/>
-            </a:pPr>
-            <a:r>
-              <a:rPr lang="en-US" sz="1500" b="1" dirty="0">
-                <a:solidFill>
-                  <a:srgbClr val="2F3C7E"/>
-                </a:solidFill>
-                <a:latin typeface="Calibri" pitchFamily="34" charset="0"/>
-                <a:ea typeface="Calibri" pitchFamily="34" charset="-122"/>
-                <a:cs typeface="Calibri" pitchFamily="34" charset="-120"/>
-              </a:rPr>
-              <a:t>cuánto/a/os/as</a:t>
-            </a:r>
-            <a:endParaRPr lang="en-US" sz="1500" dirty="0"/>
-          </a:p>
-          <a:p>
-            <a:pPr indent="0" marL="0">
-              <a:lnSpc>
-                <a:spcPct val="105000"/>
-              </a:lnSpc>
-              <a:buNone/>
-            </a:pPr>
-            <a:r>
-              <a:rPr lang="en-US" sz="1100" dirty="0">
-                <a:solidFill>
-                  <a:srgbClr val="5C6690"/>
-                </a:solidFill>
-                <a:latin typeface="Calibri" pitchFamily="34" charset="0"/>
-                <a:ea typeface="Calibri" pitchFamily="34" charset="-122"/>
-                <a:cs typeface="Calibri" pitchFamily="34" charset="-120"/>
-              </a:rPr>
               <a:t>сколько</a:t>
             </a:r>
-            <a:endParaRPr lang="en-US" sz="1500" dirty="0"/>
-          </a:p>
-        </p:txBody>
-      </p:sp>
-      <p:sp>
-        <p:nvSpPr>
-          <p:cNvPr id="37" name="Text 35"/>
+            <a:endParaRPr lang="en-US" sz="1300" dirty="0"/>
+          </a:p>
+        </p:txBody>
+      </p:sp>
+      <p:sp>
+        <p:nvSpPr>
+          <p:cNvPr id="43" name="Text 41"/>
           <p:cNvSpPr/>
           <p:nvPr/>
         </p:nvSpPr>
@@ -21892,7 +24407,7 @@
       </p:sp>
       <p:sp>
         <p:nvSpPr>
-          <p:cNvPr id="38" name="Text 36"/>
+          <p:cNvPr id="44" name="Text 42"/>
           <p:cNvSpPr/>
           <p:nvPr/>
         </p:nvSpPr>
@@ -21923,7 +24438,7 @@
                 <a:ea typeface="Calibri" pitchFamily="34" charset="-122"/>
                 <a:cs typeface="Calibri" pitchFamily="34" charset="-120"/>
               </a:rPr>
-              <a:t>© Ángel Luis Acosta González</a:t>
+              <a:t>© Angel Luis Acosta González</a:t>
             </a:r>
             <a:endParaRPr lang="en-US" sz="900" dirty="0"/>
           </a:p>
@@ -23179,7 +25694,7 @@
                 <a:ea typeface="Calibri" pitchFamily="34" charset="-122"/>
                 <a:cs typeface="Calibri" pitchFamily="34" charset="-120"/>
               </a:rPr>
-              <a:t>© Ángel Luis Acosta González</a:t>
+              <a:t>© Angel Luis Acosta González</a:t>
             </a:r>
             <a:endParaRPr lang="en-US" sz="900" dirty="0"/>
           </a:p>
@@ -24582,7 +27097,7 @@
                 <a:ea typeface="Calibri" pitchFamily="34" charset="-122"/>
                 <a:cs typeface="Calibri" pitchFamily="34" charset="-120"/>
               </a:rPr>
-              <a:t>© Ángel Luis Acosta González</a:t>
+              <a:t>© Angel Luis Acosta González</a:t>
             </a:r>
             <a:endParaRPr lang="en-US" sz="900" dirty="0"/>
           </a:p>
@@ -26720,7 +29235,7 @@
                 <a:ea typeface="Calibri" pitchFamily="34" charset="-122"/>
                 <a:cs typeface="Calibri" pitchFamily="34" charset="-120"/>
               </a:rPr>
-              <a:t>© Ángel Luis Acosta González</a:t>
+              <a:t>© Angel Luis Acosta González</a:t>
             </a:r>
             <a:endParaRPr lang="en-US" sz="900" dirty="0"/>
           </a:p>
@@ -28858,7 +31373,7 @@
                 <a:ea typeface="Calibri" pitchFamily="34" charset="-122"/>
                 <a:cs typeface="Calibri" pitchFamily="34" charset="-120"/>
               </a:rPr>
-              <a:t>© Ángel Luis Acosta González</a:t>
+              <a:t>© Angel Luis Acosta González</a:t>
             </a:r>
             <a:endParaRPr lang="en-US" sz="900" dirty="0"/>
           </a:p>

--- a/docencia-espanol/materiales/presentaciones/nuevo-espanol-en-marcha-1_unidad1.pptx
+++ b/docencia-espanol/materiales/presentaciones/nuevo-espanol-en-marcha-1_unidad1.pptx
@@ -9893,7 +9893,7 @@
                 <a:ea typeface="Cambria" pitchFamily="34" charset="-122"/>
                 <a:cs typeface="Cambria" pitchFamily="34" charset="-120"/>
               </a:rPr>
-              <a:t>Verbos clave en presente</a:t>
+              <a:t>Verbos regulares en presente</a:t>
             </a:r>
             <a:endParaRPr lang="en-US" sz="3000" dirty="0"/>
           </a:p>
@@ -9932,7 +9932,7 @@
                 <a:ea typeface="Calibri" pitchFamily="34" charset="-122"/>
                 <a:cs typeface="Calibri" pitchFamily="34" charset="-120"/>
               </a:rPr>
-              <a:t>Regulares e irregulares: la misma terminación no siempre sirve</a:t>
+              <a:t>La misma terminación para -ar, -er, -ir</a:t>
             </a:r>
             <a:endParaRPr lang="en-US" sz="1400" dirty="0"/>
           </a:p>
@@ -9940,57 +9940,18 @@
       </p:sp>
       <p:sp>
         <p:nvSpPr>
-          <p:cNvPr id="5" name="Text 3"/>
-          <p:cNvSpPr/>
-          <p:nvPr/>
-        </p:nvSpPr>
-        <p:spPr>
-          <a:xfrm>
-            <a:off x="548640" y="1463040"/>
-            <a:ext cx="5486400" cy="256032"/>
-          </a:xfrm>
-          <a:prstGeom prst="rect">
-            <a:avLst/>
-          </a:prstGeom>
-          <a:noFill/>
-          <a:ln/>
-        </p:spPr>
-        <p:txBody>
-          <a:bodyPr wrap="square" lIns="0" tIns="0" rIns="0" bIns="0" rtlCol="0" anchor="ctr"/>
-          <a:lstStyle/>
-          <a:p>
-            <a:pPr indent="0" marL="0">
-              <a:buNone/>
-            </a:pPr>
-            <a:r>
-              <a:rPr lang="en-US" sz="1200" b="1" spc="150" kern="0" dirty="0">
-                <a:solidFill>
-                  <a:srgbClr val="F96167"/>
-                </a:solidFill>
-                <a:latin typeface="Calibri" pitchFamily="34" charset="0"/>
-                <a:ea typeface="Calibri" pitchFamily="34" charset="-122"/>
-                <a:cs typeface="Calibri" pitchFamily="34" charset="-120"/>
-              </a:rPr>
-              <a:t>VERBOS REGULARES</a:t>
-            </a:r>
-            <a:endParaRPr lang="en-US" sz="1200" dirty="0"/>
-          </a:p>
-        </p:txBody>
-      </p:sp>
-      <p:sp>
-        <p:nvSpPr>
-          <p:cNvPr id="6" name="Shape 4"/>
-          <p:cNvSpPr/>
-          <p:nvPr/>
-        </p:nvSpPr>
-        <p:spPr>
-          <a:xfrm>
-            <a:off x="548640" y="1719072"/>
-            <a:ext cx="3514344" cy="2084832"/>
+          <p:cNvPr id="5" name="Shape 3"/>
+          <p:cNvSpPr/>
+          <p:nvPr/>
+        </p:nvSpPr>
+        <p:spPr>
+          <a:xfrm>
+            <a:off x="548640" y="1554480"/>
+            <a:ext cx="3514344" cy="4846320"/>
           </a:xfrm>
           <a:prstGeom prst="roundRect">
             <a:avLst>
-              <a:gd name="adj" fmla="val 4386"/>
+              <a:gd name="adj" fmla="val 2602"/>
             </a:avLst>
           </a:prstGeom>
           <a:solidFill>
@@ -10008,13 +9969,13 @@
       </p:sp>
       <p:sp>
         <p:nvSpPr>
-          <p:cNvPr id="7" name="Shape 5"/>
-          <p:cNvSpPr/>
-          <p:nvPr/>
-        </p:nvSpPr>
-        <p:spPr>
-          <a:xfrm>
-            <a:off x="713232" y="1865376"/>
+          <p:cNvPr id="6" name="Shape 4"/>
+          <p:cNvSpPr/>
+          <p:nvPr/>
+        </p:nvSpPr>
+        <p:spPr>
+          <a:xfrm>
+            <a:off x="713232" y="1700784"/>
             <a:ext cx="457200" cy="457200"/>
           </a:xfrm>
           <a:prstGeom prst="ellipse">
@@ -10028,37 +9989,76 @@
       </p:sp>
       <p:sp>
         <p:nvSpPr>
+          <p:cNvPr id="7" name="Text 5"/>
+          <p:cNvSpPr/>
+          <p:nvPr/>
+        </p:nvSpPr>
+        <p:spPr>
+          <a:xfrm>
+            <a:off x="713232" y="1700784"/>
+            <a:ext cx="457200" cy="457200"/>
+          </a:xfrm>
+          <a:prstGeom prst="rect">
+            <a:avLst/>
+          </a:prstGeom>
+          <a:noFill/>
+          <a:ln/>
+        </p:spPr>
+        <p:txBody>
+          <a:bodyPr wrap="square" lIns="0" tIns="0" rIns="0" bIns="0" rtlCol="0" anchor="ctr"/>
+          <a:lstStyle/>
+          <a:p>
+            <a:pPr algn="ctr" indent="0" marL="0">
+              <a:buNone/>
+            </a:pPr>
+            <a:r>
+              <a:rPr lang="en-US" sz="2600" dirty="0">
+                <a:solidFill>
+                  <a:srgbClr val="000000"/>
+                </a:solidFill>
+              </a:rPr>
+              <a:t>💼</a:t>
+            </a:r>
+            <a:endParaRPr lang="en-US" sz="2600" dirty="0"/>
+          </a:p>
+        </p:txBody>
+      </p:sp>
+      <p:sp>
+        <p:nvSpPr>
           <p:cNvPr id="8" name="Text 6"/>
           <p:cNvSpPr/>
           <p:nvPr/>
         </p:nvSpPr>
         <p:spPr>
           <a:xfrm>
-            <a:off x="713232" y="1865376"/>
-            <a:ext cx="457200" cy="457200"/>
-          </a:xfrm>
-          <a:prstGeom prst="rect">
-            <a:avLst/>
-          </a:prstGeom>
-          <a:noFill/>
-          <a:ln/>
-        </p:spPr>
-        <p:txBody>
-          <a:bodyPr wrap="square" lIns="0" tIns="0" rIns="0" bIns="0" rtlCol="0" anchor="ctr"/>
-          <a:lstStyle/>
-          <a:p>
-            <a:pPr algn="ctr" indent="0" marL="0">
-              <a:buNone/>
-            </a:pPr>
-            <a:r>
-              <a:rPr lang="en-US" sz="2600" dirty="0">
-                <a:solidFill>
-                  <a:srgbClr val="000000"/>
-                </a:solidFill>
-              </a:rPr>
-              <a:t>💼</a:t>
-            </a:r>
-            <a:endParaRPr lang="en-US" sz="2600" dirty="0"/>
+            <a:off x="1298448" y="1691640"/>
+            <a:ext cx="2599944" cy="365760"/>
+          </a:xfrm>
+          <a:prstGeom prst="rect">
+            <a:avLst/>
+          </a:prstGeom>
+          <a:noFill/>
+          <a:ln/>
+        </p:spPr>
+        <p:txBody>
+          <a:bodyPr wrap="square" lIns="0" tIns="0" rIns="0" bIns="0" rtlCol="0" anchor="ctr"/>
+          <a:lstStyle/>
+          <a:p>
+            <a:pPr indent="0" marL="0">
+              <a:buNone/>
+            </a:pPr>
+            <a:r>
+              <a:rPr lang="en-US" sz="1800" b="1" dirty="0">
+                <a:solidFill>
+                  <a:srgbClr val="2F3C7E"/>
+                </a:solidFill>
+                <a:latin typeface="Calibri" pitchFamily="34" charset="0"/>
+                <a:ea typeface="Calibri" pitchFamily="34" charset="-122"/>
+                <a:cs typeface="Calibri" pitchFamily="34" charset="-120"/>
+              </a:rPr>
+              <a:t>trabajar</a:t>
+            </a:r>
+            <a:endParaRPr lang="en-US" sz="1800" dirty="0"/>
           </a:p>
         </p:txBody>
       </p:sp>
@@ -10070,8 +10070,8 @@
         </p:nvSpPr>
         <p:spPr>
           <a:xfrm>
-            <a:off x="1298448" y="1856232"/>
-            <a:ext cx="2599944" cy="365760"/>
+            <a:off x="1298448" y="2057400"/>
+            <a:ext cx="2599944" cy="274320"/>
           </a:xfrm>
           <a:prstGeom prst="rect">
             <a:avLst/>
@@ -10087,45 +10087,6 @@
               <a:buNone/>
             </a:pPr>
             <a:r>
-              <a:rPr lang="en-US" sz="1800" b="1" dirty="0">
-                <a:solidFill>
-                  <a:srgbClr val="2F3C7E"/>
-                </a:solidFill>
-                <a:latin typeface="Calibri" pitchFamily="34" charset="0"/>
-                <a:ea typeface="Calibri" pitchFamily="34" charset="-122"/>
-                <a:cs typeface="Calibri" pitchFamily="34" charset="-120"/>
-              </a:rPr>
-              <a:t>trabajar</a:t>
-            </a:r>
-            <a:endParaRPr lang="en-US" sz="1800" dirty="0"/>
-          </a:p>
-        </p:txBody>
-      </p:sp>
-      <p:sp>
-        <p:nvSpPr>
-          <p:cNvPr id="10" name="Text 8"/>
-          <p:cNvSpPr/>
-          <p:nvPr/>
-        </p:nvSpPr>
-        <p:spPr>
-          <a:xfrm>
-            <a:off x="1298448" y="2221992"/>
-            <a:ext cx="2599944" cy="274320"/>
-          </a:xfrm>
-          <a:prstGeom prst="rect">
-            <a:avLst/>
-          </a:prstGeom>
-          <a:noFill/>
-          <a:ln/>
-        </p:spPr>
-        <p:txBody>
-          <a:bodyPr wrap="square" lIns="0" tIns="0" rIns="0" bIns="0" rtlCol="0" anchor="ctr"/>
-          <a:lstStyle/>
-          <a:p>
-            <a:pPr indent="0" marL="0">
-              <a:buNone/>
-            </a:pPr>
-            <a:r>
               <a:rPr lang="en-US" sz="1150" i="1" dirty="0">
                 <a:solidFill>
                   <a:srgbClr val="5C6690"/>
@@ -10142,14 +10103,14 @@
       </p:sp>
       <p:sp>
         <p:nvSpPr>
-          <p:cNvPr id="11" name="Shape 9"/>
-          <p:cNvSpPr/>
-          <p:nvPr/>
-        </p:nvSpPr>
-        <p:spPr>
-          <a:xfrm>
-            <a:off x="731520" y="2615184"/>
-            <a:ext cx="3148584" cy="1051560"/>
+          <p:cNvPr id="10" name="Shape 8"/>
+          <p:cNvSpPr/>
+          <p:nvPr/>
+        </p:nvSpPr>
+        <p:spPr>
+          <a:xfrm>
+            <a:off x="731520" y="2450592"/>
+            <a:ext cx="3148584" cy="3813048"/>
           </a:xfrm>
           <a:prstGeom prst="rect">
             <a:avLst/>
@@ -10162,14 +10123,14 @@
       </p:sp>
       <p:sp>
         <p:nvSpPr>
-          <p:cNvPr id="12" name="Shape 10"/>
-          <p:cNvSpPr/>
-          <p:nvPr/>
-        </p:nvSpPr>
-        <p:spPr>
-          <a:xfrm>
-            <a:off x="2748686" y="2670048"/>
-            <a:ext cx="0" cy="941832"/>
+          <p:cNvPr id="11" name="Shape 9"/>
+          <p:cNvSpPr/>
+          <p:nvPr/>
+        </p:nvSpPr>
+        <p:spPr>
+          <a:xfrm>
+            <a:off x="2748686" y="2505456"/>
+            <a:ext cx="0" cy="3703320"/>
           </a:xfrm>
           <a:prstGeom prst="line">
             <a:avLst/>
@@ -10185,53 +10146,53 @@
       </p:sp>
       <p:sp>
         <p:nvSpPr>
+          <p:cNvPr id="12" name="Text 10"/>
+          <p:cNvSpPr/>
+          <p:nvPr/>
+        </p:nvSpPr>
+        <p:spPr>
+          <a:xfrm>
+            <a:off x="822960" y="2450592"/>
+            <a:ext cx="1742846" cy="635508"/>
+          </a:xfrm>
+          <a:prstGeom prst="rect">
+            <a:avLst/>
+          </a:prstGeom>
+          <a:noFill/>
+          <a:ln/>
+        </p:spPr>
+        <p:txBody>
+          <a:bodyPr wrap="square" lIns="0" tIns="0" rIns="0" bIns="0" rtlCol="0" anchor="ctr"/>
+          <a:lstStyle/>
+          <a:p>
+            <a:pPr algn="r" indent="0" marL="0">
+              <a:buNone/>
+            </a:pPr>
+            <a:r>
+              <a:rPr lang="en-US" sz="1050" b="1" dirty="0">
+                <a:solidFill>
+                  <a:srgbClr val="2F3C7E"/>
+                </a:solidFill>
+                <a:latin typeface="Calibri" pitchFamily="34" charset="0"/>
+                <a:ea typeface="Calibri" pitchFamily="34" charset="-122"/>
+                <a:cs typeface="Calibri" pitchFamily="34" charset="-120"/>
+              </a:rPr>
+              <a:t>yo</a:t>
+            </a:r>
+            <a:endParaRPr lang="en-US" sz="1050" dirty="0"/>
+          </a:p>
+        </p:txBody>
+      </p:sp>
+      <p:sp>
+        <p:nvSpPr>
           <p:cNvPr id="13" name="Text 11"/>
           <p:cNvSpPr/>
           <p:nvPr/>
         </p:nvSpPr>
         <p:spPr>
           <a:xfrm>
-            <a:off x="822960" y="2615184"/>
-            <a:ext cx="1742846" cy="175260"/>
-          </a:xfrm>
-          <a:prstGeom prst="rect">
-            <a:avLst/>
-          </a:prstGeom>
-          <a:noFill/>
-          <a:ln/>
-        </p:spPr>
-        <p:txBody>
-          <a:bodyPr wrap="square" lIns="0" tIns="0" rIns="0" bIns="0" rtlCol="0" anchor="ctr"/>
-          <a:lstStyle/>
-          <a:p>
-            <a:pPr algn="r" indent="0" marL="0">
-              <a:buNone/>
-            </a:pPr>
-            <a:r>
-              <a:rPr lang="en-US" sz="1050" b="1" dirty="0">
-                <a:solidFill>
-                  <a:srgbClr val="2F3C7E"/>
-                </a:solidFill>
-                <a:latin typeface="Calibri" pitchFamily="34" charset="0"/>
-                <a:ea typeface="Calibri" pitchFamily="34" charset="-122"/>
-                <a:cs typeface="Calibri" pitchFamily="34" charset="-120"/>
-              </a:rPr>
-              <a:t>yo</a:t>
-            </a:r>
-            <a:endParaRPr lang="en-US" sz="1050" dirty="0"/>
-          </a:p>
-        </p:txBody>
-      </p:sp>
-      <p:sp>
-        <p:nvSpPr>
-          <p:cNvPr id="14" name="Text 12"/>
-          <p:cNvSpPr/>
-          <p:nvPr/>
-        </p:nvSpPr>
-        <p:spPr>
-          <a:xfrm>
-            <a:off x="2876702" y="2615184"/>
-            <a:ext cx="1039978" cy="175260"/>
+            <a:off x="2876702" y="2450592"/>
+            <a:ext cx="1039978" cy="635508"/>
           </a:xfrm>
           <a:prstGeom prst="rect">
             <a:avLst/>
@@ -10263,13 +10224,13 @@
       </p:sp>
       <p:sp>
         <p:nvSpPr>
-          <p:cNvPr id="15" name="Shape 13"/>
-          <p:cNvSpPr/>
-          <p:nvPr/>
-        </p:nvSpPr>
-        <p:spPr>
-          <a:xfrm>
-            <a:off x="786384" y="2790444"/>
+          <p:cNvPr id="14" name="Shape 12"/>
+          <p:cNvSpPr/>
+          <p:nvPr/>
+        </p:nvSpPr>
+        <p:spPr>
+          <a:xfrm>
+            <a:off x="786384" y="3086100"/>
             <a:ext cx="3038856" cy="0"/>
           </a:xfrm>
           <a:prstGeom prst="line">
@@ -10286,53 +10247,53 @@
       </p:sp>
       <p:sp>
         <p:nvSpPr>
+          <p:cNvPr id="15" name="Text 13"/>
+          <p:cNvSpPr/>
+          <p:nvPr/>
+        </p:nvSpPr>
+        <p:spPr>
+          <a:xfrm>
+            <a:off x="822960" y="3086100"/>
+            <a:ext cx="1742846" cy="635508"/>
+          </a:xfrm>
+          <a:prstGeom prst="rect">
+            <a:avLst/>
+          </a:prstGeom>
+          <a:noFill/>
+          <a:ln/>
+        </p:spPr>
+        <p:txBody>
+          <a:bodyPr wrap="square" lIns="0" tIns="0" rIns="0" bIns="0" rtlCol="0" anchor="ctr"/>
+          <a:lstStyle/>
+          <a:p>
+            <a:pPr algn="r" indent="0" marL="0">
+              <a:buNone/>
+            </a:pPr>
+            <a:r>
+              <a:rPr lang="en-US" sz="1050" b="1" dirty="0">
+                <a:solidFill>
+                  <a:srgbClr val="2F3C7E"/>
+                </a:solidFill>
+                <a:latin typeface="Calibri" pitchFamily="34" charset="0"/>
+                <a:ea typeface="Calibri" pitchFamily="34" charset="-122"/>
+                <a:cs typeface="Calibri" pitchFamily="34" charset="-120"/>
+              </a:rPr>
+              <a:t>tú</a:t>
+            </a:r>
+            <a:endParaRPr lang="en-US" sz="1050" dirty="0"/>
+          </a:p>
+        </p:txBody>
+      </p:sp>
+      <p:sp>
+        <p:nvSpPr>
           <p:cNvPr id="16" name="Text 14"/>
           <p:cNvSpPr/>
           <p:nvPr/>
         </p:nvSpPr>
         <p:spPr>
           <a:xfrm>
-            <a:off x="822960" y="2790444"/>
-            <a:ext cx="1742846" cy="175260"/>
-          </a:xfrm>
-          <a:prstGeom prst="rect">
-            <a:avLst/>
-          </a:prstGeom>
-          <a:noFill/>
-          <a:ln/>
-        </p:spPr>
-        <p:txBody>
-          <a:bodyPr wrap="square" lIns="0" tIns="0" rIns="0" bIns="0" rtlCol="0" anchor="ctr"/>
-          <a:lstStyle/>
-          <a:p>
-            <a:pPr algn="r" indent="0" marL="0">
-              <a:buNone/>
-            </a:pPr>
-            <a:r>
-              <a:rPr lang="en-US" sz="1050" b="1" dirty="0">
-                <a:solidFill>
-                  <a:srgbClr val="2F3C7E"/>
-                </a:solidFill>
-                <a:latin typeface="Calibri" pitchFamily="34" charset="0"/>
-                <a:ea typeface="Calibri" pitchFamily="34" charset="-122"/>
-                <a:cs typeface="Calibri" pitchFamily="34" charset="-120"/>
-              </a:rPr>
-              <a:t>tú</a:t>
-            </a:r>
-            <a:endParaRPr lang="en-US" sz="1050" dirty="0"/>
-          </a:p>
-        </p:txBody>
-      </p:sp>
-      <p:sp>
-        <p:nvSpPr>
-          <p:cNvPr id="17" name="Text 15"/>
-          <p:cNvSpPr/>
-          <p:nvPr/>
-        </p:nvSpPr>
-        <p:spPr>
-          <a:xfrm>
-            <a:off x="2876702" y="2790444"/>
-            <a:ext cx="1039978" cy="175260"/>
+            <a:off x="2876702" y="3086100"/>
+            <a:ext cx="1039978" cy="635508"/>
           </a:xfrm>
           <a:prstGeom prst="rect">
             <a:avLst/>
@@ -10364,13 +10325,13 @@
       </p:sp>
       <p:sp>
         <p:nvSpPr>
-          <p:cNvPr id="18" name="Shape 16"/>
-          <p:cNvSpPr/>
-          <p:nvPr/>
-        </p:nvSpPr>
-        <p:spPr>
-          <a:xfrm>
-            <a:off x="786384" y="2965704"/>
+          <p:cNvPr id="17" name="Shape 15"/>
+          <p:cNvSpPr/>
+          <p:nvPr/>
+        </p:nvSpPr>
+        <p:spPr>
+          <a:xfrm>
+            <a:off x="786384" y="3721608"/>
             <a:ext cx="3038856" cy="0"/>
           </a:xfrm>
           <a:prstGeom prst="line">
@@ -10387,53 +10348,53 @@
       </p:sp>
       <p:sp>
         <p:nvSpPr>
+          <p:cNvPr id="18" name="Text 16"/>
+          <p:cNvSpPr/>
+          <p:nvPr/>
+        </p:nvSpPr>
+        <p:spPr>
+          <a:xfrm>
+            <a:off x="822960" y="3721608"/>
+            <a:ext cx="1742846" cy="635508"/>
+          </a:xfrm>
+          <a:prstGeom prst="rect">
+            <a:avLst/>
+          </a:prstGeom>
+          <a:noFill/>
+          <a:ln/>
+        </p:spPr>
+        <p:txBody>
+          <a:bodyPr wrap="square" lIns="0" tIns="0" rIns="0" bIns="0" rtlCol="0" anchor="ctr"/>
+          <a:lstStyle/>
+          <a:p>
+            <a:pPr algn="r" indent="0" marL="0">
+              <a:buNone/>
+            </a:pPr>
+            <a:r>
+              <a:rPr lang="en-US" sz="1050" b="1" dirty="0">
+                <a:solidFill>
+                  <a:srgbClr val="2F3C7E"/>
+                </a:solidFill>
+                <a:latin typeface="Calibri" pitchFamily="34" charset="0"/>
+                <a:ea typeface="Calibri" pitchFamily="34" charset="-122"/>
+                <a:cs typeface="Calibri" pitchFamily="34" charset="-120"/>
+              </a:rPr>
+              <a:t>él/ella/Ud.</a:t>
+            </a:r>
+            <a:endParaRPr lang="en-US" sz="1050" dirty="0"/>
+          </a:p>
+        </p:txBody>
+      </p:sp>
+      <p:sp>
+        <p:nvSpPr>
           <p:cNvPr id="19" name="Text 17"/>
           <p:cNvSpPr/>
           <p:nvPr/>
         </p:nvSpPr>
         <p:spPr>
           <a:xfrm>
-            <a:off x="822960" y="2965704"/>
-            <a:ext cx="1742846" cy="175260"/>
-          </a:xfrm>
-          <a:prstGeom prst="rect">
-            <a:avLst/>
-          </a:prstGeom>
-          <a:noFill/>
-          <a:ln/>
-        </p:spPr>
-        <p:txBody>
-          <a:bodyPr wrap="square" lIns="0" tIns="0" rIns="0" bIns="0" rtlCol="0" anchor="ctr"/>
-          <a:lstStyle/>
-          <a:p>
-            <a:pPr algn="r" indent="0" marL="0">
-              <a:buNone/>
-            </a:pPr>
-            <a:r>
-              <a:rPr lang="en-US" sz="1050" b="1" dirty="0">
-                <a:solidFill>
-                  <a:srgbClr val="2F3C7E"/>
-                </a:solidFill>
-                <a:latin typeface="Calibri" pitchFamily="34" charset="0"/>
-                <a:ea typeface="Calibri" pitchFamily="34" charset="-122"/>
-                <a:cs typeface="Calibri" pitchFamily="34" charset="-120"/>
-              </a:rPr>
-              <a:t>él/ella/Ud.</a:t>
-            </a:r>
-            <a:endParaRPr lang="en-US" sz="1050" dirty="0"/>
-          </a:p>
-        </p:txBody>
-      </p:sp>
-      <p:sp>
-        <p:nvSpPr>
-          <p:cNvPr id="20" name="Text 18"/>
-          <p:cNvSpPr/>
-          <p:nvPr/>
-        </p:nvSpPr>
-        <p:spPr>
-          <a:xfrm>
-            <a:off x="2876702" y="2965704"/>
-            <a:ext cx="1039978" cy="175260"/>
+            <a:off x="2876702" y="3721608"/>
+            <a:ext cx="1039978" cy="635508"/>
           </a:xfrm>
           <a:prstGeom prst="rect">
             <a:avLst/>
@@ -10465,13 +10426,13 @@
       </p:sp>
       <p:sp>
         <p:nvSpPr>
-          <p:cNvPr id="21" name="Shape 19"/>
-          <p:cNvSpPr/>
-          <p:nvPr/>
-        </p:nvSpPr>
-        <p:spPr>
-          <a:xfrm>
-            <a:off x="786384" y="3140964"/>
+          <p:cNvPr id="20" name="Shape 18"/>
+          <p:cNvSpPr/>
+          <p:nvPr/>
+        </p:nvSpPr>
+        <p:spPr>
+          <a:xfrm>
+            <a:off x="786384" y="4357116"/>
             <a:ext cx="3038856" cy="0"/>
           </a:xfrm>
           <a:prstGeom prst="line">
@@ -10488,53 +10449,53 @@
       </p:sp>
       <p:sp>
         <p:nvSpPr>
+          <p:cNvPr id="21" name="Text 19"/>
+          <p:cNvSpPr/>
+          <p:nvPr/>
+        </p:nvSpPr>
+        <p:spPr>
+          <a:xfrm>
+            <a:off x="822960" y="4357116"/>
+            <a:ext cx="1742846" cy="635508"/>
+          </a:xfrm>
+          <a:prstGeom prst="rect">
+            <a:avLst/>
+          </a:prstGeom>
+          <a:noFill/>
+          <a:ln/>
+        </p:spPr>
+        <p:txBody>
+          <a:bodyPr wrap="square" lIns="0" tIns="0" rIns="0" bIns="0" rtlCol="0" anchor="ctr"/>
+          <a:lstStyle/>
+          <a:p>
+            <a:pPr algn="r" indent="0" marL="0">
+              <a:buNone/>
+            </a:pPr>
+            <a:r>
+              <a:rPr lang="en-US" sz="1050" b="1" dirty="0">
+                <a:solidFill>
+                  <a:srgbClr val="2F3C7E"/>
+                </a:solidFill>
+                <a:latin typeface="Calibri" pitchFamily="34" charset="0"/>
+                <a:ea typeface="Calibri" pitchFamily="34" charset="-122"/>
+                <a:cs typeface="Calibri" pitchFamily="34" charset="-120"/>
+              </a:rPr>
+              <a:t>nosotros/nosotras</a:t>
+            </a:r>
+            <a:endParaRPr lang="en-US" sz="1050" dirty="0"/>
+          </a:p>
+        </p:txBody>
+      </p:sp>
+      <p:sp>
+        <p:nvSpPr>
           <p:cNvPr id="22" name="Text 20"/>
           <p:cNvSpPr/>
           <p:nvPr/>
         </p:nvSpPr>
         <p:spPr>
           <a:xfrm>
-            <a:off x="822960" y="3140964"/>
-            <a:ext cx="1742846" cy="175260"/>
-          </a:xfrm>
-          <a:prstGeom prst="rect">
-            <a:avLst/>
-          </a:prstGeom>
-          <a:noFill/>
-          <a:ln/>
-        </p:spPr>
-        <p:txBody>
-          <a:bodyPr wrap="square" lIns="0" tIns="0" rIns="0" bIns="0" rtlCol="0" anchor="ctr"/>
-          <a:lstStyle/>
-          <a:p>
-            <a:pPr algn="r" indent="0" marL="0">
-              <a:buNone/>
-            </a:pPr>
-            <a:r>
-              <a:rPr lang="en-US" sz="1050" b="1" dirty="0">
-                <a:solidFill>
-                  <a:srgbClr val="2F3C7E"/>
-                </a:solidFill>
-                <a:latin typeface="Calibri" pitchFamily="34" charset="0"/>
-                <a:ea typeface="Calibri" pitchFamily="34" charset="-122"/>
-                <a:cs typeface="Calibri" pitchFamily="34" charset="-120"/>
-              </a:rPr>
-              <a:t>nosotros/nosotras</a:t>
-            </a:r>
-            <a:endParaRPr lang="en-US" sz="1050" dirty="0"/>
-          </a:p>
-        </p:txBody>
-      </p:sp>
-      <p:sp>
-        <p:nvSpPr>
-          <p:cNvPr id="23" name="Text 21"/>
-          <p:cNvSpPr/>
-          <p:nvPr/>
-        </p:nvSpPr>
-        <p:spPr>
-          <a:xfrm>
-            <a:off x="2876702" y="3140964"/>
-            <a:ext cx="1039978" cy="175260"/>
+            <a:off x="2876702" y="4357116"/>
+            <a:ext cx="1039978" cy="635508"/>
           </a:xfrm>
           <a:prstGeom prst="rect">
             <a:avLst/>
@@ -10566,13 +10527,13 @@
       </p:sp>
       <p:sp>
         <p:nvSpPr>
-          <p:cNvPr id="24" name="Shape 22"/>
-          <p:cNvSpPr/>
-          <p:nvPr/>
-        </p:nvSpPr>
-        <p:spPr>
-          <a:xfrm>
-            <a:off x="786384" y="3316224"/>
+          <p:cNvPr id="23" name="Shape 21"/>
+          <p:cNvSpPr/>
+          <p:nvPr/>
+        </p:nvSpPr>
+        <p:spPr>
+          <a:xfrm>
+            <a:off x="786384" y="4992624"/>
             <a:ext cx="3038856" cy="0"/>
           </a:xfrm>
           <a:prstGeom prst="line">
@@ -10589,53 +10550,53 @@
       </p:sp>
       <p:sp>
         <p:nvSpPr>
+          <p:cNvPr id="24" name="Text 22"/>
+          <p:cNvSpPr/>
+          <p:nvPr/>
+        </p:nvSpPr>
+        <p:spPr>
+          <a:xfrm>
+            <a:off x="822960" y="4992624"/>
+            <a:ext cx="1742846" cy="635508"/>
+          </a:xfrm>
+          <a:prstGeom prst="rect">
+            <a:avLst/>
+          </a:prstGeom>
+          <a:noFill/>
+          <a:ln/>
+        </p:spPr>
+        <p:txBody>
+          <a:bodyPr wrap="square" lIns="0" tIns="0" rIns="0" bIns="0" rtlCol="0" anchor="ctr"/>
+          <a:lstStyle/>
+          <a:p>
+            <a:pPr algn="r" indent="0" marL="0">
+              <a:buNone/>
+            </a:pPr>
+            <a:r>
+              <a:rPr lang="en-US" sz="1050" b="1" dirty="0">
+                <a:solidFill>
+                  <a:srgbClr val="2F3C7E"/>
+                </a:solidFill>
+                <a:latin typeface="Calibri" pitchFamily="34" charset="0"/>
+                <a:ea typeface="Calibri" pitchFamily="34" charset="-122"/>
+                <a:cs typeface="Calibri" pitchFamily="34" charset="-120"/>
+              </a:rPr>
+              <a:t>vosotros/vosotras</a:t>
+            </a:r>
+            <a:endParaRPr lang="en-US" sz="1050" dirty="0"/>
+          </a:p>
+        </p:txBody>
+      </p:sp>
+      <p:sp>
+        <p:nvSpPr>
           <p:cNvPr id="25" name="Text 23"/>
           <p:cNvSpPr/>
           <p:nvPr/>
         </p:nvSpPr>
         <p:spPr>
           <a:xfrm>
-            <a:off x="822960" y="3316224"/>
-            <a:ext cx="1742846" cy="175260"/>
-          </a:xfrm>
-          <a:prstGeom prst="rect">
-            <a:avLst/>
-          </a:prstGeom>
-          <a:noFill/>
-          <a:ln/>
-        </p:spPr>
-        <p:txBody>
-          <a:bodyPr wrap="square" lIns="0" tIns="0" rIns="0" bIns="0" rtlCol="0" anchor="ctr"/>
-          <a:lstStyle/>
-          <a:p>
-            <a:pPr algn="r" indent="0" marL="0">
-              <a:buNone/>
-            </a:pPr>
-            <a:r>
-              <a:rPr lang="en-US" sz="1050" b="1" dirty="0">
-                <a:solidFill>
-                  <a:srgbClr val="2F3C7E"/>
-                </a:solidFill>
-                <a:latin typeface="Calibri" pitchFamily="34" charset="0"/>
-                <a:ea typeface="Calibri" pitchFamily="34" charset="-122"/>
-                <a:cs typeface="Calibri" pitchFamily="34" charset="-120"/>
-              </a:rPr>
-              <a:t>vosotros/vosotras</a:t>
-            </a:r>
-            <a:endParaRPr lang="en-US" sz="1050" dirty="0"/>
-          </a:p>
-        </p:txBody>
-      </p:sp>
-      <p:sp>
-        <p:nvSpPr>
-          <p:cNvPr id="26" name="Text 24"/>
-          <p:cNvSpPr/>
-          <p:nvPr/>
-        </p:nvSpPr>
-        <p:spPr>
-          <a:xfrm>
-            <a:off x="2876702" y="3316224"/>
-            <a:ext cx="1039978" cy="175260"/>
+            <a:off x="2876702" y="4992624"/>
+            <a:ext cx="1039978" cy="635508"/>
           </a:xfrm>
           <a:prstGeom prst="rect">
             <a:avLst/>
@@ -10667,13 +10628,13 @@
       </p:sp>
       <p:sp>
         <p:nvSpPr>
-          <p:cNvPr id="27" name="Shape 25"/>
-          <p:cNvSpPr/>
-          <p:nvPr/>
-        </p:nvSpPr>
-        <p:spPr>
-          <a:xfrm>
-            <a:off x="786384" y="3491484"/>
+          <p:cNvPr id="26" name="Shape 24"/>
+          <p:cNvSpPr/>
+          <p:nvPr/>
+        </p:nvSpPr>
+        <p:spPr>
+          <a:xfrm>
+            <a:off x="786384" y="5628132"/>
             <a:ext cx="3038856" cy="0"/>
           </a:xfrm>
           <a:prstGeom prst="line">
@@ -10690,53 +10651,53 @@
       </p:sp>
       <p:sp>
         <p:nvSpPr>
+          <p:cNvPr id="27" name="Text 25"/>
+          <p:cNvSpPr/>
+          <p:nvPr/>
+        </p:nvSpPr>
+        <p:spPr>
+          <a:xfrm>
+            <a:off x="822960" y="5628132"/>
+            <a:ext cx="1742846" cy="635508"/>
+          </a:xfrm>
+          <a:prstGeom prst="rect">
+            <a:avLst/>
+          </a:prstGeom>
+          <a:noFill/>
+          <a:ln/>
+        </p:spPr>
+        <p:txBody>
+          <a:bodyPr wrap="square" lIns="0" tIns="0" rIns="0" bIns="0" rtlCol="0" anchor="ctr"/>
+          <a:lstStyle/>
+          <a:p>
+            <a:pPr algn="r" indent="0" marL="0">
+              <a:buNone/>
+            </a:pPr>
+            <a:r>
+              <a:rPr lang="en-US" sz="1050" b="1" dirty="0">
+                <a:solidFill>
+                  <a:srgbClr val="2F3C7E"/>
+                </a:solidFill>
+                <a:latin typeface="Calibri" pitchFamily="34" charset="0"/>
+                <a:ea typeface="Calibri" pitchFamily="34" charset="-122"/>
+                <a:cs typeface="Calibri" pitchFamily="34" charset="-120"/>
+              </a:rPr>
+              <a:t>ellos/ellas/Uds.</a:t>
+            </a:r>
+            <a:endParaRPr lang="en-US" sz="1050" dirty="0"/>
+          </a:p>
+        </p:txBody>
+      </p:sp>
+      <p:sp>
+        <p:nvSpPr>
           <p:cNvPr id="28" name="Text 26"/>
           <p:cNvSpPr/>
           <p:nvPr/>
         </p:nvSpPr>
         <p:spPr>
           <a:xfrm>
-            <a:off x="822960" y="3491484"/>
-            <a:ext cx="1742846" cy="175260"/>
-          </a:xfrm>
-          <a:prstGeom prst="rect">
-            <a:avLst/>
-          </a:prstGeom>
-          <a:noFill/>
-          <a:ln/>
-        </p:spPr>
-        <p:txBody>
-          <a:bodyPr wrap="square" lIns="0" tIns="0" rIns="0" bIns="0" rtlCol="0" anchor="ctr"/>
-          <a:lstStyle/>
-          <a:p>
-            <a:pPr algn="r" indent="0" marL="0">
-              <a:buNone/>
-            </a:pPr>
-            <a:r>
-              <a:rPr lang="en-US" sz="1050" b="1" dirty="0">
-                <a:solidFill>
-                  <a:srgbClr val="2F3C7E"/>
-                </a:solidFill>
-                <a:latin typeface="Calibri" pitchFamily="34" charset="0"/>
-                <a:ea typeface="Calibri" pitchFamily="34" charset="-122"/>
-                <a:cs typeface="Calibri" pitchFamily="34" charset="-120"/>
-              </a:rPr>
-              <a:t>ellos/ellas/Uds.</a:t>
-            </a:r>
-            <a:endParaRPr lang="en-US" sz="1050" dirty="0"/>
-          </a:p>
-        </p:txBody>
-      </p:sp>
-      <p:sp>
-        <p:nvSpPr>
-          <p:cNvPr id="29" name="Text 27"/>
-          <p:cNvSpPr/>
-          <p:nvPr/>
-        </p:nvSpPr>
-        <p:spPr>
-          <a:xfrm>
-            <a:off x="2876702" y="3491484"/>
-            <a:ext cx="1039978" cy="175260"/>
+            <a:off x="2876702" y="5628132"/>
+            <a:ext cx="1039978" cy="635508"/>
           </a:xfrm>
           <a:prstGeom prst="rect">
             <a:avLst/>
@@ -10768,18 +10729,18 @@
       </p:sp>
       <p:sp>
         <p:nvSpPr>
-          <p:cNvPr id="30" name="Shape 28"/>
-          <p:cNvSpPr/>
-          <p:nvPr/>
-        </p:nvSpPr>
-        <p:spPr>
-          <a:xfrm>
-            <a:off x="4337304" y="1719072"/>
-            <a:ext cx="3514344" cy="2084832"/>
+          <p:cNvPr id="29" name="Shape 27"/>
+          <p:cNvSpPr/>
+          <p:nvPr/>
+        </p:nvSpPr>
+        <p:spPr>
+          <a:xfrm>
+            <a:off x="4337304" y="1554480"/>
+            <a:ext cx="3514344" cy="4846320"/>
           </a:xfrm>
           <a:prstGeom prst="roundRect">
             <a:avLst>
-              <a:gd name="adj" fmla="val 4386"/>
+              <a:gd name="adj" fmla="val 2602"/>
             </a:avLst>
           </a:prstGeom>
           <a:solidFill>
@@ -10797,13 +10758,13 @@
       </p:sp>
       <p:sp>
         <p:nvSpPr>
-          <p:cNvPr id="31" name="Shape 29"/>
-          <p:cNvSpPr/>
-          <p:nvPr/>
-        </p:nvSpPr>
-        <p:spPr>
-          <a:xfrm>
-            <a:off x="4501896" y="1865376"/>
+          <p:cNvPr id="30" name="Shape 28"/>
+          <p:cNvSpPr/>
+          <p:nvPr/>
+        </p:nvSpPr>
+        <p:spPr>
+          <a:xfrm>
+            <a:off x="4501896" y="1700784"/>
             <a:ext cx="457200" cy="457200"/>
           </a:xfrm>
           <a:prstGeom prst="ellipse">
@@ -10817,37 +10778,76 @@
       </p:sp>
       <p:sp>
         <p:nvSpPr>
+          <p:cNvPr id="31" name="Text 29"/>
+          <p:cNvSpPr/>
+          <p:nvPr/>
+        </p:nvSpPr>
+        <p:spPr>
+          <a:xfrm>
+            <a:off x="4501896" y="1700784"/>
+            <a:ext cx="457200" cy="457200"/>
+          </a:xfrm>
+          <a:prstGeom prst="rect">
+            <a:avLst/>
+          </a:prstGeom>
+          <a:noFill/>
+          <a:ln/>
+        </p:spPr>
+        <p:txBody>
+          <a:bodyPr wrap="square" lIns="0" tIns="0" rIns="0" bIns="0" rtlCol="0" anchor="ctr"/>
+          <a:lstStyle/>
+          <a:p>
+            <a:pPr algn="ctr" indent="0" marL="0">
+              <a:buNone/>
+            </a:pPr>
+            <a:r>
+              <a:rPr lang="en-US" sz="2600" dirty="0">
+                <a:solidFill>
+                  <a:srgbClr val="000000"/>
+                </a:solidFill>
+              </a:rPr>
+              <a:t>🍽️</a:t>
+            </a:r>
+            <a:endParaRPr lang="en-US" sz="2600" dirty="0"/>
+          </a:p>
+        </p:txBody>
+      </p:sp>
+      <p:sp>
+        <p:nvSpPr>
           <p:cNvPr id="32" name="Text 30"/>
           <p:cNvSpPr/>
           <p:nvPr/>
         </p:nvSpPr>
         <p:spPr>
           <a:xfrm>
-            <a:off x="4501896" y="1865376"/>
-            <a:ext cx="457200" cy="457200"/>
-          </a:xfrm>
-          <a:prstGeom prst="rect">
-            <a:avLst/>
-          </a:prstGeom>
-          <a:noFill/>
-          <a:ln/>
-        </p:spPr>
-        <p:txBody>
-          <a:bodyPr wrap="square" lIns="0" tIns="0" rIns="0" bIns="0" rtlCol="0" anchor="ctr"/>
-          <a:lstStyle/>
-          <a:p>
-            <a:pPr algn="ctr" indent="0" marL="0">
-              <a:buNone/>
-            </a:pPr>
-            <a:r>
-              <a:rPr lang="en-US" sz="2600" dirty="0">
-                <a:solidFill>
-                  <a:srgbClr val="000000"/>
-                </a:solidFill>
-              </a:rPr>
-              <a:t>🍽️</a:t>
-            </a:r>
-            <a:endParaRPr lang="en-US" sz="2600" dirty="0"/>
+            <a:off x="5087112" y="1691640"/>
+            <a:ext cx="2599944" cy="365760"/>
+          </a:xfrm>
+          <a:prstGeom prst="rect">
+            <a:avLst/>
+          </a:prstGeom>
+          <a:noFill/>
+          <a:ln/>
+        </p:spPr>
+        <p:txBody>
+          <a:bodyPr wrap="square" lIns="0" tIns="0" rIns="0" bIns="0" rtlCol="0" anchor="ctr"/>
+          <a:lstStyle/>
+          <a:p>
+            <a:pPr indent="0" marL="0">
+              <a:buNone/>
+            </a:pPr>
+            <a:r>
+              <a:rPr lang="en-US" sz="1800" b="1" dirty="0">
+                <a:solidFill>
+                  <a:srgbClr val="2F3C7E"/>
+                </a:solidFill>
+                <a:latin typeface="Calibri" pitchFamily="34" charset="0"/>
+                <a:ea typeface="Calibri" pitchFamily="34" charset="-122"/>
+                <a:cs typeface="Calibri" pitchFamily="34" charset="-120"/>
+              </a:rPr>
+              <a:t>comer</a:t>
+            </a:r>
+            <a:endParaRPr lang="en-US" sz="1800" dirty="0"/>
           </a:p>
         </p:txBody>
       </p:sp>
@@ -10859,8 +10859,8 @@
         </p:nvSpPr>
         <p:spPr>
           <a:xfrm>
-            <a:off x="5087112" y="1856232"/>
-            <a:ext cx="2599944" cy="365760"/>
+            <a:off x="5087112" y="2057400"/>
+            <a:ext cx="2599944" cy="274320"/>
           </a:xfrm>
           <a:prstGeom prst="rect">
             <a:avLst/>
@@ -10876,45 +10876,6 @@
               <a:buNone/>
             </a:pPr>
             <a:r>
-              <a:rPr lang="en-US" sz="1800" b="1" dirty="0">
-                <a:solidFill>
-                  <a:srgbClr val="2F3C7E"/>
-                </a:solidFill>
-                <a:latin typeface="Calibri" pitchFamily="34" charset="0"/>
-                <a:ea typeface="Calibri" pitchFamily="34" charset="-122"/>
-                <a:cs typeface="Calibri" pitchFamily="34" charset="-120"/>
-              </a:rPr>
-              <a:t>comer</a:t>
-            </a:r>
-            <a:endParaRPr lang="en-US" sz="1800" dirty="0"/>
-          </a:p>
-        </p:txBody>
-      </p:sp>
-      <p:sp>
-        <p:nvSpPr>
-          <p:cNvPr id="34" name="Text 32"/>
-          <p:cNvSpPr/>
-          <p:nvPr/>
-        </p:nvSpPr>
-        <p:spPr>
-          <a:xfrm>
-            <a:off x="5087112" y="2221992"/>
-            <a:ext cx="2599944" cy="274320"/>
-          </a:xfrm>
-          <a:prstGeom prst="rect">
-            <a:avLst/>
-          </a:prstGeom>
-          <a:noFill/>
-          <a:ln/>
-        </p:spPr>
-        <p:txBody>
-          <a:bodyPr wrap="square" lIns="0" tIns="0" rIns="0" bIns="0" rtlCol="0" anchor="ctr"/>
-          <a:lstStyle/>
-          <a:p>
-            <a:pPr indent="0" marL="0">
-              <a:buNone/>
-            </a:pPr>
-            <a:r>
               <a:rPr lang="en-US" sz="1150" i="1" dirty="0">
                 <a:solidFill>
                   <a:srgbClr val="5C6690"/>
@@ -10931,14 +10892,14 @@
       </p:sp>
       <p:sp>
         <p:nvSpPr>
-          <p:cNvPr id="35" name="Shape 33"/>
-          <p:cNvSpPr/>
-          <p:nvPr/>
-        </p:nvSpPr>
-        <p:spPr>
-          <a:xfrm>
-            <a:off x="4520184" y="2615184"/>
-            <a:ext cx="3148584" cy="1051560"/>
+          <p:cNvPr id="34" name="Shape 32"/>
+          <p:cNvSpPr/>
+          <p:nvPr/>
+        </p:nvSpPr>
+        <p:spPr>
+          <a:xfrm>
+            <a:off x="4520184" y="2450592"/>
+            <a:ext cx="3148584" cy="3813048"/>
           </a:xfrm>
           <a:prstGeom prst="rect">
             <a:avLst/>
@@ -10951,14 +10912,14 @@
       </p:sp>
       <p:sp>
         <p:nvSpPr>
-          <p:cNvPr id="36" name="Shape 34"/>
-          <p:cNvSpPr/>
-          <p:nvPr/>
-        </p:nvSpPr>
-        <p:spPr>
-          <a:xfrm>
-            <a:off x="6537350" y="2670048"/>
-            <a:ext cx="0" cy="941832"/>
+          <p:cNvPr id="35" name="Shape 33"/>
+          <p:cNvSpPr/>
+          <p:nvPr/>
+        </p:nvSpPr>
+        <p:spPr>
+          <a:xfrm>
+            <a:off x="6537350" y="2505456"/>
+            <a:ext cx="0" cy="3703320"/>
           </a:xfrm>
           <a:prstGeom prst="line">
             <a:avLst/>
@@ -10974,53 +10935,53 @@
       </p:sp>
       <p:sp>
         <p:nvSpPr>
+          <p:cNvPr id="36" name="Text 34"/>
+          <p:cNvSpPr/>
+          <p:nvPr/>
+        </p:nvSpPr>
+        <p:spPr>
+          <a:xfrm>
+            <a:off x="4611624" y="2450592"/>
+            <a:ext cx="1742846" cy="635508"/>
+          </a:xfrm>
+          <a:prstGeom prst="rect">
+            <a:avLst/>
+          </a:prstGeom>
+          <a:noFill/>
+          <a:ln/>
+        </p:spPr>
+        <p:txBody>
+          <a:bodyPr wrap="square" lIns="0" tIns="0" rIns="0" bIns="0" rtlCol="0" anchor="ctr"/>
+          <a:lstStyle/>
+          <a:p>
+            <a:pPr algn="r" indent="0" marL="0">
+              <a:buNone/>
+            </a:pPr>
+            <a:r>
+              <a:rPr lang="en-US" sz="1050" b="1" dirty="0">
+                <a:solidFill>
+                  <a:srgbClr val="2F3C7E"/>
+                </a:solidFill>
+                <a:latin typeface="Calibri" pitchFamily="34" charset="0"/>
+                <a:ea typeface="Calibri" pitchFamily="34" charset="-122"/>
+                <a:cs typeface="Calibri" pitchFamily="34" charset="-120"/>
+              </a:rPr>
+              <a:t>yo</a:t>
+            </a:r>
+            <a:endParaRPr lang="en-US" sz="1050" dirty="0"/>
+          </a:p>
+        </p:txBody>
+      </p:sp>
+      <p:sp>
+        <p:nvSpPr>
           <p:cNvPr id="37" name="Text 35"/>
           <p:cNvSpPr/>
           <p:nvPr/>
         </p:nvSpPr>
         <p:spPr>
           <a:xfrm>
-            <a:off x="4611624" y="2615184"/>
-            <a:ext cx="1742846" cy="175260"/>
-          </a:xfrm>
-          <a:prstGeom prst="rect">
-            <a:avLst/>
-          </a:prstGeom>
-          <a:noFill/>
-          <a:ln/>
-        </p:spPr>
-        <p:txBody>
-          <a:bodyPr wrap="square" lIns="0" tIns="0" rIns="0" bIns="0" rtlCol="0" anchor="ctr"/>
-          <a:lstStyle/>
-          <a:p>
-            <a:pPr algn="r" indent="0" marL="0">
-              <a:buNone/>
-            </a:pPr>
-            <a:r>
-              <a:rPr lang="en-US" sz="1050" b="1" dirty="0">
-                <a:solidFill>
-                  <a:srgbClr val="2F3C7E"/>
-                </a:solidFill>
-                <a:latin typeface="Calibri" pitchFamily="34" charset="0"/>
-                <a:ea typeface="Calibri" pitchFamily="34" charset="-122"/>
-                <a:cs typeface="Calibri" pitchFamily="34" charset="-120"/>
-              </a:rPr>
-              <a:t>yo</a:t>
-            </a:r>
-            <a:endParaRPr lang="en-US" sz="1050" dirty="0"/>
-          </a:p>
-        </p:txBody>
-      </p:sp>
-      <p:sp>
-        <p:nvSpPr>
-          <p:cNvPr id="38" name="Text 36"/>
-          <p:cNvSpPr/>
-          <p:nvPr/>
-        </p:nvSpPr>
-        <p:spPr>
-          <a:xfrm>
-            <a:off x="6665366" y="2615184"/>
-            <a:ext cx="1039978" cy="175260"/>
+            <a:off x="6665366" y="2450592"/>
+            <a:ext cx="1039978" cy="635508"/>
           </a:xfrm>
           <a:prstGeom prst="rect">
             <a:avLst/>
@@ -11052,13 +11013,13 @@
       </p:sp>
       <p:sp>
         <p:nvSpPr>
-          <p:cNvPr id="39" name="Shape 37"/>
-          <p:cNvSpPr/>
-          <p:nvPr/>
-        </p:nvSpPr>
-        <p:spPr>
-          <a:xfrm>
-            <a:off x="4575048" y="2790444"/>
+          <p:cNvPr id="38" name="Shape 36"/>
+          <p:cNvSpPr/>
+          <p:nvPr/>
+        </p:nvSpPr>
+        <p:spPr>
+          <a:xfrm>
+            <a:off x="4575048" y="3086100"/>
             <a:ext cx="3038856" cy="0"/>
           </a:xfrm>
           <a:prstGeom prst="line">
@@ -11075,53 +11036,53 @@
       </p:sp>
       <p:sp>
         <p:nvSpPr>
+          <p:cNvPr id="39" name="Text 37"/>
+          <p:cNvSpPr/>
+          <p:nvPr/>
+        </p:nvSpPr>
+        <p:spPr>
+          <a:xfrm>
+            <a:off x="4611624" y="3086100"/>
+            <a:ext cx="1742846" cy="635508"/>
+          </a:xfrm>
+          <a:prstGeom prst="rect">
+            <a:avLst/>
+          </a:prstGeom>
+          <a:noFill/>
+          <a:ln/>
+        </p:spPr>
+        <p:txBody>
+          <a:bodyPr wrap="square" lIns="0" tIns="0" rIns="0" bIns="0" rtlCol="0" anchor="ctr"/>
+          <a:lstStyle/>
+          <a:p>
+            <a:pPr algn="r" indent="0" marL="0">
+              <a:buNone/>
+            </a:pPr>
+            <a:r>
+              <a:rPr lang="en-US" sz="1050" b="1" dirty="0">
+                <a:solidFill>
+                  <a:srgbClr val="2F3C7E"/>
+                </a:solidFill>
+                <a:latin typeface="Calibri" pitchFamily="34" charset="0"/>
+                <a:ea typeface="Calibri" pitchFamily="34" charset="-122"/>
+                <a:cs typeface="Calibri" pitchFamily="34" charset="-120"/>
+              </a:rPr>
+              <a:t>tú</a:t>
+            </a:r>
+            <a:endParaRPr lang="en-US" sz="1050" dirty="0"/>
+          </a:p>
+        </p:txBody>
+      </p:sp>
+      <p:sp>
+        <p:nvSpPr>
           <p:cNvPr id="40" name="Text 38"/>
           <p:cNvSpPr/>
           <p:nvPr/>
         </p:nvSpPr>
         <p:spPr>
           <a:xfrm>
-            <a:off x="4611624" y="2790444"/>
-            <a:ext cx="1742846" cy="175260"/>
-          </a:xfrm>
-          <a:prstGeom prst="rect">
-            <a:avLst/>
-          </a:prstGeom>
-          <a:noFill/>
-          <a:ln/>
-        </p:spPr>
-        <p:txBody>
-          <a:bodyPr wrap="square" lIns="0" tIns="0" rIns="0" bIns="0" rtlCol="0" anchor="ctr"/>
-          <a:lstStyle/>
-          <a:p>
-            <a:pPr algn="r" indent="0" marL="0">
-              <a:buNone/>
-            </a:pPr>
-            <a:r>
-              <a:rPr lang="en-US" sz="1050" b="1" dirty="0">
-                <a:solidFill>
-                  <a:srgbClr val="2F3C7E"/>
-                </a:solidFill>
-                <a:latin typeface="Calibri" pitchFamily="34" charset="0"/>
-                <a:ea typeface="Calibri" pitchFamily="34" charset="-122"/>
-                <a:cs typeface="Calibri" pitchFamily="34" charset="-120"/>
-              </a:rPr>
-              <a:t>tú</a:t>
-            </a:r>
-            <a:endParaRPr lang="en-US" sz="1050" dirty="0"/>
-          </a:p>
-        </p:txBody>
-      </p:sp>
-      <p:sp>
-        <p:nvSpPr>
-          <p:cNvPr id="41" name="Text 39"/>
-          <p:cNvSpPr/>
-          <p:nvPr/>
-        </p:nvSpPr>
-        <p:spPr>
-          <a:xfrm>
-            <a:off x="6665366" y="2790444"/>
-            <a:ext cx="1039978" cy="175260"/>
+            <a:off x="6665366" y="3086100"/>
+            <a:ext cx="1039978" cy="635508"/>
           </a:xfrm>
           <a:prstGeom prst="rect">
             <a:avLst/>
@@ -11153,13 +11114,13 @@
       </p:sp>
       <p:sp>
         <p:nvSpPr>
-          <p:cNvPr id="42" name="Shape 40"/>
-          <p:cNvSpPr/>
-          <p:nvPr/>
-        </p:nvSpPr>
-        <p:spPr>
-          <a:xfrm>
-            <a:off x="4575048" y="2965704"/>
+          <p:cNvPr id="41" name="Shape 39"/>
+          <p:cNvSpPr/>
+          <p:nvPr/>
+        </p:nvSpPr>
+        <p:spPr>
+          <a:xfrm>
+            <a:off x="4575048" y="3721608"/>
             <a:ext cx="3038856" cy="0"/>
           </a:xfrm>
           <a:prstGeom prst="line">
@@ -11176,53 +11137,53 @@
       </p:sp>
       <p:sp>
         <p:nvSpPr>
+          <p:cNvPr id="42" name="Text 40"/>
+          <p:cNvSpPr/>
+          <p:nvPr/>
+        </p:nvSpPr>
+        <p:spPr>
+          <a:xfrm>
+            <a:off x="4611624" y="3721608"/>
+            <a:ext cx="1742846" cy="635508"/>
+          </a:xfrm>
+          <a:prstGeom prst="rect">
+            <a:avLst/>
+          </a:prstGeom>
+          <a:noFill/>
+          <a:ln/>
+        </p:spPr>
+        <p:txBody>
+          <a:bodyPr wrap="square" lIns="0" tIns="0" rIns="0" bIns="0" rtlCol="0" anchor="ctr"/>
+          <a:lstStyle/>
+          <a:p>
+            <a:pPr algn="r" indent="0" marL="0">
+              <a:buNone/>
+            </a:pPr>
+            <a:r>
+              <a:rPr lang="en-US" sz="1050" b="1" dirty="0">
+                <a:solidFill>
+                  <a:srgbClr val="2F3C7E"/>
+                </a:solidFill>
+                <a:latin typeface="Calibri" pitchFamily="34" charset="0"/>
+                <a:ea typeface="Calibri" pitchFamily="34" charset="-122"/>
+                <a:cs typeface="Calibri" pitchFamily="34" charset="-120"/>
+              </a:rPr>
+              <a:t>él/ella/Ud.</a:t>
+            </a:r>
+            <a:endParaRPr lang="en-US" sz="1050" dirty="0"/>
+          </a:p>
+        </p:txBody>
+      </p:sp>
+      <p:sp>
+        <p:nvSpPr>
           <p:cNvPr id="43" name="Text 41"/>
           <p:cNvSpPr/>
           <p:nvPr/>
         </p:nvSpPr>
         <p:spPr>
           <a:xfrm>
-            <a:off x="4611624" y="2965704"/>
-            <a:ext cx="1742846" cy="175260"/>
-          </a:xfrm>
-          <a:prstGeom prst="rect">
-            <a:avLst/>
-          </a:prstGeom>
-          <a:noFill/>
-          <a:ln/>
-        </p:spPr>
-        <p:txBody>
-          <a:bodyPr wrap="square" lIns="0" tIns="0" rIns="0" bIns="0" rtlCol="0" anchor="ctr"/>
-          <a:lstStyle/>
-          <a:p>
-            <a:pPr algn="r" indent="0" marL="0">
-              <a:buNone/>
-            </a:pPr>
-            <a:r>
-              <a:rPr lang="en-US" sz="1050" b="1" dirty="0">
-                <a:solidFill>
-                  <a:srgbClr val="2F3C7E"/>
-                </a:solidFill>
-                <a:latin typeface="Calibri" pitchFamily="34" charset="0"/>
-                <a:ea typeface="Calibri" pitchFamily="34" charset="-122"/>
-                <a:cs typeface="Calibri" pitchFamily="34" charset="-120"/>
-              </a:rPr>
-              <a:t>él/ella/Ud.</a:t>
-            </a:r>
-            <a:endParaRPr lang="en-US" sz="1050" dirty="0"/>
-          </a:p>
-        </p:txBody>
-      </p:sp>
-      <p:sp>
-        <p:nvSpPr>
-          <p:cNvPr id="44" name="Text 42"/>
-          <p:cNvSpPr/>
-          <p:nvPr/>
-        </p:nvSpPr>
-        <p:spPr>
-          <a:xfrm>
-            <a:off x="6665366" y="2965704"/>
-            <a:ext cx="1039978" cy="175260"/>
+            <a:off x="6665366" y="3721608"/>
+            <a:ext cx="1039978" cy="635508"/>
           </a:xfrm>
           <a:prstGeom prst="rect">
             <a:avLst/>
@@ -11254,13 +11215,13 @@
       </p:sp>
       <p:sp>
         <p:nvSpPr>
-          <p:cNvPr id="45" name="Shape 43"/>
-          <p:cNvSpPr/>
-          <p:nvPr/>
-        </p:nvSpPr>
-        <p:spPr>
-          <a:xfrm>
-            <a:off x="4575048" y="3140964"/>
+          <p:cNvPr id="44" name="Shape 42"/>
+          <p:cNvSpPr/>
+          <p:nvPr/>
+        </p:nvSpPr>
+        <p:spPr>
+          <a:xfrm>
+            <a:off x="4575048" y="4357116"/>
             <a:ext cx="3038856" cy="0"/>
           </a:xfrm>
           <a:prstGeom prst="line">
@@ -11277,53 +11238,53 @@
       </p:sp>
       <p:sp>
         <p:nvSpPr>
+          <p:cNvPr id="45" name="Text 43"/>
+          <p:cNvSpPr/>
+          <p:nvPr/>
+        </p:nvSpPr>
+        <p:spPr>
+          <a:xfrm>
+            <a:off x="4611624" y="4357116"/>
+            <a:ext cx="1742846" cy="635508"/>
+          </a:xfrm>
+          <a:prstGeom prst="rect">
+            <a:avLst/>
+          </a:prstGeom>
+          <a:noFill/>
+          <a:ln/>
+        </p:spPr>
+        <p:txBody>
+          <a:bodyPr wrap="square" lIns="0" tIns="0" rIns="0" bIns="0" rtlCol="0" anchor="ctr"/>
+          <a:lstStyle/>
+          <a:p>
+            <a:pPr algn="r" indent="0" marL="0">
+              <a:buNone/>
+            </a:pPr>
+            <a:r>
+              <a:rPr lang="en-US" sz="1050" b="1" dirty="0">
+                <a:solidFill>
+                  <a:srgbClr val="2F3C7E"/>
+                </a:solidFill>
+                <a:latin typeface="Calibri" pitchFamily="34" charset="0"/>
+                <a:ea typeface="Calibri" pitchFamily="34" charset="-122"/>
+                <a:cs typeface="Calibri" pitchFamily="34" charset="-120"/>
+              </a:rPr>
+              <a:t>nosotros/nosotras</a:t>
+            </a:r>
+            <a:endParaRPr lang="en-US" sz="1050" dirty="0"/>
+          </a:p>
+        </p:txBody>
+      </p:sp>
+      <p:sp>
+        <p:nvSpPr>
           <p:cNvPr id="46" name="Text 44"/>
           <p:cNvSpPr/>
           <p:nvPr/>
         </p:nvSpPr>
         <p:spPr>
           <a:xfrm>
-            <a:off x="4611624" y="3140964"/>
-            <a:ext cx="1742846" cy="175260"/>
-          </a:xfrm>
-          <a:prstGeom prst="rect">
-            <a:avLst/>
-          </a:prstGeom>
-          <a:noFill/>
-          <a:ln/>
-        </p:spPr>
-        <p:txBody>
-          <a:bodyPr wrap="square" lIns="0" tIns="0" rIns="0" bIns="0" rtlCol="0" anchor="ctr"/>
-          <a:lstStyle/>
-          <a:p>
-            <a:pPr algn="r" indent="0" marL="0">
-              <a:buNone/>
-            </a:pPr>
-            <a:r>
-              <a:rPr lang="en-US" sz="1050" b="1" dirty="0">
-                <a:solidFill>
-                  <a:srgbClr val="2F3C7E"/>
-                </a:solidFill>
-                <a:latin typeface="Calibri" pitchFamily="34" charset="0"/>
-                <a:ea typeface="Calibri" pitchFamily="34" charset="-122"/>
-                <a:cs typeface="Calibri" pitchFamily="34" charset="-120"/>
-              </a:rPr>
-              <a:t>nosotros/nosotras</a:t>
-            </a:r>
-            <a:endParaRPr lang="en-US" sz="1050" dirty="0"/>
-          </a:p>
-        </p:txBody>
-      </p:sp>
-      <p:sp>
-        <p:nvSpPr>
-          <p:cNvPr id="47" name="Text 45"/>
-          <p:cNvSpPr/>
-          <p:nvPr/>
-        </p:nvSpPr>
-        <p:spPr>
-          <a:xfrm>
-            <a:off x="6665366" y="3140964"/>
-            <a:ext cx="1039978" cy="175260"/>
+            <a:off x="6665366" y="4357116"/>
+            <a:ext cx="1039978" cy="635508"/>
           </a:xfrm>
           <a:prstGeom prst="rect">
             <a:avLst/>
@@ -11355,13 +11316,13 @@
       </p:sp>
       <p:sp>
         <p:nvSpPr>
-          <p:cNvPr id="48" name="Shape 46"/>
-          <p:cNvSpPr/>
-          <p:nvPr/>
-        </p:nvSpPr>
-        <p:spPr>
-          <a:xfrm>
-            <a:off x="4575048" y="3316224"/>
+          <p:cNvPr id="47" name="Shape 45"/>
+          <p:cNvSpPr/>
+          <p:nvPr/>
+        </p:nvSpPr>
+        <p:spPr>
+          <a:xfrm>
+            <a:off x="4575048" y="4992624"/>
             <a:ext cx="3038856" cy="0"/>
           </a:xfrm>
           <a:prstGeom prst="line">
@@ -11378,53 +11339,53 @@
       </p:sp>
       <p:sp>
         <p:nvSpPr>
+          <p:cNvPr id="48" name="Text 46"/>
+          <p:cNvSpPr/>
+          <p:nvPr/>
+        </p:nvSpPr>
+        <p:spPr>
+          <a:xfrm>
+            <a:off x="4611624" y="4992624"/>
+            <a:ext cx="1742846" cy="635508"/>
+          </a:xfrm>
+          <a:prstGeom prst="rect">
+            <a:avLst/>
+          </a:prstGeom>
+          <a:noFill/>
+          <a:ln/>
+        </p:spPr>
+        <p:txBody>
+          <a:bodyPr wrap="square" lIns="0" tIns="0" rIns="0" bIns="0" rtlCol="0" anchor="ctr"/>
+          <a:lstStyle/>
+          <a:p>
+            <a:pPr algn="r" indent="0" marL="0">
+              <a:buNone/>
+            </a:pPr>
+            <a:r>
+              <a:rPr lang="en-US" sz="1050" b="1" dirty="0">
+                <a:solidFill>
+                  <a:srgbClr val="2F3C7E"/>
+                </a:solidFill>
+                <a:latin typeface="Calibri" pitchFamily="34" charset="0"/>
+                <a:ea typeface="Calibri" pitchFamily="34" charset="-122"/>
+                <a:cs typeface="Calibri" pitchFamily="34" charset="-120"/>
+              </a:rPr>
+              <a:t>vosotros/vosotras</a:t>
+            </a:r>
+            <a:endParaRPr lang="en-US" sz="1050" dirty="0"/>
+          </a:p>
+        </p:txBody>
+      </p:sp>
+      <p:sp>
+        <p:nvSpPr>
           <p:cNvPr id="49" name="Text 47"/>
           <p:cNvSpPr/>
           <p:nvPr/>
         </p:nvSpPr>
         <p:spPr>
           <a:xfrm>
-            <a:off x="4611624" y="3316224"/>
-            <a:ext cx="1742846" cy="175260"/>
-          </a:xfrm>
-          <a:prstGeom prst="rect">
-            <a:avLst/>
-          </a:prstGeom>
-          <a:noFill/>
-          <a:ln/>
-        </p:spPr>
-        <p:txBody>
-          <a:bodyPr wrap="square" lIns="0" tIns="0" rIns="0" bIns="0" rtlCol="0" anchor="ctr"/>
-          <a:lstStyle/>
-          <a:p>
-            <a:pPr algn="r" indent="0" marL="0">
-              <a:buNone/>
-            </a:pPr>
-            <a:r>
-              <a:rPr lang="en-US" sz="1050" b="1" dirty="0">
-                <a:solidFill>
-                  <a:srgbClr val="2F3C7E"/>
-                </a:solidFill>
-                <a:latin typeface="Calibri" pitchFamily="34" charset="0"/>
-                <a:ea typeface="Calibri" pitchFamily="34" charset="-122"/>
-                <a:cs typeface="Calibri" pitchFamily="34" charset="-120"/>
-              </a:rPr>
-              <a:t>vosotros/vosotras</a:t>
-            </a:r>
-            <a:endParaRPr lang="en-US" sz="1050" dirty="0"/>
-          </a:p>
-        </p:txBody>
-      </p:sp>
-      <p:sp>
-        <p:nvSpPr>
-          <p:cNvPr id="50" name="Text 48"/>
-          <p:cNvSpPr/>
-          <p:nvPr/>
-        </p:nvSpPr>
-        <p:spPr>
-          <a:xfrm>
-            <a:off x="6665366" y="3316224"/>
-            <a:ext cx="1039978" cy="175260"/>
+            <a:off x="6665366" y="4992624"/>
+            <a:ext cx="1039978" cy="635508"/>
           </a:xfrm>
           <a:prstGeom prst="rect">
             <a:avLst/>
@@ -11456,13 +11417,13 @@
       </p:sp>
       <p:sp>
         <p:nvSpPr>
-          <p:cNvPr id="51" name="Shape 49"/>
-          <p:cNvSpPr/>
-          <p:nvPr/>
-        </p:nvSpPr>
-        <p:spPr>
-          <a:xfrm>
-            <a:off x="4575048" y="3491484"/>
+          <p:cNvPr id="50" name="Shape 48"/>
+          <p:cNvSpPr/>
+          <p:nvPr/>
+        </p:nvSpPr>
+        <p:spPr>
+          <a:xfrm>
+            <a:off x="4575048" y="5628132"/>
             <a:ext cx="3038856" cy="0"/>
           </a:xfrm>
           <a:prstGeom prst="line">
@@ -11479,53 +11440,53 @@
       </p:sp>
       <p:sp>
         <p:nvSpPr>
+          <p:cNvPr id="51" name="Text 49"/>
+          <p:cNvSpPr/>
+          <p:nvPr/>
+        </p:nvSpPr>
+        <p:spPr>
+          <a:xfrm>
+            <a:off x="4611624" y="5628132"/>
+            <a:ext cx="1742846" cy="635508"/>
+          </a:xfrm>
+          <a:prstGeom prst="rect">
+            <a:avLst/>
+          </a:prstGeom>
+          <a:noFill/>
+          <a:ln/>
+        </p:spPr>
+        <p:txBody>
+          <a:bodyPr wrap="square" lIns="0" tIns="0" rIns="0" bIns="0" rtlCol="0" anchor="ctr"/>
+          <a:lstStyle/>
+          <a:p>
+            <a:pPr algn="r" indent="0" marL="0">
+              <a:buNone/>
+            </a:pPr>
+            <a:r>
+              <a:rPr lang="en-US" sz="1050" b="1" dirty="0">
+                <a:solidFill>
+                  <a:srgbClr val="2F3C7E"/>
+                </a:solidFill>
+                <a:latin typeface="Calibri" pitchFamily="34" charset="0"/>
+                <a:ea typeface="Calibri" pitchFamily="34" charset="-122"/>
+                <a:cs typeface="Calibri" pitchFamily="34" charset="-120"/>
+              </a:rPr>
+              <a:t>ellos/ellas/Uds.</a:t>
+            </a:r>
+            <a:endParaRPr lang="en-US" sz="1050" dirty="0"/>
+          </a:p>
+        </p:txBody>
+      </p:sp>
+      <p:sp>
+        <p:nvSpPr>
           <p:cNvPr id="52" name="Text 50"/>
           <p:cNvSpPr/>
           <p:nvPr/>
         </p:nvSpPr>
         <p:spPr>
           <a:xfrm>
-            <a:off x="4611624" y="3491484"/>
-            <a:ext cx="1742846" cy="175260"/>
-          </a:xfrm>
-          <a:prstGeom prst="rect">
-            <a:avLst/>
-          </a:prstGeom>
-          <a:noFill/>
-          <a:ln/>
-        </p:spPr>
-        <p:txBody>
-          <a:bodyPr wrap="square" lIns="0" tIns="0" rIns="0" bIns="0" rtlCol="0" anchor="ctr"/>
-          <a:lstStyle/>
-          <a:p>
-            <a:pPr algn="r" indent="0" marL="0">
-              <a:buNone/>
-            </a:pPr>
-            <a:r>
-              <a:rPr lang="en-US" sz="1050" b="1" dirty="0">
-                <a:solidFill>
-                  <a:srgbClr val="2F3C7E"/>
-                </a:solidFill>
-                <a:latin typeface="Calibri" pitchFamily="34" charset="0"/>
-                <a:ea typeface="Calibri" pitchFamily="34" charset="-122"/>
-                <a:cs typeface="Calibri" pitchFamily="34" charset="-120"/>
-              </a:rPr>
-              <a:t>ellos/ellas/Uds.</a:t>
-            </a:r>
-            <a:endParaRPr lang="en-US" sz="1050" dirty="0"/>
-          </a:p>
-        </p:txBody>
-      </p:sp>
-      <p:sp>
-        <p:nvSpPr>
-          <p:cNvPr id="53" name="Text 51"/>
-          <p:cNvSpPr/>
-          <p:nvPr/>
-        </p:nvSpPr>
-        <p:spPr>
-          <a:xfrm>
-            <a:off x="6665366" y="3491484"/>
-            <a:ext cx="1039978" cy="175260"/>
+            <a:off x="6665366" y="5628132"/>
+            <a:ext cx="1039978" cy="635508"/>
           </a:xfrm>
           <a:prstGeom prst="rect">
             <a:avLst/>
@@ -11557,18 +11518,18 @@
       </p:sp>
       <p:sp>
         <p:nvSpPr>
-          <p:cNvPr id="54" name="Shape 52"/>
-          <p:cNvSpPr/>
-          <p:nvPr/>
-        </p:nvSpPr>
-        <p:spPr>
-          <a:xfrm>
-            <a:off x="8125968" y="1719072"/>
-            <a:ext cx="3514344" cy="2084832"/>
+          <p:cNvPr id="53" name="Shape 51"/>
+          <p:cNvSpPr/>
+          <p:nvPr/>
+        </p:nvSpPr>
+        <p:spPr>
+          <a:xfrm>
+            <a:off x="8125968" y="1554480"/>
+            <a:ext cx="3514344" cy="4846320"/>
           </a:xfrm>
           <a:prstGeom prst="roundRect">
             <a:avLst>
-              <a:gd name="adj" fmla="val 4386"/>
+              <a:gd name="adj" fmla="val 2602"/>
             </a:avLst>
           </a:prstGeom>
           <a:solidFill>
@@ -11586,13 +11547,13 @@
       </p:sp>
       <p:sp>
         <p:nvSpPr>
-          <p:cNvPr id="55" name="Shape 53"/>
-          <p:cNvSpPr/>
-          <p:nvPr/>
-        </p:nvSpPr>
-        <p:spPr>
-          <a:xfrm>
-            <a:off x="8290560" y="1865376"/>
+          <p:cNvPr id="54" name="Shape 52"/>
+          <p:cNvSpPr/>
+          <p:nvPr/>
+        </p:nvSpPr>
+        <p:spPr>
+          <a:xfrm>
+            <a:off x="8290560" y="1700784"/>
             <a:ext cx="457200" cy="457200"/>
           </a:xfrm>
           <a:prstGeom prst="ellipse">
@@ -11606,37 +11567,76 @@
       </p:sp>
       <p:sp>
         <p:nvSpPr>
+          <p:cNvPr id="55" name="Text 53"/>
+          <p:cNvSpPr/>
+          <p:nvPr/>
+        </p:nvSpPr>
+        <p:spPr>
+          <a:xfrm>
+            <a:off x="8290560" y="1700784"/>
+            <a:ext cx="457200" cy="457200"/>
+          </a:xfrm>
+          <a:prstGeom prst="rect">
+            <a:avLst/>
+          </a:prstGeom>
+          <a:noFill/>
+          <a:ln/>
+        </p:spPr>
+        <p:txBody>
+          <a:bodyPr wrap="square" lIns="0" tIns="0" rIns="0" bIns="0" rtlCol="0" anchor="ctr"/>
+          <a:lstStyle/>
+          <a:p>
+            <a:pPr algn="ctr" indent="0" marL="0">
+              <a:buNone/>
+            </a:pPr>
+            <a:r>
+              <a:rPr lang="en-US" sz="2600" dirty="0">
+                <a:solidFill>
+                  <a:srgbClr val="000000"/>
+                </a:solidFill>
+              </a:rPr>
+              <a:t>🏡</a:t>
+            </a:r>
+            <a:endParaRPr lang="en-US" sz="2600" dirty="0"/>
+          </a:p>
+        </p:txBody>
+      </p:sp>
+      <p:sp>
+        <p:nvSpPr>
           <p:cNvPr id="56" name="Text 54"/>
           <p:cNvSpPr/>
           <p:nvPr/>
         </p:nvSpPr>
         <p:spPr>
           <a:xfrm>
-            <a:off x="8290560" y="1865376"/>
-            <a:ext cx="457200" cy="457200"/>
-          </a:xfrm>
-          <a:prstGeom prst="rect">
-            <a:avLst/>
-          </a:prstGeom>
-          <a:noFill/>
-          <a:ln/>
-        </p:spPr>
-        <p:txBody>
-          <a:bodyPr wrap="square" lIns="0" tIns="0" rIns="0" bIns="0" rtlCol="0" anchor="ctr"/>
-          <a:lstStyle/>
-          <a:p>
-            <a:pPr algn="ctr" indent="0" marL="0">
-              <a:buNone/>
-            </a:pPr>
-            <a:r>
-              <a:rPr lang="en-US" sz="2600" dirty="0">
-                <a:solidFill>
-                  <a:srgbClr val="000000"/>
-                </a:solidFill>
-              </a:rPr>
-              <a:t>🏡</a:t>
-            </a:r>
-            <a:endParaRPr lang="en-US" sz="2600" dirty="0"/>
+            <a:off x="8875776" y="1691640"/>
+            <a:ext cx="2599944" cy="365760"/>
+          </a:xfrm>
+          <a:prstGeom prst="rect">
+            <a:avLst/>
+          </a:prstGeom>
+          <a:noFill/>
+          <a:ln/>
+        </p:spPr>
+        <p:txBody>
+          <a:bodyPr wrap="square" lIns="0" tIns="0" rIns="0" bIns="0" rtlCol="0" anchor="ctr"/>
+          <a:lstStyle/>
+          <a:p>
+            <a:pPr indent="0" marL="0">
+              <a:buNone/>
+            </a:pPr>
+            <a:r>
+              <a:rPr lang="en-US" sz="1800" b="1" dirty="0">
+                <a:solidFill>
+                  <a:srgbClr val="2F3C7E"/>
+                </a:solidFill>
+                <a:latin typeface="Calibri" pitchFamily="34" charset="0"/>
+                <a:ea typeface="Calibri" pitchFamily="34" charset="-122"/>
+                <a:cs typeface="Calibri" pitchFamily="34" charset="-120"/>
+              </a:rPr>
+              <a:t>vivir</a:t>
+            </a:r>
+            <a:endParaRPr lang="en-US" sz="1800" dirty="0"/>
           </a:p>
         </p:txBody>
       </p:sp>
@@ -11648,8 +11648,8 @@
         </p:nvSpPr>
         <p:spPr>
           <a:xfrm>
-            <a:off x="8875776" y="1856232"/>
-            <a:ext cx="2599944" cy="365760"/>
+            <a:off x="8875776" y="2057400"/>
+            <a:ext cx="2599944" cy="274320"/>
           </a:xfrm>
           <a:prstGeom prst="rect">
             <a:avLst/>
@@ -11665,45 +11665,6 @@
               <a:buNone/>
             </a:pPr>
             <a:r>
-              <a:rPr lang="en-US" sz="1800" b="1" dirty="0">
-                <a:solidFill>
-                  <a:srgbClr val="2F3C7E"/>
-                </a:solidFill>
-                <a:latin typeface="Calibri" pitchFamily="34" charset="0"/>
-                <a:ea typeface="Calibri" pitchFamily="34" charset="-122"/>
-                <a:cs typeface="Calibri" pitchFamily="34" charset="-120"/>
-              </a:rPr>
-              <a:t>vivir</a:t>
-            </a:r>
-            <a:endParaRPr lang="en-US" sz="1800" dirty="0"/>
-          </a:p>
-        </p:txBody>
-      </p:sp>
-      <p:sp>
-        <p:nvSpPr>
-          <p:cNvPr id="58" name="Text 56"/>
-          <p:cNvSpPr/>
-          <p:nvPr/>
-        </p:nvSpPr>
-        <p:spPr>
-          <a:xfrm>
-            <a:off x="8875776" y="2221992"/>
-            <a:ext cx="2599944" cy="274320"/>
-          </a:xfrm>
-          <a:prstGeom prst="rect">
-            <a:avLst/>
-          </a:prstGeom>
-          <a:noFill/>
-          <a:ln/>
-        </p:spPr>
-        <p:txBody>
-          <a:bodyPr wrap="square" lIns="0" tIns="0" rIns="0" bIns="0" rtlCol="0" anchor="ctr"/>
-          <a:lstStyle/>
-          <a:p>
-            <a:pPr indent="0" marL="0">
-              <a:buNone/>
-            </a:pPr>
-            <a:r>
               <a:rPr lang="en-US" sz="1150" i="1" dirty="0">
                 <a:solidFill>
                   <a:srgbClr val="5C6690"/>
@@ -11720,14 +11681,14 @@
       </p:sp>
       <p:sp>
         <p:nvSpPr>
-          <p:cNvPr id="59" name="Shape 57"/>
-          <p:cNvSpPr/>
-          <p:nvPr/>
-        </p:nvSpPr>
-        <p:spPr>
-          <a:xfrm>
-            <a:off x="8308848" y="2615184"/>
-            <a:ext cx="3148584" cy="1051560"/>
+          <p:cNvPr id="58" name="Shape 56"/>
+          <p:cNvSpPr/>
+          <p:nvPr/>
+        </p:nvSpPr>
+        <p:spPr>
+          <a:xfrm>
+            <a:off x="8308848" y="2450592"/>
+            <a:ext cx="3148584" cy="3813048"/>
           </a:xfrm>
           <a:prstGeom prst="rect">
             <a:avLst/>
@@ -11740,14 +11701,14 @@
       </p:sp>
       <p:sp>
         <p:nvSpPr>
-          <p:cNvPr id="60" name="Shape 58"/>
-          <p:cNvSpPr/>
-          <p:nvPr/>
-        </p:nvSpPr>
-        <p:spPr>
-          <a:xfrm>
-            <a:off x="10326014" y="2670048"/>
-            <a:ext cx="0" cy="941832"/>
+          <p:cNvPr id="59" name="Shape 57"/>
+          <p:cNvSpPr/>
+          <p:nvPr/>
+        </p:nvSpPr>
+        <p:spPr>
+          <a:xfrm>
+            <a:off x="10326014" y="2505456"/>
+            <a:ext cx="0" cy="3703320"/>
           </a:xfrm>
           <a:prstGeom prst="line">
             <a:avLst/>
@@ -11763,53 +11724,53 @@
       </p:sp>
       <p:sp>
         <p:nvSpPr>
+          <p:cNvPr id="60" name="Text 58"/>
+          <p:cNvSpPr/>
+          <p:nvPr/>
+        </p:nvSpPr>
+        <p:spPr>
+          <a:xfrm>
+            <a:off x="8400288" y="2450592"/>
+            <a:ext cx="1742846" cy="635508"/>
+          </a:xfrm>
+          <a:prstGeom prst="rect">
+            <a:avLst/>
+          </a:prstGeom>
+          <a:noFill/>
+          <a:ln/>
+        </p:spPr>
+        <p:txBody>
+          <a:bodyPr wrap="square" lIns="0" tIns="0" rIns="0" bIns="0" rtlCol="0" anchor="ctr"/>
+          <a:lstStyle/>
+          <a:p>
+            <a:pPr algn="r" indent="0" marL="0">
+              <a:buNone/>
+            </a:pPr>
+            <a:r>
+              <a:rPr lang="en-US" sz="1050" b="1" dirty="0">
+                <a:solidFill>
+                  <a:srgbClr val="2F3C7E"/>
+                </a:solidFill>
+                <a:latin typeface="Calibri" pitchFamily="34" charset="0"/>
+                <a:ea typeface="Calibri" pitchFamily="34" charset="-122"/>
+                <a:cs typeface="Calibri" pitchFamily="34" charset="-120"/>
+              </a:rPr>
+              <a:t>yo</a:t>
+            </a:r>
+            <a:endParaRPr lang="en-US" sz="1050" dirty="0"/>
+          </a:p>
+        </p:txBody>
+      </p:sp>
+      <p:sp>
+        <p:nvSpPr>
           <p:cNvPr id="61" name="Text 59"/>
           <p:cNvSpPr/>
           <p:nvPr/>
         </p:nvSpPr>
         <p:spPr>
           <a:xfrm>
-            <a:off x="8400288" y="2615184"/>
-            <a:ext cx="1742846" cy="175260"/>
-          </a:xfrm>
-          <a:prstGeom prst="rect">
-            <a:avLst/>
-          </a:prstGeom>
-          <a:noFill/>
-          <a:ln/>
-        </p:spPr>
-        <p:txBody>
-          <a:bodyPr wrap="square" lIns="0" tIns="0" rIns="0" bIns="0" rtlCol="0" anchor="ctr"/>
-          <a:lstStyle/>
-          <a:p>
-            <a:pPr algn="r" indent="0" marL="0">
-              <a:buNone/>
-            </a:pPr>
-            <a:r>
-              <a:rPr lang="en-US" sz="1050" b="1" dirty="0">
-                <a:solidFill>
-                  <a:srgbClr val="2F3C7E"/>
-                </a:solidFill>
-                <a:latin typeface="Calibri" pitchFamily="34" charset="0"/>
-                <a:ea typeface="Calibri" pitchFamily="34" charset="-122"/>
-                <a:cs typeface="Calibri" pitchFamily="34" charset="-120"/>
-              </a:rPr>
-              <a:t>yo</a:t>
-            </a:r>
-            <a:endParaRPr lang="en-US" sz="1050" dirty="0"/>
-          </a:p>
-        </p:txBody>
-      </p:sp>
-      <p:sp>
-        <p:nvSpPr>
-          <p:cNvPr id="62" name="Text 60"/>
-          <p:cNvSpPr/>
-          <p:nvPr/>
-        </p:nvSpPr>
-        <p:spPr>
-          <a:xfrm>
-            <a:off x="10454030" y="2615184"/>
-            <a:ext cx="1039978" cy="175260"/>
+            <a:off x="10454030" y="2450592"/>
+            <a:ext cx="1039978" cy="635508"/>
           </a:xfrm>
           <a:prstGeom prst="rect">
             <a:avLst/>
@@ -11841,13 +11802,13 @@
       </p:sp>
       <p:sp>
         <p:nvSpPr>
-          <p:cNvPr id="63" name="Shape 61"/>
-          <p:cNvSpPr/>
-          <p:nvPr/>
-        </p:nvSpPr>
-        <p:spPr>
-          <a:xfrm>
-            <a:off x="8363712" y="2790444"/>
+          <p:cNvPr id="62" name="Shape 60"/>
+          <p:cNvSpPr/>
+          <p:nvPr/>
+        </p:nvSpPr>
+        <p:spPr>
+          <a:xfrm>
+            <a:off x="8363712" y="3086100"/>
             <a:ext cx="3038856" cy="0"/>
           </a:xfrm>
           <a:prstGeom prst="line">
@@ -11864,53 +11825,53 @@
       </p:sp>
       <p:sp>
         <p:nvSpPr>
+          <p:cNvPr id="63" name="Text 61"/>
+          <p:cNvSpPr/>
+          <p:nvPr/>
+        </p:nvSpPr>
+        <p:spPr>
+          <a:xfrm>
+            <a:off x="8400288" y="3086100"/>
+            <a:ext cx="1742846" cy="635508"/>
+          </a:xfrm>
+          <a:prstGeom prst="rect">
+            <a:avLst/>
+          </a:prstGeom>
+          <a:noFill/>
+          <a:ln/>
+        </p:spPr>
+        <p:txBody>
+          <a:bodyPr wrap="square" lIns="0" tIns="0" rIns="0" bIns="0" rtlCol="0" anchor="ctr"/>
+          <a:lstStyle/>
+          <a:p>
+            <a:pPr algn="r" indent="0" marL="0">
+              <a:buNone/>
+            </a:pPr>
+            <a:r>
+              <a:rPr lang="en-US" sz="1050" b="1" dirty="0">
+                <a:solidFill>
+                  <a:srgbClr val="2F3C7E"/>
+                </a:solidFill>
+                <a:latin typeface="Calibri" pitchFamily="34" charset="0"/>
+                <a:ea typeface="Calibri" pitchFamily="34" charset="-122"/>
+                <a:cs typeface="Calibri" pitchFamily="34" charset="-120"/>
+              </a:rPr>
+              <a:t>tú</a:t>
+            </a:r>
+            <a:endParaRPr lang="en-US" sz="1050" dirty="0"/>
+          </a:p>
+        </p:txBody>
+      </p:sp>
+      <p:sp>
+        <p:nvSpPr>
           <p:cNvPr id="64" name="Text 62"/>
           <p:cNvSpPr/>
           <p:nvPr/>
         </p:nvSpPr>
         <p:spPr>
           <a:xfrm>
-            <a:off x="8400288" y="2790444"/>
-            <a:ext cx="1742846" cy="175260"/>
-          </a:xfrm>
-          <a:prstGeom prst="rect">
-            <a:avLst/>
-          </a:prstGeom>
-          <a:noFill/>
-          <a:ln/>
-        </p:spPr>
-        <p:txBody>
-          <a:bodyPr wrap="square" lIns="0" tIns="0" rIns="0" bIns="0" rtlCol="0" anchor="ctr"/>
-          <a:lstStyle/>
-          <a:p>
-            <a:pPr algn="r" indent="0" marL="0">
-              <a:buNone/>
-            </a:pPr>
-            <a:r>
-              <a:rPr lang="en-US" sz="1050" b="1" dirty="0">
-                <a:solidFill>
-                  <a:srgbClr val="2F3C7E"/>
-                </a:solidFill>
-                <a:latin typeface="Calibri" pitchFamily="34" charset="0"/>
-                <a:ea typeface="Calibri" pitchFamily="34" charset="-122"/>
-                <a:cs typeface="Calibri" pitchFamily="34" charset="-120"/>
-              </a:rPr>
-              <a:t>tú</a:t>
-            </a:r>
-            <a:endParaRPr lang="en-US" sz="1050" dirty="0"/>
-          </a:p>
-        </p:txBody>
-      </p:sp>
-      <p:sp>
-        <p:nvSpPr>
-          <p:cNvPr id="65" name="Text 63"/>
-          <p:cNvSpPr/>
-          <p:nvPr/>
-        </p:nvSpPr>
-        <p:spPr>
-          <a:xfrm>
-            <a:off x="10454030" y="2790444"/>
-            <a:ext cx="1039978" cy="175260"/>
+            <a:off x="10454030" y="3086100"/>
+            <a:ext cx="1039978" cy="635508"/>
           </a:xfrm>
           <a:prstGeom prst="rect">
             <a:avLst/>
@@ -11942,13 +11903,13 @@
       </p:sp>
       <p:sp>
         <p:nvSpPr>
-          <p:cNvPr id="66" name="Shape 64"/>
-          <p:cNvSpPr/>
-          <p:nvPr/>
-        </p:nvSpPr>
-        <p:spPr>
-          <a:xfrm>
-            <a:off x="8363712" y="2965704"/>
+          <p:cNvPr id="65" name="Shape 63"/>
+          <p:cNvSpPr/>
+          <p:nvPr/>
+        </p:nvSpPr>
+        <p:spPr>
+          <a:xfrm>
+            <a:off x="8363712" y="3721608"/>
             <a:ext cx="3038856" cy="0"/>
           </a:xfrm>
           <a:prstGeom prst="line">
@@ -11965,53 +11926,53 @@
       </p:sp>
       <p:sp>
         <p:nvSpPr>
+          <p:cNvPr id="66" name="Text 64"/>
+          <p:cNvSpPr/>
+          <p:nvPr/>
+        </p:nvSpPr>
+        <p:spPr>
+          <a:xfrm>
+            <a:off x="8400288" y="3721608"/>
+            <a:ext cx="1742846" cy="635508"/>
+          </a:xfrm>
+          <a:prstGeom prst="rect">
+            <a:avLst/>
+          </a:prstGeom>
+          <a:noFill/>
+          <a:ln/>
+        </p:spPr>
+        <p:txBody>
+          <a:bodyPr wrap="square" lIns="0" tIns="0" rIns="0" bIns="0" rtlCol="0" anchor="ctr"/>
+          <a:lstStyle/>
+          <a:p>
+            <a:pPr algn="r" indent="0" marL="0">
+              <a:buNone/>
+            </a:pPr>
+            <a:r>
+              <a:rPr lang="en-US" sz="1050" b="1" dirty="0">
+                <a:solidFill>
+                  <a:srgbClr val="2F3C7E"/>
+                </a:solidFill>
+                <a:latin typeface="Calibri" pitchFamily="34" charset="0"/>
+                <a:ea typeface="Calibri" pitchFamily="34" charset="-122"/>
+                <a:cs typeface="Calibri" pitchFamily="34" charset="-120"/>
+              </a:rPr>
+              <a:t>él/ella/Ud.</a:t>
+            </a:r>
+            <a:endParaRPr lang="en-US" sz="1050" dirty="0"/>
+          </a:p>
+        </p:txBody>
+      </p:sp>
+      <p:sp>
+        <p:nvSpPr>
           <p:cNvPr id="67" name="Text 65"/>
           <p:cNvSpPr/>
           <p:nvPr/>
         </p:nvSpPr>
         <p:spPr>
           <a:xfrm>
-            <a:off x="8400288" y="2965704"/>
-            <a:ext cx="1742846" cy="175260"/>
-          </a:xfrm>
-          <a:prstGeom prst="rect">
-            <a:avLst/>
-          </a:prstGeom>
-          <a:noFill/>
-          <a:ln/>
-        </p:spPr>
-        <p:txBody>
-          <a:bodyPr wrap="square" lIns="0" tIns="0" rIns="0" bIns="0" rtlCol="0" anchor="ctr"/>
-          <a:lstStyle/>
-          <a:p>
-            <a:pPr algn="r" indent="0" marL="0">
-              <a:buNone/>
-            </a:pPr>
-            <a:r>
-              <a:rPr lang="en-US" sz="1050" b="1" dirty="0">
-                <a:solidFill>
-                  <a:srgbClr val="2F3C7E"/>
-                </a:solidFill>
-                <a:latin typeface="Calibri" pitchFamily="34" charset="0"/>
-                <a:ea typeface="Calibri" pitchFamily="34" charset="-122"/>
-                <a:cs typeface="Calibri" pitchFamily="34" charset="-120"/>
-              </a:rPr>
-              <a:t>él/ella/Ud.</a:t>
-            </a:r>
-            <a:endParaRPr lang="en-US" sz="1050" dirty="0"/>
-          </a:p>
-        </p:txBody>
-      </p:sp>
-      <p:sp>
-        <p:nvSpPr>
-          <p:cNvPr id="68" name="Text 66"/>
-          <p:cNvSpPr/>
-          <p:nvPr/>
-        </p:nvSpPr>
-        <p:spPr>
-          <a:xfrm>
-            <a:off x="10454030" y="2965704"/>
-            <a:ext cx="1039978" cy="175260"/>
+            <a:off x="10454030" y="3721608"/>
+            <a:ext cx="1039978" cy="635508"/>
           </a:xfrm>
           <a:prstGeom prst="rect">
             <a:avLst/>
@@ -12043,13 +12004,13 @@
       </p:sp>
       <p:sp>
         <p:nvSpPr>
-          <p:cNvPr id="69" name="Shape 67"/>
-          <p:cNvSpPr/>
-          <p:nvPr/>
-        </p:nvSpPr>
-        <p:spPr>
-          <a:xfrm>
-            <a:off x="8363712" y="3140964"/>
+          <p:cNvPr id="68" name="Shape 66"/>
+          <p:cNvSpPr/>
+          <p:nvPr/>
+        </p:nvSpPr>
+        <p:spPr>
+          <a:xfrm>
+            <a:off x="8363712" y="4357116"/>
             <a:ext cx="3038856" cy="0"/>
           </a:xfrm>
           <a:prstGeom prst="line">
@@ -12066,53 +12027,53 @@
       </p:sp>
       <p:sp>
         <p:nvSpPr>
+          <p:cNvPr id="69" name="Text 67"/>
+          <p:cNvSpPr/>
+          <p:nvPr/>
+        </p:nvSpPr>
+        <p:spPr>
+          <a:xfrm>
+            <a:off x="8400288" y="4357116"/>
+            <a:ext cx="1742846" cy="635508"/>
+          </a:xfrm>
+          <a:prstGeom prst="rect">
+            <a:avLst/>
+          </a:prstGeom>
+          <a:noFill/>
+          <a:ln/>
+        </p:spPr>
+        <p:txBody>
+          <a:bodyPr wrap="square" lIns="0" tIns="0" rIns="0" bIns="0" rtlCol="0" anchor="ctr"/>
+          <a:lstStyle/>
+          <a:p>
+            <a:pPr algn="r" indent="0" marL="0">
+              <a:buNone/>
+            </a:pPr>
+            <a:r>
+              <a:rPr lang="en-US" sz="1050" b="1" dirty="0">
+                <a:solidFill>
+                  <a:srgbClr val="2F3C7E"/>
+                </a:solidFill>
+                <a:latin typeface="Calibri" pitchFamily="34" charset="0"/>
+                <a:ea typeface="Calibri" pitchFamily="34" charset="-122"/>
+                <a:cs typeface="Calibri" pitchFamily="34" charset="-120"/>
+              </a:rPr>
+              <a:t>nosotros/nosotras</a:t>
+            </a:r>
+            <a:endParaRPr lang="en-US" sz="1050" dirty="0"/>
+          </a:p>
+        </p:txBody>
+      </p:sp>
+      <p:sp>
+        <p:nvSpPr>
           <p:cNvPr id="70" name="Text 68"/>
           <p:cNvSpPr/>
           <p:nvPr/>
         </p:nvSpPr>
         <p:spPr>
           <a:xfrm>
-            <a:off x="8400288" y="3140964"/>
-            <a:ext cx="1742846" cy="175260"/>
-          </a:xfrm>
-          <a:prstGeom prst="rect">
-            <a:avLst/>
-          </a:prstGeom>
-          <a:noFill/>
-          <a:ln/>
-        </p:spPr>
-        <p:txBody>
-          <a:bodyPr wrap="square" lIns="0" tIns="0" rIns="0" bIns="0" rtlCol="0" anchor="ctr"/>
-          <a:lstStyle/>
-          <a:p>
-            <a:pPr algn="r" indent="0" marL="0">
-              <a:buNone/>
-            </a:pPr>
-            <a:r>
-              <a:rPr lang="en-US" sz="1050" b="1" dirty="0">
-                <a:solidFill>
-                  <a:srgbClr val="2F3C7E"/>
-                </a:solidFill>
-                <a:latin typeface="Calibri" pitchFamily="34" charset="0"/>
-                <a:ea typeface="Calibri" pitchFamily="34" charset="-122"/>
-                <a:cs typeface="Calibri" pitchFamily="34" charset="-120"/>
-              </a:rPr>
-              <a:t>nosotros/nosotras</a:t>
-            </a:r>
-            <a:endParaRPr lang="en-US" sz="1050" dirty="0"/>
-          </a:p>
-        </p:txBody>
-      </p:sp>
-      <p:sp>
-        <p:nvSpPr>
-          <p:cNvPr id="71" name="Text 69"/>
-          <p:cNvSpPr/>
-          <p:nvPr/>
-        </p:nvSpPr>
-        <p:spPr>
-          <a:xfrm>
-            <a:off x="10454030" y="3140964"/>
-            <a:ext cx="1039978" cy="175260"/>
+            <a:off x="10454030" y="4357116"/>
+            <a:ext cx="1039978" cy="635508"/>
           </a:xfrm>
           <a:prstGeom prst="rect">
             <a:avLst/>
@@ -12144,13 +12105,13 @@
       </p:sp>
       <p:sp>
         <p:nvSpPr>
-          <p:cNvPr id="72" name="Shape 70"/>
-          <p:cNvSpPr/>
-          <p:nvPr/>
-        </p:nvSpPr>
-        <p:spPr>
-          <a:xfrm>
-            <a:off x="8363712" y="3316224"/>
+          <p:cNvPr id="71" name="Shape 69"/>
+          <p:cNvSpPr/>
+          <p:nvPr/>
+        </p:nvSpPr>
+        <p:spPr>
+          <a:xfrm>
+            <a:off x="8363712" y="4992624"/>
             <a:ext cx="3038856" cy="0"/>
           </a:xfrm>
           <a:prstGeom prst="line">
@@ -12167,53 +12128,53 @@
       </p:sp>
       <p:sp>
         <p:nvSpPr>
+          <p:cNvPr id="72" name="Text 70"/>
+          <p:cNvSpPr/>
+          <p:nvPr/>
+        </p:nvSpPr>
+        <p:spPr>
+          <a:xfrm>
+            <a:off x="8400288" y="4992624"/>
+            <a:ext cx="1742846" cy="635508"/>
+          </a:xfrm>
+          <a:prstGeom prst="rect">
+            <a:avLst/>
+          </a:prstGeom>
+          <a:noFill/>
+          <a:ln/>
+        </p:spPr>
+        <p:txBody>
+          <a:bodyPr wrap="square" lIns="0" tIns="0" rIns="0" bIns="0" rtlCol="0" anchor="ctr"/>
+          <a:lstStyle/>
+          <a:p>
+            <a:pPr algn="r" indent="0" marL="0">
+              <a:buNone/>
+            </a:pPr>
+            <a:r>
+              <a:rPr lang="en-US" sz="1050" b="1" dirty="0">
+                <a:solidFill>
+                  <a:srgbClr val="2F3C7E"/>
+                </a:solidFill>
+                <a:latin typeface="Calibri" pitchFamily="34" charset="0"/>
+                <a:ea typeface="Calibri" pitchFamily="34" charset="-122"/>
+                <a:cs typeface="Calibri" pitchFamily="34" charset="-120"/>
+              </a:rPr>
+              <a:t>vosotros/vosotras</a:t>
+            </a:r>
+            <a:endParaRPr lang="en-US" sz="1050" dirty="0"/>
+          </a:p>
+        </p:txBody>
+      </p:sp>
+      <p:sp>
+        <p:nvSpPr>
           <p:cNvPr id="73" name="Text 71"/>
           <p:cNvSpPr/>
           <p:nvPr/>
         </p:nvSpPr>
         <p:spPr>
           <a:xfrm>
-            <a:off x="8400288" y="3316224"/>
-            <a:ext cx="1742846" cy="175260"/>
-          </a:xfrm>
-          <a:prstGeom prst="rect">
-            <a:avLst/>
-          </a:prstGeom>
-          <a:noFill/>
-          <a:ln/>
-        </p:spPr>
-        <p:txBody>
-          <a:bodyPr wrap="square" lIns="0" tIns="0" rIns="0" bIns="0" rtlCol="0" anchor="ctr"/>
-          <a:lstStyle/>
-          <a:p>
-            <a:pPr algn="r" indent="0" marL="0">
-              <a:buNone/>
-            </a:pPr>
-            <a:r>
-              <a:rPr lang="en-US" sz="1050" b="1" dirty="0">
-                <a:solidFill>
-                  <a:srgbClr val="2F3C7E"/>
-                </a:solidFill>
-                <a:latin typeface="Calibri" pitchFamily="34" charset="0"/>
-                <a:ea typeface="Calibri" pitchFamily="34" charset="-122"/>
-                <a:cs typeface="Calibri" pitchFamily="34" charset="-120"/>
-              </a:rPr>
-              <a:t>vosotros/vosotras</a:t>
-            </a:r>
-            <a:endParaRPr lang="en-US" sz="1050" dirty="0"/>
-          </a:p>
-        </p:txBody>
-      </p:sp>
-      <p:sp>
-        <p:nvSpPr>
-          <p:cNvPr id="74" name="Text 72"/>
-          <p:cNvSpPr/>
-          <p:nvPr/>
-        </p:nvSpPr>
-        <p:spPr>
-          <a:xfrm>
-            <a:off x="10454030" y="3316224"/>
-            <a:ext cx="1039978" cy="175260"/>
+            <a:off x="10454030" y="4992624"/>
+            <a:ext cx="1039978" cy="635508"/>
           </a:xfrm>
           <a:prstGeom prst="rect">
             <a:avLst/>
@@ -12245,13 +12206,13 @@
       </p:sp>
       <p:sp>
         <p:nvSpPr>
-          <p:cNvPr id="75" name="Shape 73"/>
-          <p:cNvSpPr/>
-          <p:nvPr/>
-        </p:nvSpPr>
-        <p:spPr>
-          <a:xfrm>
-            <a:off x="8363712" y="3491484"/>
+          <p:cNvPr id="74" name="Shape 72"/>
+          <p:cNvSpPr/>
+          <p:nvPr/>
+        </p:nvSpPr>
+        <p:spPr>
+          <a:xfrm>
+            <a:off x="8363712" y="5628132"/>
             <a:ext cx="3038856" cy="0"/>
           </a:xfrm>
           <a:prstGeom prst="line">
@@ -12268,913 +12229,85 @@
       </p:sp>
       <p:sp>
         <p:nvSpPr>
+          <p:cNvPr id="75" name="Text 73"/>
+          <p:cNvSpPr/>
+          <p:nvPr/>
+        </p:nvSpPr>
+        <p:spPr>
+          <a:xfrm>
+            <a:off x="8400288" y="5628132"/>
+            <a:ext cx="1742846" cy="635508"/>
+          </a:xfrm>
+          <a:prstGeom prst="rect">
+            <a:avLst/>
+          </a:prstGeom>
+          <a:noFill/>
+          <a:ln/>
+        </p:spPr>
+        <p:txBody>
+          <a:bodyPr wrap="square" lIns="0" tIns="0" rIns="0" bIns="0" rtlCol="0" anchor="ctr"/>
+          <a:lstStyle/>
+          <a:p>
+            <a:pPr algn="r" indent="0" marL="0">
+              <a:buNone/>
+            </a:pPr>
+            <a:r>
+              <a:rPr lang="en-US" sz="1050" b="1" dirty="0">
+                <a:solidFill>
+                  <a:srgbClr val="2F3C7E"/>
+                </a:solidFill>
+                <a:latin typeface="Calibri" pitchFamily="34" charset="0"/>
+                <a:ea typeface="Calibri" pitchFamily="34" charset="-122"/>
+                <a:cs typeface="Calibri" pitchFamily="34" charset="-120"/>
+              </a:rPr>
+              <a:t>ellos/ellas/Uds.</a:t>
+            </a:r>
+            <a:endParaRPr lang="en-US" sz="1050" dirty="0"/>
+          </a:p>
+        </p:txBody>
+      </p:sp>
+      <p:sp>
+        <p:nvSpPr>
           <p:cNvPr id="76" name="Text 74"/>
           <p:cNvSpPr/>
           <p:nvPr/>
         </p:nvSpPr>
         <p:spPr>
           <a:xfrm>
-            <a:off x="8400288" y="3491484"/>
-            <a:ext cx="1742846" cy="175260"/>
-          </a:xfrm>
-          <a:prstGeom prst="rect">
-            <a:avLst/>
-          </a:prstGeom>
-          <a:noFill/>
-          <a:ln/>
-        </p:spPr>
-        <p:txBody>
-          <a:bodyPr wrap="square" lIns="0" tIns="0" rIns="0" bIns="0" rtlCol="0" anchor="ctr"/>
-          <a:lstStyle/>
-          <a:p>
-            <a:pPr algn="r" indent="0" marL="0">
-              <a:buNone/>
-            </a:pPr>
-            <a:r>
-              <a:rPr lang="en-US" sz="1050" b="1" dirty="0">
-                <a:solidFill>
-                  <a:srgbClr val="2F3C7E"/>
-                </a:solidFill>
-                <a:latin typeface="Calibri" pitchFamily="34" charset="0"/>
-                <a:ea typeface="Calibri" pitchFamily="34" charset="-122"/>
-                <a:cs typeface="Calibri" pitchFamily="34" charset="-120"/>
-              </a:rPr>
-              <a:t>ellos/ellas/Uds.</a:t>
-            </a:r>
-            <a:endParaRPr lang="en-US" sz="1050" dirty="0"/>
+            <a:off x="10454030" y="5628132"/>
+            <a:ext cx="1039978" cy="635508"/>
+          </a:xfrm>
+          <a:prstGeom prst="rect">
+            <a:avLst/>
+          </a:prstGeom>
+          <a:noFill/>
+          <a:ln/>
+        </p:spPr>
+        <p:txBody>
+          <a:bodyPr wrap="square" lIns="0" tIns="0" rIns="0" bIns="0" rtlCol="0" anchor="ctr"/>
+          <a:lstStyle/>
+          <a:p>
+            <a:pPr algn="l" indent="0" marL="0">
+              <a:buNone/>
+            </a:pPr>
+            <a:r>
+              <a:rPr lang="en-US" sz="1100" b="1" dirty="0">
+                <a:solidFill>
+                  <a:srgbClr val="F96167"/>
+                </a:solidFill>
+                <a:latin typeface="Calibri" pitchFamily="34" charset="0"/>
+                <a:ea typeface="Calibri" pitchFamily="34" charset="-122"/>
+                <a:cs typeface="Calibri" pitchFamily="34" charset="-120"/>
+              </a:rPr>
+              <a:t>viven</a:t>
+            </a:r>
+            <a:endParaRPr lang="en-US" sz="1100" dirty="0"/>
           </a:p>
         </p:txBody>
       </p:sp>
       <p:sp>
         <p:nvSpPr>
           <p:cNvPr id="77" name="Text 75"/>
-          <p:cNvSpPr/>
-          <p:nvPr/>
-        </p:nvSpPr>
-        <p:spPr>
-          <a:xfrm>
-            <a:off x="10454030" y="3491484"/>
-            <a:ext cx="1039978" cy="175260"/>
-          </a:xfrm>
-          <a:prstGeom prst="rect">
-            <a:avLst/>
-          </a:prstGeom>
-          <a:noFill/>
-          <a:ln/>
-        </p:spPr>
-        <p:txBody>
-          <a:bodyPr wrap="square" lIns="0" tIns="0" rIns="0" bIns="0" rtlCol="0" anchor="ctr"/>
-          <a:lstStyle/>
-          <a:p>
-            <a:pPr algn="l" indent="0" marL="0">
-              <a:buNone/>
-            </a:pPr>
-            <a:r>
-              <a:rPr lang="en-US" sz="1100" b="1" dirty="0">
-                <a:solidFill>
-                  <a:srgbClr val="F96167"/>
-                </a:solidFill>
-                <a:latin typeface="Calibri" pitchFamily="34" charset="0"/>
-                <a:ea typeface="Calibri" pitchFamily="34" charset="-122"/>
-                <a:cs typeface="Calibri" pitchFamily="34" charset="-120"/>
-              </a:rPr>
-              <a:t>viven</a:t>
-            </a:r>
-            <a:endParaRPr lang="en-US" sz="1100" dirty="0"/>
-          </a:p>
-        </p:txBody>
-      </p:sp>
-      <p:sp>
-        <p:nvSpPr>
-          <p:cNvPr id="78" name="Text 76"/>
-          <p:cNvSpPr/>
-          <p:nvPr/>
-        </p:nvSpPr>
-        <p:spPr>
-          <a:xfrm>
-            <a:off x="548640" y="3913632"/>
-            <a:ext cx="5486400" cy="256032"/>
-          </a:xfrm>
-          <a:prstGeom prst="rect">
-            <a:avLst/>
-          </a:prstGeom>
-          <a:noFill/>
-          <a:ln/>
-        </p:spPr>
-        <p:txBody>
-          <a:bodyPr wrap="square" lIns="0" tIns="0" rIns="0" bIns="0" rtlCol="0" anchor="ctr"/>
-          <a:lstStyle/>
-          <a:p>
-            <a:pPr indent="0" marL="0">
-              <a:buNone/>
-            </a:pPr>
-            <a:r>
-              <a:rPr lang="en-US" sz="1200" b="1" spc="150" kern="0" dirty="0">
-                <a:solidFill>
-                  <a:srgbClr val="F96167"/>
-                </a:solidFill>
-                <a:latin typeface="Calibri" pitchFamily="34" charset="0"/>
-                <a:ea typeface="Calibri" pitchFamily="34" charset="-122"/>
-                <a:cs typeface="Calibri" pitchFamily="34" charset="-120"/>
-              </a:rPr>
-              <a:t>VERBOS IRREGULARES</a:t>
-            </a:r>
-            <a:endParaRPr lang="en-US" sz="1200" dirty="0"/>
-          </a:p>
-        </p:txBody>
-      </p:sp>
-      <p:sp>
-        <p:nvSpPr>
-          <p:cNvPr id="79" name="Shape 77"/>
-          <p:cNvSpPr/>
-          <p:nvPr/>
-        </p:nvSpPr>
-        <p:spPr>
-          <a:xfrm>
-            <a:off x="548640" y="4169664"/>
-            <a:ext cx="3514344" cy="2084832"/>
-          </a:xfrm>
-          <a:prstGeom prst="roundRect">
-            <a:avLst>
-              <a:gd name="adj" fmla="val 4386"/>
-            </a:avLst>
-          </a:prstGeom>
-          <a:solidFill>
-            <a:srgbClr val="F5F6FB"/>
-          </a:solidFill>
-          <a:ln/>
-          <a:effectLst>
-            <a:outerShdw sx="100000" sy="100000" kx="0" ky="0" algn="bl" rotWithShape="0" blurRad="76200" dist="38100" dir="5400000">
-              <a:srgbClr val="1B2340">
-                <a:alpha val="18000"/>
-              </a:srgbClr>
-            </a:outerShdw>
-          </a:effectLst>
-        </p:spPr>
-      </p:sp>
-      <p:sp>
-        <p:nvSpPr>
-          <p:cNvPr id="80" name="Shape 78"/>
-          <p:cNvSpPr/>
-          <p:nvPr/>
-        </p:nvSpPr>
-        <p:spPr>
-          <a:xfrm>
-            <a:off x="713232" y="4315968"/>
-            <a:ext cx="457200" cy="457200"/>
-          </a:xfrm>
-          <a:prstGeom prst="ellipse">
-            <a:avLst/>
-          </a:prstGeom>
-          <a:solidFill>
-            <a:srgbClr val="F96167"/>
-          </a:solidFill>
-          <a:ln/>
-        </p:spPr>
-      </p:sp>
-      <p:sp>
-        <p:nvSpPr>
-          <p:cNvPr id="81" name="Text 79"/>
-          <p:cNvSpPr/>
-          <p:nvPr/>
-        </p:nvSpPr>
-        <p:spPr>
-          <a:xfrm>
-            <a:off x="713232" y="4315968"/>
-            <a:ext cx="457200" cy="457200"/>
-          </a:xfrm>
-          <a:prstGeom prst="rect">
-            <a:avLst/>
-          </a:prstGeom>
-          <a:noFill/>
-          <a:ln/>
-        </p:spPr>
-        <p:txBody>
-          <a:bodyPr wrap="square" lIns="0" tIns="0" rIns="0" bIns="0" rtlCol="0" anchor="ctr"/>
-          <a:lstStyle/>
-          <a:p>
-            <a:pPr algn="ctr" indent="0" marL="0">
-              <a:buNone/>
-            </a:pPr>
-            <a:r>
-              <a:rPr lang="en-US" sz="2600" dirty="0">
-                <a:solidFill>
-                  <a:srgbClr val="000000"/>
-                </a:solidFill>
-              </a:rPr>
-              <a:t>🤲</a:t>
-            </a:r>
-            <a:endParaRPr lang="en-US" sz="2600" dirty="0"/>
-          </a:p>
-        </p:txBody>
-      </p:sp>
-      <p:sp>
-        <p:nvSpPr>
-          <p:cNvPr id="82" name="Text 80"/>
-          <p:cNvSpPr/>
-          <p:nvPr/>
-        </p:nvSpPr>
-        <p:spPr>
-          <a:xfrm>
-            <a:off x="1298448" y="4306824"/>
-            <a:ext cx="2599944" cy="365760"/>
-          </a:xfrm>
-          <a:prstGeom prst="rect">
-            <a:avLst/>
-          </a:prstGeom>
-          <a:noFill/>
-          <a:ln/>
-        </p:spPr>
-        <p:txBody>
-          <a:bodyPr wrap="square" lIns="0" tIns="0" rIns="0" bIns="0" rtlCol="0" anchor="ctr"/>
-          <a:lstStyle/>
-          <a:p>
-            <a:pPr indent="0" marL="0">
-              <a:buNone/>
-            </a:pPr>
-            <a:r>
-              <a:rPr lang="en-US" sz="1800" b="1" dirty="0">
-                <a:solidFill>
-                  <a:srgbClr val="2F3C7E"/>
-                </a:solidFill>
-                <a:latin typeface="Calibri" pitchFamily="34" charset="0"/>
-                <a:ea typeface="Calibri" pitchFamily="34" charset="-122"/>
-                <a:cs typeface="Calibri" pitchFamily="34" charset="-120"/>
-              </a:rPr>
-              <a:t>tener</a:t>
-            </a:r>
-            <a:endParaRPr lang="en-US" sz="1800" dirty="0"/>
-          </a:p>
-        </p:txBody>
-      </p:sp>
-      <p:sp>
-        <p:nvSpPr>
-          <p:cNvPr id="83" name="Text 81"/>
-          <p:cNvSpPr/>
-          <p:nvPr/>
-        </p:nvSpPr>
-        <p:spPr>
-          <a:xfrm>
-            <a:off x="1298448" y="4672584"/>
-            <a:ext cx="2599944" cy="274320"/>
-          </a:xfrm>
-          <a:prstGeom prst="rect">
-            <a:avLst/>
-          </a:prstGeom>
-          <a:noFill/>
-          <a:ln/>
-        </p:spPr>
-        <p:txBody>
-          <a:bodyPr wrap="square" lIns="0" tIns="0" rIns="0" bIns="0" rtlCol="0" anchor="ctr"/>
-          <a:lstStyle/>
-          <a:p>
-            <a:pPr indent="0" marL="0">
-              <a:buNone/>
-            </a:pPr>
-            <a:r>
-              <a:rPr lang="en-US" sz="1150" i="1" dirty="0">
-                <a:solidFill>
-                  <a:srgbClr val="5C6690"/>
-                </a:solidFill>
-                <a:latin typeface="Calibri" pitchFamily="34" charset="0"/>
-                <a:ea typeface="Calibri" pitchFamily="34" charset="-122"/>
-                <a:cs typeface="Calibri" pitchFamily="34" charset="-120"/>
-              </a:rPr>
-              <a:t>иметь</a:t>
-            </a:r>
-            <a:endParaRPr lang="en-US" sz="1150" dirty="0"/>
-          </a:p>
-        </p:txBody>
-      </p:sp>
-      <p:sp>
-        <p:nvSpPr>
-          <p:cNvPr id="84" name="Shape 82"/>
-          <p:cNvSpPr/>
-          <p:nvPr/>
-        </p:nvSpPr>
-        <p:spPr>
-          <a:xfrm>
-            <a:off x="731520" y="5065776"/>
-            <a:ext cx="3148584" cy="1051560"/>
-          </a:xfrm>
-          <a:prstGeom prst="rect">
-            <a:avLst/>
-          </a:prstGeom>
-          <a:solidFill>
-            <a:srgbClr val="FFFFFF"/>
-          </a:solidFill>
-          <a:ln/>
-        </p:spPr>
-      </p:sp>
-      <p:sp>
-        <p:nvSpPr>
-          <p:cNvPr id="85" name="Shape 83"/>
-          <p:cNvSpPr/>
-          <p:nvPr/>
-        </p:nvSpPr>
-        <p:spPr>
-          <a:xfrm>
-            <a:off x="2748686" y="5120640"/>
-            <a:ext cx="0" cy="941832"/>
-          </a:xfrm>
-          <a:prstGeom prst="line">
-            <a:avLst/>
-          </a:prstGeom>
-          <a:noFill/>
-          <a:ln w="12700">
-            <a:solidFill>
-              <a:srgbClr val="D8DBEA"/>
-            </a:solidFill>
-            <a:prstDash val="solid"/>
-          </a:ln>
-        </p:spPr>
-      </p:sp>
-      <p:sp>
-        <p:nvSpPr>
-          <p:cNvPr id="86" name="Text 84"/>
-          <p:cNvSpPr/>
-          <p:nvPr/>
-        </p:nvSpPr>
-        <p:spPr>
-          <a:xfrm>
-            <a:off x="822960" y="5065776"/>
-            <a:ext cx="1742846" cy="175260"/>
-          </a:xfrm>
-          <a:prstGeom prst="rect">
-            <a:avLst/>
-          </a:prstGeom>
-          <a:noFill/>
-          <a:ln/>
-        </p:spPr>
-        <p:txBody>
-          <a:bodyPr wrap="square" lIns="0" tIns="0" rIns="0" bIns="0" rtlCol="0" anchor="ctr"/>
-          <a:lstStyle/>
-          <a:p>
-            <a:pPr algn="r" indent="0" marL="0">
-              <a:buNone/>
-            </a:pPr>
-            <a:r>
-              <a:rPr lang="en-US" sz="1050" b="1" dirty="0">
-                <a:solidFill>
-                  <a:srgbClr val="2F3C7E"/>
-                </a:solidFill>
-                <a:latin typeface="Calibri" pitchFamily="34" charset="0"/>
-                <a:ea typeface="Calibri" pitchFamily="34" charset="-122"/>
-                <a:cs typeface="Calibri" pitchFamily="34" charset="-120"/>
-              </a:rPr>
-              <a:t>yo</a:t>
-            </a:r>
-            <a:endParaRPr lang="en-US" sz="1050" dirty="0"/>
-          </a:p>
-        </p:txBody>
-      </p:sp>
-      <p:sp>
-        <p:nvSpPr>
-          <p:cNvPr id="87" name="Text 85"/>
-          <p:cNvSpPr/>
-          <p:nvPr/>
-        </p:nvSpPr>
-        <p:spPr>
-          <a:xfrm>
-            <a:off x="2876702" y="5065776"/>
-            <a:ext cx="1039978" cy="175260"/>
-          </a:xfrm>
-          <a:prstGeom prst="rect">
-            <a:avLst/>
-          </a:prstGeom>
-          <a:noFill/>
-          <a:ln/>
-        </p:spPr>
-        <p:txBody>
-          <a:bodyPr wrap="square" lIns="0" tIns="0" rIns="0" bIns="0" rtlCol="0" anchor="ctr"/>
-          <a:lstStyle/>
-          <a:p>
-            <a:pPr algn="l" indent="0" marL="0">
-              <a:buNone/>
-            </a:pPr>
-            <a:r>
-              <a:rPr lang="en-US" sz="1100" b="1" dirty="0">
-                <a:solidFill>
-                  <a:srgbClr val="F96167"/>
-                </a:solidFill>
-                <a:latin typeface="Calibri" pitchFamily="34" charset="0"/>
-                <a:ea typeface="Calibri" pitchFamily="34" charset="-122"/>
-                <a:cs typeface="Calibri" pitchFamily="34" charset="-120"/>
-              </a:rPr>
-              <a:t>tengo</a:t>
-            </a:r>
-            <a:endParaRPr lang="en-US" sz="1100" dirty="0"/>
-          </a:p>
-        </p:txBody>
-      </p:sp>
-      <p:sp>
-        <p:nvSpPr>
-          <p:cNvPr id="88" name="Shape 86"/>
-          <p:cNvSpPr/>
-          <p:nvPr/>
-        </p:nvSpPr>
-        <p:spPr>
-          <a:xfrm>
-            <a:off x="786384" y="5241036"/>
-            <a:ext cx="3038856" cy="0"/>
-          </a:xfrm>
-          <a:prstGeom prst="line">
-            <a:avLst/>
-          </a:prstGeom>
-          <a:noFill/>
-          <a:ln w="9525">
-            <a:solidFill>
-              <a:srgbClr val="E7E9F3"/>
-            </a:solidFill>
-            <a:prstDash val="solid"/>
-          </a:ln>
-        </p:spPr>
-      </p:sp>
-      <p:sp>
-        <p:nvSpPr>
-          <p:cNvPr id="89" name="Text 87"/>
-          <p:cNvSpPr/>
-          <p:nvPr/>
-        </p:nvSpPr>
-        <p:spPr>
-          <a:xfrm>
-            <a:off x="822960" y="5241036"/>
-            <a:ext cx="1742846" cy="175260"/>
-          </a:xfrm>
-          <a:prstGeom prst="rect">
-            <a:avLst/>
-          </a:prstGeom>
-          <a:noFill/>
-          <a:ln/>
-        </p:spPr>
-        <p:txBody>
-          <a:bodyPr wrap="square" lIns="0" tIns="0" rIns="0" bIns="0" rtlCol="0" anchor="ctr"/>
-          <a:lstStyle/>
-          <a:p>
-            <a:pPr algn="r" indent="0" marL="0">
-              <a:buNone/>
-            </a:pPr>
-            <a:r>
-              <a:rPr lang="en-US" sz="1050" b="1" dirty="0">
-                <a:solidFill>
-                  <a:srgbClr val="2F3C7E"/>
-                </a:solidFill>
-                <a:latin typeface="Calibri" pitchFamily="34" charset="0"/>
-                <a:ea typeface="Calibri" pitchFamily="34" charset="-122"/>
-                <a:cs typeface="Calibri" pitchFamily="34" charset="-120"/>
-              </a:rPr>
-              <a:t>tú</a:t>
-            </a:r>
-            <a:endParaRPr lang="en-US" sz="1050" dirty="0"/>
-          </a:p>
-        </p:txBody>
-      </p:sp>
-      <p:sp>
-        <p:nvSpPr>
-          <p:cNvPr id="90" name="Text 88"/>
-          <p:cNvSpPr/>
-          <p:nvPr/>
-        </p:nvSpPr>
-        <p:spPr>
-          <a:xfrm>
-            <a:off x="2876702" y="5241036"/>
-            <a:ext cx="1039978" cy="175260"/>
-          </a:xfrm>
-          <a:prstGeom prst="rect">
-            <a:avLst/>
-          </a:prstGeom>
-          <a:noFill/>
-          <a:ln/>
-        </p:spPr>
-        <p:txBody>
-          <a:bodyPr wrap="square" lIns="0" tIns="0" rIns="0" bIns="0" rtlCol="0" anchor="ctr"/>
-          <a:lstStyle/>
-          <a:p>
-            <a:pPr algn="l" indent="0" marL="0">
-              <a:buNone/>
-            </a:pPr>
-            <a:r>
-              <a:rPr lang="en-US" sz="1100" b="1" dirty="0">
-                <a:solidFill>
-                  <a:srgbClr val="F96167"/>
-                </a:solidFill>
-                <a:latin typeface="Calibri" pitchFamily="34" charset="0"/>
-                <a:ea typeface="Calibri" pitchFamily="34" charset="-122"/>
-                <a:cs typeface="Calibri" pitchFamily="34" charset="-120"/>
-              </a:rPr>
-              <a:t>tienes</a:t>
-            </a:r>
-            <a:endParaRPr lang="en-US" sz="1100" dirty="0"/>
-          </a:p>
-        </p:txBody>
-      </p:sp>
-      <p:sp>
-        <p:nvSpPr>
-          <p:cNvPr id="91" name="Shape 89"/>
-          <p:cNvSpPr/>
-          <p:nvPr/>
-        </p:nvSpPr>
-        <p:spPr>
-          <a:xfrm>
-            <a:off x="786384" y="5416296"/>
-            <a:ext cx="3038856" cy="0"/>
-          </a:xfrm>
-          <a:prstGeom prst="line">
-            <a:avLst/>
-          </a:prstGeom>
-          <a:noFill/>
-          <a:ln w="9525">
-            <a:solidFill>
-              <a:srgbClr val="E7E9F3"/>
-            </a:solidFill>
-            <a:prstDash val="solid"/>
-          </a:ln>
-        </p:spPr>
-      </p:sp>
-      <p:sp>
-        <p:nvSpPr>
-          <p:cNvPr id="92" name="Text 90"/>
-          <p:cNvSpPr/>
-          <p:nvPr/>
-        </p:nvSpPr>
-        <p:spPr>
-          <a:xfrm>
-            <a:off x="822960" y="5416296"/>
-            <a:ext cx="1742846" cy="175260"/>
-          </a:xfrm>
-          <a:prstGeom prst="rect">
-            <a:avLst/>
-          </a:prstGeom>
-          <a:noFill/>
-          <a:ln/>
-        </p:spPr>
-        <p:txBody>
-          <a:bodyPr wrap="square" lIns="0" tIns="0" rIns="0" bIns="0" rtlCol="0" anchor="ctr"/>
-          <a:lstStyle/>
-          <a:p>
-            <a:pPr algn="r" indent="0" marL="0">
-              <a:buNone/>
-            </a:pPr>
-            <a:r>
-              <a:rPr lang="en-US" sz="1050" b="1" dirty="0">
-                <a:solidFill>
-                  <a:srgbClr val="2F3C7E"/>
-                </a:solidFill>
-                <a:latin typeface="Calibri" pitchFamily="34" charset="0"/>
-                <a:ea typeface="Calibri" pitchFamily="34" charset="-122"/>
-                <a:cs typeface="Calibri" pitchFamily="34" charset="-120"/>
-              </a:rPr>
-              <a:t>él/ella/Ud.</a:t>
-            </a:r>
-            <a:endParaRPr lang="en-US" sz="1050" dirty="0"/>
-          </a:p>
-        </p:txBody>
-      </p:sp>
-      <p:sp>
-        <p:nvSpPr>
-          <p:cNvPr id="93" name="Text 91"/>
-          <p:cNvSpPr/>
-          <p:nvPr/>
-        </p:nvSpPr>
-        <p:spPr>
-          <a:xfrm>
-            <a:off x="2876702" y="5416296"/>
-            <a:ext cx="1039978" cy="175260"/>
-          </a:xfrm>
-          <a:prstGeom prst="rect">
-            <a:avLst/>
-          </a:prstGeom>
-          <a:noFill/>
-          <a:ln/>
-        </p:spPr>
-        <p:txBody>
-          <a:bodyPr wrap="square" lIns="0" tIns="0" rIns="0" bIns="0" rtlCol="0" anchor="ctr"/>
-          <a:lstStyle/>
-          <a:p>
-            <a:pPr algn="l" indent="0" marL="0">
-              <a:buNone/>
-            </a:pPr>
-            <a:r>
-              <a:rPr lang="en-US" sz="1100" b="1" dirty="0">
-                <a:solidFill>
-                  <a:srgbClr val="F96167"/>
-                </a:solidFill>
-                <a:latin typeface="Calibri" pitchFamily="34" charset="0"/>
-                <a:ea typeface="Calibri" pitchFamily="34" charset="-122"/>
-                <a:cs typeface="Calibri" pitchFamily="34" charset="-120"/>
-              </a:rPr>
-              <a:t>tiene</a:t>
-            </a:r>
-            <a:endParaRPr lang="en-US" sz="1100" dirty="0"/>
-          </a:p>
-        </p:txBody>
-      </p:sp>
-      <p:sp>
-        <p:nvSpPr>
-          <p:cNvPr id="94" name="Shape 92"/>
-          <p:cNvSpPr/>
-          <p:nvPr/>
-        </p:nvSpPr>
-        <p:spPr>
-          <a:xfrm>
-            <a:off x="786384" y="5591556"/>
-            <a:ext cx="3038856" cy="0"/>
-          </a:xfrm>
-          <a:prstGeom prst="line">
-            <a:avLst/>
-          </a:prstGeom>
-          <a:noFill/>
-          <a:ln w="9525">
-            <a:solidFill>
-              <a:srgbClr val="E7E9F3"/>
-            </a:solidFill>
-            <a:prstDash val="solid"/>
-          </a:ln>
-        </p:spPr>
-      </p:sp>
-      <p:sp>
-        <p:nvSpPr>
-          <p:cNvPr id="95" name="Text 93"/>
-          <p:cNvSpPr/>
-          <p:nvPr/>
-        </p:nvSpPr>
-        <p:spPr>
-          <a:xfrm>
-            <a:off x="822960" y="5591556"/>
-            <a:ext cx="1742846" cy="175260"/>
-          </a:xfrm>
-          <a:prstGeom prst="rect">
-            <a:avLst/>
-          </a:prstGeom>
-          <a:noFill/>
-          <a:ln/>
-        </p:spPr>
-        <p:txBody>
-          <a:bodyPr wrap="square" lIns="0" tIns="0" rIns="0" bIns="0" rtlCol="0" anchor="ctr"/>
-          <a:lstStyle/>
-          <a:p>
-            <a:pPr algn="r" indent="0" marL="0">
-              <a:buNone/>
-            </a:pPr>
-            <a:r>
-              <a:rPr lang="en-US" sz="1050" b="1" dirty="0">
-                <a:solidFill>
-                  <a:srgbClr val="2F3C7E"/>
-                </a:solidFill>
-                <a:latin typeface="Calibri" pitchFamily="34" charset="0"/>
-                <a:ea typeface="Calibri" pitchFamily="34" charset="-122"/>
-                <a:cs typeface="Calibri" pitchFamily="34" charset="-120"/>
-              </a:rPr>
-              <a:t>nosotros/nosotras</a:t>
-            </a:r>
-            <a:endParaRPr lang="en-US" sz="1050" dirty="0"/>
-          </a:p>
-        </p:txBody>
-      </p:sp>
-      <p:sp>
-        <p:nvSpPr>
-          <p:cNvPr id="96" name="Text 94"/>
-          <p:cNvSpPr/>
-          <p:nvPr/>
-        </p:nvSpPr>
-        <p:spPr>
-          <a:xfrm>
-            <a:off x="2876702" y="5591556"/>
-            <a:ext cx="1039978" cy="175260"/>
-          </a:xfrm>
-          <a:prstGeom prst="rect">
-            <a:avLst/>
-          </a:prstGeom>
-          <a:noFill/>
-          <a:ln/>
-        </p:spPr>
-        <p:txBody>
-          <a:bodyPr wrap="square" lIns="0" tIns="0" rIns="0" bIns="0" rtlCol="0" anchor="ctr"/>
-          <a:lstStyle/>
-          <a:p>
-            <a:pPr algn="l" indent="0" marL="0">
-              <a:buNone/>
-            </a:pPr>
-            <a:r>
-              <a:rPr lang="en-US" sz="1100" b="1" dirty="0">
-                <a:solidFill>
-                  <a:srgbClr val="F96167"/>
-                </a:solidFill>
-                <a:latin typeface="Calibri" pitchFamily="34" charset="0"/>
-                <a:ea typeface="Calibri" pitchFamily="34" charset="-122"/>
-                <a:cs typeface="Calibri" pitchFamily="34" charset="-120"/>
-              </a:rPr>
-              <a:t>tenemos</a:t>
-            </a:r>
-            <a:endParaRPr lang="en-US" sz="1100" dirty="0"/>
-          </a:p>
-        </p:txBody>
-      </p:sp>
-      <p:sp>
-        <p:nvSpPr>
-          <p:cNvPr id="97" name="Shape 95"/>
-          <p:cNvSpPr/>
-          <p:nvPr/>
-        </p:nvSpPr>
-        <p:spPr>
-          <a:xfrm>
-            <a:off x="786384" y="5766816"/>
-            <a:ext cx="3038856" cy="0"/>
-          </a:xfrm>
-          <a:prstGeom prst="line">
-            <a:avLst/>
-          </a:prstGeom>
-          <a:noFill/>
-          <a:ln w="9525">
-            <a:solidFill>
-              <a:srgbClr val="E7E9F3"/>
-            </a:solidFill>
-            <a:prstDash val="solid"/>
-          </a:ln>
-        </p:spPr>
-      </p:sp>
-      <p:sp>
-        <p:nvSpPr>
-          <p:cNvPr id="98" name="Text 96"/>
-          <p:cNvSpPr/>
-          <p:nvPr/>
-        </p:nvSpPr>
-        <p:spPr>
-          <a:xfrm>
-            <a:off x="822960" y="5766816"/>
-            <a:ext cx="1742846" cy="175260"/>
-          </a:xfrm>
-          <a:prstGeom prst="rect">
-            <a:avLst/>
-          </a:prstGeom>
-          <a:noFill/>
-          <a:ln/>
-        </p:spPr>
-        <p:txBody>
-          <a:bodyPr wrap="square" lIns="0" tIns="0" rIns="0" bIns="0" rtlCol="0" anchor="ctr"/>
-          <a:lstStyle/>
-          <a:p>
-            <a:pPr algn="r" indent="0" marL="0">
-              <a:buNone/>
-            </a:pPr>
-            <a:r>
-              <a:rPr lang="en-US" sz="1050" b="1" dirty="0">
-                <a:solidFill>
-                  <a:srgbClr val="2F3C7E"/>
-                </a:solidFill>
-                <a:latin typeface="Calibri" pitchFamily="34" charset="0"/>
-                <a:ea typeface="Calibri" pitchFamily="34" charset="-122"/>
-                <a:cs typeface="Calibri" pitchFamily="34" charset="-120"/>
-              </a:rPr>
-              <a:t>vosotros/vosotras</a:t>
-            </a:r>
-            <a:endParaRPr lang="en-US" sz="1050" dirty="0"/>
-          </a:p>
-        </p:txBody>
-      </p:sp>
-      <p:sp>
-        <p:nvSpPr>
-          <p:cNvPr id="99" name="Text 97"/>
-          <p:cNvSpPr/>
-          <p:nvPr/>
-        </p:nvSpPr>
-        <p:spPr>
-          <a:xfrm>
-            <a:off x="2876702" y="5766816"/>
-            <a:ext cx="1039978" cy="175260"/>
-          </a:xfrm>
-          <a:prstGeom prst="rect">
-            <a:avLst/>
-          </a:prstGeom>
-          <a:noFill/>
-          <a:ln/>
-        </p:spPr>
-        <p:txBody>
-          <a:bodyPr wrap="square" lIns="0" tIns="0" rIns="0" bIns="0" rtlCol="0" anchor="ctr"/>
-          <a:lstStyle/>
-          <a:p>
-            <a:pPr algn="l" indent="0" marL="0">
-              <a:buNone/>
-            </a:pPr>
-            <a:r>
-              <a:rPr lang="en-US" sz="1100" b="1" dirty="0">
-                <a:solidFill>
-                  <a:srgbClr val="F96167"/>
-                </a:solidFill>
-                <a:latin typeface="Calibri" pitchFamily="34" charset="0"/>
-                <a:ea typeface="Calibri" pitchFamily="34" charset="-122"/>
-                <a:cs typeface="Calibri" pitchFamily="34" charset="-120"/>
-              </a:rPr>
-              <a:t>tenéis</a:t>
-            </a:r>
-            <a:endParaRPr lang="en-US" sz="1100" dirty="0"/>
-          </a:p>
-        </p:txBody>
-      </p:sp>
-      <p:sp>
-        <p:nvSpPr>
-          <p:cNvPr id="100" name="Shape 98"/>
-          <p:cNvSpPr/>
-          <p:nvPr/>
-        </p:nvSpPr>
-        <p:spPr>
-          <a:xfrm>
-            <a:off x="786384" y="5942076"/>
-            <a:ext cx="3038856" cy="0"/>
-          </a:xfrm>
-          <a:prstGeom prst="line">
-            <a:avLst/>
-          </a:prstGeom>
-          <a:noFill/>
-          <a:ln w="9525">
-            <a:solidFill>
-              <a:srgbClr val="E7E9F3"/>
-            </a:solidFill>
-            <a:prstDash val="solid"/>
-          </a:ln>
-        </p:spPr>
-      </p:sp>
-      <p:sp>
-        <p:nvSpPr>
-          <p:cNvPr id="101" name="Text 99"/>
-          <p:cNvSpPr/>
-          <p:nvPr/>
-        </p:nvSpPr>
-        <p:spPr>
-          <a:xfrm>
-            <a:off x="822960" y="5942076"/>
-            <a:ext cx="1742846" cy="175260"/>
-          </a:xfrm>
-          <a:prstGeom prst="rect">
-            <a:avLst/>
-          </a:prstGeom>
-          <a:noFill/>
-          <a:ln/>
-        </p:spPr>
-        <p:txBody>
-          <a:bodyPr wrap="square" lIns="0" tIns="0" rIns="0" bIns="0" rtlCol="0" anchor="ctr"/>
-          <a:lstStyle/>
-          <a:p>
-            <a:pPr algn="r" indent="0" marL="0">
-              <a:buNone/>
-            </a:pPr>
-            <a:r>
-              <a:rPr lang="en-US" sz="1050" b="1" dirty="0">
-                <a:solidFill>
-                  <a:srgbClr val="2F3C7E"/>
-                </a:solidFill>
-                <a:latin typeface="Calibri" pitchFamily="34" charset="0"/>
-                <a:ea typeface="Calibri" pitchFamily="34" charset="-122"/>
-                <a:cs typeface="Calibri" pitchFamily="34" charset="-120"/>
-              </a:rPr>
-              <a:t>ellos/ellas/Uds.</a:t>
-            </a:r>
-            <a:endParaRPr lang="en-US" sz="1050" dirty="0"/>
-          </a:p>
-        </p:txBody>
-      </p:sp>
-      <p:sp>
-        <p:nvSpPr>
-          <p:cNvPr id="102" name="Text 100"/>
-          <p:cNvSpPr/>
-          <p:nvPr/>
-        </p:nvSpPr>
-        <p:spPr>
-          <a:xfrm>
-            <a:off x="2876702" y="5942076"/>
-            <a:ext cx="1039978" cy="175260"/>
-          </a:xfrm>
-          <a:prstGeom prst="rect">
-            <a:avLst/>
-          </a:prstGeom>
-          <a:noFill/>
-          <a:ln/>
-        </p:spPr>
-        <p:txBody>
-          <a:bodyPr wrap="square" lIns="0" tIns="0" rIns="0" bIns="0" rtlCol="0" anchor="ctr"/>
-          <a:lstStyle/>
-          <a:p>
-            <a:pPr algn="l" indent="0" marL="0">
-              <a:buNone/>
-            </a:pPr>
-            <a:r>
-              <a:rPr lang="en-US" sz="1100" b="1" dirty="0">
-                <a:solidFill>
-                  <a:srgbClr val="F96167"/>
-                </a:solidFill>
-                <a:latin typeface="Calibri" pitchFamily="34" charset="0"/>
-                <a:ea typeface="Calibri" pitchFamily="34" charset="-122"/>
-                <a:cs typeface="Calibri" pitchFamily="34" charset="-120"/>
-              </a:rPr>
-              <a:t>tienen</a:t>
-            </a:r>
-            <a:endParaRPr lang="en-US" sz="1100" dirty="0"/>
-          </a:p>
-        </p:txBody>
-      </p:sp>
-      <p:sp>
-        <p:nvSpPr>
-          <p:cNvPr id="103" name="Text 101"/>
           <p:cNvSpPr/>
           <p:nvPr/>
         </p:nvSpPr>
@@ -13213,7 +12346,7 @@
       </p:sp>
       <p:sp>
         <p:nvSpPr>
-          <p:cNvPr id="104" name="Text 102"/>
+          <p:cNvPr id="78" name="Text 76"/>
           <p:cNvSpPr/>
           <p:nvPr/>
         </p:nvSpPr>
@@ -13354,7 +12487,7 @@
                 <a:ea typeface="Cambria" pitchFamily="34" charset="-122"/>
                 <a:cs typeface="Cambria" pitchFamily="34" charset="-120"/>
               </a:rPr>
-              <a:t>Ser y estar</a:t>
+              <a:t>Tener, ser y estar</a:t>
             </a:r>
             <a:endParaRPr lang="en-US" sz="3000" dirty="0"/>
           </a:p>
@@ -13393,7 +12526,7 @@
                 <a:ea typeface="Calibri" pitchFamily="34" charset="-122"/>
                 <a:cs typeface="Calibri" pitchFamily="34" charset="-120"/>
               </a:rPr>
-              <a:t>Los dos verbos más importantes... y los que más se confunden</a:t>
+              <a:t>Un irregular más... y los dos verbos que más se confunden</a:t>
             </a:r>
             <a:endParaRPr lang="en-US" sz="1400" dirty="0"/>
           </a:p>
@@ -13408,7 +12541,7 @@
         <p:spPr>
           <a:xfrm>
             <a:off x="548640" y="1536192"/>
-            <a:ext cx="5385816" cy="2880360"/>
+            <a:ext cx="3291840" cy="2880360"/>
           </a:xfrm>
           <a:prstGeom prst="roundRect">
             <a:avLst>
@@ -13416,7 +12549,7 @@
             </a:avLst>
           </a:prstGeom>
           <a:solidFill>
-            <a:srgbClr val="EFE9FB"/>
+            <a:srgbClr val="F5F6FB"/>
           </a:solidFill>
           <a:ln/>
           <a:effectLst>
@@ -13436,8 +12569,8 @@
         </p:nvSpPr>
         <p:spPr>
           <a:xfrm>
-            <a:off x="731520" y="1700784"/>
-            <a:ext cx="502920" cy="502920"/>
+            <a:off x="713232" y="1682496"/>
+            <a:ext cx="457200" cy="457200"/>
           </a:xfrm>
           <a:prstGeom prst="ellipse">
             <a:avLst/>
@@ -13456,8 +12589,8 @@
         </p:nvSpPr>
         <p:spPr>
           <a:xfrm>
-            <a:off x="731520" y="1700784"/>
-            <a:ext cx="502920" cy="502920"/>
+            <a:off x="713232" y="1682496"/>
+            <a:ext cx="457200" cy="457200"/>
           </a:xfrm>
           <a:prstGeom prst="rect">
             <a:avLst/>
@@ -13473,14 +12606,14 @@
               <a:buNone/>
             </a:pPr>
             <a:r>
-              <a:rPr lang="en-US" sz="2800" dirty="0">
+              <a:rPr lang="en-US" sz="2600" dirty="0">
                 <a:solidFill>
                   <a:srgbClr val="000000"/>
                 </a:solidFill>
               </a:rPr>
-              <a:t>✨</a:t>
-            </a:r>
-            <a:endParaRPr lang="en-US" sz="2800" dirty="0"/>
+              <a:t>🤲</a:t>
+            </a:r>
+            <a:endParaRPr lang="en-US" sz="2600" dirty="0"/>
           </a:p>
         </p:txBody>
       </p:sp>
@@ -13492,8 +12625,8 @@
         </p:nvSpPr>
         <p:spPr>
           <a:xfrm>
-            <a:off x="1380744" y="1664208"/>
-            <a:ext cx="4379976" cy="384048"/>
+            <a:off x="1298448" y="1673352"/>
+            <a:ext cx="2377440" cy="365760"/>
           </a:xfrm>
           <a:prstGeom prst="rect">
             <a:avLst/>
@@ -13509,17 +12642,17 @@
               <a:buNone/>
             </a:pPr>
             <a:r>
-              <a:rPr lang="en-US" sz="2200" b="1" dirty="0">
+              <a:rPr lang="en-US" sz="1800" b="1" dirty="0">
                 <a:solidFill>
                   <a:srgbClr val="2F3C7E"/>
                 </a:solidFill>
-                <a:latin typeface="Cambria" pitchFamily="34" charset="0"/>
-                <a:ea typeface="Cambria" pitchFamily="34" charset="-122"/>
-                <a:cs typeface="Cambria" pitchFamily="34" charset="-120"/>
-              </a:rPr>
-              <a:t>SER</a:t>
-            </a:r>
-            <a:endParaRPr lang="en-US" sz="2200" dirty="0"/>
+                <a:latin typeface="Calibri" pitchFamily="34" charset="0"/>
+                <a:ea typeface="Calibri" pitchFamily="34" charset="-122"/>
+                <a:cs typeface="Calibri" pitchFamily="34" charset="-120"/>
+              </a:rPr>
+              <a:t>tener</a:t>
+            </a:r>
+            <a:endParaRPr lang="en-US" sz="1800" dirty="0"/>
           </a:p>
         </p:txBody>
       </p:sp>
@@ -13531,8 +12664,8 @@
         </p:nvSpPr>
         <p:spPr>
           <a:xfrm>
-            <a:off x="1380744" y="2048256"/>
-            <a:ext cx="4379976" cy="274320"/>
+            <a:off x="1298448" y="2039112"/>
+            <a:ext cx="2377440" cy="274320"/>
           </a:xfrm>
           <a:prstGeom prst="rect">
             <a:avLst/>
@@ -13548,7 +12681,7 @@
               <a:buNone/>
             </a:pPr>
             <a:r>
-              <a:rPr lang="en-US" sz="1200" i="1" dirty="0">
+              <a:rPr lang="en-US" sz="1150" i="1" dirty="0">
                 <a:solidFill>
                   <a:srgbClr val="5C6690"/>
                 </a:solidFill>
@@ -13556,9 +12689,9 @@
                 <a:ea typeface="Calibri" pitchFamily="34" charset="-122"/>
                 <a:cs typeface="Calibri" pitchFamily="34" charset="-120"/>
               </a:rPr>
-              <a:t>быть, являться</a:t>
-            </a:r>
-            <a:endParaRPr lang="en-US" sz="1200" dirty="0"/>
+              <a:t>иметь</a:t>
+            </a:r>
+            <a:endParaRPr lang="en-US" sz="1150" dirty="0"/>
           </a:p>
         </p:txBody>
       </p:sp>
@@ -13570,8 +12703,8 @@
         </p:nvSpPr>
         <p:spPr>
           <a:xfrm>
-            <a:off x="777240" y="2404872"/>
-            <a:ext cx="4928616" cy="1417320"/>
+            <a:off x="731520" y="2432304"/>
+            <a:ext cx="2926080" cy="1847088"/>
           </a:xfrm>
           <a:prstGeom prst="rect">
             <a:avLst/>
@@ -13590,8 +12723,8 @@
         </p:nvSpPr>
         <p:spPr>
           <a:xfrm>
-            <a:off x="3862426" y="2459736"/>
-            <a:ext cx="0" cy="1307592"/>
+            <a:off x="2615184" y="2487168"/>
+            <a:ext cx="0" cy="1737360"/>
           </a:xfrm>
           <a:prstGeom prst="line">
             <a:avLst/>
@@ -13613,8 +12746,8 @@
         </p:nvSpPr>
         <p:spPr>
           <a:xfrm>
-            <a:off x="868680" y="2404872"/>
-            <a:ext cx="2810866" cy="236220"/>
+            <a:off x="822960" y="2432304"/>
+            <a:ext cx="1609344" cy="307848"/>
           </a:xfrm>
           <a:prstGeom prst="rect">
             <a:avLst/>
@@ -13652,8 +12785,8 @@
         </p:nvSpPr>
         <p:spPr>
           <a:xfrm>
-            <a:off x="3990442" y="2404872"/>
-            <a:ext cx="1751990" cy="236220"/>
+            <a:off x="2743200" y="2432304"/>
+            <a:ext cx="950976" cy="307848"/>
           </a:xfrm>
           <a:prstGeom prst="rect">
             <a:avLst/>
@@ -13677,7 +12810,7 @@
                 <a:ea typeface="Calibri" pitchFamily="34" charset="-122"/>
                 <a:cs typeface="Calibri" pitchFamily="34" charset="-120"/>
               </a:rPr>
-              <a:t>soy</a:t>
+              <a:t>tengo</a:t>
             </a:r>
             <a:endParaRPr lang="en-US" sz="1100" dirty="0"/>
           </a:p>
@@ -13691,8 +12824,8 @@
         </p:nvSpPr>
         <p:spPr>
           <a:xfrm>
-            <a:off x="832104" y="2641092"/>
-            <a:ext cx="4818888" cy="0"/>
+            <a:off x="786384" y="2740152"/>
+            <a:ext cx="2816352" cy="0"/>
           </a:xfrm>
           <a:prstGeom prst="line">
             <a:avLst/>
@@ -13714,8 +12847,8 @@
         </p:nvSpPr>
         <p:spPr>
           <a:xfrm>
-            <a:off x="868680" y="2641092"/>
-            <a:ext cx="2810866" cy="236220"/>
+            <a:off x="822960" y="2740152"/>
+            <a:ext cx="1609344" cy="307848"/>
           </a:xfrm>
           <a:prstGeom prst="rect">
             <a:avLst/>
@@ -13753,8 +12886,8 @@
         </p:nvSpPr>
         <p:spPr>
           <a:xfrm>
-            <a:off x="3990442" y="2641092"/>
-            <a:ext cx="1751990" cy="236220"/>
+            <a:off x="2743200" y="2740152"/>
+            <a:ext cx="950976" cy="307848"/>
           </a:xfrm>
           <a:prstGeom prst="rect">
             <a:avLst/>
@@ -13778,7 +12911,7 @@
                 <a:ea typeface="Calibri" pitchFamily="34" charset="-122"/>
                 <a:cs typeface="Calibri" pitchFamily="34" charset="-120"/>
               </a:rPr>
-              <a:t>eres</a:t>
+              <a:t>tienes</a:t>
             </a:r>
             <a:endParaRPr lang="en-US" sz="1100" dirty="0"/>
           </a:p>
@@ -13792,8 +12925,8 @@
         </p:nvSpPr>
         <p:spPr>
           <a:xfrm>
-            <a:off x="832104" y="2877312"/>
-            <a:ext cx="4818888" cy="0"/>
+            <a:off x="786384" y="3048000"/>
+            <a:ext cx="2816352" cy="0"/>
           </a:xfrm>
           <a:prstGeom prst="line">
             <a:avLst/>
@@ -13815,8 +12948,8 @@
         </p:nvSpPr>
         <p:spPr>
           <a:xfrm>
-            <a:off x="868680" y="2877312"/>
-            <a:ext cx="2810866" cy="236220"/>
+            <a:off x="822960" y="3048000"/>
+            <a:ext cx="1609344" cy="307848"/>
           </a:xfrm>
           <a:prstGeom prst="rect">
             <a:avLst/>
@@ -13854,8 +12987,8 @@
         </p:nvSpPr>
         <p:spPr>
           <a:xfrm>
-            <a:off x="3990442" y="2877312"/>
-            <a:ext cx="1751990" cy="236220"/>
+            <a:off x="2743200" y="3048000"/>
+            <a:ext cx="950976" cy="307848"/>
           </a:xfrm>
           <a:prstGeom prst="rect">
             <a:avLst/>
@@ -13879,7 +13012,7 @@
                 <a:ea typeface="Calibri" pitchFamily="34" charset="-122"/>
                 <a:cs typeface="Calibri" pitchFamily="34" charset="-120"/>
               </a:rPr>
-              <a:t>es</a:t>
+              <a:t>tiene</a:t>
             </a:r>
             <a:endParaRPr lang="en-US" sz="1100" dirty="0"/>
           </a:p>
@@ -13893,8 +13026,8 @@
         </p:nvSpPr>
         <p:spPr>
           <a:xfrm>
-            <a:off x="832104" y="3113532"/>
-            <a:ext cx="4818888" cy="0"/>
+            <a:off x="786384" y="3355848"/>
+            <a:ext cx="2816352" cy="0"/>
           </a:xfrm>
           <a:prstGeom prst="line">
             <a:avLst/>
@@ -13916,8 +13049,8 @@
         </p:nvSpPr>
         <p:spPr>
           <a:xfrm>
-            <a:off x="868680" y="3113532"/>
-            <a:ext cx="2810866" cy="236220"/>
+            <a:off x="822960" y="3355848"/>
+            <a:ext cx="1609344" cy="307848"/>
           </a:xfrm>
           <a:prstGeom prst="rect">
             <a:avLst/>
@@ -13955,8 +13088,8 @@
         </p:nvSpPr>
         <p:spPr>
           <a:xfrm>
-            <a:off x="3990442" y="3113532"/>
-            <a:ext cx="1751990" cy="236220"/>
+            <a:off x="2743200" y="3355848"/>
+            <a:ext cx="950976" cy="307848"/>
           </a:xfrm>
           <a:prstGeom prst="rect">
             <a:avLst/>
@@ -13980,7 +13113,7 @@
                 <a:ea typeface="Calibri" pitchFamily="34" charset="-122"/>
                 <a:cs typeface="Calibri" pitchFamily="34" charset="-120"/>
               </a:rPr>
-              <a:t>somos</a:t>
+              <a:t>tenemos</a:t>
             </a:r>
             <a:endParaRPr lang="en-US" sz="1100" dirty="0"/>
           </a:p>
@@ -13994,8 +13127,8 @@
         </p:nvSpPr>
         <p:spPr>
           <a:xfrm>
-            <a:off x="832104" y="3349752"/>
-            <a:ext cx="4818888" cy="0"/>
+            <a:off x="786384" y="3663696"/>
+            <a:ext cx="2816352" cy="0"/>
           </a:xfrm>
           <a:prstGeom prst="line">
             <a:avLst/>
@@ -14017,8 +13150,8 @@
         </p:nvSpPr>
         <p:spPr>
           <a:xfrm>
-            <a:off x="868680" y="3349752"/>
-            <a:ext cx="2810866" cy="236220"/>
+            <a:off x="822960" y="3663696"/>
+            <a:ext cx="1609344" cy="307848"/>
           </a:xfrm>
           <a:prstGeom prst="rect">
             <a:avLst/>
@@ -14056,8 +13189,8 @@
         </p:nvSpPr>
         <p:spPr>
           <a:xfrm>
-            <a:off x="3990442" y="3349752"/>
-            <a:ext cx="1751990" cy="236220"/>
+            <a:off x="2743200" y="3663696"/>
+            <a:ext cx="950976" cy="307848"/>
           </a:xfrm>
           <a:prstGeom prst="rect">
             <a:avLst/>
@@ -14081,7 +13214,7 @@
                 <a:ea typeface="Calibri" pitchFamily="34" charset="-122"/>
                 <a:cs typeface="Calibri" pitchFamily="34" charset="-120"/>
               </a:rPr>
-              <a:t>sois</a:t>
+              <a:t>tenéis</a:t>
             </a:r>
             <a:endParaRPr lang="en-US" sz="1100" dirty="0"/>
           </a:p>
@@ -14095,8 +13228,8 @@
         </p:nvSpPr>
         <p:spPr>
           <a:xfrm>
-            <a:off x="832104" y="3585972"/>
-            <a:ext cx="4818888" cy="0"/>
+            <a:off x="786384" y="3971544"/>
+            <a:ext cx="2816352" cy="0"/>
           </a:xfrm>
           <a:prstGeom prst="line">
             <a:avLst/>
@@ -14118,8 +13251,8 @@
         </p:nvSpPr>
         <p:spPr>
           <a:xfrm>
-            <a:off x="868680" y="3585972"/>
-            <a:ext cx="2810866" cy="236220"/>
+            <a:off x="822960" y="3971544"/>
+            <a:ext cx="1609344" cy="307848"/>
           </a:xfrm>
           <a:prstGeom prst="rect">
             <a:avLst/>
@@ -14157,8 +13290,8 @@
         </p:nvSpPr>
         <p:spPr>
           <a:xfrm>
-            <a:off x="3990442" y="3585972"/>
-            <a:ext cx="1751990" cy="236220"/>
+            <a:off x="2743200" y="3971544"/>
+            <a:ext cx="950976" cy="307848"/>
           </a:xfrm>
           <a:prstGeom prst="rect">
             <a:avLst/>
@@ -14182,7 +13315,7 @@
                 <a:ea typeface="Calibri" pitchFamily="34" charset="-122"/>
                 <a:cs typeface="Calibri" pitchFamily="34" charset="-120"/>
               </a:rPr>
-              <a:t>son</a:t>
+              <a:t>tienen</a:t>
             </a:r>
             <a:endParaRPr lang="en-US" sz="1100" dirty="0"/>
           </a:p>
@@ -14190,56 +13323,14 @@
       </p:sp>
       <p:sp>
         <p:nvSpPr>
-          <p:cNvPr id="29" name="Text 27"/>
-          <p:cNvSpPr/>
-          <p:nvPr/>
-        </p:nvSpPr>
-        <p:spPr>
-          <a:xfrm>
-            <a:off x="777240" y="3895344"/>
-            <a:ext cx="4928616" cy="457200"/>
-          </a:xfrm>
-          <a:prstGeom prst="rect">
-            <a:avLst/>
-          </a:prstGeom>
-          <a:noFill/>
-          <a:ln/>
-        </p:spPr>
-        <p:txBody>
-          <a:bodyPr wrap="square" lIns="0" tIns="0" rIns="0" bIns="0" rtlCol="0" anchor="ctr"/>
-          <a:lstStyle/>
-          <a:p>
-            <a:pPr indent="0" marL="0">
-              <a:lnSpc>
-                <a:spcPct val="105000"/>
-              </a:lnSpc>
-              <a:buNone/>
-            </a:pPr>
-            <a:r>
-              <a:rPr lang="en-US" sz="1050" i="1" dirty="0">
-                <a:solidFill>
-                  <a:srgbClr val="5C6690"/>
-                </a:solidFill>
-                <a:latin typeface="Calibri" pitchFamily="34" charset="0"/>
-                <a:ea typeface="Calibri" pitchFamily="34" charset="-122"/>
-                <a:cs typeface="Calibri" pitchFamily="34" charset="-120"/>
-              </a:rPr>
-              <a:t>Se usa para: имя, семья, происхождение, профессия, постоянные качества</a:t>
-            </a:r>
-            <a:endParaRPr lang="en-US" sz="1050" dirty="0"/>
-          </a:p>
-        </p:txBody>
-      </p:sp>
-      <p:sp>
-        <p:nvSpPr>
-          <p:cNvPr id="30" name="Shape 28"/>
-          <p:cNvSpPr/>
-          <p:nvPr/>
-        </p:nvSpPr>
-        <p:spPr>
-          <a:xfrm>
-            <a:off x="6254496" y="1536192"/>
-            <a:ext cx="5385816" cy="2880360"/>
+          <p:cNvPr id="29" name="Shape 27"/>
+          <p:cNvSpPr/>
+          <p:nvPr/>
+        </p:nvSpPr>
+        <p:spPr>
+          <a:xfrm>
+            <a:off x="4114800" y="1536192"/>
+            <a:ext cx="3625596" cy="2880360"/>
           </a:xfrm>
           <a:prstGeom prst="roundRect">
             <a:avLst>
@@ -14247,7 +13338,7 @@
             </a:avLst>
           </a:prstGeom>
           <a:solidFill>
-            <a:srgbClr val="FDECEC"/>
+            <a:srgbClr val="EFE9FB"/>
           </a:solidFill>
           <a:ln/>
           <a:effectLst>
@@ -14261,13 +13352,13 @@
       </p:sp>
       <p:sp>
         <p:nvSpPr>
-          <p:cNvPr id="31" name="Shape 29"/>
-          <p:cNvSpPr/>
-          <p:nvPr/>
-        </p:nvSpPr>
-        <p:spPr>
-          <a:xfrm>
-            <a:off x="6437376" y="1700784"/>
+          <p:cNvPr id="30" name="Shape 28"/>
+          <p:cNvSpPr/>
+          <p:nvPr/>
+        </p:nvSpPr>
+        <p:spPr>
+          <a:xfrm>
+            <a:off x="4297680" y="1700784"/>
             <a:ext cx="502920" cy="502920"/>
           </a:xfrm>
           <a:prstGeom prst="ellipse">
@@ -14281,50 +13372,50 @@
       </p:sp>
       <p:sp>
         <p:nvSpPr>
+          <p:cNvPr id="31" name="Text 29"/>
+          <p:cNvSpPr/>
+          <p:nvPr/>
+        </p:nvSpPr>
+        <p:spPr>
+          <a:xfrm>
+            <a:off x="4297680" y="1700784"/>
+            <a:ext cx="502920" cy="502920"/>
+          </a:xfrm>
+          <a:prstGeom prst="rect">
+            <a:avLst/>
+          </a:prstGeom>
+          <a:noFill/>
+          <a:ln/>
+        </p:spPr>
+        <p:txBody>
+          <a:bodyPr wrap="square" lIns="0" tIns="0" rIns="0" bIns="0" rtlCol="0" anchor="ctr"/>
+          <a:lstStyle/>
+          <a:p>
+            <a:pPr algn="ctr" indent="0" marL="0">
+              <a:buNone/>
+            </a:pPr>
+            <a:r>
+              <a:rPr lang="en-US" sz="2800" dirty="0">
+                <a:solidFill>
+                  <a:srgbClr val="000000"/>
+                </a:solidFill>
+              </a:rPr>
+              <a:t>✨</a:t>
+            </a:r>
+            <a:endParaRPr lang="en-US" sz="2800" dirty="0"/>
+          </a:p>
+        </p:txBody>
+      </p:sp>
+      <p:sp>
+        <p:nvSpPr>
           <p:cNvPr id="32" name="Text 30"/>
           <p:cNvSpPr/>
           <p:nvPr/>
         </p:nvSpPr>
         <p:spPr>
           <a:xfrm>
-            <a:off x="6437376" y="1700784"/>
-            <a:ext cx="502920" cy="502920"/>
-          </a:xfrm>
-          <a:prstGeom prst="rect">
-            <a:avLst/>
-          </a:prstGeom>
-          <a:noFill/>
-          <a:ln/>
-        </p:spPr>
-        <p:txBody>
-          <a:bodyPr wrap="square" lIns="0" tIns="0" rIns="0" bIns="0" rtlCol="0" anchor="ctr"/>
-          <a:lstStyle/>
-          <a:p>
-            <a:pPr algn="ctr" indent="0" marL="0">
-              <a:buNone/>
-            </a:pPr>
-            <a:r>
-              <a:rPr lang="en-US" sz="2800" dirty="0">
-                <a:solidFill>
-                  <a:srgbClr val="000000"/>
-                </a:solidFill>
-              </a:rPr>
-              <a:t>📍</a:t>
-            </a:r>
-            <a:endParaRPr lang="en-US" sz="2800" dirty="0"/>
-          </a:p>
-        </p:txBody>
-      </p:sp>
-      <p:sp>
-        <p:nvSpPr>
-          <p:cNvPr id="33" name="Text 31"/>
-          <p:cNvSpPr/>
-          <p:nvPr/>
-        </p:nvSpPr>
-        <p:spPr>
-          <a:xfrm>
-            <a:off x="7086600" y="1664208"/>
-            <a:ext cx="4379976" cy="384048"/>
+            <a:off x="4946904" y="1664208"/>
+            <a:ext cx="2619756" cy="384048"/>
           </a:xfrm>
           <a:prstGeom prst="rect">
             <a:avLst/>
@@ -14348,7 +13439,7 @@
                 <a:ea typeface="Cambria" pitchFamily="34" charset="-122"/>
                 <a:cs typeface="Cambria" pitchFamily="34" charset="-120"/>
               </a:rPr>
-              <a:t>ESTAR</a:t>
+              <a:t>SER</a:t>
             </a:r>
             <a:endParaRPr lang="en-US" sz="2200" dirty="0"/>
           </a:p>
@@ -14356,14 +13447,14 @@
       </p:sp>
       <p:sp>
         <p:nvSpPr>
-          <p:cNvPr id="34" name="Text 32"/>
-          <p:cNvSpPr/>
-          <p:nvPr/>
-        </p:nvSpPr>
-        <p:spPr>
-          <a:xfrm>
-            <a:off x="7086600" y="2048256"/>
-            <a:ext cx="4379976" cy="274320"/>
+          <p:cNvPr id="33" name="Text 31"/>
+          <p:cNvSpPr/>
+          <p:nvPr/>
+        </p:nvSpPr>
+        <p:spPr>
+          <a:xfrm>
+            <a:off x="4946904" y="2048256"/>
+            <a:ext cx="2619756" cy="274320"/>
           </a:xfrm>
           <a:prstGeom prst="rect">
             <a:avLst/>
@@ -14387,7 +13478,7 @@
                 <a:ea typeface="Calibri" pitchFamily="34" charset="-122"/>
                 <a:cs typeface="Calibri" pitchFamily="34" charset="-120"/>
               </a:rPr>
-              <a:t>быть, находиться</a:t>
+              <a:t>быть, являться</a:t>
             </a:r>
             <a:endParaRPr lang="en-US" sz="1200" dirty="0"/>
           </a:p>
@@ -14395,14 +13486,14 @@
       </p:sp>
       <p:sp>
         <p:nvSpPr>
-          <p:cNvPr id="35" name="Shape 33"/>
-          <p:cNvSpPr/>
-          <p:nvPr/>
-        </p:nvSpPr>
-        <p:spPr>
-          <a:xfrm>
-            <a:off x="6483096" y="2404872"/>
-            <a:ext cx="4928616" cy="1417320"/>
+          <p:cNvPr id="34" name="Shape 32"/>
+          <p:cNvSpPr/>
+          <p:nvPr/>
+        </p:nvSpPr>
+        <p:spPr>
+          <a:xfrm>
+            <a:off x="4343400" y="2404872"/>
+            <a:ext cx="3168396" cy="1417320"/>
           </a:xfrm>
           <a:prstGeom prst="rect">
             <a:avLst/>
@@ -14415,13 +13506,13 @@
       </p:sp>
       <p:sp>
         <p:nvSpPr>
-          <p:cNvPr id="36" name="Shape 34"/>
-          <p:cNvSpPr/>
-          <p:nvPr/>
-        </p:nvSpPr>
-        <p:spPr>
-          <a:xfrm>
-            <a:off x="9568282" y="2459736"/>
+          <p:cNvPr id="35" name="Shape 33"/>
+          <p:cNvSpPr/>
+          <p:nvPr/>
+        </p:nvSpPr>
+        <p:spPr>
+          <a:xfrm>
+            <a:off x="6372454" y="2459736"/>
             <a:ext cx="0" cy="1307592"/>
           </a:xfrm>
           <a:prstGeom prst="line">
@@ -14438,53 +13529,53 @@
       </p:sp>
       <p:sp>
         <p:nvSpPr>
+          <p:cNvPr id="36" name="Text 34"/>
+          <p:cNvSpPr/>
+          <p:nvPr/>
+        </p:nvSpPr>
+        <p:spPr>
+          <a:xfrm>
+            <a:off x="4434840" y="2404872"/>
+            <a:ext cx="1754734" cy="236220"/>
+          </a:xfrm>
+          <a:prstGeom prst="rect">
+            <a:avLst/>
+          </a:prstGeom>
+          <a:noFill/>
+          <a:ln/>
+        </p:spPr>
+        <p:txBody>
+          <a:bodyPr wrap="square" lIns="0" tIns="0" rIns="0" bIns="0" rtlCol="0" anchor="ctr"/>
+          <a:lstStyle/>
+          <a:p>
+            <a:pPr algn="r" indent="0" marL="0">
+              <a:buNone/>
+            </a:pPr>
+            <a:r>
+              <a:rPr lang="en-US" sz="1050" b="1" dirty="0">
+                <a:solidFill>
+                  <a:srgbClr val="2F3C7E"/>
+                </a:solidFill>
+                <a:latin typeface="Calibri" pitchFamily="34" charset="0"/>
+                <a:ea typeface="Calibri" pitchFamily="34" charset="-122"/>
+                <a:cs typeface="Calibri" pitchFamily="34" charset="-120"/>
+              </a:rPr>
+              <a:t>yo</a:t>
+            </a:r>
+            <a:endParaRPr lang="en-US" sz="1050" dirty="0"/>
+          </a:p>
+        </p:txBody>
+      </p:sp>
+      <p:sp>
+        <p:nvSpPr>
           <p:cNvPr id="37" name="Text 35"/>
           <p:cNvSpPr/>
           <p:nvPr/>
         </p:nvSpPr>
         <p:spPr>
           <a:xfrm>
-            <a:off x="6574536" y="2404872"/>
-            <a:ext cx="2810866" cy="236220"/>
-          </a:xfrm>
-          <a:prstGeom prst="rect">
-            <a:avLst/>
-          </a:prstGeom>
-          <a:noFill/>
-          <a:ln/>
-        </p:spPr>
-        <p:txBody>
-          <a:bodyPr wrap="square" lIns="0" tIns="0" rIns="0" bIns="0" rtlCol="0" anchor="ctr"/>
-          <a:lstStyle/>
-          <a:p>
-            <a:pPr algn="r" indent="0" marL="0">
-              <a:buNone/>
-            </a:pPr>
-            <a:r>
-              <a:rPr lang="en-US" sz="1050" b="1" dirty="0">
-                <a:solidFill>
-                  <a:srgbClr val="2F3C7E"/>
-                </a:solidFill>
-                <a:latin typeface="Calibri" pitchFamily="34" charset="0"/>
-                <a:ea typeface="Calibri" pitchFamily="34" charset="-122"/>
-                <a:cs typeface="Calibri" pitchFamily="34" charset="-120"/>
-              </a:rPr>
-              <a:t>yo</a:t>
-            </a:r>
-            <a:endParaRPr lang="en-US" sz="1050" dirty="0"/>
-          </a:p>
-        </p:txBody>
-      </p:sp>
-      <p:sp>
-        <p:nvSpPr>
-          <p:cNvPr id="38" name="Text 36"/>
-          <p:cNvSpPr/>
-          <p:nvPr/>
-        </p:nvSpPr>
-        <p:spPr>
-          <a:xfrm>
-            <a:off x="9696298" y="2404872"/>
-            <a:ext cx="1751990" cy="236220"/>
+            <a:off x="6500470" y="2404872"/>
+            <a:ext cx="1047902" cy="236220"/>
           </a:xfrm>
           <a:prstGeom prst="rect">
             <a:avLst/>
@@ -14508,7 +13599,7 @@
                 <a:ea typeface="Calibri" pitchFamily="34" charset="-122"/>
                 <a:cs typeface="Calibri" pitchFamily="34" charset="-120"/>
               </a:rPr>
-              <a:t>estoy</a:t>
+              <a:t>soy</a:t>
             </a:r>
             <a:endParaRPr lang="en-US" sz="1100" dirty="0"/>
           </a:p>
@@ -14516,14 +13607,14 @@
       </p:sp>
       <p:sp>
         <p:nvSpPr>
-          <p:cNvPr id="39" name="Shape 37"/>
-          <p:cNvSpPr/>
-          <p:nvPr/>
-        </p:nvSpPr>
-        <p:spPr>
-          <a:xfrm>
-            <a:off x="6537960" y="2641092"/>
-            <a:ext cx="4818888" cy="0"/>
+          <p:cNvPr id="38" name="Shape 36"/>
+          <p:cNvSpPr/>
+          <p:nvPr/>
+        </p:nvSpPr>
+        <p:spPr>
+          <a:xfrm>
+            <a:off x="4398264" y="2641092"/>
+            <a:ext cx="3058668" cy="0"/>
           </a:xfrm>
           <a:prstGeom prst="line">
             <a:avLst/>
@@ -14539,53 +13630,53 @@
       </p:sp>
       <p:sp>
         <p:nvSpPr>
+          <p:cNvPr id="39" name="Text 37"/>
+          <p:cNvSpPr/>
+          <p:nvPr/>
+        </p:nvSpPr>
+        <p:spPr>
+          <a:xfrm>
+            <a:off x="4434840" y="2641092"/>
+            <a:ext cx="1754734" cy="236220"/>
+          </a:xfrm>
+          <a:prstGeom prst="rect">
+            <a:avLst/>
+          </a:prstGeom>
+          <a:noFill/>
+          <a:ln/>
+        </p:spPr>
+        <p:txBody>
+          <a:bodyPr wrap="square" lIns="0" tIns="0" rIns="0" bIns="0" rtlCol="0" anchor="ctr"/>
+          <a:lstStyle/>
+          <a:p>
+            <a:pPr algn="r" indent="0" marL="0">
+              <a:buNone/>
+            </a:pPr>
+            <a:r>
+              <a:rPr lang="en-US" sz="1050" b="1" dirty="0">
+                <a:solidFill>
+                  <a:srgbClr val="2F3C7E"/>
+                </a:solidFill>
+                <a:latin typeface="Calibri" pitchFamily="34" charset="0"/>
+                <a:ea typeface="Calibri" pitchFamily="34" charset="-122"/>
+                <a:cs typeface="Calibri" pitchFamily="34" charset="-120"/>
+              </a:rPr>
+              <a:t>tú</a:t>
+            </a:r>
+            <a:endParaRPr lang="en-US" sz="1050" dirty="0"/>
+          </a:p>
+        </p:txBody>
+      </p:sp>
+      <p:sp>
+        <p:nvSpPr>
           <p:cNvPr id="40" name="Text 38"/>
           <p:cNvSpPr/>
           <p:nvPr/>
         </p:nvSpPr>
         <p:spPr>
           <a:xfrm>
-            <a:off x="6574536" y="2641092"/>
-            <a:ext cx="2810866" cy="236220"/>
-          </a:xfrm>
-          <a:prstGeom prst="rect">
-            <a:avLst/>
-          </a:prstGeom>
-          <a:noFill/>
-          <a:ln/>
-        </p:spPr>
-        <p:txBody>
-          <a:bodyPr wrap="square" lIns="0" tIns="0" rIns="0" bIns="0" rtlCol="0" anchor="ctr"/>
-          <a:lstStyle/>
-          <a:p>
-            <a:pPr algn="r" indent="0" marL="0">
-              <a:buNone/>
-            </a:pPr>
-            <a:r>
-              <a:rPr lang="en-US" sz="1050" b="1" dirty="0">
-                <a:solidFill>
-                  <a:srgbClr val="2F3C7E"/>
-                </a:solidFill>
-                <a:latin typeface="Calibri" pitchFamily="34" charset="0"/>
-                <a:ea typeface="Calibri" pitchFamily="34" charset="-122"/>
-                <a:cs typeface="Calibri" pitchFamily="34" charset="-120"/>
-              </a:rPr>
-              <a:t>tú</a:t>
-            </a:r>
-            <a:endParaRPr lang="en-US" sz="1050" dirty="0"/>
-          </a:p>
-        </p:txBody>
-      </p:sp>
-      <p:sp>
-        <p:nvSpPr>
-          <p:cNvPr id="41" name="Text 39"/>
-          <p:cNvSpPr/>
-          <p:nvPr/>
-        </p:nvSpPr>
-        <p:spPr>
-          <a:xfrm>
-            <a:off x="9696298" y="2641092"/>
-            <a:ext cx="1751990" cy="236220"/>
+            <a:off x="6500470" y="2641092"/>
+            <a:ext cx="1047902" cy="236220"/>
           </a:xfrm>
           <a:prstGeom prst="rect">
             <a:avLst/>
@@ -14609,7 +13700,7 @@
                 <a:ea typeface="Calibri" pitchFamily="34" charset="-122"/>
                 <a:cs typeface="Calibri" pitchFamily="34" charset="-120"/>
               </a:rPr>
-              <a:t>estás</a:t>
+              <a:t>eres</a:t>
             </a:r>
             <a:endParaRPr lang="en-US" sz="1100" dirty="0"/>
           </a:p>
@@ -14617,14 +13708,14 @@
       </p:sp>
       <p:sp>
         <p:nvSpPr>
-          <p:cNvPr id="42" name="Shape 40"/>
-          <p:cNvSpPr/>
-          <p:nvPr/>
-        </p:nvSpPr>
-        <p:spPr>
-          <a:xfrm>
-            <a:off x="6537960" y="2877312"/>
-            <a:ext cx="4818888" cy="0"/>
+          <p:cNvPr id="41" name="Shape 39"/>
+          <p:cNvSpPr/>
+          <p:nvPr/>
+        </p:nvSpPr>
+        <p:spPr>
+          <a:xfrm>
+            <a:off x="4398264" y="2877312"/>
+            <a:ext cx="3058668" cy="0"/>
           </a:xfrm>
           <a:prstGeom prst="line">
             <a:avLst/>
@@ -14640,53 +13731,53 @@
       </p:sp>
       <p:sp>
         <p:nvSpPr>
+          <p:cNvPr id="42" name="Text 40"/>
+          <p:cNvSpPr/>
+          <p:nvPr/>
+        </p:nvSpPr>
+        <p:spPr>
+          <a:xfrm>
+            <a:off x="4434840" y="2877312"/>
+            <a:ext cx="1754734" cy="236220"/>
+          </a:xfrm>
+          <a:prstGeom prst="rect">
+            <a:avLst/>
+          </a:prstGeom>
+          <a:noFill/>
+          <a:ln/>
+        </p:spPr>
+        <p:txBody>
+          <a:bodyPr wrap="square" lIns="0" tIns="0" rIns="0" bIns="0" rtlCol="0" anchor="ctr"/>
+          <a:lstStyle/>
+          <a:p>
+            <a:pPr algn="r" indent="0" marL="0">
+              <a:buNone/>
+            </a:pPr>
+            <a:r>
+              <a:rPr lang="en-US" sz="1050" b="1" dirty="0">
+                <a:solidFill>
+                  <a:srgbClr val="2F3C7E"/>
+                </a:solidFill>
+                <a:latin typeface="Calibri" pitchFamily="34" charset="0"/>
+                <a:ea typeface="Calibri" pitchFamily="34" charset="-122"/>
+                <a:cs typeface="Calibri" pitchFamily="34" charset="-120"/>
+              </a:rPr>
+              <a:t>él/ella/Ud.</a:t>
+            </a:r>
+            <a:endParaRPr lang="en-US" sz="1050" dirty="0"/>
+          </a:p>
+        </p:txBody>
+      </p:sp>
+      <p:sp>
+        <p:nvSpPr>
           <p:cNvPr id="43" name="Text 41"/>
           <p:cNvSpPr/>
           <p:nvPr/>
         </p:nvSpPr>
         <p:spPr>
           <a:xfrm>
-            <a:off x="6574536" y="2877312"/>
-            <a:ext cx="2810866" cy="236220"/>
-          </a:xfrm>
-          <a:prstGeom prst="rect">
-            <a:avLst/>
-          </a:prstGeom>
-          <a:noFill/>
-          <a:ln/>
-        </p:spPr>
-        <p:txBody>
-          <a:bodyPr wrap="square" lIns="0" tIns="0" rIns="0" bIns="0" rtlCol="0" anchor="ctr"/>
-          <a:lstStyle/>
-          <a:p>
-            <a:pPr algn="r" indent="0" marL="0">
-              <a:buNone/>
-            </a:pPr>
-            <a:r>
-              <a:rPr lang="en-US" sz="1050" b="1" dirty="0">
-                <a:solidFill>
-                  <a:srgbClr val="2F3C7E"/>
-                </a:solidFill>
-                <a:latin typeface="Calibri" pitchFamily="34" charset="0"/>
-                <a:ea typeface="Calibri" pitchFamily="34" charset="-122"/>
-                <a:cs typeface="Calibri" pitchFamily="34" charset="-120"/>
-              </a:rPr>
-              <a:t>él/ella/Ud.</a:t>
-            </a:r>
-            <a:endParaRPr lang="en-US" sz="1050" dirty="0"/>
-          </a:p>
-        </p:txBody>
-      </p:sp>
-      <p:sp>
-        <p:nvSpPr>
-          <p:cNvPr id="44" name="Text 42"/>
-          <p:cNvSpPr/>
-          <p:nvPr/>
-        </p:nvSpPr>
-        <p:spPr>
-          <a:xfrm>
-            <a:off x="9696298" y="2877312"/>
-            <a:ext cx="1751990" cy="236220"/>
+            <a:off x="6500470" y="2877312"/>
+            <a:ext cx="1047902" cy="236220"/>
           </a:xfrm>
           <a:prstGeom prst="rect">
             <a:avLst/>
@@ -14710,7 +13801,7 @@
                 <a:ea typeface="Calibri" pitchFamily="34" charset="-122"/>
                 <a:cs typeface="Calibri" pitchFamily="34" charset="-120"/>
               </a:rPr>
-              <a:t>está</a:t>
+              <a:t>es</a:t>
             </a:r>
             <a:endParaRPr lang="en-US" sz="1100" dirty="0"/>
           </a:p>
@@ -14718,14 +13809,14 @@
       </p:sp>
       <p:sp>
         <p:nvSpPr>
-          <p:cNvPr id="45" name="Shape 43"/>
-          <p:cNvSpPr/>
-          <p:nvPr/>
-        </p:nvSpPr>
-        <p:spPr>
-          <a:xfrm>
-            <a:off x="6537960" y="3113532"/>
-            <a:ext cx="4818888" cy="0"/>
+          <p:cNvPr id="44" name="Shape 42"/>
+          <p:cNvSpPr/>
+          <p:nvPr/>
+        </p:nvSpPr>
+        <p:spPr>
+          <a:xfrm>
+            <a:off x="4398264" y="3113532"/>
+            <a:ext cx="3058668" cy="0"/>
           </a:xfrm>
           <a:prstGeom prst="line">
             <a:avLst/>
@@ -14741,53 +13832,53 @@
       </p:sp>
       <p:sp>
         <p:nvSpPr>
+          <p:cNvPr id="45" name="Text 43"/>
+          <p:cNvSpPr/>
+          <p:nvPr/>
+        </p:nvSpPr>
+        <p:spPr>
+          <a:xfrm>
+            <a:off x="4434840" y="3113532"/>
+            <a:ext cx="1754734" cy="236220"/>
+          </a:xfrm>
+          <a:prstGeom prst="rect">
+            <a:avLst/>
+          </a:prstGeom>
+          <a:noFill/>
+          <a:ln/>
+        </p:spPr>
+        <p:txBody>
+          <a:bodyPr wrap="square" lIns="0" tIns="0" rIns="0" bIns="0" rtlCol="0" anchor="ctr"/>
+          <a:lstStyle/>
+          <a:p>
+            <a:pPr algn="r" indent="0" marL="0">
+              <a:buNone/>
+            </a:pPr>
+            <a:r>
+              <a:rPr lang="en-US" sz="1050" b="1" dirty="0">
+                <a:solidFill>
+                  <a:srgbClr val="2F3C7E"/>
+                </a:solidFill>
+                <a:latin typeface="Calibri" pitchFamily="34" charset="0"/>
+                <a:ea typeface="Calibri" pitchFamily="34" charset="-122"/>
+                <a:cs typeface="Calibri" pitchFamily="34" charset="-120"/>
+              </a:rPr>
+              <a:t>nosotros/nosotras</a:t>
+            </a:r>
+            <a:endParaRPr lang="en-US" sz="1050" dirty="0"/>
+          </a:p>
+        </p:txBody>
+      </p:sp>
+      <p:sp>
+        <p:nvSpPr>
           <p:cNvPr id="46" name="Text 44"/>
           <p:cNvSpPr/>
           <p:nvPr/>
         </p:nvSpPr>
         <p:spPr>
           <a:xfrm>
-            <a:off x="6574536" y="3113532"/>
-            <a:ext cx="2810866" cy="236220"/>
-          </a:xfrm>
-          <a:prstGeom prst="rect">
-            <a:avLst/>
-          </a:prstGeom>
-          <a:noFill/>
-          <a:ln/>
-        </p:spPr>
-        <p:txBody>
-          <a:bodyPr wrap="square" lIns="0" tIns="0" rIns="0" bIns="0" rtlCol="0" anchor="ctr"/>
-          <a:lstStyle/>
-          <a:p>
-            <a:pPr algn="r" indent="0" marL="0">
-              <a:buNone/>
-            </a:pPr>
-            <a:r>
-              <a:rPr lang="en-US" sz="1050" b="1" dirty="0">
-                <a:solidFill>
-                  <a:srgbClr val="2F3C7E"/>
-                </a:solidFill>
-                <a:latin typeface="Calibri" pitchFamily="34" charset="0"/>
-                <a:ea typeface="Calibri" pitchFamily="34" charset="-122"/>
-                <a:cs typeface="Calibri" pitchFamily="34" charset="-120"/>
-              </a:rPr>
-              <a:t>nosotros/nosotras</a:t>
-            </a:r>
-            <a:endParaRPr lang="en-US" sz="1050" dirty="0"/>
-          </a:p>
-        </p:txBody>
-      </p:sp>
-      <p:sp>
-        <p:nvSpPr>
-          <p:cNvPr id="47" name="Text 45"/>
-          <p:cNvSpPr/>
-          <p:nvPr/>
-        </p:nvSpPr>
-        <p:spPr>
-          <a:xfrm>
-            <a:off x="9696298" y="3113532"/>
-            <a:ext cx="1751990" cy="236220"/>
+            <a:off x="6500470" y="3113532"/>
+            <a:ext cx="1047902" cy="236220"/>
           </a:xfrm>
           <a:prstGeom prst="rect">
             <a:avLst/>
@@ -14811,7 +13902,7 @@
                 <a:ea typeface="Calibri" pitchFamily="34" charset="-122"/>
                 <a:cs typeface="Calibri" pitchFamily="34" charset="-120"/>
               </a:rPr>
-              <a:t>estamos</a:t>
+              <a:t>somos</a:t>
             </a:r>
             <a:endParaRPr lang="en-US" sz="1100" dirty="0"/>
           </a:p>
@@ -14819,14 +13910,14 @@
       </p:sp>
       <p:sp>
         <p:nvSpPr>
-          <p:cNvPr id="48" name="Shape 46"/>
-          <p:cNvSpPr/>
-          <p:nvPr/>
-        </p:nvSpPr>
-        <p:spPr>
-          <a:xfrm>
-            <a:off x="6537960" y="3349752"/>
-            <a:ext cx="4818888" cy="0"/>
+          <p:cNvPr id="47" name="Shape 45"/>
+          <p:cNvSpPr/>
+          <p:nvPr/>
+        </p:nvSpPr>
+        <p:spPr>
+          <a:xfrm>
+            <a:off x="4398264" y="3349752"/>
+            <a:ext cx="3058668" cy="0"/>
           </a:xfrm>
           <a:prstGeom prst="line">
             <a:avLst/>
@@ -14842,53 +13933,53 @@
       </p:sp>
       <p:sp>
         <p:nvSpPr>
+          <p:cNvPr id="48" name="Text 46"/>
+          <p:cNvSpPr/>
+          <p:nvPr/>
+        </p:nvSpPr>
+        <p:spPr>
+          <a:xfrm>
+            <a:off x="4434840" y="3349752"/>
+            <a:ext cx="1754734" cy="236220"/>
+          </a:xfrm>
+          <a:prstGeom prst="rect">
+            <a:avLst/>
+          </a:prstGeom>
+          <a:noFill/>
+          <a:ln/>
+        </p:spPr>
+        <p:txBody>
+          <a:bodyPr wrap="square" lIns="0" tIns="0" rIns="0" bIns="0" rtlCol="0" anchor="ctr"/>
+          <a:lstStyle/>
+          <a:p>
+            <a:pPr algn="r" indent="0" marL="0">
+              <a:buNone/>
+            </a:pPr>
+            <a:r>
+              <a:rPr lang="en-US" sz="1050" b="1" dirty="0">
+                <a:solidFill>
+                  <a:srgbClr val="2F3C7E"/>
+                </a:solidFill>
+                <a:latin typeface="Calibri" pitchFamily="34" charset="0"/>
+                <a:ea typeface="Calibri" pitchFamily="34" charset="-122"/>
+                <a:cs typeface="Calibri" pitchFamily="34" charset="-120"/>
+              </a:rPr>
+              <a:t>vosotros/vosotras</a:t>
+            </a:r>
+            <a:endParaRPr lang="en-US" sz="1050" dirty="0"/>
+          </a:p>
+        </p:txBody>
+      </p:sp>
+      <p:sp>
+        <p:nvSpPr>
           <p:cNvPr id="49" name="Text 47"/>
           <p:cNvSpPr/>
           <p:nvPr/>
         </p:nvSpPr>
         <p:spPr>
           <a:xfrm>
-            <a:off x="6574536" y="3349752"/>
-            <a:ext cx="2810866" cy="236220"/>
-          </a:xfrm>
-          <a:prstGeom prst="rect">
-            <a:avLst/>
-          </a:prstGeom>
-          <a:noFill/>
-          <a:ln/>
-        </p:spPr>
-        <p:txBody>
-          <a:bodyPr wrap="square" lIns="0" tIns="0" rIns="0" bIns="0" rtlCol="0" anchor="ctr"/>
-          <a:lstStyle/>
-          <a:p>
-            <a:pPr algn="r" indent="0" marL="0">
-              <a:buNone/>
-            </a:pPr>
-            <a:r>
-              <a:rPr lang="en-US" sz="1050" b="1" dirty="0">
-                <a:solidFill>
-                  <a:srgbClr val="2F3C7E"/>
-                </a:solidFill>
-                <a:latin typeface="Calibri" pitchFamily="34" charset="0"/>
-                <a:ea typeface="Calibri" pitchFamily="34" charset="-122"/>
-                <a:cs typeface="Calibri" pitchFamily="34" charset="-120"/>
-              </a:rPr>
-              <a:t>vosotros/vosotras</a:t>
-            </a:r>
-            <a:endParaRPr lang="en-US" sz="1050" dirty="0"/>
-          </a:p>
-        </p:txBody>
-      </p:sp>
-      <p:sp>
-        <p:nvSpPr>
-          <p:cNvPr id="50" name="Text 48"/>
-          <p:cNvSpPr/>
-          <p:nvPr/>
-        </p:nvSpPr>
-        <p:spPr>
-          <a:xfrm>
-            <a:off x="9696298" y="3349752"/>
-            <a:ext cx="1751990" cy="236220"/>
+            <a:off x="6500470" y="3349752"/>
+            <a:ext cx="1047902" cy="236220"/>
           </a:xfrm>
           <a:prstGeom prst="rect">
             <a:avLst/>
@@ -14912,7 +14003,7 @@
                 <a:ea typeface="Calibri" pitchFamily="34" charset="-122"/>
                 <a:cs typeface="Calibri" pitchFamily="34" charset="-120"/>
               </a:rPr>
-              <a:t>estáis</a:t>
+              <a:t>sois</a:t>
             </a:r>
             <a:endParaRPr lang="en-US" sz="1100" dirty="0"/>
           </a:p>
@@ -14920,14 +14011,14 @@
       </p:sp>
       <p:sp>
         <p:nvSpPr>
-          <p:cNvPr id="51" name="Shape 49"/>
-          <p:cNvSpPr/>
-          <p:nvPr/>
-        </p:nvSpPr>
-        <p:spPr>
-          <a:xfrm>
-            <a:off x="6537960" y="3585972"/>
-            <a:ext cx="4818888" cy="0"/>
+          <p:cNvPr id="50" name="Shape 48"/>
+          <p:cNvSpPr/>
+          <p:nvPr/>
+        </p:nvSpPr>
+        <p:spPr>
+          <a:xfrm>
+            <a:off x="4398264" y="3585972"/>
+            <a:ext cx="3058668" cy="0"/>
           </a:xfrm>
           <a:prstGeom prst="line">
             <a:avLst/>
@@ -14943,40 +14034,79 @@
       </p:sp>
       <p:sp>
         <p:nvSpPr>
+          <p:cNvPr id="51" name="Text 49"/>
+          <p:cNvSpPr/>
+          <p:nvPr/>
+        </p:nvSpPr>
+        <p:spPr>
+          <a:xfrm>
+            <a:off x="4434840" y="3585972"/>
+            <a:ext cx="1754734" cy="236220"/>
+          </a:xfrm>
+          <a:prstGeom prst="rect">
+            <a:avLst/>
+          </a:prstGeom>
+          <a:noFill/>
+          <a:ln/>
+        </p:spPr>
+        <p:txBody>
+          <a:bodyPr wrap="square" lIns="0" tIns="0" rIns="0" bIns="0" rtlCol="0" anchor="ctr"/>
+          <a:lstStyle/>
+          <a:p>
+            <a:pPr algn="r" indent="0" marL="0">
+              <a:buNone/>
+            </a:pPr>
+            <a:r>
+              <a:rPr lang="en-US" sz="1050" b="1" dirty="0">
+                <a:solidFill>
+                  <a:srgbClr val="2F3C7E"/>
+                </a:solidFill>
+                <a:latin typeface="Calibri" pitchFamily="34" charset="0"/>
+                <a:ea typeface="Calibri" pitchFamily="34" charset="-122"/>
+                <a:cs typeface="Calibri" pitchFamily="34" charset="-120"/>
+              </a:rPr>
+              <a:t>ellos/ellas/Uds.</a:t>
+            </a:r>
+            <a:endParaRPr lang="en-US" sz="1050" dirty="0"/>
+          </a:p>
+        </p:txBody>
+      </p:sp>
+      <p:sp>
+        <p:nvSpPr>
           <p:cNvPr id="52" name="Text 50"/>
           <p:cNvSpPr/>
           <p:nvPr/>
         </p:nvSpPr>
         <p:spPr>
           <a:xfrm>
-            <a:off x="6574536" y="3585972"/>
-            <a:ext cx="2810866" cy="236220"/>
-          </a:xfrm>
-          <a:prstGeom prst="rect">
-            <a:avLst/>
-          </a:prstGeom>
-          <a:noFill/>
-          <a:ln/>
-        </p:spPr>
-        <p:txBody>
-          <a:bodyPr wrap="square" lIns="0" tIns="0" rIns="0" bIns="0" rtlCol="0" anchor="ctr"/>
-          <a:lstStyle/>
-          <a:p>
-            <a:pPr algn="r" indent="0" marL="0">
-              <a:buNone/>
-            </a:pPr>
-            <a:r>
-              <a:rPr lang="en-US" sz="1050" b="1" dirty="0">
-                <a:solidFill>
-                  <a:srgbClr val="2F3C7E"/>
-                </a:solidFill>
-                <a:latin typeface="Calibri" pitchFamily="34" charset="0"/>
-                <a:ea typeface="Calibri" pitchFamily="34" charset="-122"/>
-                <a:cs typeface="Calibri" pitchFamily="34" charset="-120"/>
-              </a:rPr>
-              <a:t>ellos/ellas/Uds.</a:t>
-            </a:r>
-            <a:endParaRPr lang="en-US" sz="1050" dirty="0"/>
+            <a:off x="6500470" y="3585972"/>
+            <a:ext cx="1047902" cy="236220"/>
+          </a:xfrm>
+          <a:prstGeom prst="rect">
+            <a:avLst/>
+          </a:prstGeom>
+          <a:noFill/>
+          <a:ln/>
+        </p:spPr>
+        <p:txBody>
+          <a:bodyPr wrap="square" lIns="0" tIns="0" rIns="0" bIns="0" rtlCol="0" anchor="ctr"/>
+          <a:lstStyle/>
+          <a:p>
+            <a:pPr algn="l" indent="0" marL="0">
+              <a:buNone/>
+            </a:pPr>
+            <a:r>
+              <a:rPr lang="en-US" sz="1100" b="1" dirty="0">
+                <a:solidFill>
+                  <a:srgbClr val="F96167"/>
+                </a:solidFill>
+                <a:latin typeface="Calibri" pitchFamily="34" charset="0"/>
+                <a:ea typeface="Calibri" pitchFamily="34" charset="-122"/>
+                <a:cs typeface="Calibri" pitchFamily="34" charset="-120"/>
+              </a:rPr>
+              <a:t>son</a:t>
+            </a:r>
+            <a:endParaRPr lang="en-US" sz="1100" dirty="0"/>
           </a:p>
         </p:txBody>
       </p:sp>
@@ -14988,47 +14118,8 @@
         </p:nvSpPr>
         <p:spPr>
           <a:xfrm>
-            <a:off x="9696298" y="3585972"/>
-            <a:ext cx="1751990" cy="236220"/>
-          </a:xfrm>
-          <a:prstGeom prst="rect">
-            <a:avLst/>
-          </a:prstGeom>
-          <a:noFill/>
-          <a:ln/>
-        </p:spPr>
-        <p:txBody>
-          <a:bodyPr wrap="square" lIns="0" tIns="0" rIns="0" bIns="0" rtlCol="0" anchor="ctr"/>
-          <a:lstStyle/>
-          <a:p>
-            <a:pPr algn="l" indent="0" marL="0">
-              <a:buNone/>
-            </a:pPr>
-            <a:r>
-              <a:rPr lang="en-US" sz="1100" b="1" dirty="0">
-                <a:solidFill>
-                  <a:srgbClr val="F96167"/>
-                </a:solidFill>
-                <a:latin typeface="Calibri" pitchFamily="34" charset="0"/>
-                <a:ea typeface="Calibri" pitchFamily="34" charset="-122"/>
-                <a:cs typeface="Calibri" pitchFamily="34" charset="-120"/>
-              </a:rPr>
-              <a:t>están</a:t>
-            </a:r>
-            <a:endParaRPr lang="en-US" sz="1100" dirty="0"/>
-          </a:p>
-        </p:txBody>
-      </p:sp>
-      <p:sp>
-        <p:nvSpPr>
-          <p:cNvPr id="54" name="Text 52"/>
-          <p:cNvSpPr/>
-          <p:nvPr/>
-        </p:nvSpPr>
-        <p:spPr>
-          <a:xfrm>
-            <a:off x="6483096" y="3895344"/>
-            <a:ext cx="4928616" cy="457200"/>
+            <a:off x="4343400" y="3895344"/>
+            <a:ext cx="3168396" cy="457200"/>
           </a:xfrm>
           <a:prstGeom prst="rect">
             <a:avLst/>
@@ -15055,7 +14146,7 @@
                 <a:ea typeface="Calibri" pitchFamily="34" charset="-122"/>
                 <a:cs typeface="Calibri" pitchFamily="34" charset="-120"/>
               </a:rPr>
-              <a:t>Se usa para: местонахождение, временное состояние</a:t>
+              <a:t>Se usa para: имя, семья, происхождение, профессия, постоянные качества</a:t>
             </a:r>
             <a:endParaRPr lang="en-US" sz="1050" dirty="0"/>
           </a:p>
@@ -15063,61 +14154,22 @@
       </p:sp>
       <p:sp>
         <p:nvSpPr>
-          <p:cNvPr id="55" name="Text 53"/>
-          <p:cNvSpPr/>
-          <p:nvPr/>
-        </p:nvSpPr>
-        <p:spPr>
-          <a:xfrm>
-            <a:off x="548640" y="4617720"/>
-            <a:ext cx="7315200" cy="256032"/>
-          </a:xfrm>
-          <a:prstGeom prst="rect">
-            <a:avLst/>
-          </a:prstGeom>
-          <a:noFill/>
-          <a:ln/>
-        </p:spPr>
-        <p:txBody>
-          <a:bodyPr wrap="square" lIns="0" tIns="0" rIns="0" bIns="0" rtlCol="0" anchor="ctr"/>
-          <a:lstStyle/>
-          <a:p>
-            <a:pPr indent="0" marL="0">
-              <a:buNone/>
-            </a:pPr>
-            <a:r>
-              <a:rPr lang="en-US" sz="1200" b="1" spc="150" kern="0" dirty="0">
-                <a:solidFill>
-                  <a:srgbClr val="F96167"/>
-                </a:solidFill>
-                <a:latin typeface="Calibri" pitchFamily="34" charset="0"/>
-                <a:ea typeface="Calibri" pitchFamily="34" charset="-122"/>
-                <a:cs typeface="Calibri" pitchFamily="34" charset="-120"/>
-              </a:rPr>
-              <a:t>EL MISMO ADJETIVO, DISTINTO SIGNIFICADO</a:t>
-            </a:r>
-            <a:endParaRPr lang="en-US" sz="1200" dirty="0"/>
-          </a:p>
-        </p:txBody>
-      </p:sp>
-      <p:sp>
-        <p:nvSpPr>
-          <p:cNvPr id="56" name="Shape 54"/>
-          <p:cNvSpPr/>
-          <p:nvPr/>
-        </p:nvSpPr>
-        <p:spPr>
-          <a:xfrm>
-            <a:off x="548640" y="4928616"/>
-            <a:ext cx="5408676" cy="1472184"/>
+          <p:cNvPr id="54" name="Shape 52"/>
+          <p:cNvSpPr/>
+          <p:nvPr/>
+        </p:nvSpPr>
+        <p:spPr>
+          <a:xfrm>
+            <a:off x="8014716" y="1536192"/>
+            <a:ext cx="3625596" cy="2880360"/>
           </a:xfrm>
           <a:prstGeom prst="roundRect">
             <a:avLst>
-              <a:gd name="adj" fmla="val 4969"/>
+              <a:gd name="adj" fmla="val 3175"/>
             </a:avLst>
           </a:prstGeom>
           <a:solidFill>
-            <a:srgbClr val="F5F6FB"/>
+            <a:srgbClr val="FDECEC"/>
           </a:solidFill>
           <a:ln/>
           <a:effectLst>
@@ -15131,14 +14183,70 @@
       </p:sp>
       <p:sp>
         <p:nvSpPr>
+          <p:cNvPr id="55" name="Shape 53"/>
+          <p:cNvSpPr/>
+          <p:nvPr/>
+        </p:nvSpPr>
+        <p:spPr>
+          <a:xfrm>
+            <a:off x="8197596" y="1700784"/>
+            <a:ext cx="502920" cy="502920"/>
+          </a:xfrm>
+          <a:prstGeom prst="ellipse">
+            <a:avLst/>
+          </a:prstGeom>
+          <a:solidFill>
+            <a:srgbClr val="F96167"/>
+          </a:solidFill>
+          <a:ln/>
+        </p:spPr>
+      </p:sp>
+      <p:sp>
+        <p:nvSpPr>
+          <p:cNvPr id="56" name="Text 54"/>
+          <p:cNvSpPr/>
+          <p:nvPr/>
+        </p:nvSpPr>
+        <p:spPr>
+          <a:xfrm>
+            <a:off x="8197596" y="1700784"/>
+            <a:ext cx="502920" cy="502920"/>
+          </a:xfrm>
+          <a:prstGeom prst="rect">
+            <a:avLst/>
+          </a:prstGeom>
+          <a:noFill/>
+          <a:ln/>
+        </p:spPr>
+        <p:txBody>
+          <a:bodyPr wrap="square" lIns="0" tIns="0" rIns="0" bIns="0" rtlCol="0" anchor="ctr"/>
+          <a:lstStyle/>
+          <a:p>
+            <a:pPr algn="ctr" indent="0" marL="0">
+              <a:buNone/>
+            </a:pPr>
+            <a:r>
+              <a:rPr lang="en-US" sz="2800" dirty="0">
+                <a:solidFill>
+                  <a:srgbClr val="000000"/>
+                </a:solidFill>
+              </a:rPr>
+              <a:t>📍</a:t>
+            </a:r>
+            <a:endParaRPr lang="en-US" sz="2800" dirty="0"/>
+          </a:p>
+        </p:txBody>
+      </p:sp>
+      <p:sp>
+        <p:nvSpPr>
           <p:cNvPr id="57" name="Text 55"/>
           <p:cNvSpPr/>
           <p:nvPr/>
         </p:nvSpPr>
         <p:spPr>
           <a:xfrm>
-            <a:off x="676656" y="4965192"/>
-            <a:ext cx="5152644" cy="662940"/>
+            <a:off x="8846820" y="1664208"/>
+            <a:ext cx="2619756" cy="384048"/>
           </a:xfrm>
           <a:prstGeom prst="rect">
             <a:avLst/>
@@ -15151,33 +14259,49 @@
           <a:lstStyle/>
           <a:p>
             <a:pPr indent="0" marL="0">
-              <a:lnSpc>
-                <a:spcPct val="105000"/>
-              </a:lnSpc>
-              <a:buNone/>
-            </a:pPr>
-            <a:r>
-              <a:rPr lang="en-US" sz="1150" b="1" dirty="0">
+              <a:buNone/>
+            </a:pPr>
+            <a:r>
+              <a:rPr lang="en-US" sz="2200" b="1" dirty="0">
                 <a:solidFill>
                   <a:srgbClr val="2F3C7E"/>
                 </a:solidFill>
-                <a:latin typeface="Calibri" pitchFamily="34" charset="0"/>
-                <a:ea typeface="Calibri" pitchFamily="34" charset="-122"/>
-                <a:cs typeface="Calibri" pitchFamily="34" charset="-120"/>
-              </a:rPr>
-              <a:t>José es alegre.</a:t>
-            </a:r>
-            <a:endParaRPr lang="en-US" sz="1150" dirty="0"/>
-          </a:p>
+                <a:latin typeface="Cambria" pitchFamily="34" charset="0"/>
+                <a:ea typeface="Cambria" pitchFamily="34" charset="-122"/>
+                <a:cs typeface="Cambria" pitchFamily="34" charset="-120"/>
+              </a:rPr>
+              <a:t>ESTAR</a:t>
+            </a:r>
+            <a:endParaRPr lang="en-US" sz="2200" dirty="0"/>
+          </a:p>
+        </p:txBody>
+      </p:sp>
+      <p:sp>
+        <p:nvSpPr>
+          <p:cNvPr id="58" name="Text 56"/>
+          <p:cNvSpPr/>
+          <p:nvPr/>
+        </p:nvSpPr>
+        <p:spPr>
+          <a:xfrm>
+            <a:off x="8846820" y="2048256"/>
+            <a:ext cx="2619756" cy="274320"/>
+          </a:xfrm>
+          <a:prstGeom prst="rect">
+            <a:avLst/>
+          </a:prstGeom>
+          <a:noFill/>
+          <a:ln/>
+        </p:spPr>
+        <p:txBody>
+          <a:bodyPr wrap="square" lIns="0" tIns="0" rIns="0" bIns="0" rtlCol="0" anchor="ctr"/>
+          <a:lstStyle/>
           <a:p>
             <a:pPr indent="0" marL="0">
-              <a:lnSpc>
-                <a:spcPct val="105000"/>
-              </a:lnSpc>
-              <a:buNone/>
-            </a:pPr>
-            <a:r>
-              <a:rPr lang="en-US" sz="950" i="1" dirty="0">
+              <a:buNone/>
+            </a:pPr>
+            <a:r>
+              <a:rPr lang="en-US" sz="1200" i="1" dirty="0">
                 <a:solidFill>
                   <a:srgbClr val="5C6690"/>
                 </a:solidFill>
@@ -15185,22 +14309,143 @@
                 <a:ea typeface="Calibri" pitchFamily="34" charset="-122"/>
                 <a:cs typeface="Calibri" pitchFamily="34" charset="-120"/>
               </a:rPr>
-              <a:t>Хосе весёлый.  ·  así es su carácter</a:t>
-            </a:r>
-            <a:endParaRPr lang="en-US" sz="1150" dirty="0"/>
-          </a:p>
-        </p:txBody>
-      </p:sp>
-      <p:sp>
-        <p:nvSpPr>
-          <p:cNvPr id="58" name="Shape 56"/>
-          <p:cNvSpPr/>
-          <p:nvPr/>
-        </p:nvSpPr>
-        <p:spPr>
-          <a:xfrm>
-            <a:off x="640080" y="5664708"/>
-            <a:ext cx="5225796" cy="0"/>
+              <a:t>быть, находиться</a:t>
+            </a:r>
+            <a:endParaRPr lang="en-US" sz="1200" dirty="0"/>
+          </a:p>
+        </p:txBody>
+      </p:sp>
+      <p:sp>
+        <p:nvSpPr>
+          <p:cNvPr id="59" name="Shape 57"/>
+          <p:cNvSpPr/>
+          <p:nvPr/>
+        </p:nvSpPr>
+        <p:spPr>
+          <a:xfrm>
+            <a:off x="8243316" y="2404872"/>
+            <a:ext cx="3168396" cy="1417320"/>
+          </a:xfrm>
+          <a:prstGeom prst="rect">
+            <a:avLst/>
+          </a:prstGeom>
+          <a:solidFill>
+            <a:srgbClr val="FFFFFF"/>
+          </a:solidFill>
+          <a:ln/>
+        </p:spPr>
+      </p:sp>
+      <p:sp>
+        <p:nvSpPr>
+          <p:cNvPr id="60" name="Shape 58"/>
+          <p:cNvSpPr/>
+          <p:nvPr/>
+        </p:nvSpPr>
+        <p:spPr>
+          <a:xfrm>
+            <a:off x="10272370" y="2459736"/>
+            <a:ext cx="0" cy="1307592"/>
+          </a:xfrm>
+          <a:prstGeom prst="line">
+            <a:avLst/>
+          </a:prstGeom>
+          <a:noFill/>
+          <a:ln w="12700">
+            <a:solidFill>
+              <a:srgbClr val="D8DBEA"/>
+            </a:solidFill>
+            <a:prstDash val="solid"/>
+          </a:ln>
+        </p:spPr>
+      </p:sp>
+      <p:sp>
+        <p:nvSpPr>
+          <p:cNvPr id="61" name="Text 59"/>
+          <p:cNvSpPr/>
+          <p:nvPr/>
+        </p:nvSpPr>
+        <p:spPr>
+          <a:xfrm>
+            <a:off x="8334756" y="2404872"/>
+            <a:ext cx="1754734" cy="236220"/>
+          </a:xfrm>
+          <a:prstGeom prst="rect">
+            <a:avLst/>
+          </a:prstGeom>
+          <a:noFill/>
+          <a:ln/>
+        </p:spPr>
+        <p:txBody>
+          <a:bodyPr wrap="square" lIns="0" tIns="0" rIns="0" bIns="0" rtlCol="0" anchor="ctr"/>
+          <a:lstStyle/>
+          <a:p>
+            <a:pPr algn="r" indent="0" marL="0">
+              <a:buNone/>
+            </a:pPr>
+            <a:r>
+              <a:rPr lang="en-US" sz="1050" b="1" dirty="0">
+                <a:solidFill>
+                  <a:srgbClr val="2F3C7E"/>
+                </a:solidFill>
+                <a:latin typeface="Calibri" pitchFamily="34" charset="0"/>
+                <a:ea typeface="Calibri" pitchFamily="34" charset="-122"/>
+                <a:cs typeface="Calibri" pitchFamily="34" charset="-120"/>
+              </a:rPr>
+              <a:t>yo</a:t>
+            </a:r>
+            <a:endParaRPr lang="en-US" sz="1050" dirty="0"/>
+          </a:p>
+        </p:txBody>
+      </p:sp>
+      <p:sp>
+        <p:nvSpPr>
+          <p:cNvPr id="62" name="Text 60"/>
+          <p:cNvSpPr/>
+          <p:nvPr/>
+        </p:nvSpPr>
+        <p:spPr>
+          <a:xfrm>
+            <a:off x="10400386" y="2404872"/>
+            <a:ext cx="1047902" cy="236220"/>
+          </a:xfrm>
+          <a:prstGeom prst="rect">
+            <a:avLst/>
+          </a:prstGeom>
+          <a:noFill/>
+          <a:ln/>
+        </p:spPr>
+        <p:txBody>
+          <a:bodyPr wrap="square" lIns="0" tIns="0" rIns="0" bIns="0" rtlCol="0" anchor="ctr"/>
+          <a:lstStyle/>
+          <a:p>
+            <a:pPr algn="l" indent="0" marL="0">
+              <a:buNone/>
+            </a:pPr>
+            <a:r>
+              <a:rPr lang="en-US" sz="1100" b="1" dirty="0">
+                <a:solidFill>
+                  <a:srgbClr val="F96167"/>
+                </a:solidFill>
+                <a:latin typeface="Calibri" pitchFamily="34" charset="0"/>
+                <a:ea typeface="Calibri" pitchFamily="34" charset="-122"/>
+                <a:cs typeface="Calibri" pitchFamily="34" charset="-120"/>
+              </a:rPr>
+              <a:t>estoy</a:t>
+            </a:r>
+            <a:endParaRPr lang="en-US" sz="1100" dirty="0"/>
+          </a:p>
+        </p:txBody>
+      </p:sp>
+      <p:sp>
+        <p:nvSpPr>
+          <p:cNvPr id="63" name="Shape 61"/>
+          <p:cNvSpPr/>
+          <p:nvPr/>
+        </p:nvSpPr>
+        <p:spPr>
+          <a:xfrm>
+            <a:off x="8298180" y="2641092"/>
+            <a:ext cx="3058668" cy="0"/>
           </a:xfrm>
           <a:prstGeom prst="line">
             <a:avLst/>
@@ -15216,14 +14461,496 @@
       </p:sp>
       <p:sp>
         <p:nvSpPr>
-          <p:cNvPr id="59" name="Text 57"/>
-          <p:cNvSpPr/>
-          <p:nvPr/>
-        </p:nvSpPr>
-        <p:spPr>
-          <a:xfrm>
-            <a:off x="676656" y="5701284"/>
-            <a:ext cx="5152644" cy="662940"/>
+          <p:cNvPr id="64" name="Text 62"/>
+          <p:cNvSpPr/>
+          <p:nvPr/>
+        </p:nvSpPr>
+        <p:spPr>
+          <a:xfrm>
+            <a:off x="8334756" y="2641092"/>
+            <a:ext cx="1754734" cy="236220"/>
+          </a:xfrm>
+          <a:prstGeom prst="rect">
+            <a:avLst/>
+          </a:prstGeom>
+          <a:noFill/>
+          <a:ln/>
+        </p:spPr>
+        <p:txBody>
+          <a:bodyPr wrap="square" lIns="0" tIns="0" rIns="0" bIns="0" rtlCol="0" anchor="ctr"/>
+          <a:lstStyle/>
+          <a:p>
+            <a:pPr algn="r" indent="0" marL="0">
+              <a:buNone/>
+            </a:pPr>
+            <a:r>
+              <a:rPr lang="en-US" sz="1050" b="1" dirty="0">
+                <a:solidFill>
+                  <a:srgbClr val="2F3C7E"/>
+                </a:solidFill>
+                <a:latin typeface="Calibri" pitchFamily="34" charset="0"/>
+                <a:ea typeface="Calibri" pitchFamily="34" charset="-122"/>
+                <a:cs typeface="Calibri" pitchFamily="34" charset="-120"/>
+              </a:rPr>
+              <a:t>tú</a:t>
+            </a:r>
+            <a:endParaRPr lang="en-US" sz="1050" dirty="0"/>
+          </a:p>
+        </p:txBody>
+      </p:sp>
+      <p:sp>
+        <p:nvSpPr>
+          <p:cNvPr id="65" name="Text 63"/>
+          <p:cNvSpPr/>
+          <p:nvPr/>
+        </p:nvSpPr>
+        <p:spPr>
+          <a:xfrm>
+            <a:off x="10400386" y="2641092"/>
+            <a:ext cx="1047902" cy="236220"/>
+          </a:xfrm>
+          <a:prstGeom prst="rect">
+            <a:avLst/>
+          </a:prstGeom>
+          <a:noFill/>
+          <a:ln/>
+        </p:spPr>
+        <p:txBody>
+          <a:bodyPr wrap="square" lIns="0" tIns="0" rIns="0" bIns="0" rtlCol="0" anchor="ctr"/>
+          <a:lstStyle/>
+          <a:p>
+            <a:pPr algn="l" indent="0" marL="0">
+              <a:buNone/>
+            </a:pPr>
+            <a:r>
+              <a:rPr lang="en-US" sz="1100" b="1" dirty="0">
+                <a:solidFill>
+                  <a:srgbClr val="F96167"/>
+                </a:solidFill>
+                <a:latin typeface="Calibri" pitchFamily="34" charset="0"/>
+                <a:ea typeface="Calibri" pitchFamily="34" charset="-122"/>
+                <a:cs typeface="Calibri" pitchFamily="34" charset="-120"/>
+              </a:rPr>
+              <a:t>estás</a:t>
+            </a:r>
+            <a:endParaRPr lang="en-US" sz="1100" dirty="0"/>
+          </a:p>
+        </p:txBody>
+      </p:sp>
+      <p:sp>
+        <p:nvSpPr>
+          <p:cNvPr id="66" name="Shape 64"/>
+          <p:cNvSpPr/>
+          <p:nvPr/>
+        </p:nvSpPr>
+        <p:spPr>
+          <a:xfrm>
+            <a:off x="8298180" y="2877312"/>
+            <a:ext cx="3058668" cy="0"/>
+          </a:xfrm>
+          <a:prstGeom prst="line">
+            <a:avLst/>
+          </a:prstGeom>
+          <a:noFill/>
+          <a:ln w="9525">
+            <a:solidFill>
+              <a:srgbClr val="E7E9F3"/>
+            </a:solidFill>
+            <a:prstDash val="solid"/>
+          </a:ln>
+        </p:spPr>
+      </p:sp>
+      <p:sp>
+        <p:nvSpPr>
+          <p:cNvPr id="67" name="Text 65"/>
+          <p:cNvSpPr/>
+          <p:nvPr/>
+        </p:nvSpPr>
+        <p:spPr>
+          <a:xfrm>
+            <a:off x="8334756" y="2877312"/>
+            <a:ext cx="1754734" cy="236220"/>
+          </a:xfrm>
+          <a:prstGeom prst="rect">
+            <a:avLst/>
+          </a:prstGeom>
+          <a:noFill/>
+          <a:ln/>
+        </p:spPr>
+        <p:txBody>
+          <a:bodyPr wrap="square" lIns="0" tIns="0" rIns="0" bIns="0" rtlCol="0" anchor="ctr"/>
+          <a:lstStyle/>
+          <a:p>
+            <a:pPr algn="r" indent="0" marL="0">
+              <a:buNone/>
+            </a:pPr>
+            <a:r>
+              <a:rPr lang="en-US" sz="1050" b="1" dirty="0">
+                <a:solidFill>
+                  <a:srgbClr val="2F3C7E"/>
+                </a:solidFill>
+                <a:latin typeface="Calibri" pitchFamily="34" charset="0"/>
+                <a:ea typeface="Calibri" pitchFamily="34" charset="-122"/>
+                <a:cs typeface="Calibri" pitchFamily="34" charset="-120"/>
+              </a:rPr>
+              <a:t>él/ella/Ud.</a:t>
+            </a:r>
+            <a:endParaRPr lang="en-US" sz="1050" dirty="0"/>
+          </a:p>
+        </p:txBody>
+      </p:sp>
+      <p:sp>
+        <p:nvSpPr>
+          <p:cNvPr id="68" name="Text 66"/>
+          <p:cNvSpPr/>
+          <p:nvPr/>
+        </p:nvSpPr>
+        <p:spPr>
+          <a:xfrm>
+            <a:off x="10400386" y="2877312"/>
+            <a:ext cx="1047902" cy="236220"/>
+          </a:xfrm>
+          <a:prstGeom prst="rect">
+            <a:avLst/>
+          </a:prstGeom>
+          <a:noFill/>
+          <a:ln/>
+        </p:spPr>
+        <p:txBody>
+          <a:bodyPr wrap="square" lIns="0" tIns="0" rIns="0" bIns="0" rtlCol="0" anchor="ctr"/>
+          <a:lstStyle/>
+          <a:p>
+            <a:pPr algn="l" indent="0" marL="0">
+              <a:buNone/>
+            </a:pPr>
+            <a:r>
+              <a:rPr lang="en-US" sz="1100" b="1" dirty="0">
+                <a:solidFill>
+                  <a:srgbClr val="F96167"/>
+                </a:solidFill>
+                <a:latin typeface="Calibri" pitchFamily="34" charset="0"/>
+                <a:ea typeface="Calibri" pitchFamily="34" charset="-122"/>
+                <a:cs typeface="Calibri" pitchFamily="34" charset="-120"/>
+              </a:rPr>
+              <a:t>está</a:t>
+            </a:r>
+            <a:endParaRPr lang="en-US" sz="1100" dirty="0"/>
+          </a:p>
+        </p:txBody>
+      </p:sp>
+      <p:sp>
+        <p:nvSpPr>
+          <p:cNvPr id="69" name="Shape 67"/>
+          <p:cNvSpPr/>
+          <p:nvPr/>
+        </p:nvSpPr>
+        <p:spPr>
+          <a:xfrm>
+            <a:off x="8298180" y="3113532"/>
+            <a:ext cx="3058668" cy="0"/>
+          </a:xfrm>
+          <a:prstGeom prst="line">
+            <a:avLst/>
+          </a:prstGeom>
+          <a:noFill/>
+          <a:ln w="9525">
+            <a:solidFill>
+              <a:srgbClr val="E7E9F3"/>
+            </a:solidFill>
+            <a:prstDash val="solid"/>
+          </a:ln>
+        </p:spPr>
+      </p:sp>
+      <p:sp>
+        <p:nvSpPr>
+          <p:cNvPr id="70" name="Text 68"/>
+          <p:cNvSpPr/>
+          <p:nvPr/>
+        </p:nvSpPr>
+        <p:spPr>
+          <a:xfrm>
+            <a:off x="8334756" y="3113532"/>
+            <a:ext cx="1754734" cy="236220"/>
+          </a:xfrm>
+          <a:prstGeom prst="rect">
+            <a:avLst/>
+          </a:prstGeom>
+          <a:noFill/>
+          <a:ln/>
+        </p:spPr>
+        <p:txBody>
+          <a:bodyPr wrap="square" lIns="0" tIns="0" rIns="0" bIns="0" rtlCol="0" anchor="ctr"/>
+          <a:lstStyle/>
+          <a:p>
+            <a:pPr algn="r" indent="0" marL="0">
+              <a:buNone/>
+            </a:pPr>
+            <a:r>
+              <a:rPr lang="en-US" sz="1050" b="1" dirty="0">
+                <a:solidFill>
+                  <a:srgbClr val="2F3C7E"/>
+                </a:solidFill>
+                <a:latin typeface="Calibri" pitchFamily="34" charset="0"/>
+                <a:ea typeface="Calibri" pitchFamily="34" charset="-122"/>
+                <a:cs typeface="Calibri" pitchFamily="34" charset="-120"/>
+              </a:rPr>
+              <a:t>nosotros/nosotras</a:t>
+            </a:r>
+            <a:endParaRPr lang="en-US" sz="1050" dirty="0"/>
+          </a:p>
+        </p:txBody>
+      </p:sp>
+      <p:sp>
+        <p:nvSpPr>
+          <p:cNvPr id="71" name="Text 69"/>
+          <p:cNvSpPr/>
+          <p:nvPr/>
+        </p:nvSpPr>
+        <p:spPr>
+          <a:xfrm>
+            <a:off x="10400386" y="3113532"/>
+            <a:ext cx="1047902" cy="236220"/>
+          </a:xfrm>
+          <a:prstGeom prst="rect">
+            <a:avLst/>
+          </a:prstGeom>
+          <a:noFill/>
+          <a:ln/>
+        </p:spPr>
+        <p:txBody>
+          <a:bodyPr wrap="square" lIns="0" tIns="0" rIns="0" bIns="0" rtlCol="0" anchor="ctr"/>
+          <a:lstStyle/>
+          <a:p>
+            <a:pPr algn="l" indent="0" marL="0">
+              <a:buNone/>
+            </a:pPr>
+            <a:r>
+              <a:rPr lang="en-US" sz="1100" b="1" dirty="0">
+                <a:solidFill>
+                  <a:srgbClr val="F96167"/>
+                </a:solidFill>
+                <a:latin typeface="Calibri" pitchFamily="34" charset="0"/>
+                <a:ea typeface="Calibri" pitchFamily="34" charset="-122"/>
+                <a:cs typeface="Calibri" pitchFamily="34" charset="-120"/>
+              </a:rPr>
+              <a:t>estamos</a:t>
+            </a:r>
+            <a:endParaRPr lang="en-US" sz="1100" dirty="0"/>
+          </a:p>
+        </p:txBody>
+      </p:sp>
+      <p:sp>
+        <p:nvSpPr>
+          <p:cNvPr id="72" name="Shape 70"/>
+          <p:cNvSpPr/>
+          <p:nvPr/>
+        </p:nvSpPr>
+        <p:spPr>
+          <a:xfrm>
+            <a:off x="8298180" y="3349752"/>
+            <a:ext cx="3058668" cy="0"/>
+          </a:xfrm>
+          <a:prstGeom prst="line">
+            <a:avLst/>
+          </a:prstGeom>
+          <a:noFill/>
+          <a:ln w="9525">
+            <a:solidFill>
+              <a:srgbClr val="E7E9F3"/>
+            </a:solidFill>
+            <a:prstDash val="solid"/>
+          </a:ln>
+        </p:spPr>
+      </p:sp>
+      <p:sp>
+        <p:nvSpPr>
+          <p:cNvPr id="73" name="Text 71"/>
+          <p:cNvSpPr/>
+          <p:nvPr/>
+        </p:nvSpPr>
+        <p:spPr>
+          <a:xfrm>
+            <a:off x="8334756" y="3349752"/>
+            <a:ext cx="1754734" cy="236220"/>
+          </a:xfrm>
+          <a:prstGeom prst="rect">
+            <a:avLst/>
+          </a:prstGeom>
+          <a:noFill/>
+          <a:ln/>
+        </p:spPr>
+        <p:txBody>
+          <a:bodyPr wrap="square" lIns="0" tIns="0" rIns="0" bIns="0" rtlCol="0" anchor="ctr"/>
+          <a:lstStyle/>
+          <a:p>
+            <a:pPr algn="r" indent="0" marL="0">
+              <a:buNone/>
+            </a:pPr>
+            <a:r>
+              <a:rPr lang="en-US" sz="1050" b="1" dirty="0">
+                <a:solidFill>
+                  <a:srgbClr val="2F3C7E"/>
+                </a:solidFill>
+                <a:latin typeface="Calibri" pitchFamily="34" charset="0"/>
+                <a:ea typeface="Calibri" pitchFamily="34" charset="-122"/>
+                <a:cs typeface="Calibri" pitchFamily="34" charset="-120"/>
+              </a:rPr>
+              <a:t>vosotros/vosotras</a:t>
+            </a:r>
+            <a:endParaRPr lang="en-US" sz="1050" dirty="0"/>
+          </a:p>
+        </p:txBody>
+      </p:sp>
+      <p:sp>
+        <p:nvSpPr>
+          <p:cNvPr id="74" name="Text 72"/>
+          <p:cNvSpPr/>
+          <p:nvPr/>
+        </p:nvSpPr>
+        <p:spPr>
+          <a:xfrm>
+            <a:off x="10400386" y="3349752"/>
+            <a:ext cx="1047902" cy="236220"/>
+          </a:xfrm>
+          <a:prstGeom prst="rect">
+            <a:avLst/>
+          </a:prstGeom>
+          <a:noFill/>
+          <a:ln/>
+        </p:spPr>
+        <p:txBody>
+          <a:bodyPr wrap="square" lIns="0" tIns="0" rIns="0" bIns="0" rtlCol="0" anchor="ctr"/>
+          <a:lstStyle/>
+          <a:p>
+            <a:pPr algn="l" indent="0" marL="0">
+              <a:buNone/>
+            </a:pPr>
+            <a:r>
+              <a:rPr lang="en-US" sz="1100" b="1" dirty="0">
+                <a:solidFill>
+                  <a:srgbClr val="F96167"/>
+                </a:solidFill>
+                <a:latin typeface="Calibri" pitchFamily="34" charset="0"/>
+                <a:ea typeface="Calibri" pitchFamily="34" charset="-122"/>
+                <a:cs typeface="Calibri" pitchFamily="34" charset="-120"/>
+              </a:rPr>
+              <a:t>estáis</a:t>
+            </a:r>
+            <a:endParaRPr lang="en-US" sz="1100" dirty="0"/>
+          </a:p>
+        </p:txBody>
+      </p:sp>
+      <p:sp>
+        <p:nvSpPr>
+          <p:cNvPr id="75" name="Shape 73"/>
+          <p:cNvSpPr/>
+          <p:nvPr/>
+        </p:nvSpPr>
+        <p:spPr>
+          <a:xfrm>
+            <a:off x="8298180" y="3585972"/>
+            <a:ext cx="3058668" cy="0"/>
+          </a:xfrm>
+          <a:prstGeom prst="line">
+            <a:avLst/>
+          </a:prstGeom>
+          <a:noFill/>
+          <a:ln w="9525">
+            <a:solidFill>
+              <a:srgbClr val="E7E9F3"/>
+            </a:solidFill>
+            <a:prstDash val="solid"/>
+          </a:ln>
+        </p:spPr>
+      </p:sp>
+      <p:sp>
+        <p:nvSpPr>
+          <p:cNvPr id="76" name="Text 74"/>
+          <p:cNvSpPr/>
+          <p:nvPr/>
+        </p:nvSpPr>
+        <p:spPr>
+          <a:xfrm>
+            <a:off x="8334756" y="3585972"/>
+            <a:ext cx="1754734" cy="236220"/>
+          </a:xfrm>
+          <a:prstGeom prst="rect">
+            <a:avLst/>
+          </a:prstGeom>
+          <a:noFill/>
+          <a:ln/>
+        </p:spPr>
+        <p:txBody>
+          <a:bodyPr wrap="square" lIns="0" tIns="0" rIns="0" bIns="0" rtlCol="0" anchor="ctr"/>
+          <a:lstStyle/>
+          <a:p>
+            <a:pPr algn="r" indent="0" marL="0">
+              <a:buNone/>
+            </a:pPr>
+            <a:r>
+              <a:rPr lang="en-US" sz="1050" b="1" dirty="0">
+                <a:solidFill>
+                  <a:srgbClr val="2F3C7E"/>
+                </a:solidFill>
+                <a:latin typeface="Calibri" pitchFamily="34" charset="0"/>
+                <a:ea typeface="Calibri" pitchFamily="34" charset="-122"/>
+                <a:cs typeface="Calibri" pitchFamily="34" charset="-120"/>
+              </a:rPr>
+              <a:t>ellos/ellas/Uds.</a:t>
+            </a:r>
+            <a:endParaRPr lang="en-US" sz="1050" dirty="0"/>
+          </a:p>
+        </p:txBody>
+      </p:sp>
+      <p:sp>
+        <p:nvSpPr>
+          <p:cNvPr id="77" name="Text 75"/>
+          <p:cNvSpPr/>
+          <p:nvPr/>
+        </p:nvSpPr>
+        <p:spPr>
+          <a:xfrm>
+            <a:off x="10400386" y="3585972"/>
+            <a:ext cx="1047902" cy="236220"/>
+          </a:xfrm>
+          <a:prstGeom prst="rect">
+            <a:avLst/>
+          </a:prstGeom>
+          <a:noFill/>
+          <a:ln/>
+        </p:spPr>
+        <p:txBody>
+          <a:bodyPr wrap="square" lIns="0" tIns="0" rIns="0" bIns="0" rtlCol="0" anchor="ctr"/>
+          <a:lstStyle/>
+          <a:p>
+            <a:pPr algn="l" indent="0" marL="0">
+              <a:buNone/>
+            </a:pPr>
+            <a:r>
+              <a:rPr lang="en-US" sz="1100" b="1" dirty="0">
+                <a:solidFill>
+                  <a:srgbClr val="F96167"/>
+                </a:solidFill>
+                <a:latin typeface="Calibri" pitchFamily="34" charset="0"/>
+                <a:ea typeface="Calibri" pitchFamily="34" charset="-122"/>
+                <a:cs typeface="Calibri" pitchFamily="34" charset="-120"/>
+              </a:rPr>
+              <a:t>están</a:t>
+            </a:r>
+            <a:endParaRPr lang="en-US" sz="1100" dirty="0"/>
+          </a:p>
+        </p:txBody>
+      </p:sp>
+      <p:sp>
+        <p:nvSpPr>
+          <p:cNvPr id="78" name="Text 76"/>
+          <p:cNvSpPr/>
+          <p:nvPr/>
+        </p:nvSpPr>
+        <p:spPr>
+          <a:xfrm>
+            <a:off x="8243316" y="3895344"/>
+            <a:ext cx="3168396" cy="457200"/>
           </a:xfrm>
           <a:prstGeom prst="rect">
             <a:avLst/>
@@ -15242,49 +14969,68 @@
               <a:buNone/>
             </a:pPr>
             <a:r>
-              <a:rPr lang="en-US" sz="1150" b="1" dirty="0">
-                <a:solidFill>
-                  <a:srgbClr val="2F3C7E"/>
-                </a:solidFill>
-                <a:latin typeface="Calibri" pitchFamily="34" charset="0"/>
-                <a:ea typeface="Calibri" pitchFamily="34" charset="-122"/>
-                <a:cs typeface="Calibri" pitchFamily="34" charset="-120"/>
-              </a:rPr>
-              <a:t>José está alegre.</a:t>
-            </a:r>
-            <a:endParaRPr lang="en-US" sz="1150" dirty="0"/>
-          </a:p>
+              <a:rPr lang="en-US" sz="1050" i="1" dirty="0">
+                <a:solidFill>
+                  <a:srgbClr val="5C6690"/>
+                </a:solidFill>
+                <a:latin typeface="Calibri" pitchFamily="34" charset="0"/>
+                <a:ea typeface="Calibri" pitchFamily="34" charset="-122"/>
+                <a:cs typeface="Calibri" pitchFamily="34" charset="-120"/>
+              </a:rPr>
+              <a:t>Se usa para: местонахождение, временное состояние</a:t>
+            </a:r>
+            <a:endParaRPr lang="en-US" sz="1050" dirty="0"/>
+          </a:p>
+        </p:txBody>
+      </p:sp>
+      <p:sp>
+        <p:nvSpPr>
+          <p:cNvPr id="79" name="Text 77"/>
+          <p:cNvSpPr/>
+          <p:nvPr/>
+        </p:nvSpPr>
+        <p:spPr>
+          <a:xfrm>
+            <a:off x="548640" y="4617720"/>
+            <a:ext cx="7315200" cy="256032"/>
+          </a:xfrm>
+          <a:prstGeom prst="rect">
+            <a:avLst/>
+          </a:prstGeom>
+          <a:noFill/>
+          <a:ln/>
+        </p:spPr>
+        <p:txBody>
+          <a:bodyPr wrap="square" lIns="0" tIns="0" rIns="0" bIns="0" rtlCol="0" anchor="ctr"/>
+          <a:lstStyle/>
           <a:p>
             <a:pPr indent="0" marL="0">
-              <a:lnSpc>
-                <a:spcPct val="105000"/>
-              </a:lnSpc>
-              <a:buNone/>
-            </a:pPr>
-            <a:r>
-              <a:rPr lang="en-US" sz="950" i="1" dirty="0">
-                <a:solidFill>
-                  <a:srgbClr val="5C6690"/>
-                </a:solidFill>
-                <a:latin typeface="Calibri" pitchFamily="34" charset="0"/>
-                <a:ea typeface="Calibri" pitchFamily="34" charset="-122"/>
-                <a:cs typeface="Calibri" pitchFamily="34" charset="-120"/>
-              </a:rPr>
-              <a:t>Хосе весел.  ·  en este momento</a:t>
-            </a:r>
-            <a:endParaRPr lang="en-US" sz="1150" dirty="0"/>
-          </a:p>
-        </p:txBody>
-      </p:sp>
-      <p:sp>
-        <p:nvSpPr>
-          <p:cNvPr id="60" name="Shape 58"/>
-          <p:cNvSpPr/>
-          <p:nvPr/>
-        </p:nvSpPr>
-        <p:spPr>
-          <a:xfrm>
-            <a:off x="6231636" y="4928616"/>
+              <a:buNone/>
+            </a:pPr>
+            <a:r>
+              <a:rPr lang="en-US" sz="1200" b="1" spc="150" kern="0" dirty="0">
+                <a:solidFill>
+                  <a:srgbClr val="F96167"/>
+                </a:solidFill>
+                <a:latin typeface="Calibri" pitchFamily="34" charset="0"/>
+                <a:ea typeface="Calibri" pitchFamily="34" charset="-122"/>
+                <a:cs typeface="Calibri" pitchFamily="34" charset="-120"/>
+              </a:rPr>
+              <a:t>EL MISMO ADJETIVO, DISTINTO SIGNIFICADO</a:t>
+            </a:r>
+            <a:endParaRPr lang="en-US" sz="1200" dirty="0"/>
+          </a:p>
+        </p:txBody>
+      </p:sp>
+      <p:sp>
+        <p:nvSpPr>
+          <p:cNvPr id="80" name="Shape 78"/>
+          <p:cNvSpPr/>
+          <p:nvPr/>
+        </p:nvSpPr>
+        <p:spPr>
+          <a:xfrm>
+            <a:off x="548640" y="4928616"/>
             <a:ext cx="5408676" cy="1472184"/>
           </a:xfrm>
           <a:prstGeom prst="roundRect">
@@ -15307,13 +15053,13 @@
       </p:sp>
       <p:sp>
         <p:nvSpPr>
-          <p:cNvPr id="61" name="Text 59"/>
-          <p:cNvSpPr/>
-          <p:nvPr/>
-        </p:nvSpPr>
-        <p:spPr>
-          <a:xfrm>
-            <a:off x="6359652" y="4965192"/>
+          <p:cNvPr id="81" name="Text 79"/>
+          <p:cNvSpPr/>
+          <p:nvPr/>
+        </p:nvSpPr>
+        <p:spPr>
+          <a:xfrm>
+            <a:off x="676656" y="4965192"/>
             <a:ext cx="5152644" cy="662940"/>
           </a:xfrm>
           <a:prstGeom prst="rect">
@@ -15341,7 +15087,7 @@
                 <a:ea typeface="Calibri" pitchFamily="34" charset="-122"/>
                 <a:cs typeface="Calibri" pitchFamily="34" charset="-120"/>
               </a:rPr>
-              <a:t>Pilar es guapa.</a:t>
+              <a:t>José es alegre.</a:t>
             </a:r>
             <a:endParaRPr lang="en-US" sz="1150" dirty="0"/>
           </a:p>
@@ -15361,7 +15107,7 @@
                 <a:ea typeface="Calibri" pitchFamily="34" charset="-122"/>
                 <a:cs typeface="Calibri" pitchFamily="34" charset="-120"/>
               </a:rPr>
-              <a:t>Пилар красивая.  ·  cualidad física</a:t>
+              <a:t>Хосе весёлый.  ·  así es su carácter</a:t>
             </a:r>
             <a:endParaRPr lang="en-US" sz="1150" dirty="0"/>
           </a:p>
@@ -15369,13 +15115,13 @@
       </p:sp>
       <p:sp>
         <p:nvSpPr>
-          <p:cNvPr id="62" name="Shape 60"/>
-          <p:cNvSpPr/>
-          <p:nvPr/>
-        </p:nvSpPr>
-        <p:spPr>
-          <a:xfrm>
-            <a:off x="6323076" y="5664708"/>
+          <p:cNvPr id="82" name="Shape 80"/>
+          <p:cNvSpPr/>
+          <p:nvPr/>
+        </p:nvSpPr>
+        <p:spPr>
+          <a:xfrm>
+            <a:off x="640080" y="5664708"/>
             <a:ext cx="5225796" cy="0"/>
           </a:xfrm>
           <a:prstGeom prst="line">
@@ -15392,13 +15138,13 @@
       </p:sp>
       <p:sp>
         <p:nvSpPr>
-          <p:cNvPr id="63" name="Text 61"/>
-          <p:cNvSpPr/>
-          <p:nvPr/>
-        </p:nvSpPr>
-        <p:spPr>
-          <a:xfrm>
-            <a:off x="6359652" y="5701284"/>
+          <p:cNvPr id="83" name="Text 81"/>
+          <p:cNvSpPr/>
+          <p:nvPr/>
+        </p:nvSpPr>
+        <p:spPr>
+          <a:xfrm>
+            <a:off x="676656" y="5701284"/>
             <a:ext cx="5152644" cy="662940"/>
           </a:xfrm>
           <a:prstGeom prst="rect">
@@ -15426,7 +15172,7 @@
                 <a:ea typeface="Calibri" pitchFamily="34" charset="-122"/>
                 <a:cs typeface="Calibri" pitchFamily="34" charset="-120"/>
               </a:rPr>
-              <a:t>Pilar está guapa.</a:t>
+              <a:t>José está alegre.</a:t>
             </a:r>
             <a:endParaRPr lang="en-US" sz="1150" dirty="0"/>
           </a:p>
@@ -15446,7 +15192,7 @@
                 <a:ea typeface="Calibri" pitchFamily="34" charset="-122"/>
                 <a:cs typeface="Calibri" pitchFamily="34" charset="-120"/>
               </a:rPr>
-              <a:t>Пилар нарядная.  ·  hoy, así arreglada</a:t>
+              <a:t>Хосе весел.  ·  en este momento</a:t>
             </a:r>
             <a:endParaRPr lang="en-US" sz="1150" dirty="0"/>
           </a:p>
@@ -15454,7 +15200,183 @@
       </p:sp>
       <p:sp>
         <p:nvSpPr>
-          <p:cNvPr id="64" name="Text 62"/>
+          <p:cNvPr id="84" name="Shape 82"/>
+          <p:cNvSpPr/>
+          <p:nvPr/>
+        </p:nvSpPr>
+        <p:spPr>
+          <a:xfrm>
+            <a:off x="6231636" y="4928616"/>
+            <a:ext cx="5408676" cy="1472184"/>
+          </a:xfrm>
+          <a:prstGeom prst="roundRect">
+            <a:avLst>
+              <a:gd name="adj" fmla="val 4969"/>
+            </a:avLst>
+          </a:prstGeom>
+          <a:solidFill>
+            <a:srgbClr val="F5F6FB"/>
+          </a:solidFill>
+          <a:ln/>
+          <a:effectLst>
+            <a:outerShdw sx="100000" sy="100000" kx="0" ky="0" algn="bl" rotWithShape="0" blurRad="76200" dist="38100" dir="5400000">
+              <a:srgbClr val="1B2340">
+                <a:alpha val="18000"/>
+              </a:srgbClr>
+            </a:outerShdw>
+          </a:effectLst>
+        </p:spPr>
+      </p:sp>
+      <p:sp>
+        <p:nvSpPr>
+          <p:cNvPr id="85" name="Text 83"/>
+          <p:cNvSpPr/>
+          <p:nvPr/>
+        </p:nvSpPr>
+        <p:spPr>
+          <a:xfrm>
+            <a:off x="6359652" y="4965192"/>
+            <a:ext cx="5152644" cy="662940"/>
+          </a:xfrm>
+          <a:prstGeom prst="rect">
+            <a:avLst/>
+          </a:prstGeom>
+          <a:noFill/>
+          <a:ln/>
+        </p:spPr>
+        <p:txBody>
+          <a:bodyPr wrap="square" lIns="0" tIns="0" rIns="0" bIns="0" rtlCol="0" anchor="ctr"/>
+          <a:lstStyle/>
+          <a:p>
+            <a:pPr indent="0" marL="0">
+              <a:lnSpc>
+                <a:spcPct val="105000"/>
+              </a:lnSpc>
+              <a:buNone/>
+            </a:pPr>
+            <a:r>
+              <a:rPr lang="en-US" sz="1150" b="1" dirty="0">
+                <a:solidFill>
+                  <a:srgbClr val="2F3C7E"/>
+                </a:solidFill>
+                <a:latin typeface="Calibri" pitchFamily="34" charset="0"/>
+                <a:ea typeface="Calibri" pitchFamily="34" charset="-122"/>
+                <a:cs typeface="Calibri" pitchFamily="34" charset="-120"/>
+              </a:rPr>
+              <a:t>Pilar es guapa.</a:t>
+            </a:r>
+            <a:endParaRPr lang="en-US" sz="1150" dirty="0"/>
+          </a:p>
+          <a:p>
+            <a:pPr indent="0" marL="0">
+              <a:lnSpc>
+                <a:spcPct val="105000"/>
+              </a:lnSpc>
+              <a:buNone/>
+            </a:pPr>
+            <a:r>
+              <a:rPr lang="en-US" sz="950" i="1" dirty="0">
+                <a:solidFill>
+                  <a:srgbClr val="5C6690"/>
+                </a:solidFill>
+                <a:latin typeface="Calibri" pitchFamily="34" charset="0"/>
+                <a:ea typeface="Calibri" pitchFamily="34" charset="-122"/>
+                <a:cs typeface="Calibri" pitchFamily="34" charset="-120"/>
+              </a:rPr>
+              <a:t>Пилар красивая.  ·  cualidad física</a:t>
+            </a:r>
+            <a:endParaRPr lang="en-US" sz="1150" dirty="0"/>
+          </a:p>
+        </p:txBody>
+      </p:sp>
+      <p:sp>
+        <p:nvSpPr>
+          <p:cNvPr id="86" name="Shape 84"/>
+          <p:cNvSpPr/>
+          <p:nvPr/>
+        </p:nvSpPr>
+        <p:spPr>
+          <a:xfrm>
+            <a:off x="6323076" y="5664708"/>
+            <a:ext cx="5225796" cy="0"/>
+          </a:xfrm>
+          <a:prstGeom prst="line">
+            <a:avLst/>
+          </a:prstGeom>
+          <a:noFill/>
+          <a:ln w="9525">
+            <a:solidFill>
+              <a:srgbClr val="E7E9F3"/>
+            </a:solidFill>
+            <a:prstDash val="solid"/>
+          </a:ln>
+        </p:spPr>
+      </p:sp>
+      <p:sp>
+        <p:nvSpPr>
+          <p:cNvPr id="87" name="Text 85"/>
+          <p:cNvSpPr/>
+          <p:nvPr/>
+        </p:nvSpPr>
+        <p:spPr>
+          <a:xfrm>
+            <a:off x="6359652" y="5701284"/>
+            <a:ext cx="5152644" cy="662940"/>
+          </a:xfrm>
+          <a:prstGeom prst="rect">
+            <a:avLst/>
+          </a:prstGeom>
+          <a:noFill/>
+          <a:ln/>
+        </p:spPr>
+        <p:txBody>
+          <a:bodyPr wrap="square" lIns="0" tIns="0" rIns="0" bIns="0" rtlCol="0" anchor="ctr"/>
+          <a:lstStyle/>
+          <a:p>
+            <a:pPr indent="0" marL="0">
+              <a:lnSpc>
+                <a:spcPct val="105000"/>
+              </a:lnSpc>
+              <a:buNone/>
+            </a:pPr>
+            <a:r>
+              <a:rPr lang="en-US" sz="1150" b="1" dirty="0">
+                <a:solidFill>
+                  <a:srgbClr val="2F3C7E"/>
+                </a:solidFill>
+                <a:latin typeface="Calibri" pitchFamily="34" charset="0"/>
+                <a:ea typeface="Calibri" pitchFamily="34" charset="-122"/>
+                <a:cs typeface="Calibri" pitchFamily="34" charset="-120"/>
+              </a:rPr>
+              <a:t>Pilar está guapa.</a:t>
+            </a:r>
+            <a:endParaRPr lang="en-US" sz="1150" dirty="0"/>
+          </a:p>
+          <a:p>
+            <a:pPr indent="0" marL="0">
+              <a:lnSpc>
+                <a:spcPct val="105000"/>
+              </a:lnSpc>
+              <a:buNone/>
+            </a:pPr>
+            <a:r>
+              <a:rPr lang="en-US" sz="950" i="1" dirty="0">
+                <a:solidFill>
+                  <a:srgbClr val="5C6690"/>
+                </a:solidFill>
+                <a:latin typeface="Calibri" pitchFamily="34" charset="0"/>
+                <a:ea typeface="Calibri" pitchFamily="34" charset="-122"/>
+                <a:cs typeface="Calibri" pitchFamily="34" charset="-120"/>
+              </a:rPr>
+              <a:t>Пилар нарядная.  ·  hoy, está arreglada</a:t>
+            </a:r>
+            <a:endParaRPr lang="en-US" sz="1150" dirty="0"/>
+          </a:p>
+        </p:txBody>
+      </p:sp>
+      <p:sp>
+        <p:nvSpPr>
+          <p:cNvPr id="88" name="Text 86"/>
           <p:cNvSpPr/>
           <p:nvPr/>
         </p:nvSpPr>
@@ -15493,7 +15415,7 @@
       </p:sp>
       <p:sp>
         <p:nvSpPr>
-          <p:cNvPr id="65" name="Text 63"/>
+          <p:cNvPr id="89" name="Text 87"/>
           <p:cNvSpPr/>
           <p:nvPr/>
         </p:nvSpPr>
@@ -17935,7 +17857,7 @@
         <p:spPr>
           <a:xfrm>
             <a:off x="548640" y="5852160"/>
-            <a:ext cx="3514344" cy="685800"/>
+            <a:ext cx="2567178" cy="685800"/>
           </a:xfrm>
           <a:prstGeom prst="roundRect">
             <a:avLst>
@@ -18000,7 +17922,7 @@
         <p:spPr>
           <a:xfrm>
             <a:off x="1143000" y="5852160"/>
-            <a:ext cx="2828544" cy="685800"/>
+            <a:ext cx="1881378" cy="685800"/>
           </a:xfrm>
           <a:prstGeom prst="rect">
             <a:avLst/>
@@ -18061,8 +17983,8 @@
         </p:nvSpPr>
         <p:spPr>
           <a:xfrm>
-            <a:off x="4337304" y="5852160"/>
-            <a:ext cx="3514344" cy="685800"/>
+            <a:off x="3390138" y="5852160"/>
+            <a:ext cx="2567178" cy="685800"/>
           </a:xfrm>
           <a:prstGeom prst="roundRect">
             <a:avLst>
@@ -18090,7 +18012,7 @@
         </p:nvSpPr>
         <p:spPr>
           <a:xfrm>
-            <a:off x="4428744" y="5852160"/>
+            <a:off x="3481578" y="5852160"/>
             <a:ext cx="548640" cy="685800"/>
           </a:xfrm>
           <a:prstGeom prst="rect">
@@ -18126,8 +18048,8 @@
         </p:nvSpPr>
         <p:spPr>
           <a:xfrm>
-            <a:off x="4931664" y="5852160"/>
-            <a:ext cx="2828544" cy="685800"/>
+            <a:off x="3984498" y="5852160"/>
+            <a:ext cx="1881378" cy="685800"/>
           </a:xfrm>
           <a:prstGeom prst="rect">
             <a:avLst/>
@@ -18188,8 +18110,8 @@
         </p:nvSpPr>
         <p:spPr>
           <a:xfrm>
-            <a:off x="8125968" y="5852160"/>
-            <a:ext cx="3514344" cy="685800"/>
+            <a:off x="6231636" y="5852160"/>
+            <a:ext cx="2567178" cy="685800"/>
           </a:xfrm>
           <a:prstGeom prst="roundRect">
             <a:avLst>
@@ -18217,7 +18139,7 @@
         </p:nvSpPr>
         <p:spPr>
           <a:xfrm>
-            <a:off x="8217408" y="5852160"/>
+            <a:off x="6323076" y="5852160"/>
             <a:ext cx="548640" cy="685800"/>
           </a:xfrm>
           <a:prstGeom prst="rect">
@@ -18253,8 +18175,8 @@
         </p:nvSpPr>
         <p:spPr>
           <a:xfrm>
-            <a:off x="8720328" y="5852160"/>
-            <a:ext cx="2828544" cy="685800"/>
+            <a:off x="6825996" y="5852160"/>
+            <a:ext cx="1881378" cy="685800"/>
           </a:xfrm>
           <a:prstGeom prst="rect">
             <a:avLst/>
@@ -18309,7 +18231,134 @@
       </p:sp>
       <p:sp>
         <p:nvSpPr>
-          <p:cNvPr id="77" name="Text 75"/>
+          <p:cNvPr id="77" name="Shape 75"/>
+          <p:cNvSpPr/>
+          <p:nvPr/>
+        </p:nvSpPr>
+        <p:spPr>
+          <a:xfrm>
+            <a:off x="9073134" y="5852160"/>
+            <a:ext cx="2567178" cy="685800"/>
+          </a:xfrm>
+          <a:prstGeom prst="roundRect">
+            <a:avLst>
+              <a:gd name="adj" fmla="val 12000"/>
+            </a:avLst>
+          </a:prstGeom>
+          <a:solidFill>
+            <a:srgbClr val="F9E795"/>
+          </a:solidFill>
+          <a:ln/>
+          <a:effectLst>
+            <a:outerShdw sx="100000" sy="100000" kx="0" ky="0" algn="bl" rotWithShape="0" blurRad="76200" dist="38100" dir="5400000">
+              <a:srgbClr val="1B2340">
+                <a:alpha val="18000"/>
+              </a:srgbClr>
+            </a:outerShdw>
+          </a:effectLst>
+        </p:spPr>
+      </p:sp>
+      <p:sp>
+        <p:nvSpPr>
+          <p:cNvPr id="78" name="Text 76"/>
+          <p:cNvSpPr/>
+          <p:nvPr/>
+        </p:nvSpPr>
+        <p:spPr>
+          <a:xfrm>
+            <a:off x="9164574" y="5852160"/>
+            <a:ext cx="548640" cy="685800"/>
+          </a:xfrm>
+          <a:prstGeom prst="rect">
+            <a:avLst/>
+          </a:prstGeom>
+          <a:noFill/>
+          <a:ln/>
+        </p:spPr>
+        <p:txBody>
+          <a:bodyPr wrap="square" lIns="0" tIns="0" rIns="0" bIns="0" rtlCol="0" anchor="ctr"/>
+          <a:lstStyle/>
+          <a:p>
+            <a:pPr algn="ctr" indent="0" marL="0">
+              <a:buNone/>
+            </a:pPr>
+            <a:r>
+              <a:rPr lang="en-US" sz="2200" dirty="0">
+                <a:solidFill>
+                  <a:srgbClr val="000000"/>
+                </a:solidFill>
+              </a:rPr>
+              <a:t>➗</a:t>
+            </a:r>
+            <a:endParaRPr lang="en-US" sz="2200" dirty="0"/>
+          </a:p>
+        </p:txBody>
+      </p:sp>
+      <p:sp>
+        <p:nvSpPr>
+          <p:cNvPr id="79" name="Text 77"/>
+          <p:cNvSpPr/>
+          <p:nvPr/>
+        </p:nvSpPr>
+        <p:spPr>
+          <a:xfrm>
+            <a:off x="9667494" y="5852160"/>
+            <a:ext cx="1881378" cy="685800"/>
+          </a:xfrm>
+          <a:prstGeom prst="rect">
+            <a:avLst/>
+          </a:prstGeom>
+          <a:noFill/>
+          <a:ln/>
+        </p:spPr>
+        <p:txBody>
+          <a:bodyPr wrap="square" lIns="0" tIns="0" rIns="0" bIns="0" rtlCol="0" anchor="ctr"/>
+          <a:lstStyle/>
+          <a:p>
+            <a:pPr indent="0" marL="0">
+              <a:lnSpc>
+                <a:spcPct val="100000"/>
+              </a:lnSpc>
+              <a:buNone/>
+            </a:pPr>
+            <a:r>
+              <a:rPr lang="en-US" sz="1300" b="1" dirty="0">
+                <a:solidFill>
+                  <a:srgbClr val="2F3C7E"/>
+                </a:solidFill>
+                <a:latin typeface="Calibri" pitchFamily="34" charset="0"/>
+                <a:ea typeface="Calibri" pitchFamily="34" charset="-122"/>
+                <a:cs typeface="Calibri" pitchFamily="34" charset="-120"/>
+              </a:rPr>
+              <a:t>entre</a:t>
+            </a:r>
+            <a:endParaRPr lang="en-US" sz="1300" dirty="0"/>
+          </a:p>
+          <a:p>
+            <a:pPr indent="0" marL="0">
+              <a:lnSpc>
+                <a:spcPct val="100000"/>
+              </a:lnSpc>
+              <a:buNone/>
+            </a:pPr>
+            <a:r>
+              <a:rPr lang="en-US" sz="1050" dirty="0">
+                <a:solidFill>
+                  <a:srgbClr val="5C6690"/>
+                </a:solidFill>
+                <a:latin typeface="Calibri" pitchFamily="34" charset="0"/>
+                <a:ea typeface="Calibri" pitchFamily="34" charset="-122"/>
+                <a:cs typeface="Calibri" pitchFamily="34" charset="-120"/>
+              </a:rPr>
+              <a:t>разделить на (÷)</a:t>
+            </a:r>
+            <a:endParaRPr lang="en-US" sz="1300" dirty="0"/>
+          </a:p>
+        </p:txBody>
+      </p:sp>
+      <p:sp>
+        <p:nvSpPr>
+          <p:cNvPr id="80" name="Text 78"/>
           <p:cNvSpPr/>
           <p:nvPr/>
         </p:nvSpPr>
@@ -18348,7 +18397,7 @@
       </p:sp>
       <p:sp>
         <p:nvSpPr>
-          <p:cNvPr id="78" name="Text 76"/>
+          <p:cNvPr id="81" name="Text 79"/>
           <p:cNvSpPr/>
           <p:nvPr/>
         </p:nvSpPr>
